--- a/presentation/Ban-do-Cong-an-so-Phu-Tho.pptx
+++ b/presentation/Ban-do-Cong-an-so-Phu-Tho.pptx
@@ -4,6 +4,9 @@
   <p:sldMasterIdLst>
     <p:sldMasterId id="2147483648" r:id="rId1"/>
   </p:sldMasterIdLst>
+  <p:notesMasterIdLst>
+    <p:notesMasterId r:id="rId13"/>
+  </p:notesMasterIdLst>
   <p:sldIdLst>
     <p:sldId id="256" r:id="rId2"/>
     <p:sldId id="257" r:id="rId3"/>
@@ -13,12 +16,12 @@
     <p:sldId id="261" r:id="rId7"/>
     <p:sldId id="262" r:id="rId8"/>
     <p:sldId id="263" r:id="rId9"/>
+    <p:sldId id="264" r:id="rId10"/>
+    <p:sldId id="265" r:id="rId11"/>
+    <p:sldId id="266" r:id="rId12"/>
   </p:sldIdLst>
-  <p:notesMasterIdLst>
-    <p:notesMasterId r:id="rId10"/>
-  </p:notesMasterIdLst>
-  <p:sldSz cx="12161520" cy="6858000"/>
-  <p:notesSz cx="6858000" cy="12161520"/>
+  <p:sldSz cx="12161838" cy="6858000"/>
+  <p:notesSz cx="6858000" cy="12161838"/>
   <p:defaultTextStyle>
     <a:lvl1pPr marL="0" algn="l" defTabSz="914400" rtl="0" eaLnBrk="1" latinLnBrk="0" hangingPunct="1">
       <a:defRPr sz="1800" kern="1200">
@@ -111,6 +114,11 @@
       </a:defRPr>
     </a:lvl9pPr>
   </p:defaultTextStyle>
+  <p:extLst>
+    <p:ext uri="{EFAFB233-063F-42B5-8137-9DF3F51BA10A}">
+      <p15:sldGuideLst xmlns:p15="http://schemas.microsoft.com/office/powerpoint/2012/main"/>
+    </p:ext>
+  </p:extLst>
 </p:presentation>
 </file>
 
@@ -136,234 +144,10 @@
           <a:chExt cx="0" cy="0"/>
         </a:xfrm>
       </p:grpSpPr>
-      <p:sp>
-        <p:nvSpPr>
-          <p:cNvPr id="2" name="Header Placeholder 1"/>
-          <p:cNvSpPr>
-            <a:spLocks noGrp="1"/>
-          </p:cNvSpPr>
-          <p:nvPr>
-            <p:ph type="hdr" sz="quarter"/>
-          </p:nvPr>
-        </p:nvSpPr>
-        <p:spPr>
-          <a:xfrm>
-            <a:off x="0" y="0"/>
-            <a:ext cx="2971800" cy="458788"/>
-          </a:xfrm>
-          <a:prstGeom prst="rect">
-            <a:avLst/>
-          </a:prstGeom>
-        </p:spPr>
-        <p:txBody>
-          <a:bodyPr vert="horz" lIns="91440" tIns="45720" rIns="91440" bIns="45720" rtlCol="0"/>
-          <a:lstStyle>
-            <a:lvl1pPr algn="l">
-              <a:defRPr sz="1200"/>
-            </a:lvl1pPr>
-          </a:lstStyle>
-          <a:p>
-            <a:endParaRPr lang="en-US"/>
-          </a:p>
-        </p:txBody>
-      </p:sp>
-      <p:sp>
-        <p:nvSpPr>
-          <p:cNvPr id="3" name="Date Placeholder 2"/>
-          <p:cNvSpPr>
-            <a:spLocks noGrp="1"/>
-          </p:cNvSpPr>
-          <p:nvPr>
-            <p:ph type="dt" idx="1"/>
-          </p:nvPr>
-        </p:nvSpPr>
-        <p:spPr>
-          <a:xfrm>
-            <a:off x="3884613" y="0"/>
-            <a:ext cx="2971800" cy="458788"/>
-          </a:xfrm>
-          <a:prstGeom prst="rect">
-            <a:avLst/>
-          </a:prstGeom>
-        </p:spPr>
-        <p:txBody>
-          <a:bodyPr vert="horz" lIns="91440" tIns="45720" rIns="91440" bIns="45720" rtlCol="0"/>
-          <a:lstStyle>
-            <a:lvl1pPr algn="r">
-              <a:defRPr sz="1200"/>
-            </a:lvl1pPr>
-          </a:lstStyle>
-          <a:p>
-            <a:fld id="{5282F153-3F37-0F45-9E97-73ACFA13230C}" type="datetimeFigureOut">
-              <a:rPr lang="en-US"/>
-              <a:t>7/23/19</a:t>
-            </a:fld>
-            <a:endParaRPr lang="en-US"/>
-          </a:p>
-        </p:txBody>
-      </p:sp>
-      <p:sp>
-        <p:nvSpPr>
-          <p:cNvPr id="4" name="Slide Image Placeholder 3"/>
-          <p:cNvSpPr>
-            <a:spLocks noGrp="1" noRot="1" noChangeAspect="1"/>
-          </p:cNvSpPr>
-          <p:nvPr>
-            <p:ph type="sldImg" idx="2"/>
-          </p:nvPr>
-        </p:nvSpPr>
-        <p:spPr>
-          <a:xfrm>
-            <a:off x="685800" y="1143000"/>
-            <a:ext cx="5486400" cy="3086100"/>
-          </a:xfrm>
-          <a:prstGeom prst="rect">
-            <a:avLst/>
-          </a:prstGeom>
-          <a:noFill/>
-          <a:ln w="12700">
-            <a:solidFill>
-              <a:prstClr val="black"/>
-            </a:solidFill>
-          </a:ln>
-        </p:spPr>
-        <p:txBody>
-          <a:bodyPr vert="horz" lIns="91440" tIns="45720" rIns="91440" bIns="45720" rtlCol="0" anchor="ctr"/>
-          <a:lstStyle/>
-          <a:p>
-            <a:endParaRPr lang="en-US"/>
-          </a:p>
-        </p:txBody>
-      </p:sp>
-      <p:sp>
-        <p:nvSpPr>
-          <p:cNvPr id="5" name="Notes Placeholder 4"/>
-          <p:cNvSpPr>
-            <a:spLocks noGrp="1"/>
-          </p:cNvSpPr>
-          <p:nvPr>
-            <p:ph type="body" sz="quarter" idx="3"/>
-          </p:nvPr>
-        </p:nvSpPr>
-        <p:spPr>
-          <a:xfrm>
-            <a:off x="685800" y="4400550"/>
-            <a:ext cx="5486400" cy="3600450"/>
-          </a:xfrm>
-          <a:prstGeom prst="rect">
-            <a:avLst/>
-          </a:prstGeom>
-        </p:spPr>
-        <p:txBody>
-          <a:bodyPr vert="horz" lIns="91440" tIns="45720" rIns="91440" bIns="45720" rtlCol="0"/>
-          <a:lstStyle/>
-          <a:p>
-            <a:pPr lvl="0"/>
-            <a:r>
-              <a:rPr lang="en-US"/>
-              <a:t>Click to edit Master text styles</a:t>
-            </a:r>
-          </a:p>
-          <a:p>
-            <a:pPr lvl="1"/>
-            <a:r>
-              <a:rPr lang="en-US"/>
-              <a:t>Second level</a:t>
-            </a:r>
-          </a:p>
-          <a:p>
-            <a:pPr lvl="2"/>
-            <a:r>
-              <a:rPr lang="en-US"/>
-              <a:t>Third level</a:t>
-            </a:r>
-          </a:p>
-          <a:p>
-            <a:pPr lvl="3"/>
-            <a:r>
-              <a:rPr lang="en-US"/>
-              <a:t>Fourth level</a:t>
-            </a:r>
-          </a:p>
-          <a:p>
-            <a:pPr lvl="4"/>
-            <a:r>
-              <a:rPr lang="en-US"/>
-              <a:t>Fifth level</a:t>
-            </a:r>
-          </a:p>
-        </p:txBody>
-      </p:sp>
-      <p:sp>
-        <p:nvSpPr>
-          <p:cNvPr id="6" name="Footer Placeholder 5"/>
-          <p:cNvSpPr>
-            <a:spLocks noGrp="1"/>
-          </p:cNvSpPr>
-          <p:nvPr>
-            <p:ph type="ftr" sz="quarter" idx="4"/>
-          </p:nvPr>
-        </p:nvSpPr>
-        <p:spPr>
-          <a:xfrm>
-            <a:off x="0" y="8685213"/>
-            <a:ext cx="2971800" cy="458787"/>
-          </a:xfrm>
-          <a:prstGeom prst="rect">
-            <a:avLst/>
-          </a:prstGeom>
-        </p:spPr>
-        <p:txBody>
-          <a:bodyPr vert="horz" lIns="91440" tIns="45720" rIns="91440" bIns="45720" rtlCol="0" anchor="b"/>
-          <a:lstStyle>
-            <a:lvl1pPr algn="l">
-              <a:defRPr sz="1200"/>
-            </a:lvl1pPr>
-          </a:lstStyle>
-          <a:p>
-            <a:endParaRPr lang="en-US"/>
-          </a:p>
-        </p:txBody>
-      </p:sp>
-      <p:sp>
-        <p:nvSpPr>
-          <p:cNvPr id="7" name="Slide Number Placeholder 6"/>
-          <p:cNvSpPr>
-            <a:spLocks noGrp="1"/>
-          </p:cNvSpPr>
-          <p:nvPr>
-            <p:ph type="sldNum" sz="quarter" idx="5"/>
-          </p:nvPr>
-        </p:nvSpPr>
-        <p:spPr>
-          <a:xfrm>
-            <a:off x="3884613" y="8685213"/>
-            <a:ext cx="2971800" cy="458787"/>
-          </a:xfrm>
-          <a:prstGeom prst="rect">
-            <a:avLst/>
-          </a:prstGeom>
-        </p:spPr>
-        <p:txBody>
-          <a:bodyPr vert="horz" lIns="91440" tIns="45720" rIns="91440" bIns="45720" rtlCol="0" anchor="b"/>
-          <a:lstStyle>
-            <a:lvl1pPr algn="r">
-              <a:defRPr sz="1200"/>
-            </a:lvl1pPr>
-          </a:lstStyle>
-          <a:p>
-            <a:fld id="{CE5E9CC1-C706-0F49-92D6-E571CC5EEA8F}" type="slidenum">
-              <a:rPr lang="en-US"/>
-              <a:t>‹#›</a:t>
-            </a:fld>
-            <a:endParaRPr lang="en-US"/>
-          </a:p>
-        </p:txBody>
-      </p:sp>
     </p:spTree>
     <p:extLst>
       <p:ext uri="{BB962C8B-B14F-4D97-AF65-F5344CB8AC3E}">
-        <p14:creationId xmlns:p14="http://schemas.microsoft.com/office/powerpoint/2010/main" val="1024086991"/>
+        <p14:creationId xmlns:p14="http://schemas.microsoft.com/office/powerpoint/2010/main" val="4023641880"/>
       </p:ext>
     </p:extLst>
   </p:cSld>
@@ -511,7 +295,6 @@
               <a:rPr lang="en-US" dirty="0"/>
               <a:t>Kính thưa các đồng chí Lãnh đạo Công an tỉnh, hôm nay tôi xin đại diện trình bày công trình ra mắt Câu lạc bộ sáng tạo: Bản đồ Công an số tỉnh Phú Thọ. Xin phép bắt đầu bài trình bày bằng một thực tế hằng ngày mà tất cả chúng ta đều gặp.</a:t>
             </a:r>
-            <a:endParaRPr lang="en-US" dirty="0"/>
           </a:p>
         </p:txBody>
       </p:sp>
@@ -533,6 +316,180 @@
             <a:fld id="{F7021451-1387-4CA6-816F-3879F97B5CBC}" type="slidenum">
               <a:rPr lang="en-US"/>
               <a:t>1</a:t>
+            </a:fld>
+            <a:endParaRPr lang="en-US"/>
+          </a:p>
+        </p:txBody>
+      </p:sp>
+    </p:spTree>
+    <p:extLst>
+      <p:ext uri="{BB962C8B-B14F-4D97-AF65-F5344CB8AC3E}">
+        <p14:creationId xmlns:p14="http://schemas.microsoft.com/office/powerpoint/2010/main" val="1024086991"/>
+      </p:ext>
+    </p:extLst>
+  </p:cSld>
+  <p:clrMapOvr>
+    <a:masterClrMapping/>
+  </p:clrMapOvr>
+</p:notes>
+</file>
+
+<file path=ppt/notesSlides/notesSlide10.xml><?xml version="1.0" encoding="utf-8"?>
+<p:notes xmlns:a="http://schemas.openxmlformats.org/drawingml/2006/main" xmlns:r="http://schemas.openxmlformats.org/officeDocument/2006/relationships" xmlns:p="http://schemas.openxmlformats.org/presentationml/2006/main">
+  <p:cSld>
+    <p:spTree>
+      <p:nvGrpSpPr>
+        <p:cNvPr id="1" name=""/>
+        <p:cNvGrpSpPr/>
+        <p:nvPr/>
+      </p:nvGrpSpPr>
+      <p:grpSpPr>
+        <a:xfrm>
+          <a:off x="0" y="0"/>
+          <a:ext cx="0" cy="0"/>
+          <a:chOff x="0" y="0"/>
+          <a:chExt cx="0" cy="0"/>
+        </a:xfrm>
+      </p:grpSpPr>
+      <p:sp>
+        <p:nvSpPr>
+          <p:cNvPr id="2" name="Slide Image Placeholder 1"/>
+          <p:cNvSpPr>
+            <a:spLocks noGrp="1" noRot="1" noChangeAspect="1"/>
+          </p:cNvSpPr>
+          <p:nvPr>
+            <p:ph type="sldImg"/>
+          </p:nvPr>
+        </p:nvSpPr>
+        <p:spPr/>
+      </p:sp>
+      <p:sp>
+        <p:nvSpPr>
+          <p:cNvPr id="3" name="Notes Placeholder 2"/>
+          <p:cNvSpPr>
+            <a:spLocks noGrp="1"/>
+          </p:cNvSpPr>
+          <p:nvPr>
+            <p:ph type="body" idx="1"/>
+          </p:nvPr>
+        </p:nvSpPr>
+        <p:spPr/>
+        <p:txBody>
+          <a:bodyPr/>
+          <a:lstStyle/>
+          <a:p>
+            <a:r>
+              <a:rPr lang="en-US" dirty="0"/>
+              <a:t>Kính thưa các đồng chí, trước khi nêu kiến nghị, tôi xin phép được báo cáo thẳng thắn những hạn chế của công trình. Thứ nhất, bản chất đây vẫn là AI, dù đã có bốn lớp kiểm soát thì vẫn không thể khẳng định đúng tuyệt đối một trăm phần trăm. Thứ hai, kho dữ liệu hiện được xây dựng từ nguồn văn bản công khai, chưa qua thẩm định chính thức của đơn vị nghiệp vụ. Thứ ba, công trình chưa có nguồn lực công nghệ thông tin chuyên trách để tiếp nhận, duy trì và nâng cấp lâu dài. Thứ tư, công trình chưa được đồng thiết kế đầy đủ với cán bộ trực tiếp tiếp dân, nên còn cần bổ sung các tình huống phát sinh tại quầy. Và thứ năm, hệ thống chưa được kiểm thử trên diện rộng. Tuy nhiên, mỗi hạn chế đều có hướng khắc phục: bổ sung khuyến cáo và cơ chế báo lỗi cho người dân; đề nghị đơn vị nghiệp vụ thẩm định nội dung; bố trí cán bộ công nghệ thông tin phối hợp; mời cán bộ tiếp dân cùng bổ sung tình huống; và triển khai theo giai đoạn, thí điểm rồi đánh giá trước khi nhân rộng. Tôi báo cáo điều này với mong muốn công trình được hoàn thiện một cách thực chất, chứ không phải để trình bày một sản phẩm hoàn hảo trên giấy.</a:t>
+            </a:r>
+          </a:p>
+        </p:txBody>
+      </p:sp>
+      <p:sp>
+        <p:nvSpPr>
+          <p:cNvPr id="4" name="Slide Number Placeholder 3"/>
+          <p:cNvSpPr>
+            <a:spLocks noGrp="1"/>
+          </p:cNvSpPr>
+          <p:nvPr>
+            <p:ph type="sldNum" sz="quarter" idx="10"/>
+          </p:nvPr>
+        </p:nvSpPr>
+        <p:spPr/>
+        <p:txBody>
+          <a:bodyPr/>
+          <a:lstStyle/>
+          <a:p>
+            <a:fld id="{F7021451-1387-4CA6-816F-3879F97B5CBC}" type="slidenum">
+              <a:rPr lang="en-US"/>
+              <a:t>10</a:t>
+            </a:fld>
+            <a:endParaRPr lang="en-US"/>
+          </a:p>
+        </p:txBody>
+      </p:sp>
+    </p:spTree>
+    <p:extLst>
+      <p:ext uri="{BB962C8B-B14F-4D97-AF65-F5344CB8AC3E}">
+        <p14:creationId xmlns:p14="http://schemas.microsoft.com/office/powerpoint/2010/main" val="1024086991"/>
+      </p:ext>
+    </p:extLst>
+  </p:cSld>
+  <p:clrMapOvr>
+    <a:masterClrMapping/>
+  </p:clrMapOvr>
+</p:notes>
+</file>
+
+<file path=ppt/notesSlides/notesSlide11.xml><?xml version="1.0" encoding="utf-8"?>
+<p:notes xmlns:a="http://schemas.openxmlformats.org/drawingml/2006/main" xmlns:r="http://schemas.openxmlformats.org/officeDocument/2006/relationships" xmlns:p="http://schemas.openxmlformats.org/presentationml/2006/main">
+  <p:cSld>
+    <p:spTree>
+      <p:nvGrpSpPr>
+        <p:cNvPr id="1" name=""/>
+        <p:cNvGrpSpPr/>
+        <p:nvPr/>
+      </p:nvGrpSpPr>
+      <p:grpSpPr>
+        <a:xfrm>
+          <a:off x="0" y="0"/>
+          <a:ext cx="0" cy="0"/>
+          <a:chOff x="0" y="0"/>
+          <a:chExt cx="0" cy="0"/>
+        </a:xfrm>
+      </p:grpSpPr>
+      <p:sp>
+        <p:nvSpPr>
+          <p:cNvPr id="2" name="Slide Image Placeholder 1"/>
+          <p:cNvSpPr>
+            <a:spLocks noGrp="1" noRot="1" noChangeAspect="1"/>
+          </p:cNvSpPr>
+          <p:nvPr>
+            <p:ph type="sldImg"/>
+          </p:nvPr>
+        </p:nvSpPr>
+        <p:spPr/>
+      </p:sp>
+      <p:sp>
+        <p:nvSpPr>
+          <p:cNvPr id="3" name="Notes Placeholder 2"/>
+          <p:cNvSpPr>
+            <a:spLocks noGrp="1"/>
+          </p:cNvSpPr>
+          <p:nvPr>
+            <p:ph type="body" idx="1"/>
+          </p:nvPr>
+        </p:nvSpPr>
+        <p:spPr/>
+        <p:txBody>
+          <a:bodyPr/>
+          <a:lstStyle/>
+          <a:p>
+            <a:r>
+              <a:rPr lang="en-US" dirty="0"/>
+              <a:t>Kính thưa các đồng chí Lãnh đạo, đây không chỉ là một phần mềm, đây là viên gạch góp phần xây dựng hình ảnh chính quyền số gần dân. Trên tinh thần cầu thị vừa báo cáo, tôi kính đề nghị Lãnh đạo Công an tỉnh ba nội dung. Một là, cho phép triển khai thí điểm với cấu hình kiểm soát đã kiểm thử, đánh giá kết quả rồi mới tiến tới nhân rộng. Hai là, giao đơn vị nghiệp vụ thẩm định nội dung kho dữ liệu để bảo đảm tính chính xác về pháp lý. Ba là, quan tâm bố trí cán bộ công nghệ thông tin và kinh phí duy trì hạ tầng hằng năm, để hệ thống phục vụ nhân dân được lâu dài. Xin trân trọng cảm ơn các đồng chí.</a:t>
+            </a:r>
+          </a:p>
+        </p:txBody>
+      </p:sp>
+      <p:sp>
+        <p:nvSpPr>
+          <p:cNvPr id="4" name="Slide Number Placeholder 3"/>
+          <p:cNvSpPr>
+            <a:spLocks noGrp="1"/>
+          </p:cNvSpPr>
+          <p:nvPr>
+            <p:ph type="sldNum" sz="quarter" idx="10"/>
+          </p:nvPr>
+        </p:nvSpPr>
+        <p:spPr/>
+        <p:txBody>
+          <a:bodyPr/>
+          <a:lstStyle/>
+          <a:p>
+            <a:fld id="{F7021451-1387-4CA6-816F-3879F97B5CBC}" type="slidenum">
+              <a:rPr lang="en-US"/>
+              <a:t>11</a:t>
             </a:fld>
             <a:endParaRPr lang="en-US"/>
           </a:p>
@@ -597,9 +554,8 @@
           <a:p>
             <a:r>
               <a:rPr lang="en-US" dirty="0"/>
-              <a:t>Hàng ngàn giờ bị lãng phí mỗi năm. Người dân thì loay hoay tìm đúng trụ sở, mòn mỏi đi lại vì chuẩn bị sai thủ tục. Còn cán bộ thì quá tải vì phải trả lời những câu hỏi giống hệt nhau ngày này qua ngày khác. Đó là nỗi đau thực sự.</a:t>
-            </a:r>
-            <a:endParaRPr lang="en-US" dirty="0"/>
+              <a:t>Thưa các đồng chí, từ thực tế công tác chúng ta đều thấy một điều: cùng một câu hỏi về thủ tục được hỏi đi hỏi lại rất nhiều lần. Người dân thì loay hoay tìm đúng trụ sở, mất công đi lại vì chuẩn bị sai giấy tờ. Cán bộ thì mất thời gian trả lời những câu giống hệt nhau. Tôi xin lưu ý đây là ghi nhận từ quan sát thực tế, chưa phải số liệu thống kê chính thức, nên tôi không nêu con số cụ thể.</a:t>
+            </a:r>
           </a:p>
         </p:txBody>
       </p:sp>
@@ -685,9 +641,8 @@
           <a:p>
             <a:r>
               <a:rPr lang="en-US" dirty="0"/>
-              <a:t>Chúng tôi thường xuyên nghe người dân than phiền: Giá như có ai đó hướng dẫn chính xác trước khi đến. Chính lời than phiền này đã thôi thúc Câu lạc bộ Sáng tạo hành động.</a:t>
-            </a:r>
-            <a:endParaRPr lang="en-US" dirty="0"/>
+              <a:t>Từ thực tế công tác, có thể thấy người dân cần được hướng dẫn chính xác trước khi đến làm thủ tục. Đây là một nhận định khái quát, không phải trích dẫn nguyên văn của một trường hợp cụ thể. Chính nhu cầu đó đã thôi thúc tôi bắt tay nghiên cứu.</a:t>
+            </a:r>
           </a:p>
         </p:txBody>
       </p:sp>
@@ -775,7 +730,6 @@
               <a:rPr lang="en-US" dirty="0"/>
               <a:t>Và đó là lý do Bản đồ Công an số ra đời. Nó không chỉ là một cái bản đồ khô khan. Nó là sự kết hợp giữa bản đồ định vị chính xác mọi trụ sở, và một Trợ lý ảo AI hiểu luật, túc trực 24/7 để tư vấn thủ tục cho dân.</a:t>
             </a:r>
-            <a:endParaRPr lang="en-US" dirty="0"/>
           </a:p>
         </p:txBody>
       </p:sp>
@@ -861,9 +815,8 @@
           <a:p>
             <a:r>
               <a:rPr lang="en-US" dirty="0"/>
-              <a:t>Nhưng thưa các đồng chí, dùng AI thì sợ nhất là AI bịa chuyện. Tôi xin khẳng định: AI của chúng tôi KHÔNG BAO GIỜ nói dối. Nó được xây dựng trên công nghệ RAG, chỉ được phép trả lời dựa trên văn bản quy phạm pháp luật và luôn có trích dẫn nguồn rõ ràng.</a:t>
-            </a:r>
-            <a:endParaRPr lang="en-US" dirty="0"/>
+              <a:t>Thưa các đồng chí, dùng AI thì lo nhất là AI bịa chuyện. Tôi không dám khẳng định hệ thống đúng tuyệt đối, vì như vậy là không trung thực. Điều tôi xin báo cáo là: hệ thống được thiết kế để GIẢM RỦI RO trả lời sai, bằng hai nguyên tắc — chỉ dựa trên kho dữ liệu có kiểm soát, và có bước hậu kiểm trước khi hiển thị cho người dân.</a:t>
+            </a:r>
           </a:p>
         </p:txBody>
       </p:sp>
@@ -949,9 +902,8 @@
           <a:p>
             <a:r>
               <a:rPr lang="en-US" dirty="0"/>
-              <a:t>Hệ thống cực kỳ thân thiện với người dân địa phương qua giao diện điện thoại. Ngoài ra, để hỗ trợ hội nhập, nó còn bổ sung tính năng đa ngôn ngữ. Về phía cán bộ, việc quản trị cũng cực kỳ đơn giản qua Google Sheets.</a:t>
-            </a:r>
-            <a:endParaRPr lang="en-US" dirty="0"/>
+              <a:t>Để giảm rủi ro trả lời sai, hệ thống được thiết kế gồm bốn lớp kiểm soát nối tiếp nhau. Lớp một: truy hồi có kiểm soát, ưu tiên nguồn đã qua rà soát nội bộ, đúng thẩm quyền, đúng cấp thực hiện, tránh lẫn quy định cấp xã với cấp tỉnh. Lớp hai: dùng chính một AI khác chấm điểm, xếp hạng lại kết quả, loại bỏ tài liệu gây nhiễu. Lớp ba: câu trả lời phải bám theo tài liệu truy hồi được, nếu không đủ căn cứ thì báo không đủ cơ sở thay vì suy diễn. Lớp bốn: trước khi hiển thị, một bước hậu kiểm tự động đối chiếu lại từng số điện thoại, địa chỉ, căn cứ pháp lý với nguồn. Ở đây tôi xin báo cáo rõ hiện trạng để các đồng chí nắm đúng: lớp hai và lớp bốn hiện đã hoạt động. Lớp một và lớp ba đã được kiểm thử đạt trên bản thử nghiệm, nhưng bản chạy chính thức hiện vẫn dùng cấu hình cũ, nên hai lớp này chưa được bật. Đây chính là một trong những nội dung tôi xin kiến nghị ở phần sau.</a:t>
+            </a:r>
           </a:p>
         </p:txBody>
       </p:sp>
@@ -1037,9 +989,8 @@
           <a:p>
             <a:r>
               <a:rPr lang="en-US" dirty="0"/>
-              <a:t>Để vận hành, dự án đòi hỏi chi phí đầu tư hạ tầng máy chủ và API. Tuy nhiên, sự đánh đổi này là hoàn toàn xứng đáng. Một khoản đầu tư mang lại lợi ích cho hàng vạn người, giúp người dân tiết kiệm thời gian, giảm áp lực cực lớn cho cán bộ trực ban.</a:t>
-            </a:r>
-            <a:endParaRPr lang="en-US" dirty="0"/>
+              <a:t>Đây là video minh hoạ quy trình hệ thống xử lý một câu hỏi của người dân: từ lúc tiếp nhận câu hỏi, truy hồi tài liệu, chọn lọc đúng tài liệu có thẩm quyền, cho tới khi sinh câu trả lời kèm trích dẫn nguồn. Tôi xin lưu ý, nội dung câu hỏi và câu trả lời trong video chỉ là ví dụ để minh hoạ luồng xử lý, không phải nội dung tư vấn chính thức. Video không có âm thanh, các đồng chí có thể vừa xem vừa nghe tôi trình bày.</a:t>
+            </a:r>
           </a:p>
         </p:txBody>
       </p:sp>
@@ -1125,9 +1076,8 @@
           <a:p>
             <a:r>
               <a:rPr lang="en-US" dirty="0"/>
-              <a:t>Kính thưa các đồng chí Lãnh đạo, đây không chỉ là một phần mềm, đây là viên gạch góp phần xây dựng hình ảnh chính quyền số gần dân. Chúng tôi kính đề nghị Lãnh đạo Công an tỉnh cho phép nhân rộng toàn tỉnh và cấp kinh phí duy trì hạ tầng để phục vụ nhân dân lâu dài. Xin trân trọng cảm ơn.</a:t>
-            </a:r>
-            <a:endParaRPr lang="en-US" dirty="0"/>
+              <a:t>Hệ thống cực kỳ thân thiện với người dân địa phương qua giao diện điện thoại. Ngoài ra, để hỗ trợ hội nhập, nó còn bổ sung tính năng đa ngôn ngữ. Về phía cán bộ, việc quản trị cũng cực kỳ đơn giản qua Google Sheets.</a:t>
+            </a:r>
           </a:p>
         </p:txBody>
       </p:sp>
@@ -1149,6 +1099,93 @@
             <a:fld id="{F7021451-1387-4CA6-816F-3879F97B5CBC}" type="slidenum">
               <a:rPr lang="en-US"/>
               <a:t>8</a:t>
+            </a:fld>
+            <a:endParaRPr lang="en-US"/>
+          </a:p>
+        </p:txBody>
+      </p:sp>
+    </p:spTree>
+    <p:extLst>
+      <p:ext uri="{BB962C8B-B14F-4D97-AF65-F5344CB8AC3E}">
+        <p14:creationId xmlns:p14="http://schemas.microsoft.com/office/powerpoint/2010/main" val="1024086991"/>
+      </p:ext>
+    </p:extLst>
+  </p:cSld>
+  <p:clrMapOvr>
+    <a:masterClrMapping/>
+  </p:clrMapOvr>
+</p:notes>
+</file>
+
+<file path=ppt/notesSlides/notesSlide9.xml><?xml version="1.0" encoding="utf-8"?>
+<p:notes xmlns:a="http://schemas.openxmlformats.org/drawingml/2006/main" xmlns:r="http://schemas.openxmlformats.org/officeDocument/2006/relationships" xmlns:p="http://schemas.openxmlformats.org/presentationml/2006/main">
+  <p:cSld>
+    <p:spTree>
+      <p:nvGrpSpPr>
+        <p:cNvPr id="1" name=""/>
+        <p:cNvGrpSpPr/>
+        <p:nvPr/>
+      </p:nvGrpSpPr>
+      <p:grpSpPr>
+        <a:xfrm>
+          <a:off x="0" y="0"/>
+          <a:ext cx="0" cy="0"/>
+          <a:chOff x="0" y="0"/>
+          <a:chExt cx="0" cy="0"/>
+        </a:xfrm>
+      </p:grpSpPr>
+      <p:sp>
+        <p:nvSpPr>
+          <p:cNvPr id="2" name="Slide Image Placeholder 1"/>
+          <p:cNvSpPr>
+            <a:spLocks noGrp="1" noRot="1" noChangeAspect="1"/>
+          </p:cNvSpPr>
+          <p:nvPr>
+            <p:ph type="sldImg"/>
+          </p:nvPr>
+        </p:nvSpPr>
+        <p:spPr/>
+      </p:sp>
+      <p:sp>
+        <p:nvSpPr>
+          <p:cNvPr id="3" name="Notes Placeholder 2"/>
+          <p:cNvSpPr>
+            <a:spLocks noGrp="1"/>
+          </p:cNvSpPr>
+          <p:nvPr>
+            <p:ph type="body" idx="1"/>
+          </p:nvPr>
+        </p:nvSpPr>
+        <p:spPr/>
+        <p:txBody>
+          <a:bodyPr/>
+          <a:lstStyle/>
+          <a:p>
+            <a:r>
+              <a:rPr lang="en-US" dirty="0"/>
+              <a:t>Về giá trị mang lại: thứ nhất, hệ thống phục vụ 24/7, người dân tra cứu được cả ngoài giờ hành chính mà không phải chờ tới lượt. Thứ hai, về tốc độ, tôi xin báo cáo đúng số đo: thời gian phản hồi p95 trong kiểm thử nội bộ khoảng 17 giây, và có thể lên tới khoảng 28 giây khi hệ thống phải chuyển sang nhà cung cấp AI dự phòng. Tôi nói rõ đây là số đo trong kiểm thử, chưa phải số liệu vận hành thực tế trên diện rộng. Đổi lại, dự án cần chi phí đầu tư hạ tầng máy chủ và API.</a:t>
+            </a:r>
+          </a:p>
+        </p:txBody>
+      </p:sp>
+      <p:sp>
+        <p:nvSpPr>
+          <p:cNvPr id="4" name="Slide Number Placeholder 3"/>
+          <p:cNvSpPr>
+            <a:spLocks noGrp="1"/>
+          </p:cNvSpPr>
+          <p:nvPr>
+            <p:ph type="sldNum" sz="quarter" idx="10"/>
+          </p:nvPr>
+        </p:nvSpPr>
+        <p:spPr/>
+        <p:txBody>
+          <a:bodyPr/>
+          <a:lstStyle/>
+          <a:p>
+            <a:fld id="{F7021451-1387-4CA6-816F-3879F97B5CBC}" type="slidenum">
+              <a:rPr lang="en-US"/>
+              <a:t>9</a:t>
             </a:fld>
             <a:endParaRPr lang="en-US"/>
           </a:p>
@@ -1200,6 +1237,11 @@
 <file path=ppt/slideMasters/slideMaster1.xml><?xml version="1.0" encoding="utf-8"?>
 <p:sldMaster xmlns:a="http://schemas.openxmlformats.org/drawingml/2006/main" xmlns:r="http://schemas.openxmlformats.org/officeDocument/2006/relationships" xmlns:p="http://schemas.openxmlformats.org/presentationml/2006/main">
   <p:cSld>
+    <p:bg>
+      <p:bgRef idx="1001">
+        <a:schemeClr val="bg1"/>
+      </p:bgRef>
+    </p:bg>
     <p:spTree>
       <p:nvGrpSpPr>
         <p:cNvPr id="1" name=""/>
@@ -1482,6 +1524,7 @@
         <a:solidFill>
           <a:srgbClr val="1E3A8A"/>
         </a:solidFill>
+        <a:effectLst/>
       </p:bgPr>
     </p:bg>
     <p:spTree>
@@ -1500,14 +1543,14 @@
       </p:grpSpPr>
       <p:pic>
         <p:nvPicPr>
-          <p:cNvPr id="2" name="Image 0" descr="preencoded.png">    </p:cNvPr>
+          <p:cNvPr id="2" name="Image 0" descr="preencoded.png"/>
           <p:cNvPicPr>
             <a:picLocks noChangeAspect="1"/>
           </p:cNvPicPr>
           <p:nvPr/>
         </p:nvPicPr>
         <p:blipFill>
-          <a:blip r:embed="rId1">
+          <a:blip r:embed="rId3">
             <a:alphaModFix amt="14000"/>
           </a:blip>
           <a:stretch>
@@ -1545,11 +1588,11 @@
           <a:bodyPr wrap="square" lIns="0" tIns="0" rIns="0" bIns="0" rtlCol="0" anchor="ctr"/>
           <a:lstStyle/>
           <a:p>
-            <a:pPr indent="0" marL="0">
-              <a:buNone/>
-            </a:pPr>
-            <a:r>
-              <a:rPr lang="en-US" sz="1400" b="1" spc="150" kern="0" dirty="0">
+            <a:pPr marL="0" indent="0">
+              <a:buNone/>
+            </a:pPr>
+            <a:r>
+              <a:rPr lang="en-US" sz="1400" b="1" kern="0" spc="150" dirty="0">
                 <a:solidFill>
                   <a:srgbClr val="DBEAFE"/>
                 </a:solidFill>
@@ -1584,11 +1627,11 @@
           <a:bodyPr wrap="square" lIns="0" tIns="0" rIns="0" bIns="0" rtlCol="0" anchor="ctr"/>
           <a:lstStyle/>
           <a:p>
-            <a:pPr indent="0" marL="0">
-              <a:buNone/>
-            </a:pPr>
-            <a:r>
-              <a:rPr lang="en-US" sz="5400" b="1" dirty="0">
+            <a:pPr marL="0" indent="0">
+              <a:buNone/>
+            </a:pPr>
+            <a:r>
+              <a:rPr lang="en-US" sz="5400" b="1" kern="0" spc="-120" dirty="0">
                 <a:solidFill>
                   <a:srgbClr val="FFFFFF"/>
                 </a:solidFill>
@@ -1623,7 +1666,7 @@
           <a:bodyPr wrap="square" lIns="0" tIns="0" rIns="0" bIns="0" rtlCol="0" anchor="ctr"/>
           <a:lstStyle/>
           <a:p>
-            <a:pPr indent="0" marL="0">
+            <a:pPr marL="0" indent="0">
               <a:buNone/>
             </a:pPr>
             <a:r>
@@ -1684,7 +1727,7 @@
           <a:bodyPr wrap="square" lIns="0" tIns="0" rIns="0" bIns="0" rtlCol="0" anchor="ctr"/>
           <a:lstStyle/>
           <a:p>
-            <a:pPr algn="ctr" indent="0" marL="0">
+            <a:pPr marL="0" indent="0" algn="ctr">
               <a:buNone/>
             </a:pPr>
             <a:r>
@@ -1745,7 +1788,7 @@
           <a:bodyPr wrap="square" lIns="0" tIns="0" rIns="0" bIns="0" rtlCol="0" anchor="ctr"/>
           <a:lstStyle/>
           <a:p>
-            <a:pPr algn="ctr" indent="0" marL="0">
+            <a:pPr marL="0" indent="0" algn="ctr">
               <a:buNone/>
             </a:pPr>
             <a:r>
@@ -1806,7 +1849,7 @@
           <a:bodyPr wrap="square" lIns="0" tIns="0" rIns="0" bIns="0" rtlCol="0" anchor="ctr"/>
           <a:lstStyle/>
           <a:p>
-            <a:pPr algn="ctr" indent="0" marL="0">
+            <a:pPr marL="0" indent="0" algn="ctr">
               <a:buNone/>
             </a:pPr>
             <a:r>
@@ -1845,7 +1888,7 @@
           <a:bodyPr wrap="square" lIns="0" tIns="0" rIns="0" bIns="0" rtlCol="0" anchor="ctr"/>
           <a:lstStyle/>
           <a:p>
-            <a:pPr indent="0" marL="0">
+            <a:pPr marL="0" indent="0">
               <a:buNone/>
             </a:pPr>
             <a:r>
@@ -1859,9 +1902,6 @@
               </a:rPr>
               <a:t>Tác giả: </a:t>
             </a:r>
-            <a:pPr indent="0" marL="0">
-              <a:buNone/>
-            </a:pPr>
             <a:r>
               <a:rPr lang="en-US" sz="1500" b="1" dirty="0">
                 <a:solidFill>
@@ -1882,20 +1922,30 @@
   <p:clrMapOvr>
     <a:masterClrMapping/>
   </p:clrMapOvr>
-  <p:transition xmlns:p14="http://schemas.microsoft.com/office/powerpoint/2010/main" spd="med" p14:dur="450">
-    <p:fade/>
-  </p:transition>
+  <mc:AlternateContent xmlns:mc="http://schemas.openxmlformats.org/markup-compatibility/2006">
+    <mc:Choice xmlns:p14="http://schemas.microsoft.com/office/powerpoint/2010/main" Requires="p14">
+      <p:transition p14:dur="450">
+        <p:fade/>
+      </p:transition>
+    </mc:Choice>
+    <mc:Fallback>
+      <p:transition>
+        <p:fade/>
+      </p:transition>
+    </mc:Fallback>
+  </mc:AlternateContent>
 </p:sld>
 </file>
 
-<file path=ppt/slides/slide2.xml><?xml version="1.0" encoding="utf-8"?>
+<file path=ppt/slides/slide10.xml><?xml version="1.0" encoding="utf-8"?>
 <p:sld xmlns:a="http://schemas.openxmlformats.org/drawingml/2006/main" xmlns:r="http://schemas.openxmlformats.org/officeDocument/2006/relationships" xmlns:p="http://schemas.openxmlformats.org/presentationml/2006/main">
-  <p:cSld name="Slide 2">
+  <p:cSld name="Slide 10">
     <p:bg>
       <p:bgPr>
         <a:solidFill>
-          <a:srgbClr val="1E3A8A"/>
+          <a:srgbClr val="FFFFFF"/>
         </a:solidFill>
+        <a:effectLst/>
       </p:bgPr>
     </p:bg>
     <p:spTree>
@@ -1933,19 +1983,19 @@
           <a:bodyPr wrap="square" lIns="0" tIns="0" rIns="0" bIns="0" rtlCol="0" anchor="ctr"/>
           <a:lstStyle/>
           <a:p>
-            <a:pPr indent="0" marL="0">
-              <a:buNone/>
-            </a:pPr>
-            <a:r>
-              <a:rPr lang="en-US" sz="1300" b="1" spc="200" kern="0" dirty="0">
-                <a:solidFill>
-                  <a:srgbClr val="DBEAFE"/>
-                </a:solidFill>
-                <a:latin typeface="Segoe UI" pitchFamily="34" charset="0"/>
-                <a:ea typeface="Segoe UI" pitchFamily="34" charset="-122"/>
-                <a:cs typeface="Segoe UI" pitchFamily="34" charset="-120"/>
-              </a:rPr>
-              <a:t>THỰC TRẠNG</a:t>
+            <a:pPr marL="0" indent="0">
+              <a:buNone/>
+            </a:pPr>
+            <a:r>
+              <a:rPr lang="en-US" sz="1300" b="1" kern="0" spc="200" dirty="0">
+                <a:solidFill>
+                  <a:srgbClr val="1D4ED8"/>
+                </a:solidFill>
+                <a:latin typeface="Segoe UI" pitchFamily="34" charset="0"/>
+                <a:ea typeface="Segoe UI" pitchFamily="34" charset="-122"/>
+                <a:cs typeface="Segoe UI" pitchFamily="34" charset="-120"/>
+              </a:rPr>
+              <a:t>THẲNG THẮN NHÌN NHẬN</a:t>
             </a:r>
             <a:endParaRPr lang="en-US" sz="1300" dirty="0"/>
           </a:p>
@@ -1972,9 +2022,20 @@
           <a:bodyPr wrap="square" lIns="0" tIns="0" rIns="0" bIns="0" rtlCol="0" anchor="t"/>
           <a:lstStyle/>
           <a:p>
-            <a:pPr indent="0" marL="0">
-              <a:buNone/>
-            </a:pPr>
+            <a:pPr marL="0" indent="0">
+              <a:buNone/>
+            </a:pPr>
+            <a:r>
+              <a:rPr lang="en-US" sz="2900" b="1" kern="0" spc="-50" dirty="0">
+                <a:solidFill>
+                  <a:srgbClr val="0F172A"/>
+                </a:solidFill>
+                <a:latin typeface="Segoe UI" pitchFamily="34" charset="0"/>
+                <a:ea typeface="Segoe UI" pitchFamily="34" charset="-122"/>
+                <a:cs typeface="Segoe UI" pitchFamily="34" charset="-120"/>
+              </a:rPr>
+              <a:t>Hạn chế và hướng khắc phục</a:t>
+            </a:r>
             <a:endParaRPr lang="en-US" sz="2900" dirty="0"/>
           </a:p>
         </p:txBody>
@@ -1987,8 +2048,8 @@
         </p:nvSpPr>
         <p:spPr>
           <a:xfrm>
-            <a:off x="548640" y="1828800"/>
-            <a:ext cx="5852160" cy="1554480"/>
+            <a:off x="640080" y="1536192"/>
+            <a:ext cx="10881360" cy="411480"/>
           </a:xfrm>
           <a:prstGeom prst="rect">
             <a:avLst/>
@@ -2000,21 +2061,21 @@
           <a:bodyPr wrap="square" lIns="0" tIns="0" rIns="0" bIns="0" rtlCol="0" anchor="ctr"/>
           <a:lstStyle/>
           <a:p>
-            <a:pPr algn="ctr" indent="0" marL="0">
-              <a:buNone/>
-            </a:pPr>
-            <a:r>
-              <a:rPr lang="en-US" sz="9000" b="1" dirty="0">
-                <a:solidFill>
-                  <a:srgbClr val="DBEAFE"/>
-                </a:solidFill>
-                <a:latin typeface="Segoe UI" pitchFamily="34" charset="0"/>
-                <a:ea typeface="Segoe UI" pitchFamily="34" charset="-122"/>
-                <a:cs typeface="Segoe UI" pitchFamily="34" charset="-120"/>
-              </a:rPr>
-              <a:t>Hàng ngàn</a:t>
-            </a:r>
-            <a:endParaRPr lang="en-US" sz="9000" dirty="0"/>
+            <a:pPr marL="0" indent="0">
+              <a:buNone/>
+            </a:pPr>
+            <a:r>
+              <a:rPr lang="en-US" sz="1450" dirty="0">
+                <a:solidFill>
+                  <a:srgbClr val="334155"/>
+                </a:solidFill>
+                <a:latin typeface="Segoe UI" pitchFamily="34" charset="0"/>
+                <a:ea typeface="Segoe UI" pitchFamily="34" charset="-122"/>
+                <a:cs typeface="Segoe UI" pitchFamily="34" charset="-120"/>
+              </a:rPr>
+              <a:t>Công trình đang trong giai đoạn hoàn thiện — xin báo cáo trung thực các hạn chế và hướng khắc phục.</a:t>
+            </a:r>
+            <a:endParaRPr lang="en-US" sz="1450" dirty="0"/>
           </a:p>
         </p:txBody>
       </p:sp>
@@ -2026,8 +2087,8 @@
         </p:nvSpPr>
         <p:spPr>
           <a:xfrm>
-            <a:off x="640080" y="3383280"/>
-            <a:ext cx="5669280" cy="822960"/>
+            <a:off x="640080" y="2011680"/>
+            <a:ext cx="5029200" cy="274320"/>
           </a:xfrm>
           <a:prstGeom prst="rect">
             <a:avLst/>
@@ -2039,46 +2100,85 @@
           <a:bodyPr wrap="square" lIns="0" tIns="0" rIns="0" bIns="0" rtlCol="0" anchor="ctr"/>
           <a:lstStyle/>
           <a:p>
-            <a:pPr algn="ctr" indent="0" marL="0">
-              <a:buNone/>
-            </a:pPr>
-            <a:r>
-              <a:rPr lang="en-US" sz="1800" dirty="0">
-                <a:solidFill>
-                  <a:srgbClr val="EFF6FF"/>
-                </a:solidFill>
-                <a:latin typeface="Segoe UI" pitchFamily="34" charset="0"/>
-                <a:ea typeface="Segoe UI" pitchFamily="34" charset="-122"/>
-                <a:cs typeface="Segoe UI" pitchFamily="34" charset="-120"/>
-              </a:rPr>
-              <a:t>Giờ bị lãng phí mỗi năm</a:t>
-            </a:r>
-            <a:endParaRPr lang="en-US" sz="1800" dirty="0"/>
-          </a:p>
-        </p:txBody>
-      </p:sp>
-      <p:sp>
-        <p:nvSpPr>
-          <p:cNvPr id="6" name="Shape 4"/>
-          <p:cNvSpPr/>
-          <p:nvPr/>
-        </p:nvSpPr>
-        <p:spPr>
-          <a:xfrm>
-            <a:off x="6492240" y="2057400"/>
-            <a:ext cx="5029200" cy="868680"/>
+            <a:pPr marL="0" indent="0">
+              <a:buNone/>
+            </a:pPr>
+            <a:r>
+              <a:rPr lang="en-US" sz="1200" b="1" kern="0" spc="150" dirty="0">
+                <a:solidFill>
+                  <a:srgbClr val="64748B"/>
+                </a:solidFill>
+                <a:latin typeface="Segoe UI" pitchFamily="34" charset="0"/>
+                <a:ea typeface="Segoe UI" pitchFamily="34" charset="-122"/>
+                <a:cs typeface="Segoe UI" pitchFamily="34" charset="-120"/>
+              </a:rPr>
+              <a:t>HẠN CHẾ CÒN TỒN TẠI</a:t>
+            </a:r>
+            <a:endParaRPr lang="en-US" sz="1200" dirty="0"/>
+          </a:p>
+        </p:txBody>
+      </p:sp>
+      <p:sp>
+        <p:nvSpPr>
+          <p:cNvPr id="6" name="Text 4"/>
+          <p:cNvSpPr/>
+          <p:nvPr/>
+        </p:nvSpPr>
+        <p:spPr>
+          <a:xfrm>
+            <a:off x="6309360" y="2011680"/>
+            <a:ext cx="5212080" cy="274320"/>
+          </a:xfrm>
+          <a:prstGeom prst="rect">
+            <a:avLst/>
+          </a:prstGeom>
+          <a:noFill/>
+          <a:ln/>
+        </p:spPr>
+        <p:txBody>
+          <a:bodyPr wrap="square" lIns="0" tIns="0" rIns="0" bIns="0" rtlCol="0" anchor="ctr"/>
+          <a:lstStyle/>
+          <a:p>
+            <a:pPr marL="0" indent="0">
+              <a:buNone/>
+            </a:pPr>
+            <a:r>
+              <a:rPr lang="en-US" sz="1200" b="1" kern="0" spc="150" dirty="0">
+                <a:solidFill>
+                  <a:srgbClr val="0B7A75"/>
+                </a:solidFill>
+                <a:latin typeface="Segoe UI" pitchFamily="34" charset="0"/>
+                <a:ea typeface="Segoe UI" pitchFamily="34" charset="-122"/>
+                <a:cs typeface="Segoe UI" pitchFamily="34" charset="-120"/>
+              </a:rPr>
+              <a:t>HƯỚNG KHẮC PHỤC ĐỀ XUẤT</a:t>
+            </a:r>
+            <a:endParaRPr lang="en-US" sz="1200" dirty="0"/>
+          </a:p>
+        </p:txBody>
+      </p:sp>
+      <p:sp>
+        <p:nvSpPr>
+          <p:cNvPr id="7" name="Shape 5"/>
+          <p:cNvSpPr/>
+          <p:nvPr/>
+        </p:nvSpPr>
+        <p:spPr>
+          <a:xfrm>
+            <a:off x="640080" y="2395728"/>
+            <a:ext cx="5029200" cy="749808"/>
           </a:xfrm>
           <a:prstGeom prst="roundRect">
             <a:avLst>
-              <a:gd name="adj" fmla="val 10526"/>
+              <a:gd name="adj" fmla="val 9756"/>
             </a:avLst>
           </a:prstGeom>
           <a:solidFill>
-            <a:srgbClr val="0E4A44"/>
+            <a:srgbClr val="F8FAFC"/>
           </a:solidFill>
           <a:ln w="12700">
             <a:solidFill>
-              <a:srgbClr val="059669"/>
+              <a:srgbClr val="E2E8F0"/>
             </a:solidFill>
             <a:prstDash val="solid"/>
           </a:ln>
@@ -2086,268 +2186,105 @@
       </p:sp>
       <p:sp>
         <p:nvSpPr>
-          <p:cNvPr id="7" name="Shape 5"/>
-          <p:cNvSpPr/>
-          <p:nvPr/>
-        </p:nvSpPr>
-        <p:spPr>
-          <a:xfrm>
-            <a:off x="6766560" y="2221992"/>
-            <a:ext cx="548640" cy="548640"/>
+          <p:cNvPr id="8" name="Shape 6"/>
+          <p:cNvSpPr/>
+          <p:nvPr/>
+        </p:nvSpPr>
+        <p:spPr>
+          <a:xfrm>
+            <a:off x="841248" y="2596896"/>
+            <a:ext cx="347472" cy="347472"/>
           </a:xfrm>
           <a:prstGeom prst="ellipse">
             <a:avLst/>
           </a:prstGeom>
           <a:solidFill>
-            <a:srgbClr val="059669"/>
+            <a:srgbClr val="334155"/>
           </a:solidFill>
           <a:ln/>
-          <a:effectLst>
-            <a:outerShdw sx="100000" sy="100000" kx="0" ky="0" algn="bl" rotWithShape="0" blurRad="114300" dist="38100" dir="8100000">
-              <a:srgbClr val="1e40af">
-                <a:alpha val="20000"/>
-              </a:srgbClr>
-            </a:outerShdw>
-          </a:effectLst>
-        </p:spPr>
+        </p:spPr>
+      </p:sp>
+      <p:sp>
+        <p:nvSpPr>
+          <p:cNvPr id="9" name="Text 7"/>
+          <p:cNvSpPr/>
+          <p:nvPr/>
+        </p:nvSpPr>
+        <p:spPr>
+          <a:xfrm>
+            <a:off x="841248" y="2596896"/>
+            <a:ext cx="347472" cy="347472"/>
+          </a:xfrm>
+          <a:prstGeom prst="rect">
+            <a:avLst/>
+          </a:prstGeom>
+          <a:noFill/>
+          <a:ln/>
+        </p:spPr>
+        <p:txBody>
+          <a:bodyPr wrap="square" lIns="0" tIns="0" rIns="0" bIns="0" rtlCol="0" anchor="ctr"/>
+          <a:lstStyle/>
+          <a:p>
+            <a:pPr marL="0" indent="0" algn="ctr">
+              <a:buNone/>
+            </a:pPr>
+            <a:r>
+              <a:rPr lang="en-US" sz="1400" b="1" dirty="0">
+                <a:solidFill>
+                  <a:srgbClr val="FFFFFF"/>
+                </a:solidFill>
+                <a:latin typeface="Segoe UI" pitchFamily="34" charset="0"/>
+                <a:ea typeface="Segoe UI" pitchFamily="34" charset="-122"/>
+                <a:cs typeface="Segoe UI" pitchFamily="34" charset="-120"/>
+              </a:rPr>
+              <a:t>1</a:t>
+            </a:r>
+            <a:endParaRPr lang="en-US" sz="1400" dirty="0"/>
+          </a:p>
+        </p:txBody>
+      </p:sp>
+      <p:sp>
+        <p:nvSpPr>
+          <p:cNvPr id="10" name="Text 8"/>
+          <p:cNvSpPr/>
+          <p:nvPr/>
+        </p:nvSpPr>
+        <p:spPr>
+          <a:xfrm>
+            <a:off x="1325880" y="2395728"/>
+            <a:ext cx="4160520" cy="749808"/>
+          </a:xfrm>
+          <a:prstGeom prst="rect">
+            <a:avLst/>
+          </a:prstGeom>
+          <a:noFill/>
+          <a:ln/>
+        </p:spPr>
+        <p:txBody>
+          <a:bodyPr wrap="square" lIns="0" tIns="0" rIns="0" bIns="0" rtlCol="0" anchor="ctr"/>
+          <a:lstStyle/>
+          <a:p>
+            <a:pPr marL="0" indent="0">
+              <a:buNone/>
+            </a:pPr>
+            <a:r>
+              <a:rPr lang="en-US" sz="1450" b="1" dirty="0">
+                <a:solidFill>
+                  <a:srgbClr val="0F172A"/>
+                </a:solidFill>
+                <a:latin typeface="Segoe UI" pitchFamily="34" charset="0"/>
+                <a:ea typeface="Segoe UI" pitchFamily="34" charset="-122"/>
+                <a:cs typeface="Segoe UI" pitchFamily="34" charset="-120"/>
+              </a:rPr>
+              <a:t>Bản chất vẫn là AI — vẫn có thể trả lời sai</a:t>
+            </a:r>
+            <a:endParaRPr lang="en-US" sz="1450" dirty="0"/>
+          </a:p>
+        </p:txBody>
       </p:sp>
       <p:pic>
         <p:nvPicPr>
-          <p:cNvPr id="8" name="Image 0" descr="preencoded.png">    </p:cNvPr>
-          <p:cNvPicPr>
-            <a:picLocks noChangeAspect="1"/>
-          </p:cNvPicPr>
-          <p:nvPr/>
-        </p:nvPicPr>
-        <p:blipFill>
-          <a:blip r:embed="rId1"/>
-          <a:stretch>
-            <a:fillRect/>
-          </a:stretch>
-        </p:blipFill>
-        <p:spPr>
-          <a:xfrm>
-            <a:off x="6914693" y="2370125"/>
-            <a:ext cx="252374" cy="252374"/>
-          </a:xfrm>
-          <a:prstGeom prst="rect">
-            <a:avLst/>
-          </a:prstGeom>
-        </p:spPr>
-      </p:pic>
-      <p:sp>
-        <p:nvSpPr>
-          <p:cNvPr id="9" name="Text 6"/>
-          <p:cNvSpPr/>
-          <p:nvPr/>
-        </p:nvSpPr>
-        <p:spPr>
-          <a:xfrm>
-            <a:off x="7498080" y="2057400"/>
-            <a:ext cx="3886200" cy="868680"/>
-          </a:xfrm>
-          <a:prstGeom prst="rect">
-            <a:avLst/>
-          </a:prstGeom>
-          <a:noFill/>
-          <a:ln/>
-        </p:spPr>
-        <p:txBody>
-          <a:bodyPr wrap="square" lIns="0" tIns="0" rIns="0" bIns="0" rtlCol="0" anchor="ctr"/>
-          <a:lstStyle/>
-          <a:p>
-            <a:pPr indent="0" marL="0">
-              <a:buNone/>
-            </a:pPr>
-            <a:r>
-              <a:rPr lang="en-US" sz="1600" b="1" dirty="0">
-                <a:solidFill>
-                  <a:srgbClr val="FFFFFF"/>
-                </a:solidFill>
-                <a:latin typeface="Segoe UI" pitchFamily="34" charset="0"/>
-                <a:ea typeface="Segoe UI" pitchFamily="34" charset="-122"/>
-                <a:cs typeface="Segoe UI" pitchFamily="34" charset="-120"/>
-              </a:rPr>
-              <a:t>Người dân loay hoay tìm địa chỉ đúng</a:t>
-            </a:r>
-            <a:endParaRPr lang="en-US" sz="1600" dirty="0"/>
-          </a:p>
-        </p:txBody>
-      </p:sp>
-      <p:sp>
-        <p:nvSpPr>
-          <p:cNvPr id="10" name="Shape 7"/>
-          <p:cNvSpPr/>
-          <p:nvPr/>
-        </p:nvSpPr>
-        <p:spPr>
-          <a:xfrm>
-            <a:off x="6492240" y="3108960"/>
-            <a:ext cx="5029200" cy="868680"/>
-          </a:xfrm>
-          <a:prstGeom prst="roundRect">
-            <a:avLst>
-              <a:gd name="adj" fmla="val 10526"/>
-            </a:avLst>
-          </a:prstGeom>
-          <a:solidFill>
-            <a:srgbClr val="0E4A44"/>
-          </a:solidFill>
-          <a:ln w="12700">
-            <a:solidFill>
-              <a:srgbClr val="059669"/>
-            </a:solidFill>
-            <a:prstDash val="solid"/>
-          </a:ln>
-        </p:spPr>
-      </p:sp>
-      <p:sp>
-        <p:nvSpPr>
-          <p:cNvPr id="11" name="Shape 8"/>
-          <p:cNvSpPr/>
-          <p:nvPr/>
-        </p:nvSpPr>
-        <p:spPr>
-          <a:xfrm>
-            <a:off x="6766560" y="3273552"/>
-            <a:ext cx="548640" cy="548640"/>
-          </a:xfrm>
-          <a:prstGeom prst="ellipse">
-            <a:avLst/>
-          </a:prstGeom>
-          <a:solidFill>
-            <a:srgbClr val="059669"/>
-          </a:solidFill>
-          <a:ln/>
-          <a:effectLst>
-            <a:outerShdw sx="100000" sy="100000" kx="0" ky="0" algn="bl" rotWithShape="0" blurRad="114300" dist="38100" dir="8100000">
-              <a:srgbClr val="1e40af">
-                <a:alpha val="20000"/>
-              </a:srgbClr>
-            </a:outerShdw>
-          </a:effectLst>
-        </p:spPr>
-      </p:sp>
-      <p:pic>
-        <p:nvPicPr>
-          <p:cNvPr id="12" name="Image 1" descr="preencoded.png">    </p:cNvPr>
-          <p:cNvPicPr>
-            <a:picLocks noChangeAspect="1"/>
-          </p:cNvPicPr>
-          <p:nvPr/>
-        </p:nvPicPr>
-        <p:blipFill>
-          <a:blip r:embed="rId2"/>
-          <a:stretch>
-            <a:fillRect/>
-          </a:stretch>
-        </p:blipFill>
-        <p:spPr>
-          <a:xfrm>
-            <a:off x="6914693" y="3421685"/>
-            <a:ext cx="252374" cy="252374"/>
-          </a:xfrm>
-          <a:prstGeom prst="rect">
-            <a:avLst/>
-          </a:prstGeom>
-        </p:spPr>
-      </p:pic>
-      <p:sp>
-        <p:nvSpPr>
-          <p:cNvPr id="13" name="Text 9"/>
-          <p:cNvSpPr/>
-          <p:nvPr/>
-        </p:nvSpPr>
-        <p:spPr>
-          <a:xfrm>
-            <a:off x="7498080" y="3108960"/>
-            <a:ext cx="3886200" cy="868680"/>
-          </a:xfrm>
-          <a:prstGeom prst="rect">
-            <a:avLst/>
-          </a:prstGeom>
-          <a:noFill/>
-          <a:ln/>
-        </p:spPr>
-        <p:txBody>
-          <a:bodyPr wrap="square" lIns="0" tIns="0" rIns="0" bIns="0" rtlCol="0" anchor="ctr"/>
-          <a:lstStyle/>
-          <a:p>
-            <a:pPr indent="0" marL="0">
-              <a:buNone/>
-            </a:pPr>
-            <a:r>
-              <a:rPr lang="en-US" sz="1600" b="1" dirty="0">
-                <a:solidFill>
-                  <a:srgbClr val="FFFFFF"/>
-                </a:solidFill>
-                <a:latin typeface="Segoe UI" pitchFamily="34" charset="0"/>
-                <a:ea typeface="Segoe UI" pitchFamily="34" charset="-122"/>
-                <a:cs typeface="Segoe UI" pitchFamily="34" charset="-120"/>
-              </a:rPr>
-              <a:t>Đi lại nhiều lần vì sai thủ tục</a:t>
-            </a:r>
-            <a:endParaRPr lang="en-US" sz="1600" dirty="0"/>
-          </a:p>
-        </p:txBody>
-      </p:sp>
-      <p:sp>
-        <p:nvSpPr>
-          <p:cNvPr id="14" name="Shape 10"/>
-          <p:cNvSpPr/>
-          <p:nvPr/>
-        </p:nvSpPr>
-        <p:spPr>
-          <a:xfrm>
-            <a:off x="6492240" y="4160520"/>
-            <a:ext cx="5029200" cy="868680"/>
-          </a:xfrm>
-          <a:prstGeom prst="roundRect">
-            <a:avLst>
-              <a:gd name="adj" fmla="val 10526"/>
-            </a:avLst>
-          </a:prstGeom>
-          <a:solidFill>
-            <a:srgbClr val="0E4A44"/>
-          </a:solidFill>
-          <a:ln w="12700">
-            <a:solidFill>
-              <a:srgbClr val="059669"/>
-            </a:solidFill>
-            <a:prstDash val="solid"/>
-          </a:ln>
-        </p:spPr>
-      </p:sp>
-      <p:sp>
-        <p:nvSpPr>
-          <p:cNvPr id="15" name="Shape 11"/>
-          <p:cNvSpPr/>
-          <p:nvPr/>
-        </p:nvSpPr>
-        <p:spPr>
-          <a:xfrm>
-            <a:off x="6766560" y="4325112"/>
-            <a:ext cx="548640" cy="548640"/>
-          </a:xfrm>
-          <a:prstGeom prst="ellipse">
-            <a:avLst/>
-          </a:prstGeom>
-          <a:solidFill>
-            <a:srgbClr val="059669"/>
-          </a:solidFill>
-          <a:ln/>
-          <a:effectLst>
-            <a:outerShdw sx="100000" sy="100000" kx="0" ky="0" algn="bl" rotWithShape="0" blurRad="114300" dist="38100" dir="8100000">
-              <a:srgbClr val="1e40af">
-                <a:alpha val="20000"/>
-              </a:srgbClr>
-            </a:outerShdw>
-          </a:effectLst>
-        </p:spPr>
-      </p:sp>
-      <p:pic>
-        <p:nvPicPr>
-          <p:cNvPr id="16" name="Image 2" descr="preencoded.png">    </p:cNvPr>
+          <p:cNvPr id="11" name="Image 0" descr="preencoded.png"/>
           <p:cNvPicPr>
             <a:picLocks noChangeAspect="1"/>
           </p:cNvPicPr>
@@ -2361,8 +2298,8 @@
         </p:blipFill>
         <p:spPr>
           <a:xfrm>
-            <a:off x="6914693" y="4473245"/>
-            <a:ext cx="252374" cy="252374"/>
+            <a:off x="5797296" y="2642616"/>
+            <a:ext cx="256032" cy="256032"/>
           </a:xfrm>
           <a:prstGeom prst="rect">
             <a:avLst/>
@@ -2371,14 +2308,65 @@
       </p:pic>
       <p:sp>
         <p:nvSpPr>
-          <p:cNvPr id="17" name="Text 12"/>
-          <p:cNvSpPr/>
-          <p:nvPr/>
-        </p:nvSpPr>
-        <p:spPr>
-          <a:xfrm>
-            <a:off x="7498080" y="4160520"/>
-            <a:ext cx="3886200" cy="868680"/>
+          <p:cNvPr id="12" name="Shape 9"/>
+          <p:cNvSpPr/>
+          <p:nvPr/>
+        </p:nvSpPr>
+        <p:spPr>
+          <a:xfrm>
+            <a:off x="6309360" y="2395728"/>
+            <a:ext cx="5212080" cy="749808"/>
+          </a:xfrm>
+          <a:prstGeom prst="roundRect">
+            <a:avLst>
+              <a:gd name="adj" fmla="val 9756"/>
+            </a:avLst>
+          </a:prstGeom>
+          <a:solidFill>
+            <a:srgbClr val="EAF6F5"/>
+          </a:solidFill>
+          <a:ln w="12700">
+            <a:solidFill>
+              <a:srgbClr val="0B7A75"/>
+            </a:solidFill>
+            <a:prstDash val="solid"/>
+          </a:ln>
+        </p:spPr>
+      </p:sp>
+      <p:pic>
+        <p:nvPicPr>
+          <p:cNvPr id="13" name="Image 1" descr="preencoded.png"/>
+          <p:cNvPicPr>
+            <a:picLocks noChangeAspect="1"/>
+          </p:cNvPicPr>
+          <p:nvPr/>
+        </p:nvPicPr>
+        <p:blipFill>
+          <a:blip r:embed="rId4"/>
+          <a:stretch>
+            <a:fillRect/>
+          </a:stretch>
+        </p:blipFill>
+        <p:spPr>
+          <a:xfrm>
+            <a:off x="6510528" y="2642616"/>
+            <a:ext cx="256032" cy="256032"/>
+          </a:xfrm>
+          <a:prstGeom prst="rect">
+            <a:avLst/>
+          </a:prstGeom>
+        </p:spPr>
+      </p:pic>
+      <p:sp>
+        <p:nvSpPr>
+          <p:cNvPr id="14" name="Text 10"/>
+          <p:cNvSpPr/>
+          <p:nvPr/>
+        </p:nvSpPr>
+        <p:spPr>
+          <a:xfrm>
+            <a:off x="6876288" y="2395728"/>
+            <a:ext cx="4462272" cy="749808"/>
           </a:xfrm>
           <a:prstGeom prst="rect">
             <a:avLst/>
@@ -2390,11 +2378,97 @@
           <a:bodyPr wrap="square" lIns="0" tIns="0" rIns="0" bIns="0" rtlCol="0" anchor="ctr"/>
           <a:lstStyle/>
           <a:p>
-            <a:pPr indent="0" marL="0">
-              <a:buNone/>
-            </a:pPr>
-            <a:r>
-              <a:rPr lang="en-US" sz="1600" b="1" dirty="0">
+            <a:pPr marL="0" indent="0">
+              <a:buNone/>
+            </a:pPr>
+            <a:r>
+              <a:rPr lang="en-US" sz="1400" dirty="0">
+                <a:solidFill>
+                  <a:srgbClr val="0F172A"/>
+                </a:solidFill>
+                <a:latin typeface="Segoe UI" pitchFamily="34" charset="0"/>
+                <a:ea typeface="Segoe UI" pitchFamily="34" charset="-122"/>
+                <a:cs typeface="Segoe UI" pitchFamily="34" charset="-120"/>
+              </a:rPr>
+              <a:t>Hiển thị khuyến cáo “thông tin tham khảo”; nút báo lỗi ngay dưới mỗi câu trả lời; cán bộ rà soát định kỳ.</a:t>
+            </a:r>
+            <a:endParaRPr lang="en-US" sz="1400" dirty="0"/>
+          </a:p>
+        </p:txBody>
+      </p:sp>
+      <p:sp>
+        <p:nvSpPr>
+          <p:cNvPr id="15" name="Shape 11"/>
+          <p:cNvSpPr/>
+          <p:nvPr/>
+        </p:nvSpPr>
+        <p:spPr>
+          <a:xfrm>
+            <a:off x="640080" y="3255264"/>
+            <a:ext cx="5029200" cy="749808"/>
+          </a:xfrm>
+          <a:prstGeom prst="roundRect">
+            <a:avLst>
+              <a:gd name="adj" fmla="val 9756"/>
+            </a:avLst>
+          </a:prstGeom>
+          <a:solidFill>
+            <a:srgbClr val="F8FAFC"/>
+          </a:solidFill>
+          <a:ln w="12700">
+            <a:solidFill>
+              <a:srgbClr val="E2E8F0"/>
+            </a:solidFill>
+            <a:prstDash val="solid"/>
+          </a:ln>
+        </p:spPr>
+      </p:sp>
+      <p:sp>
+        <p:nvSpPr>
+          <p:cNvPr id="16" name="Shape 12"/>
+          <p:cNvSpPr/>
+          <p:nvPr/>
+        </p:nvSpPr>
+        <p:spPr>
+          <a:xfrm>
+            <a:off x="841248" y="3456432"/>
+            <a:ext cx="347472" cy="347472"/>
+          </a:xfrm>
+          <a:prstGeom prst="ellipse">
+            <a:avLst/>
+          </a:prstGeom>
+          <a:solidFill>
+            <a:srgbClr val="334155"/>
+          </a:solidFill>
+          <a:ln/>
+        </p:spPr>
+      </p:sp>
+      <p:sp>
+        <p:nvSpPr>
+          <p:cNvPr id="17" name="Text 13"/>
+          <p:cNvSpPr/>
+          <p:nvPr/>
+        </p:nvSpPr>
+        <p:spPr>
+          <a:xfrm>
+            <a:off x="841248" y="3456432"/>
+            <a:ext cx="347472" cy="347472"/>
+          </a:xfrm>
+          <a:prstGeom prst="rect">
+            <a:avLst/>
+          </a:prstGeom>
+          <a:noFill/>
+          <a:ln/>
+        </p:spPr>
+        <p:txBody>
+          <a:bodyPr wrap="square" lIns="0" tIns="0" rIns="0" bIns="0" rtlCol="0" anchor="ctr"/>
+          <a:lstStyle/>
+          <a:p>
+            <a:pPr marL="0" indent="0" algn="ctr">
+              <a:buNone/>
+            </a:pPr>
+            <a:r>
+              <a:rPr lang="en-US" sz="1400" b="1" dirty="0">
                 <a:solidFill>
                   <a:srgbClr val="FFFFFF"/>
                 </a:solidFill>
@@ -2402,22 +2476,22 @@
                 <a:ea typeface="Segoe UI" pitchFamily="34" charset="-122"/>
                 <a:cs typeface="Segoe UI" pitchFamily="34" charset="-120"/>
               </a:rPr>
-              <a:t>Cán bộ quá tải vì trả lời lặp lại</a:t>
-            </a:r>
-            <a:endParaRPr lang="en-US" sz="1600" dirty="0"/>
-          </a:p>
-        </p:txBody>
-      </p:sp>
-      <p:sp>
-        <p:nvSpPr>
-          <p:cNvPr id="18" name="Text 13"/>
-          <p:cNvSpPr/>
-          <p:nvPr/>
-        </p:nvSpPr>
-        <p:spPr>
-          <a:xfrm>
-            <a:off x="640080" y="5623560"/>
-            <a:ext cx="10881360" cy="640080"/>
+              <a:t>2</a:t>
+            </a:r>
+            <a:endParaRPr lang="en-US" sz="1400" dirty="0"/>
+          </a:p>
+        </p:txBody>
+      </p:sp>
+      <p:sp>
+        <p:nvSpPr>
+          <p:cNvPr id="18" name="Text 14"/>
+          <p:cNvSpPr/>
+          <p:nvPr/>
+        </p:nvSpPr>
+        <p:spPr>
+          <a:xfrm>
+            <a:off x="1325880" y="3255264"/>
+            <a:ext cx="4160520" cy="749808"/>
           </a:xfrm>
           <a:prstGeom prst="rect">
             <a:avLst/>
@@ -2429,21 +2503,852 @@
           <a:bodyPr wrap="square" lIns="0" tIns="0" rIns="0" bIns="0" rtlCol="0" anchor="ctr"/>
           <a:lstStyle/>
           <a:p>
-            <a:pPr indent="0" marL="0">
-              <a:buNone/>
-            </a:pPr>
-            <a:r>
-              <a:rPr lang="en-US" sz="1600" i="1" dirty="0">
-                <a:solidFill>
-                  <a:srgbClr val="DBEAFE"/>
-                </a:solidFill>
-                <a:latin typeface="Segoe UI" pitchFamily="34" charset="0"/>
-                <a:ea typeface="Segoe UI" pitchFamily="34" charset="-122"/>
-                <a:cs typeface="Segoe UI" pitchFamily="34" charset="-120"/>
-              </a:rPr>
-              <a:t>Đó là nỗi đau chung của cả người dân và cán bộ tiếp dân.</a:t>
-            </a:r>
-            <a:endParaRPr lang="en-US" sz="1600" dirty="0"/>
+            <a:pPr marL="0" indent="0">
+              <a:buNone/>
+            </a:pPr>
+            <a:r>
+              <a:rPr lang="en-US" sz="1450" b="1" dirty="0">
+                <a:solidFill>
+                  <a:srgbClr val="0F172A"/>
+                </a:solidFill>
+                <a:latin typeface="Segoe UI" pitchFamily="34" charset="0"/>
+                <a:ea typeface="Segoe UI" pitchFamily="34" charset="-122"/>
+                <a:cs typeface="Segoe UI" pitchFamily="34" charset="-120"/>
+              </a:rPr>
+              <a:t>Kho dữ liệu chưa qua thẩm định chính thức</a:t>
+            </a:r>
+            <a:endParaRPr lang="en-US" sz="1450" dirty="0"/>
+          </a:p>
+        </p:txBody>
+      </p:sp>
+      <p:pic>
+        <p:nvPicPr>
+          <p:cNvPr id="19" name="Image 2" descr="preencoded.png"/>
+          <p:cNvPicPr>
+            <a:picLocks noChangeAspect="1"/>
+          </p:cNvPicPr>
+          <p:nvPr/>
+        </p:nvPicPr>
+        <p:blipFill>
+          <a:blip r:embed="rId3"/>
+          <a:stretch>
+            <a:fillRect/>
+          </a:stretch>
+        </p:blipFill>
+        <p:spPr>
+          <a:xfrm>
+            <a:off x="5797296" y="3502152"/>
+            <a:ext cx="256032" cy="256032"/>
+          </a:xfrm>
+          <a:prstGeom prst="rect">
+            <a:avLst/>
+          </a:prstGeom>
+        </p:spPr>
+      </p:pic>
+      <p:sp>
+        <p:nvSpPr>
+          <p:cNvPr id="20" name="Shape 15"/>
+          <p:cNvSpPr/>
+          <p:nvPr/>
+        </p:nvSpPr>
+        <p:spPr>
+          <a:xfrm>
+            <a:off x="6309360" y="3255264"/>
+            <a:ext cx="5212080" cy="749808"/>
+          </a:xfrm>
+          <a:prstGeom prst="roundRect">
+            <a:avLst>
+              <a:gd name="adj" fmla="val 9756"/>
+            </a:avLst>
+          </a:prstGeom>
+          <a:solidFill>
+            <a:srgbClr val="EAF6F5"/>
+          </a:solidFill>
+          <a:ln w="12700">
+            <a:solidFill>
+              <a:srgbClr val="0B7A75"/>
+            </a:solidFill>
+            <a:prstDash val="solid"/>
+          </a:ln>
+        </p:spPr>
+      </p:sp>
+      <p:pic>
+        <p:nvPicPr>
+          <p:cNvPr id="21" name="Image 3" descr="preencoded.png"/>
+          <p:cNvPicPr>
+            <a:picLocks noChangeAspect="1"/>
+          </p:cNvPicPr>
+          <p:nvPr/>
+        </p:nvPicPr>
+        <p:blipFill>
+          <a:blip r:embed="rId4"/>
+          <a:stretch>
+            <a:fillRect/>
+          </a:stretch>
+        </p:blipFill>
+        <p:spPr>
+          <a:xfrm>
+            <a:off x="6510528" y="3502152"/>
+            <a:ext cx="256032" cy="256032"/>
+          </a:xfrm>
+          <a:prstGeom prst="rect">
+            <a:avLst/>
+          </a:prstGeom>
+        </p:spPr>
+      </p:pic>
+      <p:sp>
+        <p:nvSpPr>
+          <p:cNvPr id="22" name="Text 16"/>
+          <p:cNvSpPr/>
+          <p:nvPr/>
+        </p:nvSpPr>
+        <p:spPr>
+          <a:xfrm>
+            <a:off x="6876288" y="3255264"/>
+            <a:ext cx="4462272" cy="749808"/>
+          </a:xfrm>
+          <a:prstGeom prst="rect">
+            <a:avLst/>
+          </a:prstGeom>
+          <a:noFill/>
+          <a:ln/>
+        </p:spPr>
+        <p:txBody>
+          <a:bodyPr wrap="square" lIns="0" tIns="0" rIns="0" bIns="0" rtlCol="0" anchor="ctr"/>
+          <a:lstStyle/>
+          <a:p>
+            <a:pPr marL="0" indent="0">
+              <a:buNone/>
+            </a:pPr>
+            <a:r>
+              <a:rPr lang="en-US" sz="1400" dirty="0">
+                <a:solidFill>
+                  <a:srgbClr val="0F172A"/>
+                </a:solidFill>
+                <a:latin typeface="Segoe UI" pitchFamily="34" charset="0"/>
+                <a:ea typeface="Segoe UI" pitchFamily="34" charset="-122"/>
+                <a:cs typeface="Segoe UI" pitchFamily="34" charset="-120"/>
+              </a:rPr>
+              <a:t>Đề nghị đơn vị nghiệp vụ (QLXNC, QLHC về TTXH) rà soát, phê duyệt nội dung trước khi công bố rộng.</a:t>
+            </a:r>
+            <a:endParaRPr lang="en-US" sz="1400" dirty="0"/>
+          </a:p>
+        </p:txBody>
+      </p:sp>
+      <p:sp>
+        <p:nvSpPr>
+          <p:cNvPr id="23" name="Shape 17"/>
+          <p:cNvSpPr/>
+          <p:nvPr/>
+        </p:nvSpPr>
+        <p:spPr>
+          <a:xfrm>
+            <a:off x="640080" y="4114800"/>
+            <a:ext cx="5029200" cy="749808"/>
+          </a:xfrm>
+          <a:prstGeom prst="roundRect">
+            <a:avLst>
+              <a:gd name="adj" fmla="val 9756"/>
+            </a:avLst>
+          </a:prstGeom>
+          <a:solidFill>
+            <a:srgbClr val="F8FAFC"/>
+          </a:solidFill>
+          <a:ln w="12700">
+            <a:solidFill>
+              <a:srgbClr val="E2E8F0"/>
+            </a:solidFill>
+            <a:prstDash val="solid"/>
+          </a:ln>
+        </p:spPr>
+      </p:sp>
+      <p:sp>
+        <p:nvSpPr>
+          <p:cNvPr id="24" name="Shape 18"/>
+          <p:cNvSpPr/>
+          <p:nvPr/>
+        </p:nvSpPr>
+        <p:spPr>
+          <a:xfrm>
+            <a:off x="841248" y="4315968"/>
+            <a:ext cx="347472" cy="347472"/>
+          </a:xfrm>
+          <a:prstGeom prst="ellipse">
+            <a:avLst/>
+          </a:prstGeom>
+          <a:solidFill>
+            <a:srgbClr val="334155"/>
+          </a:solidFill>
+          <a:ln/>
+        </p:spPr>
+      </p:sp>
+      <p:sp>
+        <p:nvSpPr>
+          <p:cNvPr id="25" name="Text 19"/>
+          <p:cNvSpPr/>
+          <p:nvPr/>
+        </p:nvSpPr>
+        <p:spPr>
+          <a:xfrm>
+            <a:off x="841248" y="4315968"/>
+            <a:ext cx="347472" cy="347472"/>
+          </a:xfrm>
+          <a:prstGeom prst="rect">
+            <a:avLst/>
+          </a:prstGeom>
+          <a:noFill/>
+          <a:ln/>
+        </p:spPr>
+        <p:txBody>
+          <a:bodyPr wrap="square" lIns="0" tIns="0" rIns="0" bIns="0" rtlCol="0" anchor="ctr"/>
+          <a:lstStyle/>
+          <a:p>
+            <a:pPr marL="0" indent="0" algn="ctr">
+              <a:buNone/>
+            </a:pPr>
+            <a:r>
+              <a:rPr lang="en-US" sz="1400" b="1" dirty="0">
+                <a:solidFill>
+                  <a:srgbClr val="FFFFFF"/>
+                </a:solidFill>
+                <a:latin typeface="Segoe UI" pitchFamily="34" charset="0"/>
+                <a:ea typeface="Segoe UI" pitchFamily="34" charset="-122"/>
+                <a:cs typeface="Segoe UI" pitchFamily="34" charset="-120"/>
+              </a:rPr>
+              <a:t>3</a:t>
+            </a:r>
+            <a:endParaRPr lang="en-US" sz="1400" dirty="0"/>
+          </a:p>
+        </p:txBody>
+      </p:sp>
+      <p:sp>
+        <p:nvSpPr>
+          <p:cNvPr id="26" name="Text 20"/>
+          <p:cNvSpPr/>
+          <p:nvPr/>
+        </p:nvSpPr>
+        <p:spPr>
+          <a:xfrm>
+            <a:off x="1325880" y="4114800"/>
+            <a:ext cx="4160520" cy="749808"/>
+          </a:xfrm>
+          <a:prstGeom prst="rect">
+            <a:avLst/>
+          </a:prstGeom>
+          <a:noFill/>
+          <a:ln/>
+        </p:spPr>
+        <p:txBody>
+          <a:bodyPr wrap="square" lIns="0" tIns="0" rIns="0" bIns="0" rtlCol="0" anchor="ctr"/>
+          <a:lstStyle/>
+          <a:p>
+            <a:pPr marL="0" indent="0">
+              <a:buNone/>
+            </a:pPr>
+            <a:r>
+              <a:rPr lang="en-US" sz="1450" b="1" dirty="0">
+                <a:solidFill>
+                  <a:srgbClr val="0F172A"/>
+                </a:solidFill>
+                <a:latin typeface="Segoe UI" pitchFamily="34" charset="0"/>
+                <a:ea typeface="Segoe UI" pitchFamily="34" charset="-122"/>
+                <a:cs typeface="Segoe UI" pitchFamily="34" charset="-120"/>
+              </a:rPr>
+              <a:t>Chưa có nguồn lực CNTT chuyên trách</a:t>
+            </a:r>
+            <a:endParaRPr lang="en-US" sz="1450" dirty="0"/>
+          </a:p>
+        </p:txBody>
+      </p:sp>
+      <p:pic>
+        <p:nvPicPr>
+          <p:cNvPr id="27" name="Image 4" descr="preencoded.png"/>
+          <p:cNvPicPr>
+            <a:picLocks noChangeAspect="1"/>
+          </p:cNvPicPr>
+          <p:nvPr/>
+        </p:nvPicPr>
+        <p:blipFill>
+          <a:blip r:embed="rId3"/>
+          <a:stretch>
+            <a:fillRect/>
+          </a:stretch>
+        </p:blipFill>
+        <p:spPr>
+          <a:xfrm>
+            <a:off x="5797296" y="4361688"/>
+            <a:ext cx="256032" cy="256032"/>
+          </a:xfrm>
+          <a:prstGeom prst="rect">
+            <a:avLst/>
+          </a:prstGeom>
+        </p:spPr>
+      </p:pic>
+      <p:sp>
+        <p:nvSpPr>
+          <p:cNvPr id="28" name="Shape 21"/>
+          <p:cNvSpPr/>
+          <p:nvPr/>
+        </p:nvSpPr>
+        <p:spPr>
+          <a:xfrm>
+            <a:off x="6309360" y="4114800"/>
+            <a:ext cx="5212080" cy="749808"/>
+          </a:xfrm>
+          <a:prstGeom prst="roundRect">
+            <a:avLst>
+              <a:gd name="adj" fmla="val 9756"/>
+            </a:avLst>
+          </a:prstGeom>
+          <a:solidFill>
+            <a:srgbClr val="EAF6F5"/>
+          </a:solidFill>
+          <a:ln w="12700">
+            <a:solidFill>
+              <a:srgbClr val="0B7A75"/>
+            </a:solidFill>
+            <a:prstDash val="solid"/>
+          </a:ln>
+        </p:spPr>
+      </p:sp>
+      <p:pic>
+        <p:nvPicPr>
+          <p:cNvPr id="29" name="Image 5" descr="preencoded.png"/>
+          <p:cNvPicPr>
+            <a:picLocks noChangeAspect="1"/>
+          </p:cNvPicPr>
+          <p:nvPr/>
+        </p:nvPicPr>
+        <p:blipFill>
+          <a:blip r:embed="rId4"/>
+          <a:stretch>
+            <a:fillRect/>
+          </a:stretch>
+        </p:blipFill>
+        <p:spPr>
+          <a:xfrm>
+            <a:off x="6510528" y="4361688"/>
+            <a:ext cx="256032" cy="256032"/>
+          </a:xfrm>
+          <a:prstGeom prst="rect">
+            <a:avLst/>
+          </a:prstGeom>
+        </p:spPr>
+      </p:pic>
+      <p:sp>
+        <p:nvSpPr>
+          <p:cNvPr id="30" name="Text 22"/>
+          <p:cNvSpPr/>
+          <p:nvPr/>
+        </p:nvSpPr>
+        <p:spPr>
+          <a:xfrm>
+            <a:off x="6876288" y="4114800"/>
+            <a:ext cx="4462272" cy="749808"/>
+          </a:xfrm>
+          <a:prstGeom prst="rect">
+            <a:avLst/>
+          </a:prstGeom>
+          <a:noFill/>
+          <a:ln/>
+        </p:spPr>
+        <p:txBody>
+          <a:bodyPr wrap="square" lIns="0" tIns="0" rIns="0" bIns="0" rtlCol="0" anchor="ctr"/>
+          <a:lstStyle/>
+          <a:p>
+            <a:pPr marL="0" indent="0">
+              <a:buNone/>
+            </a:pPr>
+            <a:r>
+              <a:rPr lang="en-US" sz="1400" dirty="0">
+                <a:solidFill>
+                  <a:srgbClr val="0F172A"/>
+                </a:solidFill>
+                <a:latin typeface="Segoe UI" pitchFamily="34" charset="0"/>
+                <a:ea typeface="Segoe UI" pitchFamily="34" charset="-122"/>
+                <a:cs typeface="Segoe UI" pitchFamily="34" charset="-120"/>
+              </a:rPr>
+              <a:t>Đề nghị bố trí, phối hợp cán bộ CNTT để tiếp nhận, duy trì và nâng cấp hệ thống lâu dài.</a:t>
+            </a:r>
+            <a:endParaRPr lang="en-US" sz="1400" dirty="0"/>
+          </a:p>
+        </p:txBody>
+      </p:sp>
+      <p:sp>
+        <p:nvSpPr>
+          <p:cNvPr id="31" name="Shape 23"/>
+          <p:cNvSpPr/>
+          <p:nvPr/>
+        </p:nvSpPr>
+        <p:spPr>
+          <a:xfrm>
+            <a:off x="640080" y="4974336"/>
+            <a:ext cx="5029200" cy="749808"/>
+          </a:xfrm>
+          <a:prstGeom prst="roundRect">
+            <a:avLst>
+              <a:gd name="adj" fmla="val 9756"/>
+            </a:avLst>
+          </a:prstGeom>
+          <a:solidFill>
+            <a:srgbClr val="F8FAFC"/>
+          </a:solidFill>
+          <a:ln w="12700">
+            <a:solidFill>
+              <a:srgbClr val="E2E8F0"/>
+            </a:solidFill>
+            <a:prstDash val="solid"/>
+          </a:ln>
+        </p:spPr>
+      </p:sp>
+      <p:sp>
+        <p:nvSpPr>
+          <p:cNvPr id="32" name="Shape 24"/>
+          <p:cNvSpPr/>
+          <p:nvPr/>
+        </p:nvSpPr>
+        <p:spPr>
+          <a:xfrm>
+            <a:off x="841248" y="5175504"/>
+            <a:ext cx="347472" cy="347472"/>
+          </a:xfrm>
+          <a:prstGeom prst="ellipse">
+            <a:avLst/>
+          </a:prstGeom>
+          <a:solidFill>
+            <a:srgbClr val="334155"/>
+          </a:solidFill>
+          <a:ln/>
+        </p:spPr>
+      </p:sp>
+      <p:sp>
+        <p:nvSpPr>
+          <p:cNvPr id="33" name="Text 25"/>
+          <p:cNvSpPr/>
+          <p:nvPr/>
+        </p:nvSpPr>
+        <p:spPr>
+          <a:xfrm>
+            <a:off x="841248" y="5175504"/>
+            <a:ext cx="347472" cy="347472"/>
+          </a:xfrm>
+          <a:prstGeom prst="rect">
+            <a:avLst/>
+          </a:prstGeom>
+          <a:noFill/>
+          <a:ln/>
+        </p:spPr>
+        <p:txBody>
+          <a:bodyPr wrap="square" lIns="0" tIns="0" rIns="0" bIns="0" rtlCol="0" anchor="ctr"/>
+          <a:lstStyle/>
+          <a:p>
+            <a:pPr marL="0" indent="0" algn="ctr">
+              <a:buNone/>
+            </a:pPr>
+            <a:r>
+              <a:rPr lang="en-US" sz="1400" b="1" dirty="0">
+                <a:solidFill>
+                  <a:srgbClr val="FFFFFF"/>
+                </a:solidFill>
+                <a:latin typeface="Segoe UI" pitchFamily="34" charset="0"/>
+                <a:ea typeface="Segoe UI" pitchFamily="34" charset="-122"/>
+                <a:cs typeface="Segoe UI" pitchFamily="34" charset="-120"/>
+              </a:rPr>
+              <a:t>4</a:t>
+            </a:r>
+            <a:endParaRPr lang="en-US" sz="1400" dirty="0"/>
+          </a:p>
+        </p:txBody>
+      </p:sp>
+      <p:sp>
+        <p:nvSpPr>
+          <p:cNvPr id="34" name="Text 26"/>
+          <p:cNvSpPr/>
+          <p:nvPr/>
+        </p:nvSpPr>
+        <p:spPr>
+          <a:xfrm>
+            <a:off x="1325880" y="4974336"/>
+            <a:ext cx="4160520" cy="749808"/>
+          </a:xfrm>
+          <a:prstGeom prst="rect">
+            <a:avLst/>
+          </a:prstGeom>
+          <a:noFill/>
+          <a:ln/>
+        </p:spPr>
+        <p:txBody>
+          <a:bodyPr wrap="square" lIns="0" tIns="0" rIns="0" bIns="0" rtlCol="0" anchor="ctr"/>
+          <a:lstStyle/>
+          <a:p>
+            <a:pPr marL="0" indent="0">
+              <a:buNone/>
+            </a:pPr>
+            <a:r>
+              <a:rPr lang="en-US" sz="1450" b="1" dirty="0">
+                <a:solidFill>
+                  <a:srgbClr val="0F172A"/>
+                </a:solidFill>
+                <a:latin typeface="Segoe UI" pitchFamily="34" charset="0"/>
+                <a:ea typeface="Segoe UI" pitchFamily="34" charset="-122"/>
+                <a:cs typeface="Segoe UI" pitchFamily="34" charset="-120"/>
+              </a:rPr>
+              <a:t>Chưa đồng thiết kế đầy đủ với cán bộ tiếp dân</a:t>
+            </a:r>
+            <a:endParaRPr lang="en-US" sz="1450" dirty="0"/>
+          </a:p>
+        </p:txBody>
+      </p:sp>
+      <p:pic>
+        <p:nvPicPr>
+          <p:cNvPr id="35" name="Image 6" descr="preencoded.png"/>
+          <p:cNvPicPr>
+            <a:picLocks noChangeAspect="1"/>
+          </p:cNvPicPr>
+          <p:nvPr/>
+        </p:nvPicPr>
+        <p:blipFill>
+          <a:blip r:embed="rId3"/>
+          <a:stretch>
+            <a:fillRect/>
+          </a:stretch>
+        </p:blipFill>
+        <p:spPr>
+          <a:xfrm>
+            <a:off x="5797296" y="5221224"/>
+            <a:ext cx="256032" cy="256032"/>
+          </a:xfrm>
+          <a:prstGeom prst="rect">
+            <a:avLst/>
+          </a:prstGeom>
+        </p:spPr>
+      </p:pic>
+      <p:sp>
+        <p:nvSpPr>
+          <p:cNvPr id="36" name="Shape 27"/>
+          <p:cNvSpPr/>
+          <p:nvPr/>
+        </p:nvSpPr>
+        <p:spPr>
+          <a:xfrm>
+            <a:off x="6309360" y="4974336"/>
+            <a:ext cx="5212080" cy="749808"/>
+          </a:xfrm>
+          <a:prstGeom prst="roundRect">
+            <a:avLst>
+              <a:gd name="adj" fmla="val 9756"/>
+            </a:avLst>
+          </a:prstGeom>
+          <a:solidFill>
+            <a:srgbClr val="EAF6F5"/>
+          </a:solidFill>
+          <a:ln w="12700">
+            <a:solidFill>
+              <a:srgbClr val="0B7A75"/>
+            </a:solidFill>
+            <a:prstDash val="solid"/>
+          </a:ln>
+        </p:spPr>
+      </p:sp>
+      <p:pic>
+        <p:nvPicPr>
+          <p:cNvPr id="37" name="Image 7" descr="preencoded.png"/>
+          <p:cNvPicPr>
+            <a:picLocks noChangeAspect="1"/>
+          </p:cNvPicPr>
+          <p:nvPr/>
+        </p:nvPicPr>
+        <p:blipFill>
+          <a:blip r:embed="rId4"/>
+          <a:stretch>
+            <a:fillRect/>
+          </a:stretch>
+        </p:blipFill>
+        <p:spPr>
+          <a:xfrm>
+            <a:off x="6510528" y="5221224"/>
+            <a:ext cx="256032" cy="256032"/>
+          </a:xfrm>
+          <a:prstGeom prst="rect">
+            <a:avLst/>
+          </a:prstGeom>
+        </p:spPr>
+      </p:pic>
+      <p:sp>
+        <p:nvSpPr>
+          <p:cNvPr id="38" name="Text 28"/>
+          <p:cNvSpPr/>
+          <p:nvPr/>
+        </p:nvSpPr>
+        <p:spPr>
+          <a:xfrm>
+            <a:off x="6876288" y="4974336"/>
+            <a:ext cx="4462272" cy="749808"/>
+          </a:xfrm>
+          <a:prstGeom prst="rect">
+            <a:avLst/>
+          </a:prstGeom>
+          <a:noFill/>
+          <a:ln/>
+        </p:spPr>
+        <p:txBody>
+          <a:bodyPr wrap="square" lIns="0" tIns="0" rIns="0" bIns="0" rtlCol="0" anchor="ctr"/>
+          <a:lstStyle/>
+          <a:p>
+            <a:pPr marL="0" indent="0">
+              <a:buNone/>
+            </a:pPr>
+            <a:r>
+              <a:rPr lang="en-US" sz="1400" dirty="0">
+                <a:solidFill>
+                  <a:srgbClr val="0F172A"/>
+                </a:solidFill>
+                <a:latin typeface="Segoe UI" pitchFamily="34" charset="0"/>
+                <a:ea typeface="Segoe UI" pitchFamily="34" charset="-122"/>
+                <a:cs typeface="Segoe UI" pitchFamily="34" charset="-120"/>
+              </a:rPr>
+              <a:t>Mời cán bộ trực tiếp tiếp công dân bổ sung tình huống thực tế và các câu hỏi thường gặp tại quầy.</a:t>
+            </a:r>
+            <a:endParaRPr lang="en-US" sz="1400" dirty="0"/>
+          </a:p>
+        </p:txBody>
+      </p:sp>
+      <p:sp>
+        <p:nvSpPr>
+          <p:cNvPr id="39" name="Shape 29"/>
+          <p:cNvSpPr/>
+          <p:nvPr/>
+        </p:nvSpPr>
+        <p:spPr>
+          <a:xfrm>
+            <a:off x="640080" y="5833872"/>
+            <a:ext cx="5029200" cy="749808"/>
+          </a:xfrm>
+          <a:prstGeom prst="roundRect">
+            <a:avLst>
+              <a:gd name="adj" fmla="val 9756"/>
+            </a:avLst>
+          </a:prstGeom>
+          <a:solidFill>
+            <a:srgbClr val="F8FAFC"/>
+          </a:solidFill>
+          <a:ln w="12700">
+            <a:solidFill>
+              <a:srgbClr val="E2E8F0"/>
+            </a:solidFill>
+            <a:prstDash val="solid"/>
+          </a:ln>
+        </p:spPr>
+      </p:sp>
+      <p:sp>
+        <p:nvSpPr>
+          <p:cNvPr id="40" name="Shape 30"/>
+          <p:cNvSpPr/>
+          <p:nvPr/>
+        </p:nvSpPr>
+        <p:spPr>
+          <a:xfrm>
+            <a:off x="841248" y="6035040"/>
+            <a:ext cx="347472" cy="347472"/>
+          </a:xfrm>
+          <a:prstGeom prst="ellipse">
+            <a:avLst/>
+          </a:prstGeom>
+          <a:solidFill>
+            <a:srgbClr val="334155"/>
+          </a:solidFill>
+          <a:ln/>
+        </p:spPr>
+      </p:sp>
+      <p:sp>
+        <p:nvSpPr>
+          <p:cNvPr id="41" name="Text 31"/>
+          <p:cNvSpPr/>
+          <p:nvPr/>
+        </p:nvSpPr>
+        <p:spPr>
+          <a:xfrm>
+            <a:off x="841248" y="6035040"/>
+            <a:ext cx="347472" cy="347472"/>
+          </a:xfrm>
+          <a:prstGeom prst="rect">
+            <a:avLst/>
+          </a:prstGeom>
+          <a:noFill/>
+          <a:ln/>
+        </p:spPr>
+        <p:txBody>
+          <a:bodyPr wrap="square" lIns="0" tIns="0" rIns="0" bIns="0" rtlCol="0" anchor="ctr"/>
+          <a:lstStyle/>
+          <a:p>
+            <a:pPr marL="0" indent="0" algn="ctr">
+              <a:buNone/>
+            </a:pPr>
+            <a:r>
+              <a:rPr lang="en-US" sz="1400" b="1" dirty="0">
+                <a:solidFill>
+                  <a:srgbClr val="FFFFFF"/>
+                </a:solidFill>
+                <a:latin typeface="Segoe UI" pitchFamily="34" charset="0"/>
+                <a:ea typeface="Segoe UI" pitchFamily="34" charset="-122"/>
+                <a:cs typeface="Segoe UI" pitchFamily="34" charset="-120"/>
+              </a:rPr>
+              <a:t>5</a:t>
+            </a:r>
+            <a:endParaRPr lang="en-US" sz="1400" dirty="0"/>
+          </a:p>
+        </p:txBody>
+      </p:sp>
+      <p:sp>
+        <p:nvSpPr>
+          <p:cNvPr id="42" name="Text 32"/>
+          <p:cNvSpPr/>
+          <p:nvPr/>
+        </p:nvSpPr>
+        <p:spPr>
+          <a:xfrm>
+            <a:off x="1325880" y="5833872"/>
+            <a:ext cx="4160520" cy="749808"/>
+          </a:xfrm>
+          <a:prstGeom prst="rect">
+            <a:avLst/>
+          </a:prstGeom>
+          <a:noFill/>
+          <a:ln/>
+        </p:spPr>
+        <p:txBody>
+          <a:bodyPr wrap="square" lIns="0" tIns="0" rIns="0" bIns="0" rtlCol="0" anchor="ctr"/>
+          <a:lstStyle/>
+          <a:p>
+            <a:pPr marL="0" indent="0">
+              <a:buNone/>
+            </a:pPr>
+            <a:r>
+              <a:rPr lang="en-US" sz="1450" b="1" dirty="0">
+                <a:solidFill>
+                  <a:srgbClr val="0F172A"/>
+                </a:solidFill>
+                <a:latin typeface="Segoe UI" pitchFamily="34" charset="0"/>
+                <a:ea typeface="Segoe UI" pitchFamily="34" charset="-122"/>
+                <a:cs typeface="Segoe UI" pitchFamily="34" charset="-120"/>
+              </a:rPr>
+              <a:t>Chưa được kiểm thử trên diện rộng</a:t>
+            </a:r>
+            <a:endParaRPr lang="en-US" sz="1450" dirty="0"/>
+          </a:p>
+        </p:txBody>
+      </p:sp>
+      <p:pic>
+        <p:nvPicPr>
+          <p:cNvPr id="43" name="Image 8" descr="preencoded.png"/>
+          <p:cNvPicPr>
+            <a:picLocks noChangeAspect="1"/>
+          </p:cNvPicPr>
+          <p:nvPr/>
+        </p:nvPicPr>
+        <p:blipFill>
+          <a:blip r:embed="rId3"/>
+          <a:stretch>
+            <a:fillRect/>
+          </a:stretch>
+        </p:blipFill>
+        <p:spPr>
+          <a:xfrm>
+            <a:off x="5797296" y="6080760"/>
+            <a:ext cx="256032" cy="256032"/>
+          </a:xfrm>
+          <a:prstGeom prst="rect">
+            <a:avLst/>
+          </a:prstGeom>
+        </p:spPr>
+      </p:pic>
+      <p:sp>
+        <p:nvSpPr>
+          <p:cNvPr id="44" name="Shape 33"/>
+          <p:cNvSpPr/>
+          <p:nvPr/>
+        </p:nvSpPr>
+        <p:spPr>
+          <a:xfrm>
+            <a:off x="6309360" y="5833872"/>
+            <a:ext cx="5212080" cy="749808"/>
+          </a:xfrm>
+          <a:prstGeom prst="roundRect">
+            <a:avLst>
+              <a:gd name="adj" fmla="val 9756"/>
+            </a:avLst>
+          </a:prstGeom>
+          <a:solidFill>
+            <a:srgbClr val="EAF6F5"/>
+          </a:solidFill>
+          <a:ln w="12700">
+            <a:solidFill>
+              <a:srgbClr val="0B7A75"/>
+            </a:solidFill>
+            <a:prstDash val="solid"/>
+          </a:ln>
+        </p:spPr>
+      </p:sp>
+      <p:pic>
+        <p:nvPicPr>
+          <p:cNvPr id="45" name="Image 9" descr="preencoded.png"/>
+          <p:cNvPicPr>
+            <a:picLocks noChangeAspect="1"/>
+          </p:cNvPicPr>
+          <p:nvPr/>
+        </p:nvPicPr>
+        <p:blipFill>
+          <a:blip r:embed="rId4"/>
+          <a:stretch>
+            <a:fillRect/>
+          </a:stretch>
+        </p:blipFill>
+        <p:spPr>
+          <a:xfrm>
+            <a:off x="6510528" y="6080760"/>
+            <a:ext cx="256032" cy="256032"/>
+          </a:xfrm>
+          <a:prstGeom prst="rect">
+            <a:avLst/>
+          </a:prstGeom>
+        </p:spPr>
+      </p:pic>
+      <p:sp>
+        <p:nvSpPr>
+          <p:cNvPr id="46" name="Text 34"/>
+          <p:cNvSpPr/>
+          <p:nvPr/>
+        </p:nvSpPr>
+        <p:spPr>
+          <a:xfrm>
+            <a:off x="6876288" y="5833872"/>
+            <a:ext cx="4462272" cy="749808"/>
+          </a:xfrm>
+          <a:prstGeom prst="rect">
+            <a:avLst/>
+          </a:prstGeom>
+          <a:noFill/>
+          <a:ln/>
+        </p:spPr>
+        <p:txBody>
+          <a:bodyPr wrap="square" lIns="0" tIns="0" rIns="0" bIns="0" rtlCol="0" anchor="ctr"/>
+          <a:lstStyle/>
+          <a:p>
+            <a:pPr marL="0" indent="0">
+              <a:buNone/>
+            </a:pPr>
+            <a:r>
+              <a:rPr lang="en-US" sz="1400" dirty="0">
+                <a:solidFill>
+                  <a:srgbClr val="0F172A"/>
+                </a:solidFill>
+                <a:latin typeface="Segoe UI" pitchFamily="34" charset="0"/>
+                <a:ea typeface="Segoe UI" pitchFamily="34" charset="-122"/>
+                <a:cs typeface="Segoe UI" pitchFamily="34" charset="-120"/>
+              </a:rPr>
+              <a:t>Triển khai theo giai đoạn: thí điểm phạm vi hẹp → đánh giá kết quả → mới nhân rộng toàn tỉnh.</a:t>
+            </a:r>
+            <a:endParaRPr lang="en-US" sz="1400" dirty="0"/>
           </a:p>
         </p:txBody>
       </p:sp>
@@ -2452,20 +3357,30 @@
   <p:clrMapOvr>
     <a:masterClrMapping/>
   </p:clrMapOvr>
-  <p:transition xmlns:p14="http://schemas.microsoft.com/office/powerpoint/2010/main" spd="med" p14:dur="450">
-    <p:fade/>
-  </p:transition>
+  <mc:AlternateContent xmlns:mc="http://schemas.openxmlformats.org/markup-compatibility/2006">
+    <mc:Choice xmlns:p14="http://schemas.microsoft.com/office/powerpoint/2010/main" Requires="p14">
+      <p:transition p14:dur="450">
+        <p:fade/>
+      </p:transition>
+    </mc:Choice>
+    <mc:Fallback>
+      <p:transition>
+        <p:fade/>
+      </p:transition>
+    </mc:Fallback>
+  </mc:AlternateContent>
 </p:sld>
 </file>
 
-<file path=ppt/slides/slide3.xml><?xml version="1.0" encoding="utf-8"?>
+<file path=ppt/slides/slide11.xml><?xml version="1.0" encoding="utf-8"?>
 <p:sld xmlns:a="http://schemas.openxmlformats.org/drawingml/2006/main" xmlns:r="http://schemas.openxmlformats.org/officeDocument/2006/relationships" xmlns:p="http://schemas.openxmlformats.org/presentationml/2006/main">
-  <p:cSld name="Slide 3">
+  <p:cSld name="Slide 11">
     <p:bg>
       <p:bgPr>
         <a:solidFill>
-          <a:srgbClr val="FFFFFF"/>
+          <a:srgbClr val="1E3A8A"/>
         </a:solidFill>
+        <a:effectLst/>
       </p:bgPr>
     </p:bg>
     <p:spTree>
@@ -2482,92 +3397,280 @@
           <a:chExt cx="0" cy="0"/>
         </a:xfrm>
       </p:grpSpPr>
-      <p:sp>
-        <p:nvSpPr>
-          <p:cNvPr id="2" name="Shape 0"/>
-          <p:cNvSpPr/>
-          <p:nvPr/>
-        </p:nvSpPr>
-        <p:spPr>
-          <a:xfrm>
-            <a:off x="2286000" y="2286000"/>
-            <a:ext cx="91440" cy="1828800"/>
-          </a:xfrm>
-          <a:prstGeom prst="rect">
-            <a:avLst/>
+      <p:pic>
+        <p:nvPicPr>
+          <p:cNvPr id="2" name="Image 0" descr="preencoded.png"/>
+          <p:cNvPicPr>
+            <a:picLocks noChangeAspect="1"/>
+          </p:cNvPicPr>
+          <p:nvPr/>
+        </p:nvPicPr>
+        <p:blipFill>
+          <a:blip r:embed="rId3">
+            <a:alphaModFix amt="12000"/>
+          </a:blip>
+          <a:stretch>
+            <a:fillRect/>
+          </a:stretch>
+        </p:blipFill>
+        <p:spPr>
+          <a:xfrm>
+            <a:off x="9052560" y="1097280"/>
+            <a:ext cx="4389120" cy="4389120"/>
+          </a:xfrm>
+          <a:prstGeom prst="rect">
+            <a:avLst/>
+          </a:prstGeom>
+        </p:spPr>
+      </p:pic>
+      <p:sp>
+        <p:nvSpPr>
+          <p:cNvPr id="3" name="Text 0"/>
+          <p:cNvSpPr/>
+          <p:nvPr/>
+        </p:nvSpPr>
+        <p:spPr>
+          <a:xfrm>
+            <a:off x="640080" y="548640"/>
+            <a:ext cx="9144000" cy="365760"/>
+          </a:xfrm>
+          <a:prstGeom prst="rect">
+            <a:avLst/>
+          </a:prstGeom>
+          <a:noFill/>
+          <a:ln/>
+        </p:spPr>
+        <p:txBody>
+          <a:bodyPr wrap="square" lIns="0" tIns="0" rIns="0" bIns="0" rtlCol="0" anchor="ctr"/>
+          <a:lstStyle/>
+          <a:p>
+            <a:pPr marL="0" indent="0">
+              <a:buNone/>
+            </a:pPr>
+            <a:r>
+              <a:rPr lang="en-US" sz="1400" b="1" kern="0" spc="200" dirty="0">
+                <a:solidFill>
+                  <a:srgbClr val="DBEAFE"/>
+                </a:solidFill>
+                <a:latin typeface="Segoe UI" pitchFamily="34" charset="0"/>
+                <a:ea typeface="Segoe UI" pitchFamily="34" charset="-122"/>
+                <a:cs typeface="Segoe UI" pitchFamily="34" charset="-120"/>
+              </a:rPr>
+              <a:t>TẦM NHÌN THIẾT THỰC</a:t>
+            </a:r>
+            <a:endParaRPr lang="en-US" sz="1400" dirty="0"/>
+          </a:p>
+        </p:txBody>
+      </p:sp>
+      <p:sp>
+        <p:nvSpPr>
+          <p:cNvPr id="4" name="Text 1"/>
+          <p:cNvSpPr/>
+          <p:nvPr/>
+        </p:nvSpPr>
+        <p:spPr>
+          <a:xfrm>
+            <a:off x="640080" y="896112"/>
+            <a:ext cx="10515600" cy="731520"/>
+          </a:xfrm>
+          <a:prstGeom prst="rect">
+            <a:avLst/>
+          </a:prstGeom>
+          <a:noFill/>
+          <a:ln/>
+        </p:spPr>
+        <p:txBody>
+          <a:bodyPr wrap="square" lIns="0" tIns="0" rIns="0" bIns="0" rtlCol="0" anchor="ctr"/>
+          <a:lstStyle/>
+          <a:p>
+            <a:pPr marL="0" indent="0">
+              <a:buNone/>
+            </a:pPr>
+            <a:r>
+              <a:rPr lang="en-US" sz="3000" b="1" kern="0" spc="-50" dirty="0">
+                <a:solidFill>
+                  <a:srgbClr val="FFFFFF"/>
+                </a:solidFill>
+                <a:latin typeface="Segoe UI" pitchFamily="34" charset="0"/>
+                <a:ea typeface="Segoe UI" pitchFamily="34" charset="-122"/>
+                <a:cs typeface="Segoe UI" pitchFamily="34" charset="-120"/>
+              </a:rPr>
+              <a:t>Một chính quyền số gần dân</a:t>
+            </a:r>
+            <a:endParaRPr lang="en-US" sz="3000" dirty="0"/>
+          </a:p>
+        </p:txBody>
+      </p:sp>
+      <p:pic>
+        <p:nvPicPr>
+          <p:cNvPr id="5" name="Image 1" descr="preencoded.png"/>
+          <p:cNvPicPr>
+            <a:picLocks noChangeAspect="1"/>
+          </p:cNvPicPr>
+          <p:nvPr/>
+        </p:nvPicPr>
+        <p:blipFill>
+          <a:blip r:embed="rId4"/>
+          <a:stretch>
+            <a:fillRect/>
+          </a:stretch>
+        </p:blipFill>
+        <p:spPr>
+          <a:xfrm>
+            <a:off x="640080" y="1920240"/>
+            <a:ext cx="411480" cy="411480"/>
+          </a:xfrm>
+          <a:prstGeom prst="rect">
+            <a:avLst/>
+          </a:prstGeom>
+        </p:spPr>
+      </p:pic>
+      <p:sp>
+        <p:nvSpPr>
+          <p:cNvPr id="6" name="Text 2"/>
+          <p:cNvSpPr/>
+          <p:nvPr/>
+        </p:nvSpPr>
+        <p:spPr>
+          <a:xfrm>
+            <a:off x="1234440" y="1874520"/>
+            <a:ext cx="8046720" cy="548640"/>
+          </a:xfrm>
+          <a:prstGeom prst="rect">
+            <a:avLst/>
+          </a:prstGeom>
+          <a:noFill/>
+          <a:ln/>
+        </p:spPr>
+        <p:txBody>
+          <a:bodyPr wrap="square" lIns="0" tIns="0" rIns="0" bIns="0" rtlCol="0" anchor="ctr"/>
+          <a:lstStyle/>
+          <a:p>
+            <a:pPr marL="0" indent="0">
+              <a:buNone/>
+            </a:pPr>
+            <a:r>
+              <a:rPr lang="en-US" sz="1700" dirty="0">
+                <a:solidFill>
+                  <a:srgbClr val="EFF6FF"/>
+                </a:solidFill>
+                <a:latin typeface="Segoe UI" pitchFamily="34" charset="0"/>
+                <a:ea typeface="Segoe UI" pitchFamily="34" charset="-122"/>
+                <a:cs typeface="Segoe UI" pitchFamily="34" charset="-120"/>
+              </a:rPr>
+              <a:t>Hoàn thiện hệ sinh thái dịch vụ công thông minh.</a:t>
+            </a:r>
+            <a:endParaRPr lang="en-US" sz="1700" dirty="0"/>
+          </a:p>
+        </p:txBody>
+      </p:sp>
+      <p:pic>
+        <p:nvPicPr>
+          <p:cNvPr id="7" name="Image 2" descr="preencoded.png"/>
+          <p:cNvPicPr>
+            <a:picLocks noChangeAspect="1"/>
+          </p:cNvPicPr>
+          <p:nvPr/>
+        </p:nvPicPr>
+        <p:blipFill>
+          <a:blip r:embed="rId4"/>
+          <a:stretch>
+            <a:fillRect/>
+          </a:stretch>
+        </p:blipFill>
+        <p:spPr>
+          <a:xfrm>
+            <a:off x="640080" y="2697480"/>
+            <a:ext cx="411480" cy="411480"/>
+          </a:xfrm>
+          <a:prstGeom prst="rect">
+            <a:avLst/>
+          </a:prstGeom>
+        </p:spPr>
+      </p:pic>
+      <p:sp>
+        <p:nvSpPr>
+          <p:cNvPr id="8" name="Text 3"/>
+          <p:cNvSpPr/>
+          <p:nvPr/>
+        </p:nvSpPr>
+        <p:spPr>
+          <a:xfrm>
+            <a:off x="1234440" y="2651760"/>
+            <a:ext cx="8046720" cy="548640"/>
+          </a:xfrm>
+          <a:prstGeom prst="rect">
+            <a:avLst/>
+          </a:prstGeom>
+          <a:noFill/>
+          <a:ln/>
+        </p:spPr>
+        <p:txBody>
+          <a:bodyPr wrap="square" lIns="0" tIns="0" rIns="0" bIns="0" rtlCol="0" anchor="ctr"/>
+          <a:lstStyle/>
+          <a:p>
+            <a:pPr marL="0" indent="0">
+              <a:buNone/>
+            </a:pPr>
+            <a:r>
+              <a:rPr lang="en-US" sz="1700" dirty="0">
+                <a:solidFill>
+                  <a:srgbClr val="EFF6FF"/>
+                </a:solidFill>
+                <a:latin typeface="Segoe UI" pitchFamily="34" charset="0"/>
+                <a:ea typeface="Segoe UI" pitchFamily="34" charset="-122"/>
+                <a:cs typeface="Segoe UI" pitchFamily="34" charset="-120"/>
+              </a:rPr>
+              <a:t>Xây dựng hình ảnh Công an Phú Thọ hiện đại, tận tụy.</a:t>
+            </a:r>
+            <a:endParaRPr lang="en-US" sz="1700" dirty="0"/>
+          </a:p>
+        </p:txBody>
+      </p:sp>
+      <p:sp>
+        <p:nvSpPr>
+          <p:cNvPr id="9" name="Shape 4"/>
+          <p:cNvSpPr/>
+          <p:nvPr/>
+        </p:nvSpPr>
+        <p:spPr>
+          <a:xfrm>
+            <a:off x="640080" y="4315968"/>
+            <a:ext cx="10881360" cy="1783080"/>
+          </a:xfrm>
+          <a:prstGeom prst="roundRect">
+            <a:avLst>
+              <a:gd name="adj" fmla="val 6154"/>
+            </a:avLst>
           </a:prstGeom>
           <a:solidFill>
-            <a:srgbClr val="1D4ED8"/>
+            <a:srgbClr val="16306E"/>
           </a:solidFill>
-          <a:ln/>
-        </p:spPr>
-      </p:sp>
-      <p:sp>
-        <p:nvSpPr>
-          <p:cNvPr id="3" name="Text 1"/>
-          <p:cNvSpPr/>
-          <p:nvPr/>
-        </p:nvSpPr>
-        <p:spPr>
-          <a:xfrm>
-            <a:off x="2743200" y="2286000"/>
-            <a:ext cx="8229600" cy="1371600"/>
-          </a:xfrm>
-          <a:prstGeom prst="rect">
-            <a:avLst/>
-          </a:prstGeom>
-          <a:noFill/>
-          <a:ln/>
-        </p:spPr>
-        <p:txBody>
-          <a:bodyPr wrap="square" lIns="0" tIns="0" rIns="0" bIns="0" rtlCol="0" anchor="t"/>
-          <a:lstStyle/>
-          <a:p>
-            <a:pPr indent="0" marL="0">
-              <a:buNone/>
-            </a:pPr>
-            <a:r>
-              <a:rPr lang="en-US" sz="3200" i="1" dirty="0">
-                <a:solidFill>
-                  <a:srgbClr val="0F172A"/>
-                </a:solidFill>
-                <a:latin typeface="Segoe UI" pitchFamily="34" charset="0"/>
-                <a:ea typeface="Segoe UI" pitchFamily="34" charset="-122"/>
-                <a:cs typeface="Segoe UI" pitchFamily="34" charset="-120"/>
-              </a:rPr>
-              <a:t>"Giá như có ai đó hướng dẫn chính xác</a:t>
-            </a:r>
-            <a:endParaRPr lang="en-US" sz="3200" dirty="0"/>
-          </a:p>
-          <a:p>
-            <a:pPr indent="0" marL="0">
-              <a:buNone/>
-            </a:pPr>
-            <a:r>
-              <a:rPr lang="en-US" sz="3200" i="1" dirty="0">
-                <a:solidFill>
-                  <a:srgbClr val="0F172A"/>
-                </a:solidFill>
-                <a:latin typeface="Segoe UI" pitchFamily="34" charset="0"/>
-                <a:ea typeface="Segoe UI" pitchFamily="34" charset="-122"/>
-                <a:cs typeface="Segoe UI" pitchFamily="34" charset="-120"/>
-              </a:rPr>
-              <a:t>trước khi tôi đến làm thủ tục thì tốt biết mấy."</a:t>
-            </a:r>
-            <a:endParaRPr lang="en-US" sz="3200" dirty="0"/>
-          </a:p>
-        </p:txBody>
-      </p:sp>
-      <p:sp>
-        <p:nvSpPr>
-          <p:cNvPr id="4" name="Text 2"/>
-          <p:cNvSpPr/>
-          <p:nvPr/>
-        </p:nvSpPr>
-        <p:spPr>
-          <a:xfrm>
-            <a:off x="2743200" y="3840480"/>
-            <a:ext cx="8229600" cy="457200"/>
+          <a:ln w="16510">
+            <a:solidFill>
+              <a:srgbClr val="0B7A75"/>
+            </a:solidFill>
+            <a:prstDash val="solid"/>
+          </a:ln>
+          <a:effectLst>
+            <a:outerShdw blurRad="114300" dist="38100" dir="8100000" algn="bl" rotWithShape="0">
+              <a:srgbClr val="1E40AF">
+                <a:alpha val="20000"/>
+              </a:srgbClr>
+            </a:outerShdw>
+          </a:effectLst>
+        </p:spPr>
+      </p:sp>
+      <p:sp>
+        <p:nvSpPr>
+          <p:cNvPr id="10" name="Text 5"/>
+          <p:cNvSpPr/>
+          <p:nvPr/>
+        </p:nvSpPr>
+        <p:spPr>
+          <a:xfrm>
+            <a:off x="1097280" y="4480560"/>
+            <a:ext cx="10058400" cy="411480"/>
           </a:xfrm>
           <a:prstGeom prst="rect">
             <a:avLst/>
@@ -2579,21 +3682,145 @@
           <a:bodyPr wrap="square" lIns="0" tIns="0" rIns="0" bIns="0" rtlCol="0" anchor="ctr"/>
           <a:lstStyle/>
           <a:p>
-            <a:pPr indent="0" marL="0">
-              <a:buNone/>
-            </a:pPr>
-            <a:r>
-              <a:rPr lang="en-US" sz="2000" b="1" dirty="0">
-                <a:solidFill>
-                  <a:srgbClr val="334155"/>
-                </a:solidFill>
-                <a:latin typeface="Segoe UI" pitchFamily="34" charset="0"/>
-                <a:ea typeface="Segoe UI" pitchFamily="34" charset="-122"/>
-                <a:cs typeface="Segoe UI" pitchFamily="34" charset="-120"/>
-              </a:rPr>
-              <a:t>— Một người dân</a:t>
-            </a:r>
-            <a:endParaRPr lang="en-US" sz="2000" dirty="0"/>
+            <a:pPr marL="0" indent="0">
+              <a:buNone/>
+            </a:pPr>
+            <a:r>
+              <a:rPr lang="en-US" sz="1400" b="1" kern="0" spc="150" dirty="0">
+                <a:solidFill>
+                  <a:srgbClr val="DBEAFE"/>
+                </a:solidFill>
+                <a:latin typeface="Segoe UI" pitchFamily="34" charset="0"/>
+                <a:ea typeface="Segoe UI" pitchFamily="34" charset="-122"/>
+                <a:cs typeface="Segoe UI" pitchFamily="34" charset="-120"/>
+              </a:rPr>
+              <a:t>KÍNH ĐỀ NGHỊ LÃNH ĐẠO CÔNG AN TỈNH</a:t>
+            </a:r>
+            <a:endParaRPr lang="en-US" sz="1400" dirty="0"/>
+          </a:p>
+        </p:txBody>
+      </p:sp>
+      <p:sp>
+        <p:nvSpPr>
+          <p:cNvPr id="11" name="Text 6"/>
+          <p:cNvSpPr/>
+          <p:nvPr/>
+        </p:nvSpPr>
+        <p:spPr>
+          <a:xfrm>
+            <a:off x="1143000" y="4864608"/>
+            <a:ext cx="10058400" cy="1143000"/>
+          </a:xfrm>
+          <a:prstGeom prst="rect">
+            <a:avLst/>
+          </a:prstGeom>
+          <a:noFill/>
+          <a:ln/>
+        </p:spPr>
+        <p:txBody>
+          <a:bodyPr wrap="square" lIns="0" tIns="0" rIns="0" bIns="0" rtlCol="0" anchor="ctr"/>
+          <a:lstStyle/>
+          <a:p>
+            <a:pPr marL="342900" indent="-342900">
+              <a:spcAft>
+                <a:spcPts val="500"/>
+              </a:spcAft>
+              <a:buSzPct val="100000"/>
+              <a:buChar char="•"/>
+            </a:pPr>
+            <a:r>
+              <a:rPr lang="en-US" sz="1700" b="1" dirty="0">
+                <a:solidFill>
+                  <a:srgbClr val="FFFFFF"/>
+                </a:solidFill>
+                <a:latin typeface="Segoe UI" pitchFamily="34" charset="0"/>
+                <a:ea typeface="Segoe UI" pitchFamily="34" charset="-122"/>
+                <a:cs typeface="Segoe UI" pitchFamily="34" charset="-120"/>
+              </a:rPr>
+              <a:t>Cho phép thí điểm với cấu hình kiểm soát đã kiểm thử</a:t>
+            </a:r>
+            <a:endParaRPr lang="en-US" sz="1700" dirty="0"/>
+          </a:p>
+          <a:p>
+            <a:pPr marL="342900" indent="-342900">
+              <a:spcAft>
+                <a:spcPts val="500"/>
+              </a:spcAft>
+              <a:buSzPct val="100000"/>
+              <a:buChar char="•"/>
+            </a:pPr>
+            <a:r>
+              <a:rPr lang="en-US" sz="1700" b="1" dirty="0">
+                <a:solidFill>
+                  <a:srgbClr val="FFFFFF"/>
+                </a:solidFill>
+                <a:latin typeface="Segoe UI" pitchFamily="34" charset="0"/>
+                <a:ea typeface="Segoe UI" pitchFamily="34" charset="-122"/>
+                <a:cs typeface="Segoe UI" pitchFamily="34" charset="-120"/>
+              </a:rPr>
+              <a:t>Giao đơn vị nghiệp vụ thẩm định nội dung kho dữ liệu</a:t>
+            </a:r>
+            <a:endParaRPr lang="en-US" sz="1700" dirty="0"/>
+          </a:p>
+          <a:p>
+            <a:pPr marL="342900" indent="-342900">
+              <a:spcAft>
+                <a:spcPts val="500"/>
+              </a:spcAft>
+              <a:buSzPct val="100000"/>
+              <a:buChar char="•"/>
+            </a:pPr>
+            <a:r>
+              <a:rPr lang="en-US" sz="1700" b="1" dirty="0">
+                <a:solidFill>
+                  <a:srgbClr val="FFFFFF"/>
+                </a:solidFill>
+                <a:latin typeface="Segoe UI" pitchFamily="34" charset="0"/>
+                <a:ea typeface="Segoe UI" pitchFamily="34" charset="-122"/>
+                <a:cs typeface="Segoe UI" pitchFamily="34" charset="-120"/>
+              </a:rPr>
+              <a:t>Bố trí cán bộ CNTT và kinh phí duy trì hạ tầng hằng năm</a:t>
+            </a:r>
+            <a:endParaRPr lang="en-US" sz="1700" dirty="0"/>
+          </a:p>
+        </p:txBody>
+      </p:sp>
+      <p:sp>
+        <p:nvSpPr>
+          <p:cNvPr id="12" name="Text 7"/>
+          <p:cNvSpPr/>
+          <p:nvPr/>
+        </p:nvSpPr>
+        <p:spPr>
+          <a:xfrm>
+            <a:off x="640080" y="6263640"/>
+            <a:ext cx="10881360" cy="365760"/>
+          </a:xfrm>
+          <a:prstGeom prst="rect">
+            <a:avLst/>
+          </a:prstGeom>
+          <a:noFill/>
+          <a:ln/>
+        </p:spPr>
+        <p:txBody>
+          <a:bodyPr wrap="square" lIns="0" tIns="0" rIns="0" bIns="0" rtlCol="0" anchor="ctr"/>
+          <a:lstStyle/>
+          <a:p>
+            <a:pPr marL="0" indent="0" algn="r">
+              <a:buNone/>
+            </a:pPr>
+            <a:r>
+              <a:rPr lang="en-US" sz="1600" i="1" dirty="0">
+                <a:solidFill>
+                  <a:srgbClr val="DBEAFE"/>
+                </a:solidFill>
+                <a:latin typeface="Segoe UI" pitchFamily="34" charset="0"/>
+                <a:ea typeface="Segoe UI" pitchFamily="34" charset="-122"/>
+                <a:cs typeface="Segoe UI" pitchFamily="34" charset="-120"/>
+              </a:rPr>
+              <a:t>Xin trân trọng cảm ơn các đồng chí Lãnh đạo!</a:t>
+            </a:r>
+            <a:endParaRPr lang="en-US" sz="1600" dirty="0"/>
           </a:p>
         </p:txBody>
       </p:sp>
@@ -2602,20 +3829,30 @@
   <p:clrMapOvr>
     <a:masterClrMapping/>
   </p:clrMapOvr>
-  <p:transition xmlns:p14="http://schemas.microsoft.com/office/powerpoint/2010/main" spd="med" p14:dur="450">
-    <p:fade/>
-  </p:transition>
+  <mc:AlternateContent xmlns:mc="http://schemas.openxmlformats.org/markup-compatibility/2006">
+    <mc:Choice xmlns:p14="http://schemas.microsoft.com/office/powerpoint/2010/main" Requires="p14">
+      <p:transition p14:dur="450">
+        <p:fade/>
+      </p:transition>
+    </mc:Choice>
+    <mc:Fallback>
+      <p:transition>
+        <p:fade/>
+      </p:transition>
+    </mc:Fallback>
+  </mc:AlternateContent>
 </p:sld>
 </file>
 
-<file path=ppt/slides/slide4.xml><?xml version="1.0" encoding="utf-8"?>
+<file path=ppt/slides/slide2.xml><?xml version="1.0" encoding="utf-8"?>
 <p:sld xmlns:a="http://schemas.openxmlformats.org/drawingml/2006/main" xmlns:r="http://schemas.openxmlformats.org/officeDocument/2006/relationships" xmlns:p="http://schemas.openxmlformats.org/presentationml/2006/main">
-  <p:cSld name="Slide 4">
+  <p:cSld name="Slide 2">
     <p:bg>
       <p:bgPr>
         <a:solidFill>
-          <a:srgbClr val="FFFFFF"/>
+          <a:srgbClr val="1E3A8A"/>
         </a:solidFill>
+        <a:effectLst/>
       </p:bgPr>
     </p:bg>
     <p:spTree>
@@ -2653,19 +3890,19 @@
           <a:bodyPr wrap="square" lIns="0" tIns="0" rIns="0" bIns="0" rtlCol="0" anchor="ctr"/>
           <a:lstStyle/>
           <a:p>
-            <a:pPr indent="0" marL="0">
-              <a:buNone/>
-            </a:pPr>
-            <a:r>
-              <a:rPr lang="en-US" sz="1300" b="1" spc="200" kern="0" dirty="0">
-                <a:solidFill>
-                  <a:srgbClr val="1D4ED8"/>
-                </a:solidFill>
-                <a:latin typeface="Segoe UI" pitchFamily="34" charset="0"/>
-                <a:ea typeface="Segoe UI" pitchFamily="34" charset="-122"/>
-                <a:cs typeface="Segoe UI" pitchFamily="34" charset="-120"/>
-              </a:rPr>
-              <a:t>CÚ HÍCH GIẢI PHÁP</a:t>
+            <a:pPr marL="0" indent="0">
+              <a:buNone/>
+            </a:pPr>
+            <a:r>
+              <a:rPr lang="en-US" sz="1300" b="1" kern="0" spc="200" dirty="0">
+                <a:solidFill>
+                  <a:srgbClr val="DBEAFE"/>
+                </a:solidFill>
+                <a:latin typeface="Segoe UI" pitchFamily="34" charset="0"/>
+                <a:ea typeface="Segoe UI" pitchFamily="34" charset="-122"/>
+                <a:cs typeface="Segoe UI" pitchFamily="34" charset="-120"/>
+              </a:rPr>
+              <a:t>THỰC TRẠNG</a:t>
             </a:r>
             <a:endParaRPr lang="en-US" sz="1300" dirty="0"/>
           </a:p>
@@ -2692,79 +3929,139 @@
           <a:bodyPr wrap="square" lIns="0" tIns="0" rIns="0" bIns="0" rtlCol="0" anchor="t"/>
           <a:lstStyle/>
           <a:p>
-            <a:pPr indent="0" marL="0">
-              <a:buNone/>
-            </a:pPr>
-            <a:r>
-              <a:rPr lang="en-US" sz="2900" b="1" dirty="0">
-                <a:solidFill>
-                  <a:srgbClr val="0F172A"/>
-                </a:solidFill>
-                <a:latin typeface="Segoe UI" pitchFamily="34" charset="0"/>
-                <a:ea typeface="Segoe UI" pitchFamily="34" charset="-122"/>
-                <a:cs typeface="Segoe UI" pitchFamily="34" charset="-120"/>
-              </a:rPr>
-              <a:t>Bản đồ Công an số</a:t>
-            </a:r>
+            <a:pPr marL="0" indent="0">
+              <a:buNone/>
+            </a:pPr>
             <a:endParaRPr lang="en-US" sz="2900" dirty="0"/>
           </a:p>
         </p:txBody>
       </p:sp>
       <p:sp>
         <p:nvSpPr>
-          <p:cNvPr id="4" name="Shape 2"/>
-          <p:cNvSpPr/>
-          <p:nvPr/>
-        </p:nvSpPr>
-        <p:spPr>
-          <a:xfrm>
-            <a:off x="640080" y="1828800"/>
-            <a:ext cx="5577840" cy="1783080"/>
+          <p:cNvPr id="4" name="Text 2"/>
+          <p:cNvSpPr/>
+          <p:nvPr/>
+        </p:nvSpPr>
+        <p:spPr>
+          <a:xfrm>
+            <a:off x="548640" y="1828800"/>
+            <a:ext cx="5852160" cy="1554480"/>
+          </a:xfrm>
+          <a:prstGeom prst="rect">
+            <a:avLst/>
+          </a:prstGeom>
+          <a:noFill/>
+          <a:ln/>
+        </p:spPr>
+        <p:txBody>
+          <a:bodyPr wrap="square" lIns="0" tIns="0" rIns="0" bIns="0" rtlCol="0" anchor="ctr"/>
+          <a:lstStyle/>
+          <a:p>
+            <a:pPr marL="0" indent="0" algn="ctr">
+              <a:buNone/>
+            </a:pPr>
+            <a:r>
+              <a:rPr lang="en-US" sz="9000" b="1" kern="0" spc="-250" dirty="0">
+                <a:solidFill>
+                  <a:srgbClr val="DBEAFE"/>
+                </a:solidFill>
+                <a:latin typeface="Segoe UI" pitchFamily="34" charset="0"/>
+                <a:ea typeface="Segoe UI" pitchFamily="34" charset="-122"/>
+                <a:cs typeface="Segoe UI" pitchFamily="34" charset="-120"/>
+              </a:rPr>
+              <a:t>Lặp lại</a:t>
+            </a:r>
+            <a:endParaRPr lang="en-US" sz="9000" dirty="0"/>
+          </a:p>
+        </p:txBody>
+      </p:sp>
+      <p:sp>
+        <p:nvSpPr>
+          <p:cNvPr id="5" name="Text 3"/>
+          <p:cNvSpPr/>
+          <p:nvPr/>
+        </p:nvSpPr>
+        <p:spPr>
+          <a:xfrm>
+            <a:off x="640080" y="3383280"/>
+            <a:ext cx="5669280" cy="822960"/>
+          </a:xfrm>
+          <a:prstGeom prst="rect">
+            <a:avLst/>
+          </a:prstGeom>
+          <a:noFill/>
+          <a:ln/>
+        </p:spPr>
+        <p:txBody>
+          <a:bodyPr wrap="square" lIns="0" tIns="0" rIns="0" bIns="0" rtlCol="0" anchor="ctr"/>
+          <a:lstStyle/>
+          <a:p>
+            <a:pPr marL="0" indent="0" algn="ctr">
+              <a:buNone/>
+            </a:pPr>
+            <a:r>
+              <a:rPr lang="en-US" sz="1800" dirty="0">
+                <a:solidFill>
+                  <a:srgbClr val="EFF6FF"/>
+                </a:solidFill>
+                <a:latin typeface="Segoe UI" pitchFamily="34" charset="0"/>
+                <a:ea typeface="Segoe UI" pitchFamily="34" charset="-122"/>
+                <a:cs typeface="Segoe UI" pitchFamily="34" charset="-120"/>
+              </a:rPr>
+              <a:t>Cùng một câu hỏi thủ tục, giải đáp nhiều lần mỗi ngày</a:t>
+            </a:r>
+            <a:endParaRPr lang="en-US" sz="1800" dirty="0"/>
+          </a:p>
+        </p:txBody>
+      </p:sp>
+      <p:sp>
+        <p:nvSpPr>
+          <p:cNvPr id="6" name="Shape 4"/>
+          <p:cNvSpPr/>
+          <p:nvPr/>
+        </p:nvSpPr>
+        <p:spPr>
+          <a:xfrm>
+            <a:off x="6492240" y="2057400"/>
+            <a:ext cx="5029200" cy="868680"/>
           </a:xfrm>
           <a:prstGeom prst="roundRect">
             <a:avLst>
-              <a:gd name="adj" fmla="val 5128"/>
+              <a:gd name="adj" fmla="val 10526"/>
             </a:avLst>
           </a:prstGeom>
           <a:solidFill>
-            <a:srgbClr val="F8FAFC"/>
+            <a:srgbClr val="16306E"/>
           </a:solidFill>
           <a:ln w="12700">
             <a:solidFill>
-              <a:srgbClr val="E2E8F0"/>
+              <a:srgbClr val="0B7A75"/>
             </a:solidFill>
             <a:prstDash val="solid"/>
           </a:ln>
+        </p:spPr>
+      </p:sp>
+      <p:sp>
+        <p:nvSpPr>
+          <p:cNvPr id="7" name="Shape 5"/>
+          <p:cNvSpPr/>
+          <p:nvPr/>
+        </p:nvSpPr>
+        <p:spPr>
+          <a:xfrm>
+            <a:off x="6766560" y="2221992"/>
+            <a:ext cx="548640" cy="548640"/>
+          </a:xfrm>
+          <a:prstGeom prst="ellipse">
+            <a:avLst/>
+          </a:prstGeom>
+          <a:solidFill>
+            <a:srgbClr val="0B7A75"/>
+          </a:solidFill>
+          <a:ln/>
           <a:effectLst>
-            <a:outerShdw sx="100000" sy="100000" kx="0" ky="0" algn="bl" rotWithShape="0" blurRad="88900" dist="25400" dir="8100000">
-              <a:srgbClr val="94A3B8">
-                <a:alpha val="28000"/>
-              </a:srgbClr>
-            </a:outerShdw>
-          </a:effectLst>
-        </p:spPr>
-      </p:sp>
-      <p:sp>
-        <p:nvSpPr>
-          <p:cNvPr id="5" name="Shape 3"/>
-          <p:cNvSpPr/>
-          <p:nvPr/>
-        </p:nvSpPr>
-        <p:spPr>
-          <a:xfrm>
-            <a:off x="914400" y="2103120"/>
-            <a:ext cx="777240" cy="777240"/>
-          </a:xfrm>
-          <a:prstGeom prst="ellipse">
-            <a:avLst/>
-          </a:prstGeom>
-          <a:solidFill>
-            <a:srgbClr val="1D4ED8"/>
-          </a:solidFill>
-          <a:ln/>
-          <a:effectLst>
-            <a:outerShdw sx="100000" sy="100000" kx="0" ky="0" algn="bl" rotWithShape="0" blurRad="114300" dist="38100" dir="8100000">
-              <a:srgbClr val="1e40af">
+            <a:outerShdw blurRad="114300" dist="38100" dir="8100000" algn="bl" rotWithShape="0">
+              <a:srgbClr val="1E40AF">
                 <a:alpha val="20000"/>
               </a:srgbClr>
             </a:outerShdw>
@@ -2773,22 +4070,22 @@
       </p:sp>
       <p:pic>
         <p:nvPicPr>
-          <p:cNvPr id="6" name="Image 0" descr="preencoded.png">    </p:cNvPr>
+          <p:cNvPr id="8" name="Image 0" descr="preencoded.png"/>
           <p:cNvPicPr>
             <a:picLocks noChangeAspect="1"/>
           </p:cNvPicPr>
           <p:nvPr/>
         </p:nvPicPr>
         <p:blipFill>
-          <a:blip r:embed="rId1"/>
+          <a:blip r:embed="rId3"/>
           <a:stretch>
             <a:fillRect/>
           </a:stretch>
         </p:blipFill>
         <p:spPr>
           <a:xfrm>
-            <a:off x="1124255" y="2312975"/>
-            <a:ext cx="357530" cy="357530"/>
+            <a:off x="6914693" y="2370125"/>
+            <a:ext cx="252374" cy="252374"/>
           </a:xfrm>
           <a:prstGeom prst="rect">
             <a:avLst/>
@@ -2797,14 +4094,14 @@
       </p:pic>
       <p:sp>
         <p:nvSpPr>
-          <p:cNvPr id="7" name="Text 4"/>
-          <p:cNvSpPr/>
-          <p:nvPr/>
-        </p:nvSpPr>
-        <p:spPr>
-          <a:xfrm>
-            <a:off x="1920240" y="2084832"/>
-            <a:ext cx="4160520" cy="457200"/>
+          <p:cNvPr id="9" name="Text 6"/>
+          <p:cNvSpPr/>
+          <p:nvPr/>
+        </p:nvSpPr>
+        <p:spPr>
+          <a:xfrm>
+            <a:off x="7498080" y="2057400"/>
+            <a:ext cx="3886200" cy="868680"/>
           </a:xfrm>
           <a:prstGeom prst="rect">
             <a:avLst/>
@@ -2816,118 +4113,72 @@
           <a:bodyPr wrap="square" lIns="0" tIns="0" rIns="0" bIns="0" rtlCol="0" anchor="ctr"/>
           <a:lstStyle/>
           <a:p>
-            <a:pPr indent="0" marL="0">
-              <a:buNone/>
-            </a:pPr>
-            <a:r>
-              <a:rPr lang="en-US" sz="1800" b="1" dirty="0">
-                <a:solidFill>
-                  <a:srgbClr val="0F172A"/>
-                </a:solidFill>
-                <a:latin typeface="Segoe UI" pitchFamily="34" charset="0"/>
-                <a:ea typeface="Segoe UI" pitchFamily="34" charset="-122"/>
-                <a:cs typeface="Segoe UI" pitchFamily="34" charset="-120"/>
-              </a:rPr>
-              <a:t>Bản đồ tương tác</a:t>
-            </a:r>
-            <a:endParaRPr lang="en-US" sz="1800" dirty="0"/>
-          </a:p>
-        </p:txBody>
-      </p:sp>
-      <p:sp>
-        <p:nvSpPr>
-          <p:cNvPr id="8" name="Text 5"/>
-          <p:cNvSpPr/>
-          <p:nvPr/>
-        </p:nvSpPr>
-        <p:spPr>
-          <a:xfrm>
-            <a:off x="1920240" y="2560320"/>
-            <a:ext cx="4160520" cy="914400"/>
-          </a:xfrm>
-          <a:prstGeom prst="rect">
-            <a:avLst/>
-          </a:prstGeom>
-          <a:noFill/>
-          <a:ln/>
-        </p:spPr>
-        <p:txBody>
-          <a:bodyPr wrap="square" lIns="0" tIns="0" rIns="0" bIns="0" rtlCol="0" anchor="ctr"/>
-          <a:lstStyle/>
-          <a:p>
-            <a:pPr indent="0" marL="0">
-              <a:buNone/>
-            </a:pPr>
-            <a:r>
-              <a:rPr lang="en-US" sz="1350" dirty="0">
-                <a:solidFill>
-                  <a:srgbClr val="334155"/>
-                </a:solidFill>
-                <a:latin typeface="Segoe UI" pitchFamily="34" charset="0"/>
-                <a:ea typeface="Segoe UI" pitchFamily="34" charset="-122"/>
-                <a:cs typeface="Segoe UI" pitchFamily="34" charset="-120"/>
-              </a:rPr>
-              <a:t>Định vị mạng lưới trụ sở trên nền OpenStreetMap.</a:t>
-            </a:r>
-            <a:endParaRPr lang="en-US" sz="1350" dirty="0"/>
-          </a:p>
-        </p:txBody>
-      </p:sp>
-      <p:sp>
-        <p:nvSpPr>
-          <p:cNvPr id="9" name="Shape 6"/>
-          <p:cNvSpPr/>
-          <p:nvPr/>
-        </p:nvSpPr>
-        <p:spPr>
-          <a:xfrm>
-            <a:off x="640080" y="3794760"/>
-            <a:ext cx="5577840" cy="1783080"/>
+            <a:pPr marL="0" indent="0">
+              <a:buNone/>
+            </a:pPr>
+            <a:r>
+              <a:rPr lang="en-US" sz="1600" b="1" dirty="0">
+                <a:solidFill>
+                  <a:srgbClr val="FFFFFF"/>
+                </a:solidFill>
+                <a:latin typeface="Segoe UI" pitchFamily="34" charset="0"/>
+                <a:ea typeface="Segoe UI" pitchFamily="34" charset="-122"/>
+                <a:cs typeface="Segoe UI" pitchFamily="34" charset="-120"/>
+              </a:rPr>
+              <a:t>Người dân loay hoay tìm địa chỉ đúng</a:t>
+            </a:r>
+            <a:endParaRPr lang="en-US" sz="1600" dirty="0"/>
+          </a:p>
+        </p:txBody>
+      </p:sp>
+      <p:sp>
+        <p:nvSpPr>
+          <p:cNvPr id="10" name="Shape 7"/>
+          <p:cNvSpPr/>
+          <p:nvPr/>
+        </p:nvSpPr>
+        <p:spPr>
+          <a:xfrm>
+            <a:off x="6492240" y="3108960"/>
+            <a:ext cx="5029200" cy="868680"/>
           </a:xfrm>
           <a:prstGeom prst="roundRect">
             <a:avLst>
-              <a:gd name="adj" fmla="val 5128"/>
+              <a:gd name="adj" fmla="val 10526"/>
             </a:avLst>
           </a:prstGeom>
           <a:solidFill>
-            <a:srgbClr val="1E3A8A"/>
+            <a:srgbClr val="16306E"/>
           </a:solidFill>
           <a:ln w="12700">
             <a:solidFill>
-              <a:srgbClr val="E2E8F0"/>
+              <a:srgbClr val="0B7A75"/>
             </a:solidFill>
             <a:prstDash val="solid"/>
           </a:ln>
+        </p:spPr>
+      </p:sp>
+      <p:sp>
+        <p:nvSpPr>
+          <p:cNvPr id="11" name="Shape 8"/>
+          <p:cNvSpPr/>
+          <p:nvPr/>
+        </p:nvSpPr>
+        <p:spPr>
+          <a:xfrm>
+            <a:off x="6766560" y="3273552"/>
+            <a:ext cx="548640" cy="548640"/>
+          </a:xfrm>
+          <a:prstGeom prst="ellipse">
+            <a:avLst/>
+          </a:prstGeom>
+          <a:solidFill>
+            <a:srgbClr val="0B7A75"/>
+          </a:solidFill>
+          <a:ln/>
           <a:effectLst>
-            <a:outerShdw sx="100000" sy="100000" kx="0" ky="0" algn="bl" rotWithShape="0" blurRad="88900" dist="25400" dir="8100000">
-              <a:srgbClr val="94A3B8">
-                <a:alpha val="28000"/>
-              </a:srgbClr>
-            </a:outerShdw>
-          </a:effectLst>
-        </p:spPr>
-      </p:sp>
-      <p:sp>
-        <p:nvSpPr>
-          <p:cNvPr id="10" name="Shape 7"/>
-          <p:cNvSpPr/>
-          <p:nvPr/>
-        </p:nvSpPr>
-        <p:spPr>
-          <a:xfrm>
-            <a:off x="914400" y="4069080"/>
-            <a:ext cx="777240" cy="777240"/>
-          </a:xfrm>
-          <a:prstGeom prst="ellipse">
-            <a:avLst/>
-          </a:prstGeom>
-          <a:solidFill>
-            <a:srgbClr val="059669"/>
-          </a:solidFill>
-          <a:ln/>
-          <a:effectLst>
-            <a:outerShdw sx="100000" sy="100000" kx="0" ky="0" algn="bl" rotWithShape="0" blurRad="114300" dist="38100" dir="8100000">
-              <a:srgbClr val="1e40af">
+            <a:outerShdw blurRad="114300" dist="38100" dir="8100000" algn="bl" rotWithShape="0">
+              <a:srgbClr val="1E40AF">
                 <a:alpha val="20000"/>
               </a:srgbClr>
             </a:outerShdw>
@@ -2936,22 +4187,22 @@
       </p:sp>
       <p:pic>
         <p:nvPicPr>
-          <p:cNvPr id="11" name="Image 1" descr="preencoded.png">    </p:cNvPr>
+          <p:cNvPr id="12" name="Image 1" descr="preencoded.png"/>
           <p:cNvPicPr>
             <a:picLocks noChangeAspect="1"/>
           </p:cNvPicPr>
           <p:nvPr/>
         </p:nvPicPr>
         <p:blipFill>
-          <a:blip r:embed="rId2"/>
+          <a:blip r:embed="rId3"/>
           <a:stretch>
             <a:fillRect/>
           </a:stretch>
         </p:blipFill>
         <p:spPr>
           <a:xfrm>
-            <a:off x="1124255" y="4278935"/>
-            <a:ext cx="357530" cy="357530"/>
+            <a:off x="6914693" y="3421685"/>
+            <a:ext cx="252374" cy="252374"/>
           </a:xfrm>
           <a:prstGeom prst="rect">
             <a:avLst/>
@@ -2960,14 +4211,14 @@
       </p:pic>
       <p:sp>
         <p:nvSpPr>
-          <p:cNvPr id="12" name="Text 8"/>
-          <p:cNvSpPr/>
-          <p:nvPr/>
-        </p:nvSpPr>
-        <p:spPr>
-          <a:xfrm>
-            <a:off x="1920240" y="4050792"/>
-            <a:ext cx="4160520" cy="457200"/>
+          <p:cNvPr id="13" name="Text 9"/>
+          <p:cNvSpPr/>
+          <p:nvPr/>
+        </p:nvSpPr>
+        <p:spPr>
+          <a:xfrm>
+            <a:off x="7498080" y="3108960"/>
+            <a:ext cx="3886200" cy="868680"/>
           </a:xfrm>
           <a:prstGeom prst="rect">
             <a:avLst/>
@@ -2979,11 +4230,11 @@
           <a:bodyPr wrap="square" lIns="0" tIns="0" rIns="0" bIns="0" rtlCol="0" anchor="ctr"/>
           <a:lstStyle/>
           <a:p>
-            <a:pPr indent="0" marL="0">
-              <a:buNone/>
-            </a:pPr>
-            <a:r>
-              <a:rPr lang="en-US" sz="1800" b="1" dirty="0">
+            <a:pPr marL="0" indent="0">
+              <a:buNone/>
+            </a:pPr>
+            <a:r>
+              <a:rPr lang="en-US" sz="1600" b="1" dirty="0">
                 <a:solidFill>
                   <a:srgbClr val="FFFFFF"/>
                 </a:solidFill>
@@ -2991,22 +4242,100 @@
                 <a:ea typeface="Segoe UI" pitchFamily="34" charset="-122"/>
                 <a:cs typeface="Segoe UI" pitchFamily="34" charset="-120"/>
               </a:rPr>
-              <a:t>Trợ lý ảo AI</a:t>
-            </a:r>
-            <a:endParaRPr lang="en-US" sz="1800" dirty="0"/>
-          </a:p>
-        </p:txBody>
-      </p:sp>
-      <p:sp>
-        <p:nvSpPr>
-          <p:cNvPr id="13" name="Text 9"/>
-          <p:cNvSpPr/>
-          <p:nvPr/>
-        </p:nvSpPr>
-        <p:spPr>
-          <a:xfrm>
-            <a:off x="1920240" y="4526280"/>
-            <a:ext cx="4160520" cy="914400"/>
+              <a:t>Đi lại nhiều lần vì sai thủ tục</a:t>
+            </a:r>
+            <a:endParaRPr lang="en-US" sz="1600" dirty="0"/>
+          </a:p>
+        </p:txBody>
+      </p:sp>
+      <p:sp>
+        <p:nvSpPr>
+          <p:cNvPr id="14" name="Shape 10"/>
+          <p:cNvSpPr/>
+          <p:nvPr/>
+        </p:nvSpPr>
+        <p:spPr>
+          <a:xfrm>
+            <a:off x="6492240" y="4160520"/>
+            <a:ext cx="5029200" cy="868680"/>
+          </a:xfrm>
+          <a:prstGeom prst="roundRect">
+            <a:avLst>
+              <a:gd name="adj" fmla="val 10526"/>
+            </a:avLst>
+          </a:prstGeom>
+          <a:solidFill>
+            <a:srgbClr val="16306E"/>
+          </a:solidFill>
+          <a:ln w="12700">
+            <a:solidFill>
+              <a:srgbClr val="0B7A75"/>
+            </a:solidFill>
+            <a:prstDash val="solid"/>
+          </a:ln>
+        </p:spPr>
+      </p:sp>
+      <p:sp>
+        <p:nvSpPr>
+          <p:cNvPr id="15" name="Shape 11"/>
+          <p:cNvSpPr/>
+          <p:nvPr/>
+        </p:nvSpPr>
+        <p:spPr>
+          <a:xfrm>
+            <a:off x="6766560" y="4325112"/>
+            <a:ext cx="548640" cy="548640"/>
+          </a:xfrm>
+          <a:prstGeom prst="ellipse">
+            <a:avLst/>
+          </a:prstGeom>
+          <a:solidFill>
+            <a:srgbClr val="0B7A75"/>
+          </a:solidFill>
+          <a:ln/>
+          <a:effectLst>
+            <a:outerShdw blurRad="114300" dist="38100" dir="8100000" algn="bl" rotWithShape="0">
+              <a:srgbClr val="1E40AF">
+                <a:alpha val="20000"/>
+              </a:srgbClr>
+            </a:outerShdw>
+          </a:effectLst>
+        </p:spPr>
+      </p:sp>
+      <p:pic>
+        <p:nvPicPr>
+          <p:cNvPr id="16" name="Image 2" descr="preencoded.png"/>
+          <p:cNvPicPr>
+            <a:picLocks noChangeAspect="1"/>
+          </p:cNvPicPr>
+          <p:nvPr/>
+        </p:nvPicPr>
+        <p:blipFill>
+          <a:blip r:embed="rId3"/>
+          <a:stretch>
+            <a:fillRect/>
+          </a:stretch>
+        </p:blipFill>
+        <p:spPr>
+          <a:xfrm>
+            <a:off x="6914693" y="4473245"/>
+            <a:ext cx="252374" cy="252374"/>
+          </a:xfrm>
+          <a:prstGeom prst="rect">
+            <a:avLst/>
+          </a:prstGeom>
+        </p:spPr>
+      </p:pic>
+      <p:sp>
+        <p:nvSpPr>
+          <p:cNvPr id="17" name="Text 12"/>
+          <p:cNvSpPr/>
+          <p:nvPr/>
+        </p:nvSpPr>
+        <p:spPr>
+          <a:xfrm>
+            <a:off x="7498080" y="4160520"/>
+            <a:ext cx="3886200" cy="868680"/>
           </a:xfrm>
           <a:prstGeom prst="rect">
             <a:avLst/>
@@ -3018,21 +4347,60 @@
           <a:bodyPr wrap="square" lIns="0" tIns="0" rIns="0" bIns="0" rtlCol="0" anchor="ctr"/>
           <a:lstStyle/>
           <a:p>
-            <a:pPr indent="0" marL="0">
-              <a:buNone/>
-            </a:pPr>
-            <a:r>
-              <a:rPr lang="en-US" sz="1350" dirty="0">
-                <a:solidFill>
-                  <a:srgbClr val="EFF6FF"/>
-                </a:solidFill>
-                <a:latin typeface="Segoe UI" pitchFamily="34" charset="0"/>
-                <a:ea typeface="Segoe UI" pitchFamily="34" charset="-122"/>
-                <a:cs typeface="Segoe UI" pitchFamily="34" charset="-120"/>
-              </a:rPr>
-              <a:t>Tư vấn thủ tục hành chính, giải đáp 24/7.</a:t>
-            </a:r>
-            <a:endParaRPr lang="en-US" sz="1350" dirty="0"/>
+            <a:pPr marL="0" indent="0">
+              <a:buNone/>
+            </a:pPr>
+            <a:r>
+              <a:rPr lang="en-US" sz="1600" b="1" dirty="0">
+                <a:solidFill>
+                  <a:srgbClr val="FFFFFF"/>
+                </a:solidFill>
+                <a:latin typeface="Segoe UI" pitchFamily="34" charset="0"/>
+                <a:ea typeface="Segoe UI" pitchFamily="34" charset="-122"/>
+                <a:cs typeface="Segoe UI" pitchFamily="34" charset="-120"/>
+              </a:rPr>
+              <a:t>Cán bộ mất thời gian trả lời lặp lại</a:t>
+            </a:r>
+            <a:endParaRPr lang="en-US" sz="1600" dirty="0"/>
+          </a:p>
+        </p:txBody>
+      </p:sp>
+      <p:sp>
+        <p:nvSpPr>
+          <p:cNvPr id="18" name="Text 13"/>
+          <p:cNvSpPr/>
+          <p:nvPr/>
+        </p:nvSpPr>
+        <p:spPr>
+          <a:xfrm>
+            <a:off x="640080" y="5623560"/>
+            <a:ext cx="10881360" cy="640080"/>
+          </a:xfrm>
+          <a:prstGeom prst="rect">
+            <a:avLst/>
+          </a:prstGeom>
+          <a:noFill/>
+          <a:ln/>
+        </p:spPr>
+        <p:txBody>
+          <a:bodyPr wrap="square" lIns="0" tIns="0" rIns="0" bIns="0" rtlCol="0" anchor="ctr"/>
+          <a:lstStyle/>
+          <a:p>
+            <a:pPr marL="0" indent="0">
+              <a:buNone/>
+            </a:pPr>
+            <a:r>
+              <a:rPr lang="en-US" sz="1600" i="1" dirty="0">
+                <a:solidFill>
+                  <a:srgbClr val="DBEAFE"/>
+                </a:solidFill>
+                <a:latin typeface="Segoe UI" pitchFamily="34" charset="0"/>
+                <a:ea typeface="Segoe UI" pitchFamily="34" charset="-122"/>
+                <a:cs typeface="Segoe UI" pitchFamily="34" charset="-120"/>
+              </a:rPr>
+              <a:t>Ghi nhận từ thực tế công tác, chưa có số liệu thống kê chính thức.</a:t>
+            </a:r>
+            <a:endParaRPr lang="en-US" sz="1600" dirty="0"/>
           </a:p>
         </p:txBody>
       </p:sp>
@@ -3041,20 +4409,30 @@
   <p:clrMapOvr>
     <a:masterClrMapping/>
   </p:clrMapOvr>
-  <p:transition xmlns:p14="http://schemas.microsoft.com/office/powerpoint/2010/main" spd="med" p14:dur="450">
-    <p:fade/>
-  </p:transition>
+  <mc:AlternateContent xmlns:mc="http://schemas.openxmlformats.org/markup-compatibility/2006">
+    <mc:Choice xmlns:p14="http://schemas.microsoft.com/office/powerpoint/2010/main" Requires="p14">
+      <p:transition p14:dur="450">
+        <p:fade/>
+      </p:transition>
+    </mc:Choice>
+    <mc:Fallback>
+      <p:transition>
+        <p:fade/>
+      </p:transition>
+    </mc:Fallback>
+  </mc:AlternateContent>
 </p:sld>
 </file>
 
-<file path=ppt/slides/slide5.xml><?xml version="1.0" encoding="utf-8"?>
+<file path=ppt/slides/slide3.xml><?xml version="1.0" encoding="utf-8"?>
 <p:sld xmlns:a="http://schemas.openxmlformats.org/drawingml/2006/main" xmlns:r="http://schemas.openxmlformats.org/officeDocument/2006/relationships" xmlns:p="http://schemas.openxmlformats.org/presentationml/2006/main">
-  <p:cSld name="Slide 5">
+  <p:cSld name="Slide 3">
     <p:bg>
       <p:bgPr>
         <a:solidFill>
-          <a:srgbClr val="1E3A8A"/>
+          <a:srgbClr val="FFFFFF"/>
         </a:solidFill>
+        <a:effectLst/>
       </p:bgPr>
     </p:bg>
     <p:spTree>
@@ -3073,14 +4451,90 @@
       </p:grpSpPr>
       <p:sp>
         <p:nvSpPr>
-          <p:cNvPr id="2" name="Text 0"/>
-          <p:cNvSpPr/>
-          <p:nvPr/>
-        </p:nvSpPr>
-        <p:spPr>
-          <a:xfrm>
-            <a:off x="640080" y="2286000"/>
-            <a:ext cx="10881360" cy="2286000"/>
+          <p:cNvPr id="2" name="Shape 0"/>
+          <p:cNvSpPr/>
+          <p:nvPr/>
+        </p:nvSpPr>
+        <p:spPr>
+          <a:xfrm>
+            <a:off x="2286000" y="2286000"/>
+            <a:ext cx="91440" cy="1828800"/>
+          </a:xfrm>
+          <a:prstGeom prst="rect">
+            <a:avLst/>
+          </a:prstGeom>
+          <a:solidFill>
+            <a:srgbClr val="1D4ED8"/>
+          </a:solidFill>
+          <a:ln/>
+        </p:spPr>
+      </p:sp>
+      <p:sp>
+        <p:nvSpPr>
+          <p:cNvPr id="3" name="Text 1"/>
+          <p:cNvSpPr/>
+          <p:nvPr/>
+        </p:nvSpPr>
+        <p:spPr>
+          <a:xfrm>
+            <a:off x="2743200" y="2286000"/>
+            <a:ext cx="8229600" cy="1371600"/>
+          </a:xfrm>
+          <a:prstGeom prst="rect">
+            <a:avLst/>
+          </a:prstGeom>
+          <a:noFill/>
+          <a:ln/>
+        </p:spPr>
+        <p:txBody>
+          <a:bodyPr wrap="square" lIns="0" tIns="0" rIns="0" bIns="0" rtlCol="0" anchor="t"/>
+          <a:lstStyle/>
+          <a:p>
+            <a:pPr marL="0" indent="0">
+              <a:buNone/>
+            </a:pPr>
+            <a:r>
+              <a:rPr lang="en-US" sz="3200" i="1" dirty="0">
+                <a:solidFill>
+                  <a:srgbClr val="0F172A"/>
+                </a:solidFill>
+                <a:latin typeface="Segoe UI" pitchFamily="34" charset="0"/>
+                <a:ea typeface="Segoe UI" pitchFamily="34" charset="-122"/>
+                <a:cs typeface="Segoe UI" pitchFamily="34" charset="-120"/>
+              </a:rPr>
+              <a:t>Người dân cần được hướng dẫn chính xác</a:t>
+            </a:r>
+            <a:endParaRPr lang="en-US" sz="3200" dirty="0"/>
+          </a:p>
+          <a:p>
+            <a:pPr marL="0" indent="0">
+              <a:buNone/>
+            </a:pPr>
+            <a:r>
+              <a:rPr lang="en-US" sz="3200" i="1" dirty="0">
+                <a:solidFill>
+                  <a:srgbClr val="0F172A"/>
+                </a:solidFill>
+                <a:latin typeface="Segoe UI" pitchFamily="34" charset="0"/>
+                <a:ea typeface="Segoe UI" pitchFamily="34" charset="-122"/>
+                <a:cs typeface="Segoe UI" pitchFamily="34" charset="-120"/>
+              </a:rPr>
+              <a:t>trước khi đến làm thủ tục.</a:t>
+            </a:r>
+            <a:endParaRPr lang="en-US" sz="3200" dirty="0"/>
+          </a:p>
+        </p:txBody>
+      </p:sp>
+      <p:sp>
+        <p:nvSpPr>
+          <p:cNvPr id="4" name="Text 2"/>
+          <p:cNvSpPr/>
+          <p:nvPr/>
+        </p:nvSpPr>
+        <p:spPr>
+          <a:xfrm>
+            <a:off x="2743200" y="3840480"/>
+            <a:ext cx="8229600" cy="457200"/>
           </a:xfrm>
           <a:prstGeom prst="rect">
             <a:avLst/>
@@ -3092,38 +4546,21 @@
           <a:bodyPr wrap="square" lIns="0" tIns="0" rIns="0" bIns="0" rtlCol="0" anchor="ctr"/>
           <a:lstStyle/>
           <a:p>
-            <a:pPr algn="ctr" indent="0" marL="0">
-              <a:buNone/>
-            </a:pPr>
-            <a:r>
-              <a:rPr lang="en-US" sz="5000" b="1" dirty="0">
-                <a:solidFill>
-                  <a:srgbClr val="FFFFFF"/>
-                </a:solidFill>
-                <a:latin typeface="Segoe UI" pitchFamily="34" charset="0"/>
-                <a:ea typeface="Segoe UI" pitchFamily="34" charset="-122"/>
-                <a:cs typeface="Segoe UI" pitchFamily="34" charset="-120"/>
-              </a:rPr>
-              <a:t>AI của chúng tôi</a:t>
-            </a:r>
-            <a:endParaRPr lang="en-US" sz="5000" dirty="0"/>
-          </a:p>
-          <a:p>
-            <a:pPr algn="ctr" indent="0" marL="0">
-              <a:buNone/>
-            </a:pPr>
-            <a:r>
-              <a:rPr lang="en-US" sz="5000" b="1" dirty="0">
-                <a:solidFill>
-                  <a:srgbClr val="FFFFFF"/>
-                </a:solidFill>
-                <a:latin typeface="Segoe UI" pitchFamily="34" charset="0"/>
-                <a:ea typeface="Segoe UI" pitchFamily="34" charset="-122"/>
-                <a:cs typeface="Segoe UI" pitchFamily="34" charset="-120"/>
-              </a:rPr>
-              <a:t>KHÔNG BAO GIỜ nói dối.</a:t>
-            </a:r>
-            <a:endParaRPr lang="en-US" sz="5000" dirty="0"/>
+            <a:pPr marL="0" indent="0">
+              <a:buNone/>
+            </a:pPr>
+            <a:r>
+              <a:rPr lang="en-US" sz="2000" b="1" dirty="0">
+                <a:solidFill>
+                  <a:srgbClr val="334155"/>
+                </a:solidFill>
+                <a:latin typeface="Segoe UI" pitchFamily="34" charset="0"/>
+                <a:ea typeface="Segoe UI" pitchFamily="34" charset="-122"/>
+                <a:cs typeface="Segoe UI" pitchFamily="34" charset="-120"/>
+              </a:rPr>
+              <a:t>Nhu cầu thường gặp của người dân</a:t>
+            </a:r>
+            <a:endParaRPr lang="en-US" sz="2000" dirty="0"/>
           </a:p>
         </p:txBody>
       </p:sp>
@@ -3133,7 +4570,617 @@
     <a:masterClrMapping/>
   </p:clrMapOvr>
   <mc:AlternateContent xmlns:mc="http://schemas.openxmlformats.org/markup-compatibility/2006">
-    <mc:Choice xmlns:p159="http://schemas.microsoft.com/office/powerpoint/2015/9/main" Requires="p159">
+    <mc:Choice xmlns:p14="http://schemas.microsoft.com/office/powerpoint/2010/main" Requires="p14">
+      <p:transition p14:dur="450">
+        <p:fade/>
+      </p:transition>
+    </mc:Choice>
+    <mc:Fallback>
+      <p:transition>
+        <p:fade/>
+      </p:transition>
+    </mc:Fallback>
+  </mc:AlternateContent>
+</p:sld>
+</file>
+
+<file path=ppt/slides/slide4.xml><?xml version="1.0" encoding="utf-8"?>
+<p:sld xmlns:a="http://schemas.openxmlformats.org/drawingml/2006/main" xmlns:r="http://schemas.openxmlformats.org/officeDocument/2006/relationships" xmlns:p="http://schemas.openxmlformats.org/presentationml/2006/main">
+  <p:cSld name="Slide 4">
+    <p:bg>
+      <p:bgPr>
+        <a:solidFill>
+          <a:srgbClr val="FFFFFF"/>
+        </a:solidFill>
+        <a:effectLst/>
+      </p:bgPr>
+    </p:bg>
+    <p:spTree>
+      <p:nvGrpSpPr>
+        <p:cNvPr id="1" name=""/>
+        <p:cNvGrpSpPr/>
+        <p:nvPr/>
+      </p:nvGrpSpPr>
+      <p:grpSpPr>
+        <a:xfrm>
+          <a:off x="0" y="0"/>
+          <a:ext cx="0" cy="0"/>
+          <a:chOff x="0" y="0"/>
+          <a:chExt cx="0" cy="0"/>
+        </a:xfrm>
+      </p:grpSpPr>
+      <p:sp>
+        <p:nvSpPr>
+          <p:cNvPr id="2" name="Text 0"/>
+          <p:cNvSpPr/>
+          <p:nvPr/>
+        </p:nvSpPr>
+        <p:spPr>
+          <a:xfrm>
+            <a:off x="640080" y="457200"/>
+            <a:ext cx="10881360" cy="320040"/>
+          </a:xfrm>
+          <a:prstGeom prst="rect">
+            <a:avLst/>
+          </a:prstGeom>
+          <a:noFill/>
+          <a:ln/>
+        </p:spPr>
+        <p:txBody>
+          <a:bodyPr wrap="square" lIns="0" tIns="0" rIns="0" bIns="0" rtlCol="0" anchor="ctr"/>
+          <a:lstStyle/>
+          <a:p>
+            <a:pPr marL="0" indent="0">
+              <a:buNone/>
+            </a:pPr>
+            <a:r>
+              <a:rPr lang="en-US" sz="1300" b="1" kern="0" spc="200" dirty="0">
+                <a:solidFill>
+                  <a:srgbClr val="1D4ED8"/>
+                </a:solidFill>
+                <a:latin typeface="Segoe UI" pitchFamily="34" charset="0"/>
+                <a:ea typeface="Segoe UI" pitchFamily="34" charset="-122"/>
+                <a:cs typeface="Segoe UI" pitchFamily="34" charset="-120"/>
+              </a:rPr>
+              <a:t>CÚ HÍCH GIẢI PHÁP</a:t>
+            </a:r>
+            <a:endParaRPr lang="en-US" sz="1300" dirty="0"/>
+          </a:p>
+        </p:txBody>
+      </p:sp>
+      <p:sp>
+        <p:nvSpPr>
+          <p:cNvPr id="3" name="Text 1"/>
+          <p:cNvSpPr/>
+          <p:nvPr/>
+        </p:nvSpPr>
+        <p:spPr>
+          <a:xfrm>
+            <a:off x="640080" y="768096"/>
+            <a:ext cx="10881360" cy="777240"/>
+          </a:xfrm>
+          <a:prstGeom prst="rect">
+            <a:avLst/>
+          </a:prstGeom>
+          <a:noFill/>
+          <a:ln/>
+        </p:spPr>
+        <p:txBody>
+          <a:bodyPr wrap="square" lIns="0" tIns="0" rIns="0" bIns="0" rtlCol="0" anchor="t"/>
+          <a:lstStyle/>
+          <a:p>
+            <a:pPr marL="0" indent="0">
+              <a:buNone/>
+            </a:pPr>
+            <a:r>
+              <a:rPr lang="en-US" sz="2900" b="1" kern="0" spc="-50" dirty="0">
+                <a:solidFill>
+                  <a:srgbClr val="0F172A"/>
+                </a:solidFill>
+                <a:latin typeface="Segoe UI" pitchFamily="34" charset="0"/>
+                <a:ea typeface="Segoe UI" pitchFamily="34" charset="-122"/>
+                <a:cs typeface="Segoe UI" pitchFamily="34" charset="-120"/>
+              </a:rPr>
+              <a:t>Bản đồ Công an số</a:t>
+            </a:r>
+            <a:endParaRPr lang="en-US" sz="2900" dirty="0"/>
+          </a:p>
+        </p:txBody>
+      </p:sp>
+      <p:sp>
+        <p:nvSpPr>
+          <p:cNvPr id="4" name="Text 2"/>
+          <p:cNvSpPr/>
+          <p:nvPr/>
+        </p:nvSpPr>
+        <p:spPr>
+          <a:xfrm>
+            <a:off x="640080" y="1691640"/>
+            <a:ext cx="4206240" cy="914400"/>
+          </a:xfrm>
+          <a:prstGeom prst="rect">
+            <a:avLst/>
+          </a:prstGeom>
+          <a:noFill/>
+          <a:ln/>
+        </p:spPr>
+        <p:txBody>
+          <a:bodyPr wrap="square" lIns="0" tIns="0" rIns="0" bIns="0" rtlCol="0" anchor="t"/>
+          <a:lstStyle/>
+          <a:p>
+            <a:pPr marL="0" indent="0">
+              <a:buNone/>
+            </a:pPr>
+            <a:r>
+              <a:rPr lang="en-US" sz="2600" b="1" dirty="0">
+                <a:solidFill>
+                  <a:srgbClr val="0F172A"/>
+                </a:solidFill>
+                <a:latin typeface="Segoe UI" pitchFamily="34" charset="0"/>
+                <a:ea typeface="Segoe UI" pitchFamily="34" charset="-122"/>
+                <a:cs typeface="Segoe UI" pitchFamily="34" charset="-120"/>
+              </a:rPr>
+              <a:t>Một điểm chạm để người dân tra cứu đúng nơi và hỏi đúng thủ tục.</a:t>
+            </a:r>
+            <a:endParaRPr lang="en-US" sz="2600" dirty="0"/>
+          </a:p>
+        </p:txBody>
+      </p:sp>
+      <p:sp>
+        <p:nvSpPr>
+          <p:cNvPr id="5" name="Shape 3"/>
+          <p:cNvSpPr/>
+          <p:nvPr/>
+        </p:nvSpPr>
+        <p:spPr>
+          <a:xfrm>
+            <a:off x="640080" y="2971800"/>
+            <a:ext cx="640080" cy="640080"/>
+          </a:xfrm>
+          <a:prstGeom prst="ellipse">
+            <a:avLst/>
+          </a:prstGeom>
+          <a:solidFill>
+            <a:srgbClr val="1D4ED8"/>
+          </a:solidFill>
+          <a:ln/>
+          <a:effectLst>
+            <a:outerShdw blurRad="114300" dist="38100" dir="8100000" algn="bl" rotWithShape="0">
+              <a:srgbClr val="1E40AF">
+                <a:alpha val="20000"/>
+              </a:srgbClr>
+            </a:outerShdw>
+          </a:effectLst>
+        </p:spPr>
+      </p:sp>
+      <p:pic>
+        <p:nvPicPr>
+          <p:cNvPr id="6" name="Image 0" descr="preencoded.png"/>
+          <p:cNvPicPr>
+            <a:picLocks noChangeAspect="1"/>
+          </p:cNvPicPr>
+          <p:nvPr/>
+        </p:nvPicPr>
+        <p:blipFill>
+          <a:blip r:embed="rId3"/>
+          <a:stretch>
+            <a:fillRect/>
+          </a:stretch>
+        </p:blipFill>
+        <p:spPr>
+          <a:xfrm>
+            <a:off x="812902" y="3144622"/>
+            <a:ext cx="294437" cy="294437"/>
+          </a:xfrm>
+          <a:prstGeom prst="rect">
+            <a:avLst/>
+          </a:prstGeom>
+        </p:spPr>
+      </p:pic>
+      <p:sp>
+        <p:nvSpPr>
+          <p:cNvPr id="7" name="Text 4"/>
+          <p:cNvSpPr/>
+          <p:nvPr/>
+        </p:nvSpPr>
+        <p:spPr>
+          <a:xfrm>
+            <a:off x="1508760" y="2990088"/>
+            <a:ext cx="3611880" cy="274320"/>
+          </a:xfrm>
+          <a:prstGeom prst="rect">
+            <a:avLst/>
+          </a:prstGeom>
+          <a:noFill/>
+          <a:ln/>
+        </p:spPr>
+        <p:txBody>
+          <a:bodyPr wrap="square" lIns="0" tIns="0" rIns="0" bIns="0" rtlCol="0" anchor="ctr"/>
+          <a:lstStyle/>
+          <a:p>
+            <a:pPr marL="0" indent="0">
+              <a:buNone/>
+            </a:pPr>
+            <a:r>
+              <a:rPr lang="en-US" sz="1900" b="1" dirty="0">
+                <a:solidFill>
+                  <a:srgbClr val="0F172A"/>
+                </a:solidFill>
+                <a:latin typeface="Segoe UI" pitchFamily="34" charset="0"/>
+                <a:ea typeface="Segoe UI" pitchFamily="34" charset="-122"/>
+                <a:cs typeface="Segoe UI" pitchFamily="34" charset="-120"/>
+              </a:rPr>
+              <a:t>Bản đồ tương tác</a:t>
+            </a:r>
+            <a:endParaRPr lang="en-US" sz="1900" dirty="0"/>
+          </a:p>
+        </p:txBody>
+      </p:sp>
+      <p:sp>
+        <p:nvSpPr>
+          <p:cNvPr id="8" name="Text 5"/>
+          <p:cNvSpPr/>
+          <p:nvPr/>
+        </p:nvSpPr>
+        <p:spPr>
+          <a:xfrm>
+            <a:off x="1508760" y="3355848"/>
+            <a:ext cx="3657600" cy="502920"/>
+          </a:xfrm>
+          <a:prstGeom prst="rect">
+            <a:avLst/>
+          </a:prstGeom>
+          <a:noFill/>
+          <a:ln/>
+        </p:spPr>
+        <p:txBody>
+          <a:bodyPr wrap="square" lIns="0" tIns="0" rIns="0" bIns="0" rtlCol="0" anchor="ctr"/>
+          <a:lstStyle/>
+          <a:p>
+            <a:pPr marL="0" indent="0">
+              <a:buNone/>
+            </a:pPr>
+            <a:r>
+              <a:rPr lang="en-US" sz="1550" dirty="0">
+                <a:solidFill>
+                  <a:srgbClr val="334155"/>
+                </a:solidFill>
+                <a:latin typeface="Segoe UI" pitchFamily="34" charset="0"/>
+                <a:ea typeface="Segoe UI" pitchFamily="34" charset="-122"/>
+                <a:cs typeface="Segoe UI" pitchFamily="34" charset="-120"/>
+              </a:rPr>
+              <a:t>Định vị mạng lưới trụ sở trên nền OpenStreetMap.</a:t>
+            </a:r>
+            <a:endParaRPr lang="en-US" sz="1550" dirty="0"/>
+          </a:p>
+        </p:txBody>
+      </p:sp>
+      <p:sp>
+        <p:nvSpPr>
+          <p:cNvPr id="9" name="Shape 6"/>
+          <p:cNvSpPr/>
+          <p:nvPr/>
+        </p:nvSpPr>
+        <p:spPr>
+          <a:xfrm>
+            <a:off x="640080" y="4206240"/>
+            <a:ext cx="640080" cy="640080"/>
+          </a:xfrm>
+          <a:prstGeom prst="ellipse">
+            <a:avLst/>
+          </a:prstGeom>
+          <a:solidFill>
+            <a:srgbClr val="0B7A75"/>
+          </a:solidFill>
+          <a:ln/>
+          <a:effectLst>
+            <a:outerShdw blurRad="114300" dist="38100" dir="8100000" algn="bl" rotWithShape="0">
+              <a:srgbClr val="1E40AF">
+                <a:alpha val="20000"/>
+              </a:srgbClr>
+            </a:outerShdw>
+          </a:effectLst>
+        </p:spPr>
+      </p:sp>
+      <p:sp>
+        <p:nvSpPr>
+          <p:cNvPr id="10" name="Text 7"/>
+          <p:cNvSpPr/>
+          <p:nvPr/>
+        </p:nvSpPr>
+        <p:spPr>
+          <a:xfrm>
+            <a:off x="1508760" y="4224528"/>
+            <a:ext cx="3611880" cy="274320"/>
+          </a:xfrm>
+          <a:prstGeom prst="rect">
+            <a:avLst/>
+          </a:prstGeom>
+          <a:noFill/>
+          <a:ln/>
+        </p:spPr>
+        <p:txBody>
+          <a:bodyPr wrap="square" lIns="0" tIns="0" rIns="0" bIns="0" rtlCol="0" anchor="ctr"/>
+          <a:lstStyle/>
+          <a:p>
+            <a:pPr marL="0" indent="0">
+              <a:buNone/>
+            </a:pPr>
+            <a:r>
+              <a:rPr lang="en-US" sz="1900" b="1" dirty="0">
+                <a:solidFill>
+                  <a:srgbClr val="0F172A"/>
+                </a:solidFill>
+                <a:latin typeface="Segoe UI" pitchFamily="34" charset="0"/>
+                <a:ea typeface="Segoe UI" pitchFamily="34" charset="-122"/>
+                <a:cs typeface="Segoe UI" pitchFamily="34" charset="-120"/>
+              </a:rPr>
+              <a:t>Trợ lý ảo AI</a:t>
+            </a:r>
+            <a:endParaRPr lang="en-US" sz="1900" dirty="0"/>
+          </a:p>
+        </p:txBody>
+      </p:sp>
+      <p:sp>
+        <p:nvSpPr>
+          <p:cNvPr id="11" name="Text 8"/>
+          <p:cNvSpPr/>
+          <p:nvPr/>
+        </p:nvSpPr>
+        <p:spPr>
+          <a:xfrm>
+            <a:off x="1508760" y="4590288"/>
+            <a:ext cx="3657600" cy="502920"/>
+          </a:xfrm>
+          <a:prstGeom prst="rect">
+            <a:avLst/>
+          </a:prstGeom>
+          <a:noFill/>
+          <a:ln/>
+        </p:spPr>
+        <p:txBody>
+          <a:bodyPr wrap="square" lIns="0" tIns="0" rIns="0" bIns="0" rtlCol="0" anchor="ctr"/>
+          <a:lstStyle/>
+          <a:p>
+            <a:pPr marL="0" indent="0">
+              <a:buNone/>
+            </a:pPr>
+            <a:r>
+              <a:rPr lang="en-US" sz="1550" dirty="0">
+                <a:solidFill>
+                  <a:srgbClr val="334155"/>
+                </a:solidFill>
+                <a:latin typeface="Segoe UI" pitchFamily="34" charset="0"/>
+                <a:ea typeface="Segoe UI" pitchFamily="34" charset="-122"/>
+                <a:cs typeface="Segoe UI" pitchFamily="34" charset="-120"/>
+              </a:rPr>
+              <a:t>Tư vấn thủ tục hành chính, giải đáp 24/7.</a:t>
+            </a:r>
+            <a:endParaRPr lang="en-US" sz="1550" dirty="0"/>
+          </a:p>
+        </p:txBody>
+      </p:sp>
+      <p:sp>
+        <p:nvSpPr>
+          <p:cNvPr id="12" name="Shape 9"/>
+          <p:cNvSpPr/>
+          <p:nvPr/>
+        </p:nvSpPr>
+        <p:spPr>
+          <a:xfrm>
+            <a:off x="5202936" y="1819656"/>
+            <a:ext cx="6373368" cy="3338408"/>
+          </a:xfrm>
+          <a:prstGeom prst="roundRect">
+            <a:avLst>
+              <a:gd name="adj" fmla="val 2191"/>
+            </a:avLst>
+          </a:prstGeom>
+          <a:solidFill>
+            <a:srgbClr val="F8FAFC"/>
+          </a:solidFill>
+          <a:ln w="12700">
+            <a:solidFill>
+              <a:srgbClr val="E2E8F0"/>
+            </a:solidFill>
+            <a:prstDash val="solid"/>
+          </a:ln>
+          <a:effectLst>
+            <a:outerShdw blurRad="88900" dist="25400" dir="8100000" algn="bl" rotWithShape="0">
+              <a:srgbClr val="94A3B8">
+                <a:alpha val="28000"/>
+              </a:srgbClr>
+            </a:outerShdw>
+          </a:effectLst>
+        </p:spPr>
+      </p:sp>
+      <p:pic>
+        <p:nvPicPr>
+          <p:cNvPr id="13" name="Image 1" descr="D:\04. Github\bandocapt\presentation\asset\giao dien desktop.png"/>
+          <p:cNvPicPr>
+            <a:picLocks noChangeAspect="1"/>
+          </p:cNvPicPr>
+          <p:nvPr/>
+        </p:nvPicPr>
+        <p:blipFill>
+          <a:blip r:embed="rId4"/>
+          <a:srcRect/>
+          <a:stretch/>
+        </p:blipFill>
+        <p:spPr>
+          <a:xfrm>
+            <a:off x="5257800" y="1874520"/>
+            <a:ext cx="6263640" cy="3228680"/>
+          </a:xfrm>
+          <a:prstGeom prst="rect">
+            <a:avLst/>
+          </a:prstGeom>
+        </p:spPr>
+      </p:pic>
+      <p:sp>
+        <p:nvSpPr>
+          <p:cNvPr id="14" name="Text 10"/>
+          <p:cNvSpPr/>
+          <p:nvPr/>
+        </p:nvSpPr>
+        <p:spPr>
+          <a:xfrm>
+            <a:off x="5257800" y="5267792"/>
+            <a:ext cx="6263640" cy="228600"/>
+          </a:xfrm>
+          <a:prstGeom prst="rect">
+            <a:avLst/>
+          </a:prstGeom>
+          <a:noFill/>
+          <a:ln/>
+        </p:spPr>
+        <p:txBody>
+          <a:bodyPr wrap="square" lIns="0" tIns="0" rIns="0" bIns="0" rtlCol="0" anchor="ctr"/>
+          <a:lstStyle/>
+          <a:p>
+            <a:pPr marL="0" indent="0" algn="ctr">
+              <a:buNone/>
+            </a:pPr>
+            <a:r>
+              <a:rPr lang="en-US" sz="1300" i="1" dirty="0">
+                <a:solidFill>
+                  <a:srgbClr val="64748B"/>
+                </a:solidFill>
+                <a:latin typeface="Segoe UI" pitchFamily="34" charset="0"/>
+                <a:ea typeface="Segoe UI" pitchFamily="34" charset="-122"/>
+                <a:cs typeface="Segoe UI" pitchFamily="34" charset="-120"/>
+              </a:rPr>
+              <a:t>Giao diện thử nghiệm trên máy tính</a:t>
+            </a:r>
+            <a:endParaRPr lang="en-US" sz="1300" dirty="0"/>
+          </a:p>
+        </p:txBody>
+      </p:sp>
+    </p:spTree>
+  </p:cSld>
+  <p:clrMapOvr>
+    <a:masterClrMapping/>
+  </p:clrMapOvr>
+  <mc:AlternateContent xmlns:mc="http://schemas.openxmlformats.org/markup-compatibility/2006">
+    <mc:Choice xmlns:p14="http://schemas.microsoft.com/office/powerpoint/2010/main" Requires="p14">
+      <p:transition p14:dur="450">
+        <p:fade/>
+      </p:transition>
+    </mc:Choice>
+    <mc:Fallback>
+      <p:transition>
+        <p:fade/>
+      </p:transition>
+    </mc:Fallback>
+  </mc:AlternateContent>
+</p:sld>
+</file>
+
+<file path=ppt/slides/slide5.xml><?xml version="1.0" encoding="utf-8"?>
+<p:sld xmlns:a="http://schemas.openxmlformats.org/drawingml/2006/main" xmlns:r="http://schemas.openxmlformats.org/officeDocument/2006/relationships" xmlns:p="http://schemas.openxmlformats.org/presentationml/2006/main">
+  <p:cSld name="Slide 5">
+    <p:bg>
+      <p:bgPr>
+        <a:solidFill>
+          <a:srgbClr val="1E3A8A"/>
+        </a:solidFill>
+        <a:effectLst/>
+      </p:bgPr>
+    </p:bg>
+    <p:spTree>
+      <p:nvGrpSpPr>
+        <p:cNvPr id="1" name=""/>
+        <p:cNvGrpSpPr/>
+        <p:nvPr/>
+      </p:nvGrpSpPr>
+      <p:grpSpPr>
+        <a:xfrm>
+          <a:off x="0" y="0"/>
+          <a:ext cx="0" cy="0"/>
+          <a:chOff x="0" y="0"/>
+          <a:chExt cx="0" cy="0"/>
+        </a:xfrm>
+      </p:grpSpPr>
+      <p:sp>
+        <p:nvSpPr>
+          <p:cNvPr id="2" name="Text 0"/>
+          <p:cNvSpPr/>
+          <p:nvPr/>
+        </p:nvSpPr>
+        <p:spPr>
+          <a:xfrm>
+            <a:off x="640080" y="2148840"/>
+            <a:ext cx="10881360" cy="2560320"/>
+          </a:xfrm>
+          <a:prstGeom prst="rect">
+            <a:avLst/>
+          </a:prstGeom>
+          <a:noFill/>
+          <a:ln/>
+        </p:spPr>
+        <p:txBody>
+          <a:bodyPr wrap="square" lIns="0" tIns="0" rIns="0" bIns="0" rtlCol="0" anchor="ctr"/>
+          <a:lstStyle/>
+          <a:p>
+            <a:pPr marL="0" indent="0" algn="ctr">
+              <a:buNone/>
+            </a:pPr>
+            <a:r>
+              <a:rPr lang="en-US" sz="4400" b="1" kern="0" spc="-120" dirty="0">
+                <a:solidFill>
+                  <a:srgbClr val="FFFFFF"/>
+                </a:solidFill>
+                <a:latin typeface="Segoe UI" pitchFamily="34" charset="0"/>
+                <a:ea typeface="Segoe UI" pitchFamily="34" charset="-122"/>
+                <a:cs typeface="Segoe UI" pitchFamily="34" charset="-120"/>
+              </a:rPr>
+              <a:t>Giảm rủi ro trả lời sai</a:t>
+            </a:r>
+            <a:endParaRPr lang="en-US" sz="4400" dirty="0"/>
+          </a:p>
+          <a:p>
+            <a:pPr marL="0" indent="0" algn="ctr">
+              <a:buNone/>
+            </a:pPr>
+            <a:r>
+              <a:rPr lang="en-US" sz="4400" b="1" kern="0" spc="-120" dirty="0">
+                <a:solidFill>
+                  <a:srgbClr val="FFFFFF"/>
+                </a:solidFill>
+                <a:latin typeface="Segoe UI" pitchFamily="34" charset="0"/>
+                <a:ea typeface="Segoe UI" pitchFamily="34" charset="-122"/>
+                <a:cs typeface="Segoe UI" pitchFamily="34" charset="-120"/>
+              </a:rPr>
+              <a:t>bằng dữ liệu có kiểm soát</a:t>
+            </a:r>
+            <a:endParaRPr lang="en-US" sz="4400" dirty="0"/>
+          </a:p>
+          <a:p>
+            <a:pPr marL="0" indent="0" algn="ctr">
+              <a:buNone/>
+            </a:pPr>
+            <a:r>
+              <a:rPr lang="en-US" sz="4400" b="1" kern="0" spc="-120" dirty="0">
+                <a:solidFill>
+                  <a:srgbClr val="FFFFFF"/>
+                </a:solidFill>
+                <a:latin typeface="Segoe UI" pitchFamily="34" charset="0"/>
+                <a:ea typeface="Segoe UI" pitchFamily="34" charset="-122"/>
+                <a:cs typeface="Segoe UI" pitchFamily="34" charset="-120"/>
+              </a:rPr>
+              <a:t>và hậu kiểm.</a:t>
+            </a:r>
+            <a:endParaRPr lang="en-US" sz="4400" dirty="0"/>
+          </a:p>
+        </p:txBody>
+      </p:sp>
+    </p:spTree>
+  </p:cSld>
+  <p:clrMapOvr>
+    <a:masterClrMapping/>
+  </p:clrMapOvr>
+  <mc:AlternateContent xmlns:mc="http://schemas.openxmlformats.org/markup-compatibility/2006">
+    <mc:Choice xmlns:p159="http://schemas.microsoft.com/office/powerpoint/2015/9/main" xmlns="" Requires="p159">
       <p:transition xmlns:p14="http://schemas.microsoft.com/office/powerpoint/2010/main" spd="med" p14:dur="800">
         <p159:morph option="byObject"/>
       </p:transition>
@@ -3155,6 +5202,7 @@
         <a:solidFill>
           <a:srgbClr val="FFFFFF"/>
         </a:solidFill>
+        <a:effectLst/>
       </p:bgPr>
     </p:bg>
     <p:spTree>
@@ -3192,11 +5240,11 @@
           <a:bodyPr wrap="square" lIns="0" tIns="0" rIns="0" bIns="0" rtlCol="0" anchor="ctr"/>
           <a:lstStyle/>
           <a:p>
-            <a:pPr indent="0" marL="0">
-              <a:buNone/>
-            </a:pPr>
-            <a:r>
-              <a:rPr lang="en-US" sz="1300" b="1" spc="200" kern="0" dirty="0">
+            <a:pPr marL="0" indent="0">
+              <a:buNone/>
+            </a:pPr>
+            <a:r>
+              <a:rPr lang="en-US" sz="1300" b="1" kern="0" spc="200" dirty="0">
                 <a:solidFill>
                   <a:srgbClr val="1D4ED8"/>
                 </a:solidFill>
@@ -3204,7 +5252,7 @@
                 <a:ea typeface="Segoe UI" pitchFamily="34" charset="-122"/>
                 <a:cs typeface="Segoe UI" pitchFamily="34" charset="-120"/>
               </a:rPr>
-              <a:t>TÍNH NĂNG VƯỢT TRỘI</a:t>
+              <a:t>CÁCH TIẾP CẬN KỸ THUẬT</a:t>
             </a:r>
             <a:endParaRPr lang="en-US" sz="1300" dirty="0"/>
           </a:p>
@@ -3231,11 +5279,11 @@
           <a:bodyPr wrap="square" lIns="0" tIns="0" rIns="0" bIns="0" rtlCol="0" anchor="t"/>
           <a:lstStyle/>
           <a:p>
-            <a:pPr indent="0" marL="0">
-              <a:buNone/>
-            </a:pPr>
-            <a:r>
-              <a:rPr lang="en-US" sz="2900" b="1" dirty="0">
+            <a:pPr marL="0" indent="0">
+              <a:buNone/>
+            </a:pPr>
+            <a:r>
+              <a:rPr lang="en-US" sz="2900" b="1" kern="0" spc="-50" dirty="0">
                 <a:solidFill>
                   <a:srgbClr val="0F172A"/>
                 </a:solidFill>
@@ -3243,7 +5291,7 @@
                 <a:ea typeface="Segoe UI" pitchFamily="34" charset="-122"/>
                 <a:cs typeface="Segoe UI" pitchFamily="34" charset="-120"/>
               </a:rPr>
-              <a:t>Phục vụ nhân dân địa phương</a:t>
+              <a:t>4 lớp kiểm soát giảm rủi ro trả lời sai</a:t>
             </a:r>
             <a:endParaRPr lang="en-US" sz="2900" dirty="0"/>
           </a:p>
@@ -3251,18 +5299,57 @@
       </p:sp>
       <p:sp>
         <p:nvSpPr>
-          <p:cNvPr id="4" name="Shape 2"/>
-          <p:cNvSpPr/>
-          <p:nvPr/>
-        </p:nvSpPr>
-        <p:spPr>
-          <a:xfrm>
-            <a:off x="640080" y="1874520"/>
-            <a:ext cx="5212080" cy="1828800"/>
+          <p:cNvPr id="4" name="Text 2"/>
+          <p:cNvSpPr/>
+          <p:nvPr/>
+        </p:nvSpPr>
+        <p:spPr>
+          <a:xfrm>
+            <a:off x="640080" y="1600200"/>
+            <a:ext cx="10881360" cy="548640"/>
+          </a:xfrm>
+          <a:prstGeom prst="rect">
+            <a:avLst/>
+          </a:prstGeom>
+          <a:noFill/>
+          <a:ln/>
+        </p:spPr>
+        <p:txBody>
+          <a:bodyPr wrap="square" lIns="0" tIns="0" rIns="0" bIns="0" rtlCol="0" anchor="ctr"/>
+          <a:lstStyle/>
+          <a:p>
+            <a:pPr marL="0" indent="0">
+              <a:buNone/>
+            </a:pPr>
+            <a:r>
+              <a:rPr lang="en-US" sz="1600" dirty="0">
+                <a:solidFill>
+                  <a:srgbClr val="334155"/>
+                </a:solidFill>
+                <a:latin typeface="Segoe UI" pitchFamily="34" charset="0"/>
+                <a:ea typeface="Segoe UI" pitchFamily="34" charset="-122"/>
+                <a:cs typeface="Segoe UI" pitchFamily="34" charset="-120"/>
+              </a:rPr>
+              <a:t>Không có phép màu — đây là quy trình kiểm soát gồm 4 lớp, mỗi lớp chặn một kiểu sai khác nhau:</a:t>
+            </a:r>
+            <a:endParaRPr lang="en-US" sz="1600" dirty="0"/>
+          </a:p>
+        </p:txBody>
+      </p:sp>
+      <p:sp>
+        <p:nvSpPr>
+          <p:cNvPr id="5" name="Shape 3"/>
+          <p:cNvSpPr/>
+          <p:nvPr/>
+        </p:nvSpPr>
+        <p:spPr>
+          <a:xfrm>
+            <a:off x="640080" y="2468880"/>
+            <a:ext cx="2103120" cy="3383280"/>
           </a:xfrm>
           <a:prstGeom prst="roundRect">
             <a:avLst>
-              <a:gd name="adj" fmla="val 5000"/>
+              <a:gd name="adj" fmla="val 5217"/>
             </a:avLst>
           </a:prstGeom>
           <a:solidFill>
@@ -3275,7 +5362,7 @@
             <a:prstDash val="solid"/>
           </a:ln>
           <a:effectLst>
-            <a:outerShdw sx="100000" sy="100000" kx="0" ky="0" algn="bl" rotWithShape="0" blurRad="88900" dist="25400" dir="8100000">
+            <a:outerShdw blurRad="88900" dist="25400" dir="8100000" algn="bl" rotWithShape="0">
               <a:srgbClr val="94A3B8">
                 <a:alpha val="28000"/>
               </a:srgbClr>
@@ -3285,14 +5372,14 @@
       </p:sp>
       <p:sp>
         <p:nvSpPr>
-          <p:cNvPr id="5" name="Shape 3"/>
-          <p:cNvSpPr/>
-          <p:nvPr/>
-        </p:nvSpPr>
-        <p:spPr>
-          <a:xfrm>
-            <a:off x="960120" y="2194560"/>
-            <a:ext cx="822960" cy="822960"/>
+          <p:cNvPr id="6" name="Shape 4"/>
+          <p:cNvSpPr/>
+          <p:nvPr/>
+        </p:nvSpPr>
+        <p:spPr>
+          <a:xfrm>
+            <a:off x="1143000" y="2761488"/>
+            <a:ext cx="1097280" cy="1097280"/>
           </a:xfrm>
           <a:prstGeom prst="ellipse">
             <a:avLst/>
@@ -3302,8 +5389,8 @@
           </a:solidFill>
           <a:ln/>
           <a:effectLst>
-            <a:outerShdw sx="100000" sy="100000" kx="0" ky="0" algn="bl" rotWithShape="0" blurRad="114300" dist="38100" dir="8100000">
-              <a:srgbClr val="1e40af">
+            <a:outerShdw blurRad="114300" dist="38100" dir="8100000" algn="bl" rotWithShape="0">
+              <a:srgbClr val="1E40AF">
                 <a:alpha val="20000"/>
               </a:srgbClr>
             </a:outerShdw>
@@ -3312,22 +5399,22 @@
       </p:sp>
       <p:pic>
         <p:nvPicPr>
-          <p:cNvPr id="6" name="Image 0" descr="preencoded.png">    </p:cNvPr>
+          <p:cNvPr id="7" name="Image 0" descr="preencoded.png"/>
           <p:cNvPicPr>
             <a:picLocks noChangeAspect="1"/>
           </p:cNvPicPr>
           <p:nvPr/>
         </p:nvPicPr>
         <p:blipFill>
-          <a:blip r:embed="rId1"/>
+          <a:blip r:embed="rId3"/>
           <a:stretch>
             <a:fillRect/>
           </a:stretch>
         </p:blipFill>
         <p:spPr>
           <a:xfrm>
-            <a:off x="1182319" y="2416759"/>
-            <a:ext cx="378562" cy="378562"/>
+            <a:off x="1439266" y="3057754"/>
+            <a:ext cx="504749" cy="504749"/>
           </a:xfrm>
           <a:prstGeom prst="rect">
             <a:avLst/>
@@ -3336,30 +5423,30 @@
       </p:pic>
       <p:sp>
         <p:nvSpPr>
-          <p:cNvPr id="7" name="Text 4"/>
-          <p:cNvSpPr/>
-          <p:nvPr/>
-        </p:nvSpPr>
-        <p:spPr>
-          <a:xfrm>
-            <a:off x="1965960" y="2167128"/>
-            <a:ext cx="3657600" cy="457200"/>
-          </a:xfrm>
-          <a:prstGeom prst="rect">
-            <a:avLst/>
-          </a:prstGeom>
-          <a:noFill/>
-          <a:ln/>
-        </p:spPr>
-        <p:txBody>
-          <a:bodyPr wrap="square" lIns="0" tIns="0" rIns="0" bIns="0" rtlCol="0" anchor="ctr"/>
-          <a:lstStyle/>
-          <a:p>
-            <a:pPr indent="0" marL="0">
-              <a:buNone/>
-            </a:pPr>
-            <a:r>
-              <a:rPr lang="en-US" sz="1800" b="1" dirty="0">
+          <p:cNvPr id="8" name="Text 5"/>
+          <p:cNvSpPr/>
+          <p:nvPr/>
+        </p:nvSpPr>
+        <p:spPr>
+          <a:xfrm>
+            <a:off x="868680" y="4023360"/>
+            <a:ext cx="1645920" cy="731520"/>
+          </a:xfrm>
+          <a:prstGeom prst="rect">
+            <a:avLst/>
+          </a:prstGeom>
+          <a:noFill/>
+          <a:ln/>
+        </p:spPr>
+        <p:txBody>
+          <a:bodyPr wrap="square" lIns="0" tIns="0" rIns="0" bIns="0" rtlCol="0" anchor="t"/>
+          <a:lstStyle/>
+          <a:p>
+            <a:pPr marL="0" indent="0" algn="ctr">
+              <a:buNone/>
+            </a:pPr>
+            <a:r>
+              <a:rPr lang="en-US" sz="1900" b="1" dirty="0">
                 <a:solidFill>
                   <a:srgbClr val="0F172A"/>
                 </a:solidFill>
@@ -3367,38 +5454,38 @@
                 <a:ea typeface="Segoe UI" pitchFamily="34" charset="-122"/>
                 <a:cs typeface="Segoe UI" pitchFamily="34" charset="-120"/>
               </a:rPr>
-              <a:t>Thân thiện dễ dùng</a:t>
-            </a:r>
-            <a:endParaRPr lang="en-US" sz="1800" dirty="0"/>
-          </a:p>
-        </p:txBody>
-      </p:sp>
-      <p:sp>
-        <p:nvSpPr>
-          <p:cNvPr id="8" name="Text 5"/>
-          <p:cNvSpPr/>
-          <p:nvPr/>
-        </p:nvSpPr>
-        <p:spPr>
-          <a:xfrm>
-            <a:off x="1965960" y="2651760"/>
-            <a:ext cx="3657600" cy="914400"/>
-          </a:xfrm>
-          <a:prstGeom prst="rect">
-            <a:avLst/>
-          </a:prstGeom>
-          <a:noFill/>
-          <a:ln/>
-        </p:spPr>
-        <p:txBody>
-          <a:bodyPr wrap="square" lIns="0" tIns="0" rIns="0" bIns="0" rtlCol="0" anchor="ctr"/>
-          <a:lstStyle/>
-          <a:p>
-            <a:pPr indent="0" marL="0">
-              <a:buNone/>
-            </a:pPr>
-            <a:r>
-              <a:rPr lang="en-US" sz="1400" dirty="0">
+              <a:t>Truy hồi có kiểm soát</a:t>
+            </a:r>
+            <a:endParaRPr lang="en-US" sz="1900" dirty="0"/>
+          </a:p>
+        </p:txBody>
+      </p:sp>
+      <p:sp>
+        <p:nvSpPr>
+          <p:cNvPr id="9" name="Text 6"/>
+          <p:cNvSpPr/>
+          <p:nvPr/>
+        </p:nvSpPr>
+        <p:spPr>
+          <a:xfrm>
+            <a:off x="914400" y="4791456"/>
+            <a:ext cx="1554480" cy="1005840"/>
+          </a:xfrm>
+          <a:prstGeom prst="rect">
+            <a:avLst/>
+          </a:prstGeom>
+          <a:noFill/>
+          <a:ln/>
+        </p:spPr>
+        <p:txBody>
+          <a:bodyPr wrap="square" lIns="0" tIns="0" rIns="0" bIns="0" rtlCol="0" anchor="t"/>
+          <a:lstStyle/>
+          <a:p>
+            <a:pPr marL="0" indent="0" algn="ctr">
+              <a:buNone/>
+            </a:pPr>
+            <a:r>
+              <a:rPr lang="en-US" sz="1550" dirty="0">
                 <a:solidFill>
                   <a:srgbClr val="334155"/>
                 </a:solidFill>
@@ -3406,26 +5493,50 @@
                 <a:ea typeface="Segoe UI" pitchFamily="34" charset="-122"/>
                 <a:cs typeface="Segoe UI" pitchFamily="34" charset="-120"/>
               </a:rPr>
-              <a:t>Giao diện tối giản, tối ưu cho điện thoại di động.</a:t>
-            </a:r>
-            <a:endParaRPr lang="en-US" sz="1400" dirty="0"/>
-          </a:p>
-        </p:txBody>
-      </p:sp>
-      <p:sp>
-        <p:nvSpPr>
-          <p:cNvPr id="9" name="Shape 6"/>
-          <p:cNvSpPr/>
-          <p:nvPr/>
-        </p:nvSpPr>
-        <p:spPr>
-          <a:xfrm>
-            <a:off x="6309360" y="1874520"/>
-            <a:ext cx="5212080" cy="1828800"/>
+              <a:t>Ưu tiên nguồn đã qua rà soát nội bộ, đúng thẩm quyền và cấp thực hiện.</a:t>
+            </a:r>
+            <a:endParaRPr lang="en-US" sz="1550" dirty="0"/>
+          </a:p>
+        </p:txBody>
+      </p:sp>
+      <p:pic>
+        <p:nvPicPr>
+          <p:cNvPr id="10" name="Image 1" descr="preencoded.png"/>
+          <p:cNvPicPr>
+            <a:picLocks noChangeAspect="1"/>
+          </p:cNvPicPr>
+          <p:nvPr/>
+        </p:nvPicPr>
+        <p:blipFill>
+          <a:blip r:embed="rId4"/>
+          <a:stretch>
+            <a:fillRect/>
+          </a:stretch>
+        </p:blipFill>
+        <p:spPr>
+          <a:xfrm>
+            <a:off x="2944368" y="3913632"/>
+            <a:ext cx="420624" cy="420624"/>
+          </a:xfrm>
+          <a:prstGeom prst="rect">
+            <a:avLst/>
+          </a:prstGeom>
+        </p:spPr>
+      </p:pic>
+      <p:sp>
+        <p:nvSpPr>
+          <p:cNvPr id="11" name="Shape 7"/>
+          <p:cNvSpPr/>
+          <p:nvPr/>
+        </p:nvSpPr>
+        <p:spPr>
+          <a:xfrm>
+            <a:off x="3566160" y="2468880"/>
+            <a:ext cx="2103120" cy="3383280"/>
           </a:xfrm>
           <a:prstGeom prst="roundRect">
             <a:avLst>
-              <a:gd name="adj" fmla="val 5000"/>
+              <a:gd name="adj" fmla="val 5217"/>
             </a:avLst>
           </a:prstGeom>
           <a:solidFill>
@@ -3438,7 +5549,7 @@
             <a:prstDash val="solid"/>
           </a:ln>
           <a:effectLst>
-            <a:outerShdw sx="100000" sy="100000" kx="0" ky="0" algn="bl" rotWithShape="0" blurRad="88900" dist="25400" dir="8100000">
+            <a:outerShdw blurRad="88900" dist="25400" dir="8100000" algn="bl" rotWithShape="0">
               <a:srgbClr val="94A3B8">
                 <a:alpha val="28000"/>
               </a:srgbClr>
@@ -3448,25 +5559,25 @@
       </p:sp>
       <p:sp>
         <p:nvSpPr>
-          <p:cNvPr id="10" name="Shape 7"/>
-          <p:cNvSpPr/>
-          <p:nvPr/>
-        </p:nvSpPr>
-        <p:spPr>
-          <a:xfrm>
-            <a:off x="6629400" y="2194560"/>
-            <a:ext cx="822960" cy="822960"/>
+          <p:cNvPr id="12" name="Shape 8"/>
+          <p:cNvSpPr/>
+          <p:nvPr/>
+        </p:nvSpPr>
+        <p:spPr>
+          <a:xfrm>
+            <a:off x="4069080" y="2761488"/>
+            <a:ext cx="1097280" cy="1097280"/>
           </a:xfrm>
           <a:prstGeom prst="ellipse">
             <a:avLst/>
           </a:prstGeom>
           <a:solidFill>
-            <a:srgbClr val="334155"/>
+            <a:srgbClr val="1D4ED8"/>
           </a:solidFill>
           <a:ln/>
           <a:effectLst>
-            <a:outerShdw sx="100000" sy="100000" kx="0" ky="0" algn="bl" rotWithShape="0" blurRad="114300" dist="38100" dir="8100000">
-              <a:srgbClr val="1e40af">
+            <a:outerShdw blurRad="114300" dist="38100" dir="8100000" algn="bl" rotWithShape="0">
+              <a:srgbClr val="1E40AF">
                 <a:alpha val="20000"/>
               </a:srgbClr>
             </a:outerShdw>
@@ -3475,22 +5586,22 @@
       </p:sp>
       <p:pic>
         <p:nvPicPr>
-          <p:cNvPr id="11" name="Image 1" descr="preencoded.png">    </p:cNvPr>
+          <p:cNvPr id="13" name="Image 2" descr="preencoded.png"/>
           <p:cNvPicPr>
             <a:picLocks noChangeAspect="1"/>
           </p:cNvPicPr>
           <p:nvPr/>
         </p:nvPicPr>
         <p:blipFill>
-          <a:blip r:embed="rId2"/>
+          <a:blip r:embed="rId5"/>
           <a:stretch>
             <a:fillRect/>
           </a:stretch>
         </p:blipFill>
         <p:spPr>
           <a:xfrm>
-            <a:off x="6851599" y="2416759"/>
-            <a:ext cx="378562" cy="378562"/>
+            <a:off x="4365346" y="3057754"/>
+            <a:ext cx="504749" cy="504749"/>
           </a:xfrm>
           <a:prstGeom prst="rect">
             <a:avLst/>
@@ -3499,30 +5610,30 @@
       </p:pic>
       <p:sp>
         <p:nvSpPr>
-          <p:cNvPr id="12" name="Text 8"/>
-          <p:cNvSpPr/>
-          <p:nvPr/>
-        </p:nvSpPr>
-        <p:spPr>
-          <a:xfrm>
-            <a:off x="7635240" y="2167128"/>
-            <a:ext cx="3657600" cy="457200"/>
-          </a:xfrm>
-          <a:prstGeom prst="rect">
-            <a:avLst/>
-          </a:prstGeom>
-          <a:noFill/>
-          <a:ln/>
-        </p:spPr>
-        <p:txBody>
-          <a:bodyPr wrap="square" lIns="0" tIns="0" rIns="0" bIns="0" rtlCol="0" anchor="ctr"/>
-          <a:lstStyle/>
-          <a:p>
-            <a:pPr indent="0" marL="0">
-              <a:buNone/>
-            </a:pPr>
-            <a:r>
-              <a:rPr lang="en-US" sz="1800" b="1" dirty="0">
+          <p:cNvPr id="14" name="Text 9"/>
+          <p:cNvSpPr/>
+          <p:nvPr/>
+        </p:nvSpPr>
+        <p:spPr>
+          <a:xfrm>
+            <a:off x="3794760" y="4023360"/>
+            <a:ext cx="1645920" cy="731520"/>
+          </a:xfrm>
+          <a:prstGeom prst="rect">
+            <a:avLst/>
+          </a:prstGeom>
+          <a:noFill/>
+          <a:ln/>
+        </p:spPr>
+        <p:txBody>
+          <a:bodyPr wrap="square" lIns="0" tIns="0" rIns="0" bIns="0" rtlCol="0" anchor="t"/>
+          <a:lstStyle/>
+          <a:p>
+            <a:pPr marL="0" indent="0" algn="ctr">
+              <a:buNone/>
+            </a:pPr>
+            <a:r>
+              <a:rPr lang="en-US" sz="1900" b="1" dirty="0">
                 <a:solidFill>
                   <a:srgbClr val="0F172A"/>
                 </a:solidFill>
@@ -3530,38 +5641,38 @@
                 <a:ea typeface="Segoe UI" pitchFamily="34" charset="-122"/>
                 <a:cs typeface="Segoe UI" pitchFamily="34" charset="-120"/>
               </a:rPr>
-              <a:t>Hỗ trợ Ngoại ngữ</a:t>
-            </a:r>
-            <a:endParaRPr lang="en-US" sz="1800" dirty="0"/>
-          </a:p>
-        </p:txBody>
-      </p:sp>
-      <p:sp>
-        <p:nvSpPr>
-          <p:cNvPr id="13" name="Text 9"/>
-          <p:cNvSpPr/>
-          <p:nvPr/>
-        </p:nvSpPr>
-        <p:spPr>
-          <a:xfrm>
-            <a:off x="7635240" y="2651760"/>
-            <a:ext cx="3657600" cy="914400"/>
-          </a:xfrm>
-          <a:prstGeom prst="rect">
-            <a:avLst/>
-          </a:prstGeom>
-          <a:noFill/>
-          <a:ln/>
-        </p:spPr>
-        <p:txBody>
-          <a:bodyPr wrap="square" lIns="0" tIns="0" rIns="0" bIns="0" rtlCol="0" anchor="ctr"/>
-          <a:lstStyle/>
-          <a:p>
-            <a:pPr indent="0" marL="0">
-              <a:buNone/>
-            </a:pPr>
-            <a:r>
-              <a:rPr lang="en-US" sz="1400" dirty="0">
+              <a:t>AI chấm điểm lại</a:t>
+            </a:r>
+            <a:endParaRPr lang="en-US" sz="1900" dirty="0"/>
+          </a:p>
+        </p:txBody>
+      </p:sp>
+      <p:sp>
+        <p:nvSpPr>
+          <p:cNvPr id="15" name="Text 10"/>
+          <p:cNvSpPr/>
+          <p:nvPr/>
+        </p:nvSpPr>
+        <p:spPr>
+          <a:xfrm>
+            <a:off x="3840480" y="4791456"/>
+            <a:ext cx="1554480" cy="1005840"/>
+          </a:xfrm>
+          <a:prstGeom prst="rect">
+            <a:avLst/>
+          </a:prstGeom>
+          <a:noFill/>
+          <a:ln/>
+        </p:spPr>
+        <p:txBody>
+          <a:bodyPr wrap="square" lIns="0" tIns="0" rIns="0" bIns="0" rtlCol="0" anchor="t"/>
+          <a:lstStyle/>
+          <a:p>
+            <a:pPr marL="0" indent="0" algn="ctr">
+              <a:buNone/>
+            </a:pPr>
+            <a:r>
+              <a:rPr lang="en-US" sz="1550" dirty="0">
                 <a:solidFill>
                   <a:srgbClr val="334155"/>
                 </a:solidFill>
@@ -3569,26 +5680,50 @@
                 <a:ea typeface="Segoe UI" pitchFamily="34" charset="-122"/>
                 <a:cs typeface="Segoe UI" pitchFamily="34" charset="-120"/>
               </a:rPr>
-              <a:t>Dịch Tiếng Anh/Trung/Hàn cho người nước ngoài.</a:t>
-            </a:r>
-            <a:endParaRPr lang="en-US" sz="1400" dirty="0"/>
-          </a:p>
-        </p:txBody>
-      </p:sp>
-      <p:sp>
-        <p:nvSpPr>
-          <p:cNvPr id="14" name="Shape 10"/>
-          <p:cNvSpPr/>
-          <p:nvPr/>
-        </p:nvSpPr>
-        <p:spPr>
-          <a:xfrm>
-            <a:off x="640080" y="3931920"/>
-            <a:ext cx="5212080" cy="1828800"/>
+              <a:t>Mô hình thứ hai rà soát, loại tài liệu gần giống nhưng sai ngữ cảnh.</a:t>
+            </a:r>
+            <a:endParaRPr lang="en-US" sz="1550" dirty="0"/>
+          </a:p>
+        </p:txBody>
+      </p:sp>
+      <p:pic>
+        <p:nvPicPr>
+          <p:cNvPr id="16" name="Image 3" descr="preencoded.png"/>
+          <p:cNvPicPr>
+            <a:picLocks noChangeAspect="1"/>
+          </p:cNvPicPr>
+          <p:nvPr/>
+        </p:nvPicPr>
+        <p:blipFill>
+          <a:blip r:embed="rId4"/>
+          <a:stretch>
+            <a:fillRect/>
+          </a:stretch>
+        </p:blipFill>
+        <p:spPr>
+          <a:xfrm>
+            <a:off x="5870448" y="3913632"/>
+            <a:ext cx="420624" cy="420624"/>
+          </a:xfrm>
+          <a:prstGeom prst="rect">
+            <a:avLst/>
+          </a:prstGeom>
+        </p:spPr>
+      </p:pic>
+      <p:sp>
+        <p:nvSpPr>
+          <p:cNvPr id="17" name="Shape 11"/>
+          <p:cNvSpPr/>
+          <p:nvPr/>
+        </p:nvSpPr>
+        <p:spPr>
+          <a:xfrm>
+            <a:off x="6492240" y="2468880"/>
+            <a:ext cx="2103120" cy="3383280"/>
           </a:xfrm>
           <a:prstGeom prst="roundRect">
             <a:avLst>
-              <a:gd name="adj" fmla="val 5000"/>
+              <a:gd name="adj" fmla="val 5217"/>
             </a:avLst>
           </a:prstGeom>
           <a:solidFill>
@@ -3601,7 +5736,7 @@
             <a:prstDash val="solid"/>
           </a:ln>
           <a:effectLst>
-            <a:outerShdw sx="100000" sy="100000" kx="0" ky="0" algn="bl" rotWithShape="0" blurRad="88900" dist="25400" dir="8100000">
+            <a:outerShdw blurRad="88900" dist="25400" dir="8100000" algn="bl" rotWithShape="0">
               <a:srgbClr val="94A3B8">
                 <a:alpha val="28000"/>
               </a:srgbClr>
@@ -3611,57 +5746,81 @@
       </p:sp>
       <p:sp>
         <p:nvSpPr>
-          <p:cNvPr id="15" name="Shape 11"/>
-          <p:cNvSpPr/>
-          <p:nvPr/>
-        </p:nvSpPr>
-        <p:spPr>
-          <a:xfrm>
-            <a:off x="960120" y="4251960"/>
-            <a:ext cx="822960" cy="822960"/>
+          <p:cNvPr id="18" name="Shape 12"/>
+          <p:cNvSpPr/>
+          <p:nvPr/>
+        </p:nvSpPr>
+        <p:spPr>
+          <a:xfrm>
+            <a:off x="6995160" y="2761488"/>
+            <a:ext cx="1097280" cy="1097280"/>
           </a:xfrm>
           <a:prstGeom prst="ellipse">
             <a:avLst/>
           </a:prstGeom>
           <a:solidFill>
-            <a:srgbClr val="059669"/>
+            <a:srgbClr val="1D4ED8"/>
           </a:solidFill>
           <a:ln/>
           <a:effectLst>
-            <a:outerShdw sx="100000" sy="100000" kx="0" ky="0" algn="bl" rotWithShape="0" blurRad="114300" dist="38100" dir="8100000">
-              <a:srgbClr val="1e40af">
+            <a:outerShdw blurRad="114300" dist="38100" dir="8100000" algn="bl" rotWithShape="0">
+              <a:srgbClr val="1E40AF">
                 <a:alpha val="20000"/>
               </a:srgbClr>
             </a:outerShdw>
           </a:effectLst>
         </p:spPr>
       </p:sp>
-      <p:sp>
-        <p:nvSpPr>
-          <p:cNvPr id="16" name="Text 12"/>
-          <p:cNvSpPr/>
-          <p:nvPr/>
-        </p:nvSpPr>
-        <p:spPr>
-          <a:xfrm>
-            <a:off x="1965960" y="4224528"/>
-            <a:ext cx="3657600" cy="457200"/>
-          </a:xfrm>
-          <a:prstGeom prst="rect">
-            <a:avLst/>
-          </a:prstGeom>
-          <a:noFill/>
-          <a:ln/>
-        </p:spPr>
-        <p:txBody>
-          <a:bodyPr wrap="square" lIns="0" tIns="0" rIns="0" bIns="0" rtlCol="0" anchor="ctr"/>
-          <a:lstStyle/>
-          <a:p>
-            <a:pPr indent="0" marL="0">
-              <a:buNone/>
-            </a:pPr>
-            <a:r>
-              <a:rPr lang="en-US" sz="1800" b="1" dirty="0">
+      <p:pic>
+        <p:nvPicPr>
+          <p:cNvPr id="19" name="Image 4" descr="preencoded.png"/>
+          <p:cNvPicPr>
+            <a:picLocks noChangeAspect="1"/>
+          </p:cNvPicPr>
+          <p:nvPr/>
+        </p:nvPicPr>
+        <p:blipFill>
+          <a:blip r:embed="rId6"/>
+          <a:stretch>
+            <a:fillRect/>
+          </a:stretch>
+        </p:blipFill>
+        <p:spPr>
+          <a:xfrm>
+            <a:off x="7291426" y="3057754"/>
+            <a:ext cx="504749" cy="504749"/>
+          </a:xfrm>
+          <a:prstGeom prst="rect">
+            <a:avLst/>
+          </a:prstGeom>
+        </p:spPr>
+      </p:pic>
+      <p:sp>
+        <p:nvSpPr>
+          <p:cNvPr id="20" name="Text 13"/>
+          <p:cNvSpPr/>
+          <p:nvPr/>
+        </p:nvSpPr>
+        <p:spPr>
+          <a:xfrm>
+            <a:off x="6720840" y="4023360"/>
+            <a:ext cx="1645920" cy="731520"/>
+          </a:xfrm>
+          <a:prstGeom prst="rect">
+            <a:avLst/>
+          </a:prstGeom>
+          <a:noFill/>
+          <a:ln/>
+        </p:spPr>
+        <p:txBody>
+          <a:bodyPr wrap="square" lIns="0" tIns="0" rIns="0" bIns="0" rtlCol="0" anchor="t"/>
+          <a:lstStyle/>
+          <a:p>
+            <a:pPr marL="0" indent="0" algn="ctr">
+              <a:buNone/>
+            </a:pPr>
+            <a:r>
+              <a:rPr lang="en-US" sz="1900" b="1" dirty="0">
                 <a:solidFill>
                   <a:srgbClr val="0F172A"/>
                 </a:solidFill>
@@ -3669,38 +5828,38 @@
                 <a:ea typeface="Segoe UI" pitchFamily="34" charset="-122"/>
                 <a:cs typeface="Segoe UI" pitchFamily="34" charset="-120"/>
               </a:rPr>
-              <a:t>Quản trị linh hoạt</a:t>
-            </a:r>
-            <a:endParaRPr lang="en-US" sz="1800" dirty="0"/>
-          </a:p>
-        </p:txBody>
-      </p:sp>
-      <p:sp>
-        <p:nvSpPr>
-          <p:cNvPr id="17" name="Text 13"/>
-          <p:cNvSpPr/>
-          <p:nvPr/>
-        </p:nvSpPr>
-        <p:spPr>
-          <a:xfrm>
-            <a:off x="1965960" y="4709160"/>
-            <a:ext cx="3657600" cy="914400"/>
-          </a:xfrm>
-          <a:prstGeom prst="rect">
-            <a:avLst/>
-          </a:prstGeom>
-          <a:noFill/>
-          <a:ln/>
-        </p:spPr>
-        <p:txBody>
-          <a:bodyPr wrap="square" lIns="0" tIns="0" rIns="0" bIns="0" rtlCol="0" anchor="ctr"/>
-          <a:lstStyle/>
-          <a:p>
-            <a:pPr indent="0" marL="0">
-              <a:buNone/>
-            </a:pPr>
-            <a:r>
-              <a:rPr lang="en-US" sz="1400" dirty="0">
+              <a:t>Bám theo căn cứ</a:t>
+            </a:r>
+            <a:endParaRPr lang="en-US" sz="1900" dirty="0"/>
+          </a:p>
+        </p:txBody>
+      </p:sp>
+      <p:sp>
+        <p:nvSpPr>
+          <p:cNvPr id="21" name="Text 14"/>
+          <p:cNvSpPr/>
+          <p:nvPr/>
+        </p:nvSpPr>
+        <p:spPr>
+          <a:xfrm>
+            <a:off x="6766560" y="4791456"/>
+            <a:ext cx="1554480" cy="1005840"/>
+          </a:xfrm>
+          <a:prstGeom prst="rect">
+            <a:avLst/>
+          </a:prstGeom>
+          <a:noFill/>
+          <a:ln/>
+        </p:spPr>
+        <p:txBody>
+          <a:bodyPr wrap="square" lIns="0" tIns="0" rIns="0" bIns="0" rtlCol="0" anchor="t"/>
+          <a:lstStyle/>
+          <a:p>
+            <a:pPr marL="0" indent="0" algn="ctr">
+              <a:buNone/>
+            </a:pPr>
+            <a:r>
+              <a:rPr lang="en-US" sz="1550" dirty="0">
                 <a:solidFill>
                   <a:srgbClr val="334155"/>
                 </a:solidFill>
@@ -3708,30 +5867,54 @@
                 <a:ea typeface="Segoe UI" pitchFamily="34" charset="-122"/>
                 <a:cs typeface="Segoe UI" pitchFamily="34" charset="-120"/>
               </a:rPr>
-              <a:t>Cán bộ cập nhật dữ liệu tự động qua Google Sheets.</a:t>
-            </a:r>
-            <a:endParaRPr lang="en-US" sz="1400" dirty="0"/>
-          </a:p>
-        </p:txBody>
-      </p:sp>
-      <p:sp>
-        <p:nvSpPr>
-          <p:cNvPr id="18" name="Shape 14"/>
-          <p:cNvSpPr/>
-          <p:nvPr/>
-        </p:nvSpPr>
-        <p:spPr>
-          <a:xfrm>
-            <a:off x="6309360" y="3931920"/>
-            <a:ext cx="5212080" cy="1828800"/>
+              <a:t>Bám tài liệu truy hồi được; thiếu căn cứ thì báo không đủ cơ sở.</a:t>
+            </a:r>
+            <a:endParaRPr lang="en-US" sz="1550" dirty="0"/>
+          </a:p>
+        </p:txBody>
+      </p:sp>
+      <p:pic>
+        <p:nvPicPr>
+          <p:cNvPr id="22" name="Image 5" descr="preencoded.png"/>
+          <p:cNvPicPr>
+            <a:picLocks noChangeAspect="1"/>
+          </p:cNvPicPr>
+          <p:nvPr/>
+        </p:nvPicPr>
+        <p:blipFill>
+          <a:blip r:embed="rId4"/>
+          <a:stretch>
+            <a:fillRect/>
+          </a:stretch>
+        </p:blipFill>
+        <p:spPr>
+          <a:xfrm>
+            <a:off x="8796528" y="3913632"/>
+            <a:ext cx="420624" cy="420624"/>
+          </a:xfrm>
+          <a:prstGeom prst="rect">
+            <a:avLst/>
+          </a:prstGeom>
+        </p:spPr>
+      </p:pic>
+      <p:sp>
+        <p:nvSpPr>
+          <p:cNvPr id="23" name="Shape 15"/>
+          <p:cNvSpPr/>
+          <p:nvPr/>
+        </p:nvSpPr>
+        <p:spPr>
+          <a:xfrm>
+            <a:off x="9418320" y="2468880"/>
+            <a:ext cx="2103120" cy="3383280"/>
           </a:xfrm>
           <a:prstGeom prst="roundRect">
             <a:avLst>
-              <a:gd name="adj" fmla="val 5000"/>
+              <a:gd name="adj" fmla="val 5217"/>
             </a:avLst>
           </a:prstGeom>
           <a:solidFill>
-            <a:srgbClr val="F8FAFC"/>
+            <a:srgbClr val="1E3A8A"/>
           </a:solidFill>
           <a:ln w="12700">
             <a:solidFill>
@@ -3740,7 +5923,7 @@
             <a:prstDash val="solid"/>
           </a:ln>
           <a:effectLst>
-            <a:outerShdw sx="100000" sy="100000" kx="0" ky="0" algn="bl" rotWithShape="0" blurRad="88900" dist="25400" dir="8100000">
+            <a:outerShdw blurRad="88900" dist="25400" dir="8100000" algn="bl" rotWithShape="0">
               <a:srgbClr val="94A3B8">
                 <a:alpha val="28000"/>
               </a:srgbClr>
@@ -3750,25 +5933,25 @@
       </p:sp>
       <p:sp>
         <p:nvSpPr>
-          <p:cNvPr id="19" name="Shape 15"/>
-          <p:cNvSpPr/>
-          <p:nvPr/>
-        </p:nvSpPr>
-        <p:spPr>
-          <a:xfrm>
-            <a:off x="6629400" y="4251960"/>
-            <a:ext cx="822960" cy="822960"/>
+          <p:cNvPr id="24" name="Shape 16"/>
+          <p:cNvSpPr/>
+          <p:nvPr/>
+        </p:nvSpPr>
+        <p:spPr>
+          <a:xfrm>
+            <a:off x="9921240" y="2761488"/>
+            <a:ext cx="1097280" cy="1097280"/>
           </a:xfrm>
           <a:prstGeom prst="ellipse">
             <a:avLst/>
           </a:prstGeom>
           <a:solidFill>
-            <a:srgbClr val="CC0000"/>
+            <a:srgbClr val="0B7A75"/>
           </a:solidFill>
           <a:ln/>
           <a:effectLst>
-            <a:outerShdw sx="100000" sy="100000" kx="0" ky="0" algn="bl" rotWithShape="0" blurRad="114300" dist="38100" dir="8100000">
-              <a:srgbClr val="1e40af">
+            <a:outerShdw blurRad="114300" dist="38100" dir="8100000" algn="bl" rotWithShape="0">
+              <a:srgbClr val="1E40AF">
                 <a:alpha val="20000"/>
               </a:srgbClr>
             </a:outerShdw>
@@ -3777,22 +5960,22 @@
       </p:sp>
       <p:pic>
         <p:nvPicPr>
-          <p:cNvPr id="20" name="Image 2" descr="preencoded.png">    </p:cNvPr>
+          <p:cNvPr id="25" name="Image 6" descr="preencoded.png"/>
           <p:cNvPicPr>
             <a:picLocks noChangeAspect="1"/>
           </p:cNvPicPr>
           <p:nvPr/>
         </p:nvPicPr>
         <p:blipFill>
-          <a:blip r:embed="rId3"/>
+          <a:blip r:embed="rId7"/>
           <a:stretch>
             <a:fillRect/>
           </a:stretch>
         </p:blipFill>
         <p:spPr>
           <a:xfrm>
-            <a:off x="6851599" y="4474159"/>
-            <a:ext cx="378562" cy="378562"/>
+            <a:off x="10217506" y="3057754"/>
+            <a:ext cx="504749" cy="504749"/>
           </a:xfrm>
           <a:prstGeom prst="rect">
             <a:avLst/>
@@ -3801,14 +5984,119 @@
       </p:pic>
       <p:sp>
         <p:nvSpPr>
-          <p:cNvPr id="21" name="Text 16"/>
-          <p:cNvSpPr/>
-          <p:nvPr/>
-        </p:nvSpPr>
-        <p:spPr>
-          <a:xfrm>
-            <a:off x="7635240" y="4224528"/>
-            <a:ext cx="3657600" cy="457200"/>
+          <p:cNvPr id="26" name="Text 17"/>
+          <p:cNvSpPr/>
+          <p:nvPr/>
+        </p:nvSpPr>
+        <p:spPr>
+          <a:xfrm>
+            <a:off x="9646920" y="4023360"/>
+            <a:ext cx="1645920" cy="731520"/>
+          </a:xfrm>
+          <a:prstGeom prst="rect">
+            <a:avLst/>
+          </a:prstGeom>
+          <a:noFill/>
+          <a:ln/>
+        </p:spPr>
+        <p:txBody>
+          <a:bodyPr wrap="square" lIns="0" tIns="0" rIns="0" bIns="0" rtlCol="0" anchor="t"/>
+          <a:lstStyle/>
+          <a:p>
+            <a:pPr marL="0" indent="0" algn="ctr">
+              <a:buNone/>
+            </a:pPr>
+            <a:r>
+              <a:rPr lang="en-US" sz="1900" b="1" dirty="0">
+                <a:solidFill>
+                  <a:srgbClr val="FFFFFF"/>
+                </a:solidFill>
+                <a:latin typeface="Segoe UI" pitchFamily="34" charset="0"/>
+                <a:ea typeface="Segoe UI" pitchFamily="34" charset="-122"/>
+                <a:cs typeface="Segoe UI" pitchFamily="34" charset="-120"/>
+              </a:rPr>
+              <a:t>Hậu kiểm</a:t>
+            </a:r>
+            <a:endParaRPr lang="en-US" sz="1900" dirty="0"/>
+          </a:p>
+        </p:txBody>
+      </p:sp>
+      <p:sp>
+        <p:nvSpPr>
+          <p:cNvPr id="27" name="Text 18"/>
+          <p:cNvSpPr/>
+          <p:nvPr/>
+        </p:nvSpPr>
+        <p:spPr>
+          <a:xfrm>
+            <a:off x="9692640" y="4791456"/>
+            <a:ext cx="1554480" cy="1005840"/>
+          </a:xfrm>
+          <a:prstGeom prst="rect">
+            <a:avLst/>
+          </a:prstGeom>
+          <a:noFill/>
+          <a:ln/>
+        </p:spPr>
+        <p:txBody>
+          <a:bodyPr wrap="square" lIns="0" tIns="0" rIns="0" bIns="0" rtlCol="0" anchor="t"/>
+          <a:lstStyle/>
+          <a:p>
+            <a:pPr marL="0" indent="0" algn="ctr">
+              <a:buNone/>
+            </a:pPr>
+            <a:r>
+              <a:rPr lang="en-US" sz="1550" dirty="0">
+                <a:solidFill>
+                  <a:srgbClr val="EFF6FF"/>
+                </a:solidFill>
+                <a:latin typeface="Segoe UI" pitchFamily="34" charset="0"/>
+                <a:ea typeface="Segoe UI" pitchFamily="34" charset="-122"/>
+                <a:cs typeface="Segoe UI" pitchFamily="34" charset="-120"/>
+              </a:rPr>
+              <a:t>Đối chiếu số điện thoại, địa chỉ, căn cứ pháp lý với nguồn.</a:t>
+            </a:r>
+            <a:endParaRPr lang="en-US" sz="1550" dirty="0"/>
+          </a:p>
+        </p:txBody>
+      </p:sp>
+      <p:sp>
+        <p:nvSpPr>
+          <p:cNvPr id="28" name="Shape 19"/>
+          <p:cNvSpPr/>
+          <p:nvPr/>
+        </p:nvSpPr>
+        <p:spPr>
+          <a:xfrm>
+            <a:off x="640080" y="5989320"/>
+            <a:ext cx="10881360" cy="548640"/>
+          </a:xfrm>
+          <a:prstGeom prst="roundRect">
+            <a:avLst>
+              <a:gd name="adj" fmla="val 13333"/>
+            </a:avLst>
+          </a:prstGeom>
+          <a:solidFill>
+            <a:srgbClr val="EAF6F5"/>
+          </a:solidFill>
+          <a:ln w="12700">
+            <a:solidFill>
+              <a:srgbClr val="0B7A75"/>
+            </a:solidFill>
+            <a:prstDash val="solid"/>
+          </a:ln>
+        </p:spPr>
+      </p:sp>
+      <p:sp>
+        <p:nvSpPr>
+          <p:cNvPr id="29" name="Text 20"/>
+          <p:cNvSpPr/>
+          <p:nvPr/>
+        </p:nvSpPr>
+        <p:spPr>
+          <a:xfrm>
+            <a:off x="868680" y="5989320"/>
+            <a:ext cx="10424160" cy="548640"/>
           </a:xfrm>
           <a:prstGeom prst="rect">
             <a:avLst/>
@@ -3820,11 +6108,11 @@
           <a:bodyPr wrap="square" lIns="0" tIns="0" rIns="0" bIns="0" rtlCol="0" anchor="ctr"/>
           <a:lstStyle/>
           <a:p>
-            <a:pPr indent="0" marL="0">
-              <a:buNone/>
-            </a:pPr>
-            <a:r>
-              <a:rPr lang="en-US" sz="1800" b="1" dirty="0">
+            <a:pPr marL="0" indent="0">
+              <a:buNone/>
+            </a:pPr>
+            <a:r>
+              <a:rPr lang="en-US" sz="1400" dirty="0">
                 <a:solidFill>
                   <a:srgbClr val="0F172A"/>
                 </a:solidFill>
@@ -3832,46 +6120,7 @@
                 <a:ea typeface="Segoe UI" pitchFamily="34" charset="-122"/>
                 <a:cs typeface="Segoe UI" pitchFamily="34" charset="-120"/>
               </a:rPr>
-              <a:t>Bảo mật</a:t>
-            </a:r>
-            <a:endParaRPr lang="en-US" sz="1800" dirty="0"/>
-          </a:p>
-        </p:txBody>
-      </p:sp>
-      <p:sp>
-        <p:nvSpPr>
-          <p:cNvPr id="22" name="Text 17"/>
-          <p:cNvSpPr/>
-          <p:nvPr/>
-        </p:nvSpPr>
-        <p:spPr>
-          <a:xfrm>
-            <a:off x="7635240" y="4709160"/>
-            <a:ext cx="3657600" cy="914400"/>
-          </a:xfrm>
-          <a:prstGeom prst="rect">
-            <a:avLst/>
-          </a:prstGeom>
-          <a:noFill/>
-          <a:ln/>
-        </p:spPr>
-        <p:txBody>
-          <a:bodyPr wrap="square" lIns="0" tIns="0" rIns="0" bIns="0" rtlCol="0" anchor="ctr"/>
-          <a:lstStyle/>
-          <a:p>
-            <a:pPr indent="0" marL="0">
-              <a:buNone/>
-            </a:pPr>
-            <a:r>
-              <a:rPr lang="en-US" sz="1400" dirty="0">
-                <a:solidFill>
-                  <a:srgbClr val="334155"/>
-                </a:solidFill>
-                <a:latin typeface="Segoe UI" pitchFamily="34" charset="0"/>
-                <a:ea typeface="Segoe UI" pitchFamily="34" charset="-122"/>
-                <a:cs typeface="Segoe UI" pitchFamily="34" charset="-120"/>
-              </a:rPr>
-              <a:t>Ngăn chặn tấn công bằng hệ thống Cloudflare Turnstile.</a:t>
+              <a:t>Hiện trạng: lớp 2, 4 đang hoạt động; lớp 1, 3 đã kiểm thử trên bản thử nghiệm và chờ phê duyệt áp dụng.</a:t>
             </a:r>
             <a:endParaRPr lang="en-US" sz="1400" dirty="0"/>
           </a:p>
@@ -3882,9 +6131,18 @@
   <p:clrMapOvr>
     <a:masterClrMapping/>
   </p:clrMapOvr>
-  <p:transition xmlns:p14="http://schemas.microsoft.com/office/powerpoint/2010/main" spd="med" p14:dur="450">
-    <p:fade/>
-  </p:transition>
+  <mc:AlternateContent xmlns:mc="http://schemas.openxmlformats.org/markup-compatibility/2006">
+    <mc:Choice xmlns:p14="http://schemas.microsoft.com/office/powerpoint/2010/main" Requires="p14">
+      <p:transition p14:dur="450">
+        <p:fade/>
+      </p:transition>
+    </mc:Choice>
+    <mc:Fallback>
+      <p:transition>
+        <p:fade/>
+      </p:transition>
+    </mc:Fallback>
+  </mc:AlternateContent>
 </p:sld>
 </file>
 
@@ -3894,8 +6152,9 @@
     <p:bg>
       <p:bgPr>
         <a:solidFill>
-          <a:srgbClr val="1E3A8A"/>
+          <a:srgbClr val="FFFFFF"/>
         </a:solidFill>
+        <a:effectLst/>
       </p:bgPr>
     </p:bg>
     <p:spTree>
@@ -3920,8 +6179,8 @@
         </p:nvSpPr>
         <p:spPr>
           <a:xfrm>
-            <a:off x="640080" y="548640"/>
-            <a:ext cx="9144000" cy="365760"/>
+            <a:off x="640080" y="457200"/>
+            <a:ext cx="10881360" cy="320040"/>
           </a:xfrm>
           <a:prstGeom prst="rect">
             <a:avLst/>
@@ -3933,21 +6192,21 @@
           <a:bodyPr wrap="square" lIns="0" tIns="0" rIns="0" bIns="0" rtlCol="0" anchor="ctr"/>
           <a:lstStyle/>
           <a:p>
-            <a:pPr indent="0" marL="0">
-              <a:buNone/>
-            </a:pPr>
-            <a:r>
-              <a:rPr lang="en-US" sz="1400" b="1" spc="200" kern="0" dirty="0">
-                <a:solidFill>
-                  <a:srgbClr val="DBEAFE"/>
-                </a:solidFill>
-                <a:latin typeface="Segoe UI" pitchFamily="34" charset="0"/>
-                <a:ea typeface="Segoe UI" pitchFamily="34" charset="-122"/>
-                <a:cs typeface="Segoe UI" pitchFamily="34" charset="-120"/>
-              </a:rPr>
-              <a:t>GIÁ TRỊ MANG LẠI</a:t>
-            </a:r>
-            <a:endParaRPr lang="en-US" sz="1400" dirty="0"/>
+            <a:pPr marL="0" indent="0">
+              <a:buNone/>
+            </a:pPr>
+            <a:r>
+              <a:rPr lang="en-US" sz="1300" b="1" kern="0" spc="200" dirty="0">
+                <a:solidFill>
+                  <a:srgbClr val="1D4ED8"/>
+                </a:solidFill>
+                <a:latin typeface="Segoe UI" pitchFamily="34" charset="0"/>
+                <a:ea typeface="Segoe UI" pitchFamily="34" charset="-122"/>
+                <a:cs typeface="Segoe UI" pitchFamily="34" charset="-120"/>
+              </a:rPr>
+              <a:t>MINH HOẠ</a:t>
+            </a:r>
+            <a:endParaRPr lang="en-US" sz="1300" dirty="0"/>
           </a:p>
         </p:txBody>
       </p:sp>
@@ -3959,34 +6218,34 @@
         </p:nvSpPr>
         <p:spPr>
           <a:xfrm>
-            <a:off x="640080" y="896112"/>
-            <a:ext cx="10515600" cy="731520"/>
-          </a:xfrm>
-          <a:prstGeom prst="rect">
-            <a:avLst/>
-          </a:prstGeom>
-          <a:noFill/>
-          <a:ln/>
-        </p:spPr>
-        <p:txBody>
-          <a:bodyPr wrap="square" lIns="0" tIns="0" rIns="0" bIns="0" rtlCol="0" anchor="ctr"/>
-          <a:lstStyle/>
-          <a:p>
-            <a:pPr indent="0" marL="0">
-              <a:buNone/>
-            </a:pPr>
-            <a:r>
-              <a:rPr lang="en-US" sz="3000" b="1" dirty="0">
-                <a:solidFill>
-                  <a:srgbClr val="FFFFFF"/>
-                </a:solidFill>
-                <a:latin typeface="Segoe UI" pitchFamily="34" charset="0"/>
-                <a:ea typeface="Segoe UI" pitchFamily="34" charset="-122"/>
-                <a:cs typeface="Segoe UI" pitchFamily="34" charset="-120"/>
-              </a:rPr>
-              <a:t>Sự đánh đổi xứng đáng</a:t>
-            </a:r>
-            <a:endParaRPr lang="en-US" sz="3000" dirty="0"/>
+            <a:off x="640080" y="768096"/>
+            <a:ext cx="10881360" cy="777240"/>
+          </a:xfrm>
+          <a:prstGeom prst="rect">
+            <a:avLst/>
+          </a:prstGeom>
+          <a:noFill/>
+          <a:ln/>
+        </p:spPr>
+        <p:txBody>
+          <a:bodyPr wrap="square" lIns="0" tIns="0" rIns="0" bIns="0" rtlCol="0" anchor="t"/>
+          <a:lstStyle/>
+          <a:p>
+            <a:pPr marL="0" indent="0">
+              <a:buNone/>
+            </a:pPr>
+            <a:r>
+              <a:rPr lang="en-US" sz="2900" b="1" kern="0" spc="-50" dirty="0">
+                <a:solidFill>
+                  <a:srgbClr val="0F172A"/>
+                </a:solidFill>
+                <a:latin typeface="Segoe UI" pitchFamily="34" charset="0"/>
+                <a:ea typeface="Segoe UI" pitchFamily="34" charset="-122"/>
+                <a:cs typeface="Segoe UI" pitchFamily="34" charset="-120"/>
+              </a:rPr>
+              <a:t>Quy trình xử lý một câu hỏi</a:t>
+            </a:r>
+            <a:endParaRPr lang="en-US" sz="2900" dirty="0"/>
           </a:p>
         </p:txBody>
       </p:sp>
@@ -3998,27 +6257,27 @@
         </p:nvSpPr>
         <p:spPr>
           <a:xfrm>
-            <a:off x="640080" y="1920240"/>
-            <a:ext cx="5486400" cy="3200400"/>
+            <a:off x="2025396" y="1609344"/>
+            <a:ext cx="8110728" cy="4610291"/>
           </a:xfrm>
           <a:prstGeom prst="roundRect">
             <a:avLst>
-              <a:gd name="adj" fmla="val 3429"/>
+              <a:gd name="adj" fmla="val 1983"/>
             </a:avLst>
           </a:prstGeom>
           <a:solidFill>
-            <a:srgbClr val="0E4A44"/>
+            <a:srgbClr val="F8FAFC"/>
           </a:solidFill>
-          <a:ln w="15240">
+          <a:ln w="12700">
             <a:solidFill>
-              <a:srgbClr val="22C55E"/>
+              <a:srgbClr val="E2E8F0"/>
             </a:solidFill>
             <a:prstDash val="solid"/>
           </a:ln>
           <a:effectLst>
-            <a:outerShdw sx="100000" sy="100000" kx="0" ky="0" algn="bl" rotWithShape="0" blurRad="114300" dist="38100" dir="8100000">
-              <a:srgbClr val="1e40af">
-                <a:alpha val="20000"/>
+            <a:outerShdw blurRad="88900" dist="25400" dir="8100000" algn="bl" rotWithShape="0">
+              <a:srgbClr val="94A3B8">
+                <a:alpha val="28000"/>
               </a:srgbClr>
             </a:outerShdw>
           </a:effectLst>
@@ -4026,24 +6285,31 @@
       </p:sp>
       <p:pic>
         <p:nvPicPr>
-          <p:cNvPr id="5" name="Image 0" descr="preencoded.png">    </p:cNvPr>
+          <p:cNvPr id="5" name="Media 0">
+            <a:hlinkClick r:id="" action="ppaction://media"/>
+          </p:cNvPr>
           <p:cNvPicPr>
             <a:picLocks noChangeAspect="1"/>
           </p:cNvPicPr>
-          <p:nvPr/>
+          <p:nvPr>
+            <a:videoFile r:link="rId2"/>
+            <p:extLst>
+              <p:ext uri="{DAA4B4D4-6D71-4841-9C94-3DE7FCFB9230}">
+                <p14:media xmlns:p14="http://schemas.microsoft.com/office/powerpoint/2010/main" r:embed="rId1"/>
+              </p:ext>
+            </p:extLst>
+          </p:nvPr>
         </p:nvPicPr>
         <p:blipFill>
-          <a:blip r:embed="rId1">
-            <a:alphaModFix amt="14000"/>
-          </a:blip>
+          <a:blip r:embed="rId5"/>
           <a:stretch>
             <a:fillRect/>
           </a:stretch>
         </p:blipFill>
         <p:spPr>
           <a:xfrm>
-            <a:off x="1051560" y="2029968"/>
-            <a:ext cx="960120" cy="960120"/>
+            <a:off x="2080260" y="1664208"/>
+            <a:ext cx="8001000" cy="4500563"/>
           </a:xfrm>
           <a:prstGeom prst="rect">
             <a:avLst/>
@@ -4052,152 +6318,41 @@
       </p:pic>
       <p:sp>
         <p:nvSpPr>
-          <p:cNvPr id="6" name="Text 3"/>
-          <p:cNvSpPr/>
-          <p:nvPr/>
-        </p:nvSpPr>
-        <p:spPr>
-          <a:xfrm>
-            <a:off x="914400" y="2084832"/>
-            <a:ext cx="4937760" cy="868680"/>
-          </a:xfrm>
-          <a:prstGeom prst="rect">
-            <a:avLst/>
-          </a:prstGeom>
-          <a:noFill/>
-          <a:ln/>
-        </p:spPr>
-        <p:txBody>
-          <a:bodyPr wrap="square" lIns="0" tIns="0" rIns="0" bIns="0" rtlCol="0" anchor="ctr"/>
-          <a:lstStyle/>
-          <a:p>
-            <a:pPr indent="0" marL="0">
-              <a:buNone/>
-            </a:pPr>
-            <a:r>
-              <a:rPr lang="en-US" sz="4400" b="1" dirty="0">
-                <a:solidFill>
-                  <a:srgbClr val="DBEAFE"/>
-                </a:solidFill>
-                <a:latin typeface="Segoe UI" pitchFamily="34" charset="0"/>
-                <a:ea typeface="Segoe UI" pitchFamily="34" charset="-122"/>
-                <a:cs typeface="Segoe UI" pitchFamily="34" charset="-120"/>
-              </a:rPr>
-              <a:t>VẠN NGƯỜI</a:t>
-            </a:r>
-            <a:endParaRPr lang="en-US" sz="4400" dirty="0"/>
-          </a:p>
-        </p:txBody>
-      </p:sp>
-      <p:sp>
-        <p:nvSpPr>
-          <p:cNvPr id="7" name="Text 4"/>
-          <p:cNvSpPr/>
-          <p:nvPr/>
-        </p:nvSpPr>
-        <p:spPr>
-          <a:xfrm>
-            <a:off x="914400" y="3017520"/>
-            <a:ext cx="4937760" cy="1920240"/>
-          </a:xfrm>
-          <a:prstGeom prst="rect">
-            <a:avLst/>
-          </a:prstGeom>
-          <a:noFill/>
-          <a:ln/>
-        </p:spPr>
-        <p:txBody>
-          <a:bodyPr wrap="square" lIns="0" tIns="0" rIns="0" bIns="0" rtlCol="0" anchor="ctr"/>
-          <a:lstStyle/>
-          <a:p>
-            <a:pPr indent="0" marL="0">
-              <a:buNone/>
-            </a:pPr>
-            <a:r>
-              <a:rPr lang="en-US" sz="1450" dirty="0">
-                <a:solidFill>
-                  <a:srgbClr val="FFFFFF"/>
-                </a:solidFill>
-                <a:latin typeface="Segoe UI" pitchFamily="34" charset="0"/>
-                <a:ea typeface="Segoe UI" pitchFamily="34" charset="-122"/>
-                <a:cs typeface="Segoe UI" pitchFamily="34" charset="-120"/>
-              </a:rPr>
-              <a:t>Hưởng lợi từ hệ thống, tiết kiệm công sức đi lại.</a:t>
-            </a:r>
-            <a:endParaRPr lang="en-US" sz="1450" dirty="0"/>
-          </a:p>
-        </p:txBody>
-      </p:sp>
-      <p:sp>
-        <p:nvSpPr>
-          <p:cNvPr id="8" name="Shape 5"/>
-          <p:cNvSpPr/>
-          <p:nvPr/>
-        </p:nvSpPr>
-        <p:spPr>
-          <a:xfrm>
-            <a:off x="6400800" y="1920240"/>
-            <a:ext cx="5120640" cy="3200400"/>
+          <p:cNvPr id="6" name="Shape 3"/>
+          <p:cNvSpPr/>
+          <p:nvPr/>
+        </p:nvSpPr>
+        <p:spPr>
+          <a:xfrm>
+            <a:off x="2080260" y="6365939"/>
+            <a:ext cx="8001000" cy="475488"/>
           </a:xfrm>
           <a:prstGeom prst="roundRect">
             <a:avLst>
-              <a:gd name="adj" fmla="val 3429"/>
+              <a:gd name="adj" fmla="val 15385"/>
             </a:avLst>
           </a:prstGeom>
           <a:solidFill>
-            <a:srgbClr val="0E4A44"/>
+            <a:srgbClr val="EAF6F5"/>
           </a:solidFill>
-          <a:ln w="15240">
+          <a:ln w="12700">
             <a:solidFill>
-              <a:srgbClr val="D97706"/>
+              <a:srgbClr val="0B7A75"/>
             </a:solidFill>
             <a:prstDash val="solid"/>
           </a:ln>
-          <a:effectLst>
-            <a:outerShdw sx="100000" sy="100000" kx="0" ky="0" algn="bl" rotWithShape="0" blurRad="114300" dist="38100" dir="8100000">
-              <a:srgbClr val="1e40af">
-                <a:alpha val="20000"/>
-              </a:srgbClr>
-            </a:outerShdw>
-          </a:effectLst>
-        </p:spPr>
-      </p:sp>
-      <p:pic>
-        <p:nvPicPr>
-          <p:cNvPr id="9" name="Image 1" descr="preencoded.png">    </p:cNvPr>
-          <p:cNvPicPr>
-            <a:picLocks noChangeAspect="1"/>
-          </p:cNvPicPr>
-          <p:nvPr/>
-        </p:nvPicPr>
-        <p:blipFill>
-          <a:blip r:embed="rId2">
-            <a:alphaModFix amt="14000"/>
-          </a:blip>
-          <a:stretch>
-            <a:fillRect/>
-          </a:stretch>
-        </p:blipFill>
-        <p:spPr>
-          <a:xfrm>
-            <a:off x="6812280" y="2029968"/>
-            <a:ext cx="960120" cy="960120"/>
-          </a:xfrm>
-          <a:prstGeom prst="rect">
-            <a:avLst/>
-          </a:prstGeom>
-        </p:spPr>
-      </p:pic>
-      <p:sp>
-        <p:nvSpPr>
-          <p:cNvPr id="10" name="Text 6"/>
-          <p:cNvSpPr/>
-          <p:nvPr/>
-        </p:nvSpPr>
-        <p:spPr>
-          <a:xfrm>
-            <a:off x="6675120" y="2084832"/>
-            <a:ext cx="4572000" cy="868680"/>
+        </p:spPr>
+      </p:sp>
+      <p:sp>
+        <p:nvSpPr>
+          <p:cNvPr id="7" name="Text 4"/>
+          <p:cNvSpPr/>
+          <p:nvPr/>
+        </p:nvSpPr>
+        <p:spPr>
+          <a:xfrm>
+            <a:off x="2263140" y="6365939"/>
+            <a:ext cx="7635240" cy="475488"/>
           </a:xfrm>
           <a:prstGeom prst="rect">
             <a:avLst/>
@@ -4209,121 +6364,21 @@
           <a:bodyPr wrap="square" lIns="0" tIns="0" rIns="0" bIns="0" rtlCol="0" anchor="ctr"/>
           <a:lstStyle/>
           <a:p>
-            <a:pPr indent="0" marL="0">
-              <a:buNone/>
-            </a:pPr>
-            <a:r>
-              <a:rPr lang="en-US" sz="4400" b="1" dirty="0">
-                <a:solidFill>
-                  <a:srgbClr val="DBEAFE"/>
-                </a:solidFill>
-                <a:latin typeface="Segoe UI" pitchFamily="34" charset="0"/>
-                <a:ea typeface="Segoe UI" pitchFamily="34" charset="-122"/>
-                <a:cs typeface="Segoe UI" pitchFamily="34" charset="-120"/>
-              </a:rPr>
-              <a:t>[SỐ LIỆU]</a:t>
-            </a:r>
-            <a:endParaRPr lang="en-US" sz="4400" dirty="0"/>
-          </a:p>
-        </p:txBody>
-      </p:sp>
-      <p:sp>
-        <p:nvSpPr>
-          <p:cNvPr id="11" name="Text 7"/>
-          <p:cNvSpPr/>
-          <p:nvPr/>
-        </p:nvSpPr>
-        <p:spPr>
-          <a:xfrm>
-            <a:off x="6675120" y="3017520"/>
-            <a:ext cx="4572000" cy="1920240"/>
-          </a:xfrm>
-          <a:prstGeom prst="rect">
-            <a:avLst/>
-          </a:prstGeom>
-          <a:noFill/>
-          <a:ln/>
-        </p:spPr>
-        <p:txBody>
-          <a:bodyPr wrap="square" lIns="0" tIns="0" rIns="0" bIns="0" rtlCol="0" anchor="ctr"/>
-          <a:lstStyle/>
-          <a:p>
-            <a:pPr indent="0" marL="0">
-              <a:buNone/>
-            </a:pPr>
-            <a:r>
-              <a:rPr lang="en-US" sz="1450" dirty="0">
-                <a:solidFill>
-                  <a:srgbClr val="FFFFFF"/>
-                </a:solidFill>
-                <a:latin typeface="Segoe UI" pitchFamily="34" charset="0"/>
-                <a:ea typeface="Segoe UI" pitchFamily="34" charset="-122"/>
-                <a:cs typeface="Segoe UI" pitchFamily="34" charset="-120"/>
-              </a:rPr>
-              <a:t>Giây là thời gian phản hồi cho mỗi thủ tục.</a:t>
-            </a:r>
-            <a:endParaRPr lang="en-US" sz="1450" dirty="0"/>
-          </a:p>
-        </p:txBody>
-      </p:sp>
-      <p:sp>
-        <p:nvSpPr>
-          <p:cNvPr id="12" name="Shape 8"/>
-          <p:cNvSpPr/>
-          <p:nvPr/>
-        </p:nvSpPr>
-        <p:spPr>
-          <a:xfrm>
-            <a:off x="640080" y="5394960"/>
-            <a:ext cx="10881360" cy="868680"/>
-          </a:xfrm>
-          <a:prstGeom prst="roundRect">
-            <a:avLst>
-              <a:gd name="adj" fmla="val 10526"/>
-            </a:avLst>
-          </a:prstGeom>
-          <a:solidFill>
-            <a:srgbClr val="1D4ED8"/>
-          </a:solidFill>
-          <a:ln/>
-        </p:spPr>
-      </p:sp>
-      <p:sp>
-        <p:nvSpPr>
-          <p:cNvPr id="13" name="Text 9"/>
-          <p:cNvSpPr/>
-          <p:nvPr/>
-        </p:nvSpPr>
-        <p:spPr>
-          <a:xfrm>
-            <a:off x="640080" y="5394960"/>
-            <a:ext cx="10881360" cy="868680"/>
-          </a:xfrm>
-          <a:prstGeom prst="rect">
-            <a:avLst/>
-          </a:prstGeom>
-          <a:noFill/>
-          <a:ln/>
-        </p:spPr>
-        <p:txBody>
-          <a:bodyPr wrap="square" lIns="0" tIns="0" rIns="0" bIns="0" rtlCol="0" anchor="ctr"/>
-          <a:lstStyle/>
-          <a:p>
-            <a:pPr algn="ctr" indent="0" marL="0">
-              <a:buNone/>
-            </a:pPr>
-            <a:r>
-              <a:rPr lang="en-US" sz="1700" b="1" dirty="0">
-                <a:solidFill>
-                  <a:srgbClr val="FFFFFF"/>
-                </a:solidFill>
-                <a:latin typeface="Segoe UI" pitchFamily="34" charset="0"/>
-                <a:ea typeface="Segoe UI" pitchFamily="34" charset="-122"/>
-                <a:cs typeface="Segoe UI" pitchFamily="34" charset="-120"/>
-              </a:rPr>
-              <a:t>Dự án yêu cầu chi phí đầu tư hạ tầng, nhưng là khoản đầu tư vô giá cho công tác chuyển đổi số.</a:t>
-            </a:r>
-            <a:endParaRPr lang="en-US" sz="1700" dirty="0"/>
+            <a:pPr marL="0" indent="0" algn="ctr">
+              <a:buNone/>
+            </a:pPr>
+            <a:r>
+              <a:rPr lang="en-US" sz="1400" dirty="0">
+                <a:solidFill>
+                  <a:srgbClr val="0F172A"/>
+                </a:solidFill>
+                <a:latin typeface="Segoe UI" pitchFamily="34" charset="0"/>
+                <a:ea typeface="Segoe UI" pitchFamily="34" charset="-122"/>
+                <a:cs typeface="Segoe UI" pitchFamily="34" charset="-120"/>
+              </a:rPr>
+              <a:t>Video minh hoạ — nội dung câu hỏi và câu trả lời là ví dụ, không phải tư vấn chính thức.</a:t>
+            </a:r>
+            <a:endParaRPr lang="en-US" sz="1400" dirty="0"/>
           </a:p>
         </p:txBody>
       </p:sp>
@@ -4333,17 +6388,152 @@
     <a:masterClrMapping/>
   </p:clrMapOvr>
   <mc:AlternateContent xmlns:mc="http://schemas.openxmlformats.org/markup-compatibility/2006">
-    <mc:Choice xmlns:p159="http://schemas.microsoft.com/office/powerpoint/2015/9/main" Requires="p159">
-      <p:transition xmlns:p14="http://schemas.microsoft.com/office/powerpoint/2010/main" spd="med" p14:dur="800">
-        <p159:morph option="byObject"/>
+    <mc:Choice xmlns:p14="http://schemas.microsoft.com/office/powerpoint/2010/main" Requires="p14">
+      <p:transition p14:dur="450">
+        <p:fade/>
       </p:transition>
     </mc:Choice>
     <mc:Fallback>
-      <p:transition spd="med">
+      <p:transition>
         <p:fade/>
       </p:transition>
     </mc:Fallback>
   </mc:AlternateContent>
+  <p:timing>
+    <p:tnLst>
+      <p:par>
+        <p:cTn id="1" dur="indefinite" restart="never" nodeType="tmRoot">
+          <p:childTnLst>
+            <p:seq concurrent="1" nextAc="seek">
+              <p:cTn id="2" dur="indefinite" nodeType="mainSeq">
+                <p:childTnLst>
+                  <p:par>
+                    <p:cTn id="3" fill="hold">
+                      <p:stCondLst>
+                        <p:cond delay="indefinite"/>
+                      </p:stCondLst>
+                      <p:childTnLst>
+                        <p:par>
+                          <p:cTn id="4" fill="hold">
+                            <p:stCondLst>
+                              <p:cond delay="0"/>
+                            </p:stCondLst>
+                            <p:childTnLst>
+                              <p:par>
+                                <p:cTn id="5" presetID="1" presetClass="mediacall" presetSubtype="0" fill="hold" nodeType="clickEffect">
+                                  <p:stCondLst>
+                                    <p:cond delay="0"/>
+                                  </p:stCondLst>
+                                  <p:childTnLst>
+                                    <p:cmd type="call" cmd="playFrom(0.0)">
+                                      <p:cBhvr>
+                                        <p:cTn id="6" dur="1" fill="hold"/>
+                                        <p:tgtEl>
+                                          <p:spTgt spid="5"/>
+                                        </p:tgtEl>
+                                      </p:cBhvr>
+                                    </p:cmd>
+                                  </p:childTnLst>
+                                </p:cTn>
+                              </p:par>
+                            </p:childTnLst>
+                          </p:cTn>
+                        </p:par>
+                      </p:childTnLst>
+                    </p:cTn>
+                  </p:par>
+                </p:childTnLst>
+              </p:cTn>
+              <p:prevCondLst>
+                <p:cond evt="onPrev" delay="0">
+                  <p:tgtEl>
+                    <p:sldTgt/>
+                  </p:tgtEl>
+                </p:cond>
+              </p:prevCondLst>
+              <p:nextCondLst>
+                <p:cond evt="onNext" delay="0">
+                  <p:tgtEl>
+                    <p:sldTgt/>
+                  </p:tgtEl>
+                </p:cond>
+              </p:nextCondLst>
+            </p:seq>
+            <p:video>
+              <p:cMediaNode vol="80000">
+                <p:cTn id="7" repeatCount="indefinite" fill="hold" display="0">
+                  <p:stCondLst>
+                    <p:cond delay="indefinite"/>
+                  </p:stCondLst>
+                </p:cTn>
+                <p:tgtEl>
+                  <p:spTgt spid="5"/>
+                </p:tgtEl>
+              </p:cMediaNode>
+            </p:video>
+            <p:seq concurrent="1" nextAc="seek">
+              <p:cTn id="8" restart="whenNotActive" fill="hold" evtFilter="cancelBubble" nodeType="interactiveSeq">
+                <p:stCondLst>
+                  <p:cond evt="onClick" delay="0">
+                    <p:tgtEl>
+                      <p:spTgt spid="5"/>
+                    </p:tgtEl>
+                  </p:cond>
+                </p:stCondLst>
+                <p:endSync evt="end" delay="0">
+                  <p:rtn val="all"/>
+                </p:endSync>
+                <p:childTnLst>
+                  <p:par>
+                    <p:cTn id="9" fill="hold">
+                      <p:stCondLst>
+                        <p:cond delay="0"/>
+                      </p:stCondLst>
+                      <p:childTnLst>
+                        <p:par>
+                          <p:cTn id="10" fill="hold">
+                            <p:stCondLst>
+                              <p:cond delay="0"/>
+                            </p:stCondLst>
+                            <p:childTnLst>
+                              <p:par>
+                                <p:cTn id="11" presetID="2" presetClass="mediacall" presetSubtype="0" fill="hold" nodeType="clickEffect">
+                                  <p:stCondLst>
+                                    <p:cond delay="0"/>
+                                  </p:stCondLst>
+                                  <p:childTnLst>
+                                    <p:cmd type="call" cmd="togglePause">
+                                      <p:cBhvr>
+                                        <p:cTn id="12" dur="1" fill="hold"/>
+                                        <p:tgtEl>
+                                          <p:spTgt spid="5"/>
+                                        </p:tgtEl>
+                                      </p:cBhvr>
+                                    </p:cmd>
+                                  </p:childTnLst>
+                                </p:cTn>
+                              </p:par>
+                            </p:childTnLst>
+                          </p:cTn>
+                        </p:par>
+                      </p:childTnLst>
+                    </p:cTn>
+                  </p:par>
+                </p:childTnLst>
+              </p:cTn>
+              <p:nextCondLst>
+                <p:cond evt="onClick" delay="0">
+                  <p:tgtEl>
+                    <p:spTgt spid="5"/>
+                  </p:tgtEl>
+                </p:cond>
+              </p:nextCondLst>
+            </p:seq>
+          </p:childTnLst>
+        </p:cTn>
+      </p:par>
+    </p:tnLst>
+  </p:timing>
 </p:sld>
 </file>
 
@@ -4353,8 +6543,9 @@
     <p:bg>
       <p:bgPr>
         <a:solidFill>
-          <a:srgbClr val="1E3A8A"/>
+          <a:srgbClr val="FFFFFF"/>
         </a:solidFill>
+        <a:effectLst/>
       </p:bgPr>
     </p:bg>
     <p:spTree>
@@ -4371,17 +6562,938 @@
           <a:chExt cx="0" cy="0"/>
         </a:xfrm>
       </p:grpSpPr>
+      <p:sp>
+        <p:nvSpPr>
+          <p:cNvPr id="2" name="Text 0"/>
+          <p:cNvSpPr/>
+          <p:nvPr/>
+        </p:nvSpPr>
+        <p:spPr>
+          <a:xfrm>
+            <a:off x="640080" y="457200"/>
+            <a:ext cx="10881360" cy="320040"/>
+          </a:xfrm>
+          <a:prstGeom prst="rect">
+            <a:avLst/>
+          </a:prstGeom>
+          <a:noFill/>
+          <a:ln/>
+        </p:spPr>
+        <p:txBody>
+          <a:bodyPr wrap="square" lIns="0" tIns="0" rIns="0" bIns="0" rtlCol="0" anchor="ctr"/>
+          <a:lstStyle/>
+          <a:p>
+            <a:pPr marL="0" indent="0">
+              <a:buNone/>
+            </a:pPr>
+            <a:r>
+              <a:rPr lang="en-US" sz="1300" b="1" kern="0" spc="200" dirty="0">
+                <a:solidFill>
+                  <a:srgbClr val="1D4ED8"/>
+                </a:solidFill>
+                <a:latin typeface="Segoe UI" pitchFamily="34" charset="0"/>
+                <a:ea typeface="Segoe UI" pitchFamily="34" charset="-122"/>
+                <a:cs typeface="Segoe UI" pitchFamily="34" charset="-120"/>
+              </a:rPr>
+              <a:t>TÍNH NĂNG VƯỢT TRỘI</a:t>
+            </a:r>
+            <a:endParaRPr lang="en-US" sz="1300" dirty="0"/>
+          </a:p>
+        </p:txBody>
+      </p:sp>
+      <p:sp>
+        <p:nvSpPr>
+          <p:cNvPr id="3" name="Text 1"/>
+          <p:cNvSpPr/>
+          <p:nvPr/>
+        </p:nvSpPr>
+        <p:spPr>
+          <a:xfrm>
+            <a:off x="640080" y="768096"/>
+            <a:ext cx="10881360" cy="777240"/>
+          </a:xfrm>
+          <a:prstGeom prst="rect">
+            <a:avLst/>
+          </a:prstGeom>
+          <a:noFill/>
+          <a:ln/>
+        </p:spPr>
+        <p:txBody>
+          <a:bodyPr wrap="square" lIns="0" tIns="0" rIns="0" bIns="0" rtlCol="0" anchor="t"/>
+          <a:lstStyle/>
+          <a:p>
+            <a:pPr marL="0" indent="0">
+              <a:buNone/>
+            </a:pPr>
+            <a:r>
+              <a:rPr lang="en-US" sz="2900" b="1" kern="0" spc="-50" dirty="0">
+                <a:solidFill>
+                  <a:srgbClr val="0F172A"/>
+                </a:solidFill>
+                <a:latin typeface="Segoe UI" pitchFamily="34" charset="0"/>
+                <a:ea typeface="Segoe UI" pitchFamily="34" charset="-122"/>
+                <a:cs typeface="Segoe UI" pitchFamily="34" charset="-120"/>
+              </a:rPr>
+              <a:t>Phục vụ nhân dân địa phương</a:t>
+            </a:r>
+            <a:endParaRPr lang="en-US" sz="2900" dirty="0"/>
+          </a:p>
+        </p:txBody>
+      </p:sp>
+      <p:sp>
+        <p:nvSpPr>
+          <p:cNvPr id="4" name="Shape 2"/>
+          <p:cNvSpPr/>
+          <p:nvPr/>
+        </p:nvSpPr>
+        <p:spPr>
+          <a:xfrm>
+            <a:off x="813816" y="1819656"/>
+            <a:ext cx="2103120" cy="3062901"/>
+          </a:xfrm>
+          <a:prstGeom prst="roundRect">
+            <a:avLst>
+              <a:gd name="adj" fmla="val 5217"/>
+            </a:avLst>
+          </a:prstGeom>
+          <a:solidFill>
+            <a:srgbClr val="F8FAFC"/>
+          </a:solidFill>
+          <a:ln w="12700">
+            <a:solidFill>
+              <a:srgbClr val="E2E8F0"/>
+            </a:solidFill>
+            <a:prstDash val="solid"/>
+          </a:ln>
+          <a:effectLst>
+            <a:outerShdw blurRad="88900" dist="25400" dir="8100000" algn="bl" rotWithShape="0">
+              <a:srgbClr val="94A3B8">
+                <a:alpha val="28000"/>
+              </a:srgbClr>
+            </a:outerShdw>
+          </a:effectLst>
+        </p:spPr>
+      </p:sp>
       <p:pic>
         <p:nvPicPr>
-          <p:cNvPr id="2" name="Image 0" descr="preencoded.png">    </p:cNvPr>
+          <p:cNvPr id="5" name="Image 0" descr="D:\04. Github\bandocapt\presentation\asset\chat bot tra loi.png"/>
           <p:cNvPicPr>
             <a:picLocks noChangeAspect="1"/>
           </p:cNvPicPr>
           <p:nvPr/>
         </p:nvPicPr>
         <p:blipFill>
-          <a:blip r:embed="rId1">
-            <a:alphaModFix amt="12000"/>
+          <a:blip r:embed="rId3"/>
+          <a:srcRect/>
+          <a:stretch/>
+        </p:blipFill>
+        <p:spPr>
+          <a:xfrm>
+            <a:off x="868680" y="1874520"/>
+            <a:ext cx="1993392" cy="2953173"/>
+          </a:xfrm>
+          <a:prstGeom prst="rect">
+            <a:avLst/>
+          </a:prstGeom>
+        </p:spPr>
+      </p:pic>
+      <p:sp>
+        <p:nvSpPr>
+          <p:cNvPr id="6" name="Shape 3"/>
+          <p:cNvSpPr/>
+          <p:nvPr/>
+        </p:nvSpPr>
+        <p:spPr>
+          <a:xfrm>
+            <a:off x="2980944" y="2093976"/>
+            <a:ext cx="2103120" cy="3062901"/>
+          </a:xfrm>
+          <a:prstGeom prst="roundRect">
+            <a:avLst>
+              <a:gd name="adj" fmla="val 5217"/>
+            </a:avLst>
+          </a:prstGeom>
+          <a:solidFill>
+            <a:srgbClr val="F8FAFC"/>
+          </a:solidFill>
+          <a:ln w="12700">
+            <a:solidFill>
+              <a:srgbClr val="E2E8F0"/>
+            </a:solidFill>
+            <a:prstDash val="solid"/>
+          </a:ln>
+          <a:effectLst>
+            <a:outerShdw blurRad="88900" dist="25400" dir="8100000" algn="bl" rotWithShape="0">
+              <a:srgbClr val="94A3B8">
+                <a:alpha val="28000"/>
+              </a:srgbClr>
+            </a:outerShdw>
+          </a:effectLst>
+        </p:spPr>
+      </p:sp>
+      <p:pic>
+        <p:nvPicPr>
+          <p:cNvPr id="7" name="Image 1" descr="D:\04. Github\bandocapt\presentation\asset\tra cuu thu tục tren dien thoai.png"/>
+          <p:cNvPicPr>
+            <a:picLocks noChangeAspect="1"/>
+          </p:cNvPicPr>
+          <p:nvPr/>
+        </p:nvPicPr>
+        <p:blipFill>
+          <a:blip r:embed="rId4"/>
+          <a:srcRect/>
+          <a:stretch/>
+        </p:blipFill>
+        <p:spPr>
+          <a:xfrm>
+            <a:off x="3035808" y="2148840"/>
+            <a:ext cx="1993392" cy="2953173"/>
+          </a:xfrm>
+          <a:prstGeom prst="rect">
+            <a:avLst/>
+          </a:prstGeom>
+        </p:spPr>
+      </p:pic>
+      <p:sp>
+        <p:nvSpPr>
+          <p:cNvPr id="8" name="Text 4"/>
+          <p:cNvSpPr/>
+          <p:nvPr/>
+        </p:nvSpPr>
+        <p:spPr>
+          <a:xfrm>
+            <a:off x="5212080" y="1810512"/>
+            <a:ext cx="5212080" cy="822960"/>
+          </a:xfrm>
+          <a:prstGeom prst="rect">
+            <a:avLst/>
+          </a:prstGeom>
+          <a:noFill/>
+          <a:ln/>
+        </p:spPr>
+        <p:txBody>
+          <a:bodyPr wrap="square" lIns="0" tIns="0" rIns="0" bIns="0" rtlCol="0" anchor="ctr"/>
+          <a:lstStyle/>
+          <a:p>
+            <a:pPr marL="0" indent="0">
+              <a:buNone/>
+            </a:pPr>
+            <a:r>
+              <a:rPr lang="en-US" sz="2600" b="1" dirty="0">
+                <a:solidFill>
+                  <a:srgbClr val="0F172A"/>
+                </a:solidFill>
+                <a:latin typeface="Segoe UI" pitchFamily="34" charset="0"/>
+                <a:ea typeface="Segoe UI" pitchFamily="34" charset="-122"/>
+                <a:cs typeface="Segoe UI" pitchFamily="34" charset="-120"/>
+              </a:rPr>
+              <a:t>Thiết kế để dễ dùng</a:t>
+            </a:r>
+            <a:endParaRPr lang="en-US" sz="2600" dirty="0"/>
+          </a:p>
+          <a:p>
+            <a:pPr marL="0" indent="0">
+              <a:buNone/>
+            </a:pPr>
+            <a:r>
+              <a:rPr lang="en-US" sz="2600" b="1" dirty="0">
+                <a:solidFill>
+                  <a:srgbClr val="0F172A"/>
+                </a:solidFill>
+                <a:latin typeface="Segoe UI" pitchFamily="34" charset="0"/>
+                <a:ea typeface="Segoe UI" pitchFamily="34" charset="-122"/>
+                <a:cs typeface="Segoe UI" pitchFamily="34" charset="-120"/>
+              </a:rPr>
+              <a:t>trên điện thoại</a:t>
+            </a:r>
+            <a:endParaRPr lang="en-US" sz="2600" dirty="0"/>
+          </a:p>
+        </p:txBody>
+      </p:sp>
+      <p:sp>
+        <p:nvSpPr>
+          <p:cNvPr id="9" name="Shape 5"/>
+          <p:cNvSpPr/>
+          <p:nvPr/>
+        </p:nvSpPr>
+        <p:spPr>
+          <a:xfrm>
+            <a:off x="5230368" y="2743200"/>
+            <a:ext cx="493776" cy="493776"/>
+          </a:xfrm>
+          <a:prstGeom prst="ellipse">
+            <a:avLst/>
+          </a:prstGeom>
+          <a:solidFill>
+            <a:srgbClr val="1D4ED8"/>
+          </a:solidFill>
+          <a:ln/>
+          <a:effectLst>
+            <a:outerShdw blurRad="114300" dist="38100" dir="8100000" algn="bl" rotWithShape="0">
+              <a:srgbClr val="1E40AF">
+                <a:alpha val="20000"/>
+              </a:srgbClr>
+            </a:outerShdw>
+          </a:effectLst>
+        </p:spPr>
+      </p:sp>
+      <p:pic>
+        <p:nvPicPr>
+          <p:cNvPr id="10" name="Image 2" descr="preencoded.png"/>
+          <p:cNvPicPr>
+            <a:picLocks noChangeAspect="1"/>
+          </p:cNvPicPr>
+          <p:nvPr/>
+        </p:nvPicPr>
+        <p:blipFill>
+          <a:blip r:embed="rId5"/>
+          <a:stretch>
+            <a:fillRect/>
+          </a:stretch>
+        </p:blipFill>
+        <p:spPr>
+          <a:xfrm>
+            <a:off x="5363688" y="2876520"/>
+            <a:ext cx="227137" cy="227137"/>
+          </a:xfrm>
+          <a:prstGeom prst="rect">
+            <a:avLst/>
+          </a:prstGeom>
+        </p:spPr>
+      </p:pic>
+      <p:sp>
+        <p:nvSpPr>
+          <p:cNvPr id="11" name="Text 6"/>
+          <p:cNvSpPr/>
+          <p:nvPr/>
+        </p:nvSpPr>
+        <p:spPr>
+          <a:xfrm>
+            <a:off x="5897880" y="2734056"/>
+            <a:ext cx="3566160" cy="228600"/>
+          </a:xfrm>
+          <a:prstGeom prst="rect">
+            <a:avLst/>
+          </a:prstGeom>
+          <a:noFill/>
+          <a:ln/>
+        </p:spPr>
+        <p:txBody>
+          <a:bodyPr wrap="square" lIns="0" tIns="0" rIns="0" bIns="0" rtlCol="0" anchor="ctr"/>
+          <a:lstStyle/>
+          <a:p>
+            <a:pPr marL="0" indent="0">
+              <a:buNone/>
+            </a:pPr>
+            <a:r>
+              <a:rPr lang="en-US" sz="1700" b="1" dirty="0">
+                <a:solidFill>
+                  <a:srgbClr val="0F172A"/>
+                </a:solidFill>
+                <a:latin typeface="Segoe UI" pitchFamily="34" charset="0"/>
+                <a:ea typeface="Segoe UI" pitchFamily="34" charset="-122"/>
+                <a:cs typeface="Segoe UI" pitchFamily="34" charset="-120"/>
+              </a:rPr>
+              <a:t>Thân thiện dễ dùng</a:t>
+            </a:r>
+            <a:endParaRPr lang="en-US" sz="1700" dirty="0"/>
+          </a:p>
+        </p:txBody>
+      </p:sp>
+      <p:sp>
+        <p:nvSpPr>
+          <p:cNvPr id="12" name="Text 7"/>
+          <p:cNvSpPr/>
+          <p:nvPr/>
+        </p:nvSpPr>
+        <p:spPr>
+          <a:xfrm>
+            <a:off x="5897880" y="3035808"/>
+            <a:ext cx="4846320" cy="384048"/>
+          </a:xfrm>
+          <a:prstGeom prst="rect">
+            <a:avLst/>
+          </a:prstGeom>
+          <a:noFill/>
+          <a:ln/>
+        </p:spPr>
+        <p:txBody>
+          <a:bodyPr wrap="square" lIns="0" tIns="0" rIns="0" bIns="0" rtlCol="0" anchor="ctr"/>
+          <a:lstStyle/>
+          <a:p>
+            <a:pPr marL="0" indent="0">
+              <a:buNone/>
+            </a:pPr>
+            <a:r>
+              <a:rPr lang="en-US" sz="1450" dirty="0">
+                <a:solidFill>
+                  <a:srgbClr val="334155"/>
+                </a:solidFill>
+                <a:latin typeface="Segoe UI" pitchFamily="34" charset="0"/>
+                <a:ea typeface="Segoe UI" pitchFamily="34" charset="-122"/>
+                <a:cs typeface="Segoe UI" pitchFamily="34" charset="-120"/>
+              </a:rPr>
+              <a:t>Giao diện tối giản, tối ưu cho điện thoại di động.</a:t>
+            </a:r>
+            <a:endParaRPr lang="en-US" sz="1450" dirty="0"/>
+          </a:p>
+        </p:txBody>
+      </p:sp>
+      <p:sp>
+        <p:nvSpPr>
+          <p:cNvPr id="13" name="Shape 8"/>
+          <p:cNvSpPr/>
+          <p:nvPr/>
+        </p:nvSpPr>
+        <p:spPr>
+          <a:xfrm>
+            <a:off x="5230368" y="3584448"/>
+            <a:ext cx="493776" cy="493776"/>
+          </a:xfrm>
+          <a:prstGeom prst="ellipse">
+            <a:avLst/>
+          </a:prstGeom>
+          <a:solidFill>
+            <a:srgbClr val="1D4ED8"/>
+          </a:solidFill>
+          <a:ln/>
+          <a:effectLst>
+            <a:outerShdw blurRad="114300" dist="38100" dir="8100000" algn="bl" rotWithShape="0">
+              <a:srgbClr val="1E40AF">
+                <a:alpha val="20000"/>
+              </a:srgbClr>
+            </a:outerShdw>
+          </a:effectLst>
+        </p:spPr>
+      </p:sp>
+      <p:pic>
+        <p:nvPicPr>
+          <p:cNvPr id="14" name="Image 3" descr="preencoded.png"/>
+          <p:cNvPicPr>
+            <a:picLocks noChangeAspect="1"/>
+          </p:cNvPicPr>
+          <p:nvPr/>
+        </p:nvPicPr>
+        <p:blipFill>
+          <a:blip r:embed="rId6"/>
+          <a:stretch>
+            <a:fillRect/>
+          </a:stretch>
+        </p:blipFill>
+        <p:spPr>
+          <a:xfrm>
+            <a:off x="5363688" y="3717768"/>
+            <a:ext cx="227137" cy="227137"/>
+          </a:xfrm>
+          <a:prstGeom prst="rect">
+            <a:avLst/>
+          </a:prstGeom>
+        </p:spPr>
+      </p:pic>
+      <p:sp>
+        <p:nvSpPr>
+          <p:cNvPr id="15" name="Text 9"/>
+          <p:cNvSpPr/>
+          <p:nvPr/>
+        </p:nvSpPr>
+        <p:spPr>
+          <a:xfrm>
+            <a:off x="5897880" y="3575304"/>
+            <a:ext cx="3566160" cy="228600"/>
+          </a:xfrm>
+          <a:prstGeom prst="rect">
+            <a:avLst/>
+          </a:prstGeom>
+          <a:noFill/>
+          <a:ln/>
+        </p:spPr>
+        <p:txBody>
+          <a:bodyPr wrap="square" lIns="0" tIns="0" rIns="0" bIns="0" rtlCol="0" anchor="ctr"/>
+          <a:lstStyle/>
+          <a:p>
+            <a:pPr marL="0" indent="0">
+              <a:buNone/>
+            </a:pPr>
+            <a:r>
+              <a:rPr lang="en-US" sz="1700" b="1" dirty="0">
+                <a:solidFill>
+                  <a:srgbClr val="0F172A"/>
+                </a:solidFill>
+                <a:latin typeface="Segoe UI" pitchFamily="34" charset="0"/>
+                <a:ea typeface="Segoe UI" pitchFamily="34" charset="-122"/>
+                <a:cs typeface="Segoe UI" pitchFamily="34" charset="-120"/>
+              </a:rPr>
+              <a:t>Hỗ trợ Ngoại ngữ</a:t>
+            </a:r>
+            <a:endParaRPr lang="en-US" sz="1700" dirty="0"/>
+          </a:p>
+        </p:txBody>
+      </p:sp>
+      <p:sp>
+        <p:nvSpPr>
+          <p:cNvPr id="16" name="Text 10"/>
+          <p:cNvSpPr/>
+          <p:nvPr/>
+        </p:nvSpPr>
+        <p:spPr>
+          <a:xfrm>
+            <a:off x="5897880" y="3877056"/>
+            <a:ext cx="4846320" cy="384048"/>
+          </a:xfrm>
+          <a:prstGeom prst="rect">
+            <a:avLst/>
+          </a:prstGeom>
+          <a:noFill/>
+          <a:ln/>
+        </p:spPr>
+        <p:txBody>
+          <a:bodyPr wrap="square" lIns="0" tIns="0" rIns="0" bIns="0" rtlCol="0" anchor="ctr"/>
+          <a:lstStyle/>
+          <a:p>
+            <a:pPr marL="0" indent="0">
+              <a:buNone/>
+            </a:pPr>
+            <a:r>
+              <a:rPr lang="en-US" sz="1450" dirty="0">
+                <a:solidFill>
+                  <a:srgbClr val="334155"/>
+                </a:solidFill>
+                <a:latin typeface="Segoe UI" pitchFamily="34" charset="0"/>
+                <a:ea typeface="Segoe UI" pitchFamily="34" charset="-122"/>
+                <a:cs typeface="Segoe UI" pitchFamily="34" charset="-120"/>
+              </a:rPr>
+              <a:t>Dịch Tiếng Anh/Trung/Hàn cho người nước ngoài.</a:t>
+            </a:r>
+            <a:endParaRPr lang="en-US" sz="1450" dirty="0"/>
+          </a:p>
+        </p:txBody>
+      </p:sp>
+      <p:sp>
+        <p:nvSpPr>
+          <p:cNvPr id="17" name="Shape 11"/>
+          <p:cNvSpPr/>
+          <p:nvPr/>
+        </p:nvSpPr>
+        <p:spPr>
+          <a:xfrm>
+            <a:off x="5230368" y="4425696"/>
+            <a:ext cx="493776" cy="493776"/>
+          </a:xfrm>
+          <a:prstGeom prst="ellipse">
+            <a:avLst/>
+          </a:prstGeom>
+          <a:solidFill>
+            <a:srgbClr val="1D4ED8"/>
+          </a:solidFill>
+          <a:ln/>
+          <a:effectLst>
+            <a:outerShdw blurRad="114300" dist="38100" dir="8100000" algn="bl" rotWithShape="0">
+              <a:srgbClr val="1E40AF">
+                <a:alpha val="20000"/>
+              </a:srgbClr>
+            </a:outerShdw>
+          </a:effectLst>
+        </p:spPr>
+      </p:sp>
+      <p:pic>
+        <p:nvPicPr>
+          <p:cNvPr id="18" name="Image 4" descr="preencoded.png"/>
+          <p:cNvPicPr>
+            <a:picLocks noChangeAspect="1"/>
+          </p:cNvPicPr>
+          <p:nvPr/>
+        </p:nvPicPr>
+        <p:blipFill>
+          <a:blip r:embed="rId6"/>
+          <a:stretch>
+            <a:fillRect/>
+          </a:stretch>
+        </p:blipFill>
+        <p:spPr>
+          <a:xfrm>
+            <a:off x="5363688" y="4559016"/>
+            <a:ext cx="227137" cy="227137"/>
+          </a:xfrm>
+          <a:prstGeom prst="rect">
+            <a:avLst/>
+          </a:prstGeom>
+        </p:spPr>
+      </p:pic>
+      <p:sp>
+        <p:nvSpPr>
+          <p:cNvPr id="19" name="Text 12"/>
+          <p:cNvSpPr/>
+          <p:nvPr/>
+        </p:nvSpPr>
+        <p:spPr>
+          <a:xfrm>
+            <a:off x="5897880" y="4416552"/>
+            <a:ext cx="3566160" cy="228600"/>
+          </a:xfrm>
+          <a:prstGeom prst="rect">
+            <a:avLst/>
+          </a:prstGeom>
+          <a:noFill/>
+          <a:ln/>
+        </p:spPr>
+        <p:txBody>
+          <a:bodyPr wrap="square" lIns="0" tIns="0" rIns="0" bIns="0" rtlCol="0" anchor="ctr"/>
+          <a:lstStyle/>
+          <a:p>
+            <a:pPr marL="0" indent="0">
+              <a:buNone/>
+            </a:pPr>
+            <a:r>
+              <a:rPr lang="en-US" sz="1700" b="1" dirty="0">
+                <a:solidFill>
+                  <a:srgbClr val="0F172A"/>
+                </a:solidFill>
+                <a:latin typeface="Segoe UI" pitchFamily="34" charset="0"/>
+                <a:ea typeface="Segoe UI" pitchFamily="34" charset="-122"/>
+                <a:cs typeface="Segoe UI" pitchFamily="34" charset="-120"/>
+              </a:rPr>
+              <a:t>Quản trị linh hoạt</a:t>
+            </a:r>
+            <a:endParaRPr lang="en-US" sz="1700" dirty="0"/>
+          </a:p>
+        </p:txBody>
+      </p:sp>
+      <p:sp>
+        <p:nvSpPr>
+          <p:cNvPr id="20" name="Text 13"/>
+          <p:cNvSpPr/>
+          <p:nvPr/>
+        </p:nvSpPr>
+        <p:spPr>
+          <a:xfrm>
+            <a:off x="5897880" y="4718304"/>
+            <a:ext cx="4846320" cy="384048"/>
+          </a:xfrm>
+          <a:prstGeom prst="rect">
+            <a:avLst/>
+          </a:prstGeom>
+          <a:noFill/>
+          <a:ln/>
+        </p:spPr>
+        <p:txBody>
+          <a:bodyPr wrap="square" lIns="0" tIns="0" rIns="0" bIns="0" rtlCol="0" anchor="ctr"/>
+          <a:lstStyle/>
+          <a:p>
+            <a:pPr marL="0" indent="0">
+              <a:buNone/>
+            </a:pPr>
+            <a:r>
+              <a:rPr lang="en-US" sz="1450" dirty="0">
+                <a:solidFill>
+                  <a:srgbClr val="334155"/>
+                </a:solidFill>
+                <a:latin typeface="Segoe UI" pitchFamily="34" charset="0"/>
+                <a:ea typeface="Segoe UI" pitchFamily="34" charset="-122"/>
+                <a:cs typeface="Segoe UI" pitchFamily="34" charset="-120"/>
+              </a:rPr>
+              <a:t>Cán bộ cập nhật dữ liệu tự động qua Google Sheets.</a:t>
+            </a:r>
+            <a:endParaRPr lang="en-US" sz="1450" dirty="0"/>
+          </a:p>
+        </p:txBody>
+      </p:sp>
+      <p:sp>
+        <p:nvSpPr>
+          <p:cNvPr id="21" name="Shape 14"/>
+          <p:cNvSpPr/>
+          <p:nvPr/>
+        </p:nvSpPr>
+        <p:spPr>
+          <a:xfrm>
+            <a:off x="5230368" y="5266944"/>
+            <a:ext cx="493776" cy="493776"/>
+          </a:xfrm>
+          <a:prstGeom prst="ellipse">
+            <a:avLst/>
+          </a:prstGeom>
+          <a:solidFill>
+            <a:srgbClr val="0B7A75"/>
+          </a:solidFill>
+          <a:ln/>
+          <a:effectLst>
+            <a:outerShdw blurRad="114300" dist="38100" dir="8100000" algn="bl" rotWithShape="0">
+              <a:srgbClr val="1E40AF">
+                <a:alpha val="20000"/>
+              </a:srgbClr>
+            </a:outerShdw>
+          </a:effectLst>
+        </p:spPr>
+      </p:sp>
+      <p:pic>
+        <p:nvPicPr>
+          <p:cNvPr id="22" name="Image 5" descr="preencoded.png"/>
+          <p:cNvPicPr>
+            <a:picLocks noChangeAspect="1"/>
+          </p:cNvPicPr>
+          <p:nvPr/>
+        </p:nvPicPr>
+        <p:blipFill>
+          <a:blip r:embed="rId7"/>
+          <a:stretch>
+            <a:fillRect/>
+          </a:stretch>
+        </p:blipFill>
+        <p:spPr>
+          <a:xfrm>
+            <a:off x="5363688" y="5400264"/>
+            <a:ext cx="227137" cy="227137"/>
+          </a:xfrm>
+          <a:prstGeom prst="rect">
+            <a:avLst/>
+          </a:prstGeom>
+        </p:spPr>
+      </p:pic>
+      <p:sp>
+        <p:nvSpPr>
+          <p:cNvPr id="23" name="Text 15"/>
+          <p:cNvSpPr/>
+          <p:nvPr/>
+        </p:nvSpPr>
+        <p:spPr>
+          <a:xfrm>
+            <a:off x="5897880" y="5257800"/>
+            <a:ext cx="3566160" cy="228600"/>
+          </a:xfrm>
+          <a:prstGeom prst="rect">
+            <a:avLst/>
+          </a:prstGeom>
+          <a:noFill/>
+          <a:ln/>
+        </p:spPr>
+        <p:txBody>
+          <a:bodyPr wrap="square" lIns="0" tIns="0" rIns="0" bIns="0" rtlCol="0" anchor="ctr"/>
+          <a:lstStyle/>
+          <a:p>
+            <a:pPr marL="0" indent="0">
+              <a:buNone/>
+            </a:pPr>
+            <a:r>
+              <a:rPr lang="en-US" sz="1700" b="1" dirty="0">
+                <a:solidFill>
+                  <a:srgbClr val="0F172A"/>
+                </a:solidFill>
+                <a:latin typeface="Segoe UI" pitchFamily="34" charset="0"/>
+                <a:ea typeface="Segoe UI" pitchFamily="34" charset="-122"/>
+                <a:cs typeface="Segoe UI" pitchFamily="34" charset="-120"/>
+              </a:rPr>
+              <a:t>Bảo mật</a:t>
+            </a:r>
+            <a:endParaRPr lang="en-US" sz="1700" dirty="0"/>
+          </a:p>
+        </p:txBody>
+      </p:sp>
+      <p:sp>
+        <p:nvSpPr>
+          <p:cNvPr id="24" name="Text 16"/>
+          <p:cNvSpPr/>
+          <p:nvPr/>
+        </p:nvSpPr>
+        <p:spPr>
+          <a:xfrm>
+            <a:off x="5897880" y="5559552"/>
+            <a:ext cx="4846320" cy="384048"/>
+          </a:xfrm>
+          <a:prstGeom prst="rect">
+            <a:avLst/>
+          </a:prstGeom>
+          <a:noFill/>
+          <a:ln/>
+        </p:spPr>
+        <p:txBody>
+          <a:bodyPr wrap="square" lIns="0" tIns="0" rIns="0" bIns="0" rtlCol="0" anchor="ctr"/>
+          <a:lstStyle/>
+          <a:p>
+            <a:pPr marL="0" indent="0">
+              <a:buNone/>
+            </a:pPr>
+            <a:r>
+              <a:rPr lang="en-US" sz="1450" dirty="0">
+                <a:solidFill>
+                  <a:srgbClr val="334155"/>
+                </a:solidFill>
+                <a:latin typeface="Segoe UI" pitchFamily="34" charset="0"/>
+                <a:ea typeface="Segoe UI" pitchFamily="34" charset="-122"/>
+                <a:cs typeface="Segoe UI" pitchFamily="34" charset="-120"/>
+              </a:rPr>
+              <a:t>Ngăn chặn tấn công bằng hệ thống Cloudflare Turnstile.</a:t>
+            </a:r>
+            <a:endParaRPr lang="en-US" sz="1450" dirty="0"/>
+          </a:p>
+        </p:txBody>
+      </p:sp>
+    </p:spTree>
+  </p:cSld>
+  <p:clrMapOvr>
+    <a:masterClrMapping/>
+  </p:clrMapOvr>
+  <mc:AlternateContent xmlns:mc="http://schemas.openxmlformats.org/markup-compatibility/2006">
+    <mc:Choice xmlns:p14="http://schemas.microsoft.com/office/powerpoint/2010/main" Requires="p14">
+      <p:transition p14:dur="450">
+        <p:fade/>
+      </p:transition>
+    </mc:Choice>
+    <mc:Fallback>
+      <p:transition>
+        <p:fade/>
+      </p:transition>
+    </mc:Fallback>
+  </mc:AlternateContent>
+</p:sld>
+</file>
+
+<file path=ppt/slides/slide9.xml><?xml version="1.0" encoding="utf-8"?>
+<p:sld xmlns:a="http://schemas.openxmlformats.org/drawingml/2006/main" xmlns:r="http://schemas.openxmlformats.org/officeDocument/2006/relationships" xmlns:p="http://schemas.openxmlformats.org/presentationml/2006/main">
+  <p:cSld name="Slide 9">
+    <p:bg>
+      <p:bgPr>
+        <a:solidFill>
+          <a:srgbClr val="1E3A8A"/>
+        </a:solidFill>
+        <a:effectLst/>
+      </p:bgPr>
+    </p:bg>
+    <p:spTree>
+      <p:nvGrpSpPr>
+        <p:cNvPr id="1" name=""/>
+        <p:cNvGrpSpPr/>
+        <p:nvPr/>
+      </p:nvGrpSpPr>
+      <p:grpSpPr>
+        <a:xfrm>
+          <a:off x="0" y="0"/>
+          <a:ext cx="0" cy="0"/>
+          <a:chOff x="0" y="0"/>
+          <a:chExt cx="0" cy="0"/>
+        </a:xfrm>
+      </p:grpSpPr>
+      <p:sp>
+        <p:nvSpPr>
+          <p:cNvPr id="2" name="Text 0"/>
+          <p:cNvSpPr/>
+          <p:nvPr/>
+        </p:nvSpPr>
+        <p:spPr>
+          <a:xfrm>
+            <a:off x="640080" y="548640"/>
+            <a:ext cx="9144000" cy="365760"/>
+          </a:xfrm>
+          <a:prstGeom prst="rect">
+            <a:avLst/>
+          </a:prstGeom>
+          <a:noFill/>
+          <a:ln/>
+        </p:spPr>
+        <p:txBody>
+          <a:bodyPr wrap="square" lIns="0" tIns="0" rIns="0" bIns="0" rtlCol="0" anchor="ctr"/>
+          <a:lstStyle/>
+          <a:p>
+            <a:pPr marL="0" indent="0">
+              <a:buNone/>
+            </a:pPr>
+            <a:r>
+              <a:rPr lang="en-US" sz="1400" b="1" kern="0" spc="200" dirty="0">
+                <a:solidFill>
+                  <a:srgbClr val="DBEAFE"/>
+                </a:solidFill>
+                <a:latin typeface="Segoe UI" pitchFamily="34" charset="0"/>
+                <a:ea typeface="Segoe UI" pitchFamily="34" charset="-122"/>
+                <a:cs typeface="Segoe UI" pitchFamily="34" charset="-120"/>
+              </a:rPr>
+              <a:t>GIÁ TRỊ MANG LẠI</a:t>
+            </a:r>
+            <a:endParaRPr lang="en-US" sz="1400" dirty="0"/>
+          </a:p>
+        </p:txBody>
+      </p:sp>
+      <p:sp>
+        <p:nvSpPr>
+          <p:cNvPr id="3" name="Text 1"/>
+          <p:cNvSpPr/>
+          <p:nvPr/>
+        </p:nvSpPr>
+        <p:spPr>
+          <a:xfrm>
+            <a:off x="640080" y="896112"/>
+            <a:ext cx="10515600" cy="731520"/>
+          </a:xfrm>
+          <a:prstGeom prst="rect">
+            <a:avLst/>
+          </a:prstGeom>
+          <a:noFill/>
+          <a:ln/>
+        </p:spPr>
+        <p:txBody>
+          <a:bodyPr wrap="square" lIns="0" tIns="0" rIns="0" bIns="0" rtlCol="0" anchor="ctr"/>
+          <a:lstStyle/>
+          <a:p>
+            <a:pPr marL="0" indent="0">
+              <a:buNone/>
+            </a:pPr>
+            <a:r>
+              <a:rPr lang="en-US" sz="3000" b="1" kern="0" spc="-50" dirty="0">
+                <a:solidFill>
+                  <a:srgbClr val="FFFFFF"/>
+                </a:solidFill>
+                <a:latin typeface="Segoe UI" pitchFamily="34" charset="0"/>
+                <a:ea typeface="Segoe UI" pitchFamily="34" charset="-122"/>
+                <a:cs typeface="Segoe UI" pitchFamily="34" charset="-120"/>
+              </a:rPr>
+              <a:t>Giá trị có thể đo kiểm</a:t>
+            </a:r>
+            <a:endParaRPr lang="en-US" sz="3000" dirty="0"/>
+          </a:p>
+        </p:txBody>
+      </p:sp>
+      <p:sp>
+        <p:nvSpPr>
+          <p:cNvPr id="4" name="Shape 2"/>
+          <p:cNvSpPr/>
+          <p:nvPr/>
+        </p:nvSpPr>
+        <p:spPr>
+          <a:xfrm>
+            <a:off x="640080" y="1920240"/>
+            <a:ext cx="5486400" cy="3200400"/>
+          </a:xfrm>
+          <a:prstGeom prst="roundRect">
+            <a:avLst>
+              <a:gd name="adj" fmla="val 3429"/>
+            </a:avLst>
+          </a:prstGeom>
+          <a:solidFill>
+            <a:srgbClr val="16306E"/>
+          </a:solidFill>
+          <a:ln w="15240">
+            <a:solidFill>
+              <a:srgbClr val="0B7A75"/>
+            </a:solidFill>
+            <a:prstDash val="solid"/>
+          </a:ln>
+          <a:effectLst>
+            <a:outerShdw blurRad="114300" dist="38100" dir="8100000" algn="bl" rotWithShape="0">
+              <a:srgbClr val="1E40AF">
+                <a:alpha val="20000"/>
+              </a:srgbClr>
+            </a:outerShdw>
+          </a:effectLst>
+        </p:spPr>
+      </p:sp>
+      <p:pic>
+        <p:nvPicPr>
+          <p:cNvPr id="5" name="Image 0" descr="preencoded.png"/>
+          <p:cNvPicPr>
+            <a:picLocks noChangeAspect="1"/>
+          </p:cNvPicPr>
+          <p:nvPr/>
+        </p:nvPicPr>
+        <p:blipFill>
+          <a:blip r:embed="rId3">
+            <a:alphaModFix amt="14000"/>
           </a:blip>
           <a:stretch>
             <a:fillRect/>
@@ -4389,8 +7501,8 @@
         </p:blipFill>
         <p:spPr>
           <a:xfrm>
-            <a:off x="9052560" y="1097280"/>
-            <a:ext cx="4389120" cy="4389120"/>
+            <a:off x="1051560" y="2029968"/>
+            <a:ext cx="960120" cy="960120"/>
           </a:xfrm>
           <a:prstGeom prst="rect">
             <a:avLst/>
@@ -4399,14 +7511,14 @@
       </p:pic>
       <p:sp>
         <p:nvSpPr>
-          <p:cNvPr id="3" name="Text 0"/>
-          <p:cNvSpPr/>
-          <p:nvPr/>
-        </p:nvSpPr>
-        <p:spPr>
-          <a:xfrm>
-            <a:off x="640080" y="548640"/>
-            <a:ext cx="9144000" cy="365760"/>
+          <p:cNvPr id="6" name="Text 3"/>
+          <p:cNvSpPr/>
+          <p:nvPr/>
+        </p:nvSpPr>
+        <p:spPr>
+          <a:xfrm>
+            <a:off x="914400" y="2084832"/>
+            <a:ext cx="4937760" cy="868680"/>
           </a:xfrm>
           <a:prstGeom prst="rect">
             <a:avLst/>
@@ -4418,11 +7530,11 @@
           <a:bodyPr wrap="square" lIns="0" tIns="0" rIns="0" bIns="0" rtlCol="0" anchor="ctr"/>
           <a:lstStyle/>
           <a:p>
-            <a:pPr indent="0" marL="0">
-              <a:buNone/>
-            </a:pPr>
-            <a:r>
-              <a:rPr lang="en-US" sz="1400" b="1" spc="200" kern="0" dirty="0">
+            <a:pPr marL="0" indent="0">
+              <a:buNone/>
+            </a:pPr>
+            <a:r>
+              <a:rPr lang="en-US" sz="4400" b="1" kern="0" spc="-100" dirty="0">
                 <a:solidFill>
                   <a:srgbClr val="DBEAFE"/>
                 </a:solidFill>
@@ -4430,22 +7542,22 @@
                 <a:ea typeface="Segoe UI" pitchFamily="34" charset="-122"/>
                 <a:cs typeface="Segoe UI" pitchFamily="34" charset="-120"/>
               </a:rPr>
-              <a:t>TẦM NHÌN THIẾT THỰC</a:t>
-            </a:r>
-            <a:endParaRPr lang="en-US" sz="1400" dirty="0"/>
-          </a:p>
-        </p:txBody>
-      </p:sp>
-      <p:sp>
-        <p:nvSpPr>
-          <p:cNvPr id="4" name="Text 1"/>
-          <p:cNvSpPr/>
-          <p:nvPr/>
-        </p:nvSpPr>
-        <p:spPr>
-          <a:xfrm>
-            <a:off x="640080" y="896112"/>
-            <a:ext cx="10515600" cy="731520"/>
+              <a:t>24/7</a:t>
+            </a:r>
+            <a:endParaRPr lang="en-US" sz="4400" dirty="0"/>
+          </a:p>
+        </p:txBody>
+      </p:sp>
+      <p:sp>
+        <p:nvSpPr>
+          <p:cNvPr id="7" name="Text 4"/>
+          <p:cNvSpPr/>
+          <p:nvPr/>
+        </p:nvSpPr>
+        <p:spPr>
+          <a:xfrm>
+            <a:off x="914400" y="3017520"/>
+            <a:ext cx="4937760" cy="1920240"/>
           </a:xfrm>
           <a:prstGeom prst="rect">
             <a:avLst/>
@@ -4457,11 +7569,11 @@
           <a:bodyPr wrap="square" lIns="0" tIns="0" rIns="0" bIns="0" rtlCol="0" anchor="ctr"/>
           <a:lstStyle/>
           <a:p>
-            <a:pPr indent="0" marL="0">
-              <a:buNone/>
-            </a:pPr>
-            <a:r>
-              <a:rPr lang="en-US" sz="3000" b="1" dirty="0">
+            <a:pPr marL="0" indent="0">
+              <a:buNone/>
+            </a:pPr>
+            <a:r>
+              <a:rPr lang="en-US" sz="1450" dirty="0">
                 <a:solidFill>
                   <a:srgbClr val="FFFFFF"/>
                 </a:solidFill>
@@ -4469,134 +7581,82 @@
                 <a:ea typeface="Segoe UI" pitchFamily="34" charset="-122"/>
                 <a:cs typeface="Segoe UI" pitchFamily="34" charset="-120"/>
               </a:rPr>
-              <a:t>Một chính quyền số gần dân</a:t>
-            </a:r>
-            <a:endParaRPr lang="en-US" sz="3000" dirty="0"/>
-          </a:p>
-        </p:txBody>
-      </p:sp>
-      <p:sp>
-        <p:nvSpPr>
-          <p:cNvPr id="5" name="Text 2"/>
-          <p:cNvSpPr/>
-          <p:nvPr/>
-        </p:nvSpPr>
-        <p:spPr>
-          <a:xfrm>
-            <a:off x="1234440" y="1874520"/>
-            <a:ext cx="8046720" cy="548640"/>
-          </a:xfrm>
-          <a:prstGeom prst="rect">
-            <a:avLst/>
-          </a:prstGeom>
-          <a:noFill/>
-          <a:ln/>
-        </p:spPr>
-        <p:txBody>
-          <a:bodyPr wrap="square" lIns="0" tIns="0" rIns="0" bIns="0" rtlCol="0" anchor="ctr"/>
-          <a:lstStyle/>
-          <a:p>
-            <a:pPr indent="0" marL="0">
-              <a:buNone/>
-            </a:pPr>
-            <a:r>
-              <a:rPr lang="en-US" sz="1700" dirty="0">
-                <a:solidFill>
-                  <a:srgbClr val="EFF6FF"/>
-                </a:solidFill>
-                <a:latin typeface="Segoe UI" pitchFamily="34" charset="0"/>
-                <a:ea typeface="Segoe UI" pitchFamily="34" charset="-122"/>
-                <a:cs typeface="Segoe UI" pitchFamily="34" charset="-120"/>
-              </a:rPr>
-              <a:t>Hoàn thiện hệ sinh thái dịch vụ công thông minh.</a:t>
-            </a:r>
-            <a:endParaRPr lang="en-US" sz="1700" dirty="0"/>
-          </a:p>
-        </p:txBody>
-      </p:sp>
-      <p:sp>
-        <p:nvSpPr>
-          <p:cNvPr id="6" name="Text 3"/>
-          <p:cNvSpPr/>
-          <p:nvPr/>
-        </p:nvSpPr>
-        <p:spPr>
-          <a:xfrm>
-            <a:off x="1234440" y="2651760"/>
-            <a:ext cx="8046720" cy="548640"/>
-          </a:xfrm>
-          <a:prstGeom prst="rect">
-            <a:avLst/>
-          </a:prstGeom>
-          <a:noFill/>
-          <a:ln/>
-        </p:spPr>
-        <p:txBody>
-          <a:bodyPr wrap="square" lIns="0" tIns="0" rIns="0" bIns="0" rtlCol="0" anchor="ctr"/>
-          <a:lstStyle/>
-          <a:p>
-            <a:pPr indent="0" marL="0">
-              <a:buNone/>
-            </a:pPr>
-            <a:r>
-              <a:rPr lang="en-US" sz="1700" dirty="0">
-                <a:solidFill>
-                  <a:srgbClr val="EFF6FF"/>
-                </a:solidFill>
-                <a:latin typeface="Segoe UI" pitchFamily="34" charset="0"/>
-                <a:ea typeface="Segoe UI" pitchFamily="34" charset="-122"/>
-                <a:cs typeface="Segoe UI" pitchFamily="34" charset="-120"/>
-              </a:rPr>
-              <a:t>Xây dựng hình ảnh Công an Phú Thọ hiện đại, tận tụy.</a:t>
-            </a:r>
-            <a:endParaRPr lang="en-US" sz="1700" dirty="0"/>
-          </a:p>
-        </p:txBody>
-      </p:sp>
-      <p:sp>
-        <p:nvSpPr>
-          <p:cNvPr id="7" name="Shape 4"/>
-          <p:cNvSpPr/>
-          <p:nvPr/>
-        </p:nvSpPr>
-        <p:spPr>
-          <a:xfrm>
-            <a:off x="640080" y="4526280"/>
-            <a:ext cx="10881360" cy="1554480"/>
+              <a:t>Tra cứu được ngoài giờ hành chính, không phải chờ tới lượt.</a:t>
+            </a:r>
+            <a:endParaRPr lang="en-US" sz="1450" dirty="0"/>
+          </a:p>
+        </p:txBody>
+      </p:sp>
+      <p:sp>
+        <p:nvSpPr>
+          <p:cNvPr id="8" name="Shape 5"/>
+          <p:cNvSpPr/>
+          <p:nvPr/>
+        </p:nvSpPr>
+        <p:spPr>
+          <a:xfrm>
+            <a:off x="6400800" y="1920240"/>
+            <a:ext cx="5120640" cy="3200400"/>
           </a:xfrm>
           <a:prstGeom prst="roundRect">
             <a:avLst>
-              <a:gd name="adj" fmla="val 7059"/>
+              <a:gd name="adj" fmla="val 3429"/>
             </a:avLst>
           </a:prstGeom>
           <a:solidFill>
-            <a:srgbClr val="0E4A44"/>
+            <a:srgbClr val="16306E"/>
           </a:solidFill>
-          <a:ln w="16510">
+          <a:ln w="15240">
             <a:solidFill>
-              <a:srgbClr val="22C55E"/>
+              <a:srgbClr val="0B7A75"/>
             </a:solidFill>
             <a:prstDash val="solid"/>
           </a:ln>
           <a:effectLst>
-            <a:outerShdw sx="100000" sy="100000" kx="0" ky="0" algn="bl" rotWithShape="0" blurRad="114300" dist="38100" dir="8100000">
-              <a:srgbClr val="1e40af">
+            <a:outerShdw blurRad="114300" dist="38100" dir="8100000" algn="bl" rotWithShape="0">
+              <a:srgbClr val="1E40AF">
                 <a:alpha val="20000"/>
               </a:srgbClr>
             </a:outerShdw>
           </a:effectLst>
         </p:spPr>
       </p:sp>
-      <p:sp>
-        <p:nvSpPr>
-          <p:cNvPr id="8" name="Text 5"/>
-          <p:cNvSpPr/>
-          <p:nvPr/>
-        </p:nvSpPr>
-        <p:spPr>
-          <a:xfrm>
-            <a:off x="1097280" y="4709160"/>
-            <a:ext cx="10058400" cy="411480"/>
+      <p:pic>
+        <p:nvPicPr>
+          <p:cNvPr id="9" name="Image 1" descr="preencoded.png"/>
+          <p:cNvPicPr>
+            <a:picLocks noChangeAspect="1"/>
+          </p:cNvPicPr>
+          <p:nvPr/>
+        </p:nvPicPr>
+        <p:blipFill>
+          <a:blip r:embed="rId4">
+            <a:alphaModFix amt="14000"/>
+          </a:blip>
+          <a:stretch>
+            <a:fillRect/>
+          </a:stretch>
+        </p:blipFill>
+        <p:spPr>
+          <a:xfrm>
+            <a:off x="6812280" y="2029968"/>
+            <a:ext cx="960120" cy="960120"/>
+          </a:xfrm>
+          <a:prstGeom prst="rect">
+            <a:avLst/>
+          </a:prstGeom>
+        </p:spPr>
+      </p:pic>
+      <p:sp>
+        <p:nvSpPr>
+          <p:cNvPr id="10" name="Text 6"/>
+          <p:cNvSpPr/>
+          <p:nvPr/>
+        </p:nvSpPr>
+        <p:spPr>
+          <a:xfrm>
+            <a:off x="6675120" y="2084832"/>
+            <a:ext cx="4572000" cy="868680"/>
           </a:xfrm>
           <a:prstGeom prst="rect">
             <a:avLst/>
@@ -4608,11 +7668,11 @@
           <a:bodyPr wrap="square" lIns="0" tIns="0" rIns="0" bIns="0" rtlCol="0" anchor="ctr"/>
           <a:lstStyle/>
           <a:p>
-            <a:pPr indent="0" marL="0">
-              <a:buNone/>
-            </a:pPr>
-            <a:r>
-              <a:rPr lang="en-US" sz="1400" b="1" spc="150" kern="0" dirty="0">
+            <a:pPr marL="0" indent="0">
+              <a:buNone/>
+            </a:pPr>
+            <a:r>
+              <a:rPr lang="en-US" sz="4400" b="1" kern="0" spc="-100" dirty="0">
                 <a:solidFill>
                   <a:srgbClr val="DBEAFE"/>
                 </a:solidFill>
@@ -4620,22 +7680,22 @@
                 <a:ea typeface="Segoe UI" pitchFamily="34" charset="-122"/>
                 <a:cs typeface="Segoe UI" pitchFamily="34" charset="-120"/>
               </a:rPr>
-              <a:t>KÍNH ĐỀ NGHỊ LÃNH ĐẠO CÔNG AN TỈNH</a:t>
-            </a:r>
-            <a:endParaRPr lang="en-US" sz="1400" dirty="0"/>
-          </a:p>
-        </p:txBody>
-      </p:sp>
-      <p:sp>
-        <p:nvSpPr>
-          <p:cNvPr id="9" name="Text 6"/>
-          <p:cNvSpPr/>
-          <p:nvPr/>
-        </p:nvSpPr>
-        <p:spPr>
-          <a:xfrm>
-            <a:off x="1143000" y="5120640"/>
-            <a:ext cx="10058400" cy="914400"/>
+              <a:t>17–28 GIÂY</a:t>
+            </a:r>
+            <a:endParaRPr lang="en-US" sz="4400" dirty="0"/>
+          </a:p>
+        </p:txBody>
+      </p:sp>
+      <p:sp>
+        <p:nvSpPr>
+          <p:cNvPr id="11" name="Text 7"/>
+          <p:cNvSpPr/>
+          <p:nvPr/>
+        </p:nvSpPr>
+        <p:spPr>
+          <a:xfrm>
+            <a:off x="6675120" y="3017520"/>
+            <a:ext cx="4572000" cy="1920240"/>
           </a:xfrm>
           <a:prstGeom prst="rect">
             <a:avLst/>
@@ -4647,15 +7707,11 @@
           <a:bodyPr wrap="square" lIns="0" tIns="0" rIns="0" bIns="0" rtlCol="0" anchor="ctr"/>
           <a:lstStyle/>
           <a:p>
-            <a:pPr marL="342900" indent="-342900">
-              <a:spcAft>
-                <a:spcPts val="600"/>
-              </a:spcAft>
-              <a:buSzPct val="100000"/>
-              <a:buChar char="•"/>
-            </a:pPr>
-            <a:r>
-              <a:rPr lang="en-US" sz="1800" b="1" dirty="0">
+            <a:pPr marL="0" indent="0">
+              <a:buNone/>
+            </a:pPr>
+            <a:r>
+              <a:rPr lang="en-US" sz="1450" dirty="0">
                 <a:solidFill>
                   <a:srgbClr val="FFFFFF"/>
                 </a:solidFill>
@@ -4663,20 +7719,60 @@
                 <a:ea typeface="Segoe UI" pitchFamily="34" charset="-122"/>
                 <a:cs typeface="Segoe UI" pitchFamily="34" charset="-120"/>
               </a:rPr>
-              <a:t>Chấp thuận triển khai nhân rộng toàn tỉnh</a:t>
-            </a:r>
-            <a:endParaRPr lang="en-US" sz="1800" dirty="0"/>
-          </a:p>
-          <a:p>
-            <a:pPr marL="342900" indent="-342900">
-              <a:spcAft>
-                <a:spcPts val="600"/>
-              </a:spcAft>
-              <a:buSzPct val="100000"/>
-              <a:buChar char="•"/>
-            </a:pPr>
-            <a:r>
-              <a:rPr lang="en-US" sz="1800" b="1" dirty="0">
+              <a:t>Thời gian phản hồi p95 đo trong kiểm thử nội bộ, tuỳ nhà cung cấp AI.</a:t>
+            </a:r>
+            <a:endParaRPr lang="en-US" sz="1450" dirty="0"/>
+          </a:p>
+        </p:txBody>
+      </p:sp>
+      <p:sp>
+        <p:nvSpPr>
+          <p:cNvPr id="12" name="Shape 8"/>
+          <p:cNvSpPr/>
+          <p:nvPr/>
+        </p:nvSpPr>
+        <p:spPr>
+          <a:xfrm>
+            <a:off x="640080" y="5394960"/>
+            <a:ext cx="10881360" cy="868680"/>
+          </a:xfrm>
+          <a:prstGeom prst="roundRect">
+            <a:avLst>
+              <a:gd name="adj" fmla="val 10526"/>
+            </a:avLst>
+          </a:prstGeom>
+          <a:solidFill>
+            <a:srgbClr val="1D4ED8"/>
+          </a:solidFill>
+          <a:ln/>
+        </p:spPr>
+      </p:sp>
+      <p:sp>
+        <p:nvSpPr>
+          <p:cNvPr id="13" name="Text 9"/>
+          <p:cNvSpPr/>
+          <p:nvPr/>
+        </p:nvSpPr>
+        <p:spPr>
+          <a:xfrm>
+            <a:off x="640080" y="5394960"/>
+            <a:ext cx="10881360" cy="868680"/>
+          </a:xfrm>
+          <a:prstGeom prst="rect">
+            <a:avLst/>
+          </a:prstGeom>
+          <a:noFill/>
+          <a:ln/>
+        </p:spPr>
+        <p:txBody>
+          <a:bodyPr wrap="square" lIns="0" tIns="0" rIns="0" bIns="0" rtlCol="0" anchor="ctr"/>
+          <a:lstStyle/>
+          <a:p>
+            <a:pPr marL="0" indent="0" algn="ctr">
+              <a:buNone/>
+            </a:pPr>
+            <a:r>
+              <a:rPr lang="en-US" sz="1700" b="1" dirty="0">
                 <a:solidFill>
                   <a:srgbClr val="FFFFFF"/>
                 </a:solidFill>
@@ -4684,48 +7780,9 @@
                 <a:ea typeface="Segoe UI" pitchFamily="34" charset="-122"/>
                 <a:cs typeface="Segoe UI" pitchFamily="34" charset="-120"/>
               </a:rPr>
-              <a:t>Cấp kinh phí duy trì hạ tầng AI hằng năm</a:t>
-            </a:r>
-            <a:endParaRPr lang="en-US" sz="1800" dirty="0"/>
-          </a:p>
-        </p:txBody>
-      </p:sp>
-      <p:sp>
-        <p:nvSpPr>
-          <p:cNvPr id="10" name="Text 7"/>
-          <p:cNvSpPr/>
-          <p:nvPr/>
-        </p:nvSpPr>
-        <p:spPr>
-          <a:xfrm>
-            <a:off x="640080" y="6263640"/>
-            <a:ext cx="10881360" cy="365760"/>
-          </a:xfrm>
-          <a:prstGeom prst="rect">
-            <a:avLst/>
-          </a:prstGeom>
-          <a:noFill/>
-          <a:ln/>
-        </p:spPr>
-        <p:txBody>
-          <a:bodyPr wrap="square" lIns="0" tIns="0" rIns="0" bIns="0" rtlCol="0" anchor="ctr"/>
-          <a:lstStyle/>
-          <a:p>
-            <a:pPr algn="r" indent="0" marL="0">
-              <a:buNone/>
-            </a:pPr>
-            <a:r>
-              <a:rPr lang="en-US" sz="1600" i="1" dirty="0">
-                <a:solidFill>
-                  <a:srgbClr val="DBEAFE"/>
-                </a:solidFill>
-                <a:latin typeface="Segoe UI" pitchFamily="34" charset="0"/>
-                <a:ea typeface="Segoe UI" pitchFamily="34" charset="-122"/>
-                <a:cs typeface="Segoe UI" pitchFamily="34" charset="-120"/>
-              </a:rPr>
-              <a:t>Xin trân trọng cảm ơn các đồng chí Lãnh đạo!</a:t>
-            </a:r>
-            <a:endParaRPr lang="en-US" sz="1600" dirty="0"/>
+              <a:t>Số liệu từ kiểm thử nội bộ, chưa phải số liệu vận hành thực tế trên diện rộng.</a:t>
+            </a:r>
+            <a:endParaRPr lang="en-US" sz="1700" dirty="0"/>
           </a:p>
         </p:txBody>
       </p:sp>
@@ -4734,9 +7791,18 @@
   <p:clrMapOvr>
     <a:masterClrMapping/>
   </p:clrMapOvr>
-  <p:transition xmlns:p14="http://schemas.microsoft.com/office/powerpoint/2010/main" spd="med" p14:dur="450">
-    <p:fade/>
-  </p:transition>
+  <mc:AlternateContent xmlns:mc="http://schemas.openxmlformats.org/markup-compatibility/2006">
+    <mc:Choice xmlns:p159="http://schemas.microsoft.com/office/powerpoint/2015/9/main" xmlns="" Requires="p159">
+      <p:transition xmlns:p14="http://schemas.microsoft.com/office/powerpoint/2010/main" spd="med" p14:dur="800">
+        <p159:morph option="byObject"/>
+      </p:transition>
+    </mc:Choice>
+    <mc:Fallback>
+      <p:transition spd="med">
+        <p:fade/>
+      </p:transition>
+    </mc:Fallback>
+  </mc:AlternateContent>
 </p:sld>
 </file>
 
@@ -5033,4 +8099,319 @@
     </a:ext>
   </a:extLst>
 </a:theme>
+</file>
+
+<file path=ppt/theme/theme2.xml><?xml version="1.0" encoding="utf-8"?>
+<a:theme xmlns:a="http://schemas.openxmlformats.org/drawingml/2006/main" name="Office Theme">
+  <a:themeElements>
+    <a:clrScheme name="Office">
+      <a:dk1>
+        <a:sysClr val="windowText" lastClr="000000"/>
+      </a:dk1>
+      <a:lt1>
+        <a:sysClr val="window" lastClr="FFFFFF"/>
+      </a:lt1>
+      <a:dk2>
+        <a:srgbClr val="0E2841"/>
+      </a:dk2>
+      <a:lt2>
+        <a:srgbClr val="E8E8E8"/>
+      </a:lt2>
+      <a:accent1>
+        <a:srgbClr val="156082"/>
+      </a:accent1>
+      <a:accent2>
+        <a:srgbClr val="E97132"/>
+      </a:accent2>
+      <a:accent3>
+        <a:srgbClr val="196B24"/>
+      </a:accent3>
+      <a:accent4>
+        <a:srgbClr val="0F9ED5"/>
+      </a:accent4>
+      <a:accent5>
+        <a:srgbClr val="A02B93"/>
+      </a:accent5>
+      <a:accent6>
+        <a:srgbClr val="4EA72E"/>
+      </a:accent6>
+      <a:hlink>
+        <a:srgbClr val="467886"/>
+      </a:hlink>
+      <a:folHlink>
+        <a:srgbClr val="96607D"/>
+      </a:folHlink>
+    </a:clrScheme>
+    <a:fontScheme name="Office">
+      <a:majorFont>
+        <a:latin typeface="Aptos Display" panose="02110004020202020204"/>
+        <a:ea typeface=""/>
+        <a:cs typeface=""/>
+        <a:font script="Jpan" typeface="游ゴシック Light"/>
+        <a:font script="Hang" typeface="맑은 고딕"/>
+        <a:font script="Hans" typeface="等线 Light"/>
+        <a:font script="Hant" typeface="新細明體"/>
+        <a:font script="Arab" typeface="Times New Roman"/>
+        <a:font script="Hebr" typeface="Times New Roman"/>
+        <a:font script="Thai" typeface="Angsana New"/>
+        <a:font script="Ethi" typeface="Nyala"/>
+        <a:font script="Beng" typeface="Vrinda"/>
+        <a:font script="Gujr" typeface="Shruti"/>
+        <a:font script="Khmr" typeface="MoolBoran"/>
+        <a:font script="Knda" typeface="Tunga"/>
+        <a:font script="Guru" typeface="Raavi"/>
+        <a:font script="Cans" typeface="Euphemia"/>
+        <a:font script="Cher" typeface="Plantagenet Cherokee"/>
+        <a:font script="Yiii" typeface="Microsoft Yi Baiti"/>
+        <a:font script="Tibt" typeface="Microsoft Himalaya"/>
+        <a:font script="Thaa" typeface="MV Boli"/>
+        <a:font script="Deva" typeface="Mangal"/>
+        <a:font script="Telu" typeface="Gautami"/>
+        <a:font script="Taml" typeface="Latha"/>
+        <a:font script="Syrc" typeface="Estrangelo Edessa"/>
+        <a:font script="Orya" typeface="Kalinga"/>
+        <a:font script="Mlym" typeface="Kartika"/>
+        <a:font script="Laoo" typeface="DokChampa"/>
+        <a:font script="Sinh" typeface="Iskoola Pota"/>
+        <a:font script="Mong" typeface="Mongolian Baiti"/>
+        <a:font script="Viet" typeface="Times New Roman"/>
+        <a:font script="Uigh" typeface="Microsoft Uighur"/>
+        <a:font script="Geor" typeface="Sylfaen"/>
+        <a:font script="Armn" typeface="Arial"/>
+        <a:font script="Bugi" typeface="Leelawadee UI"/>
+        <a:font script="Bopo" typeface="Microsoft JhengHei"/>
+        <a:font script="Java" typeface="Javanese Text"/>
+        <a:font script="Lisu" typeface="Segoe UI"/>
+        <a:font script="Mymr" typeface="Myanmar Text"/>
+        <a:font script="Nkoo" typeface="Ebrima"/>
+        <a:font script="Olck" typeface="Nirmala UI"/>
+        <a:font script="Osma" typeface="Ebrima"/>
+        <a:font script="Phag" typeface="Phagspa"/>
+        <a:font script="Syrn" typeface="Estrangelo Edessa"/>
+        <a:font script="Syrj" typeface="Estrangelo Edessa"/>
+        <a:font script="Syre" typeface="Estrangelo Edessa"/>
+        <a:font script="Sora" typeface="Nirmala UI"/>
+        <a:font script="Tale" typeface="Microsoft Tai Le"/>
+        <a:font script="Talu" typeface="Microsoft New Tai Lue"/>
+        <a:font script="Tfng" typeface="Ebrima"/>
+      </a:majorFont>
+      <a:minorFont>
+        <a:latin typeface="Aptos" panose="02110004020202020204"/>
+        <a:ea typeface=""/>
+        <a:cs typeface=""/>
+        <a:font script="Jpan" typeface="游ゴシック"/>
+        <a:font script="Hang" typeface="맑은 고딕"/>
+        <a:font script="Hans" typeface="等线"/>
+        <a:font script="Hant" typeface="新細明體"/>
+        <a:font script="Arab" typeface="Arial"/>
+        <a:font script="Hebr" typeface="Arial"/>
+        <a:font script="Thai" typeface="Cordia New"/>
+        <a:font script="Ethi" typeface="Nyala"/>
+        <a:font script="Beng" typeface="Vrinda"/>
+        <a:font script="Gujr" typeface="Shruti"/>
+        <a:font script="Khmr" typeface="DaunPenh"/>
+        <a:font script="Knda" typeface="Tunga"/>
+        <a:font script="Guru" typeface="Raavi"/>
+        <a:font script="Cans" typeface="Euphemia"/>
+        <a:font script="Cher" typeface="Plantagenet Cherokee"/>
+        <a:font script="Yiii" typeface="Microsoft Yi Baiti"/>
+        <a:font script="Tibt" typeface="Microsoft Himalaya"/>
+        <a:font script="Thaa" typeface="MV Boli"/>
+        <a:font script="Deva" typeface="Mangal"/>
+        <a:font script="Telu" typeface="Gautami"/>
+        <a:font script="Taml" typeface="Latha"/>
+        <a:font script="Syrc" typeface="Estrangelo Edessa"/>
+        <a:font script="Orya" typeface="Kalinga"/>
+        <a:font script="Mlym" typeface="Kartika"/>
+        <a:font script="Laoo" typeface="DokChampa"/>
+        <a:font script="Sinh" typeface="Iskoola Pota"/>
+        <a:font script="Mong" typeface="Mongolian Baiti"/>
+        <a:font script="Viet" typeface="Arial"/>
+        <a:font script="Uigh" typeface="Microsoft Uighur"/>
+        <a:font script="Geor" typeface="Sylfaen"/>
+        <a:font script="Armn" typeface="Arial"/>
+        <a:font script="Bugi" typeface="Leelawadee UI"/>
+        <a:font script="Bopo" typeface="Microsoft JhengHei"/>
+        <a:font script="Java" typeface="Javanese Text"/>
+        <a:font script="Lisu" typeface="Segoe UI"/>
+        <a:font script="Mymr" typeface="Myanmar Text"/>
+        <a:font script="Nkoo" typeface="Ebrima"/>
+        <a:font script="Olck" typeface="Nirmala UI"/>
+        <a:font script="Osma" typeface="Ebrima"/>
+        <a:font script="Phag" typeface="Phagspa"/>
+        <a:font script="Syrn" typeface="Estrangelo Edessa"/>
+        <a:font script="Syrj" typeface="Estrangelo Edessa"/>
+        <a:font script="Syre" typeface="Estrangelo Edessa"/>
+        <a:font script="Sora" typeface="Nirmala UI"/>
+        <a:font script="Tale" typeface="Microsoft Tai Le"/>
+        <a:font script="Talu" typeface="Microsoft New Tai Lue"/>
+        <a:font script="Tfng" typeface="Ebrima"/>
+      </a:minorFont>
+    </a:fontScheme>
+    <a:fmtScheme name="Office">
+      <a:fillStyleLst>
+        <a:solidFill>
+          <a:schemeClr val="phClr"/>
+        </a:solidFill>
+        <a:gradFill rotWithShape="1">
+          <a:gsLst>
+            <a:gs pos="0">
+              <a:schemeClr val="phClr">
+                <a:lumMod val="110000"/>
+                <a:satMod val="105000"/>
+                <a:tint val="67000"/>
+              </a:schemeClr>
+            </a:gs>
+            <a:gs pos="50000">
+              <a:schemeClr val="phClr">
+                <a:lumMod val="105000"/>
+                <a:satMod val="103000"/>
+                <a:tint val="73000"/>
+              </a:schemeClr>
+            </a:gs>
+            <a:gs pos="100000">
+              <a:schemeClr val="phClr">
+                <a:lumMod val="105000"/>
+                <a:satMod val="109000"/>
+                <a:tint val="81000"/>
+              </a:schemeClr>
+            </a:gs>
+          </a:gsLst>
+          <a:lin ang="5400000" scaled="0"/>
+        </a:gradFill>
+        <a:gradFill rotWithShape="1">
+          <a:gsLst>
+            <a:gs pos="0">
+              <a:schemeClr val="phClr">
+                <a:satMod val="103000"/>
+                <a:lumMod val="102000"/>
+                <a:tint val="94000"/>
+              </a:schemeClr>
+            </a:gs>
+            <a:gs pos="50000">
+              <a:schemeClr val="phClr">
+                <a:satMod val="110000"/>
+                <a:lumMod val="100000"/>
+                <a:shade val="100000"/>
+              </a:schemeClr>
+            </a:gs>
+            <a:gs pos="100000">
+              <a:schemeClr val="phClr">
+                <a:lumMod val="99000"/>
+                <a:satMod val="120000"/>
+                <a:shade val="78000"/>
+              </a:schemeClr>
+            </a:gs>
+          </a:gsLst>
+          <a:lin ang="5400000" scaled="0"/>
+        </a:gradFill>
+      </a:fillStyleLst>
+      <a:lnStyleLst>
+        <a:ln w="12700" cap="flat" cmpd="sng" algn="ctr">
+          <a:solidFill>
+            <a:schemeClr val="phClr"/>
+          </a:solidFill>
+          <a:prstDash val="solid"/>
+          <a:miter lim="800000"/>
+        </a:ln>
+        <a:ln w="19050" cap="flat" cmpd="sng" algn="ctr">
+          <a:solidFill>
+            <a:schemeClr val="phClr"/>
+          </a:solidFill>
+          <a:prstDash val="solid"/>
+          <a:miter lim="800000"/>
+        </a:ln>
+        <a:ln w="25400" cap="flat" cmpd="sng" algn="ctr">
+          <a:solidFill>
+            <a:schemeClr val="phClr"/>
+          </a:solidFill>
+          <a:prstDash val="solid"/>
+          <a:miter lim="800000"/>
+        </a:ln>
+      </a:lnStyleLst>
+      <a:effectStyleLst>
+        <a:effectStyle>
+          <a:effectLst/>
+        </a:effectStyle>
+        <a:effectStyle>
+          <a:effectLst/>
+        </a:effectStyle>
+        <a:effectStyle>
+          <a:effectLst>
+            <a:outerShdw blurRad="57150" dist="19050" dir="5400000" algn="ctr" rotWithShape="0">
+              <a:srgbClr val="000000">
+                <a:alpha val="63000"/>
+              </a:srgbClr>
+            </a:outerShdw>
+          </a:effectLst>
+        </a:effectStyle>
+      </a:effectStyleLst>
+      <a:bgFillStyleLst>
+        <a:solidFill>
+          <a:schemeClr val="phClr"/>
+        </a:solidFill>
+        <a:solidFill>
+          <a:schemeClr val="phClr">
+            <a:tint val="95000"/>
+            <a:satMod val="170000"/>
+          </a:schemeClr>
+        </a:solidFill>
+        <a:gradFill rotWithShape="1">
+          <a:gsLst>
+            <a:gs pos="0">
+              <a:schemeClr val="phClr">
+                <a:tint val="93000"/>
+                <a:satMod val="150000"/>
+                <a:shade val="98000"/>
+                <a:lumMod val="102000"/>
+              </a:schemeClr>
+            </a:gs>
+            <a:gs pos="50000">
+              <a:schemeClr val="phClr">
+                <a:tint val="98000"/>
+                <a:satMod val="130000"/>
+                <a:shade val="90000"/>
+                <a:lumMod val="103000"/>
+              </a:schemeClr>
+            </a:gs>
+            <a:gs pos="100000">
+              <a:schemeClr val="phClr">
+                <a:shade val="63000"/>
+                <a:satMod val="120000"/>
+              </a:schemeClr>
+            </a:gs>
+          </a:gsLst>
+          <a:lin ang="5400000" scaled="0"/>
+        </a:gradFill>
+      </a:bgFillStyleLst>
+    </a:fmtScheme>
+  </a:themeElements>
+  <a:objectDefaults>
+    <a:lnDef>
+      <a:spPr/>
+      <a:bodyPr/>
+      <a:lstStyle/>
+      <a:style>
+        <a:lnRef idx="2">
+          <a:schemeClr val="accent1"/>
+        </a:lnRef>
+        <a:fillRef idx="0">
+          <a:schemeClr val="accent1"/>
+        </a:fillRef>
+        <a:effectRef idx="1">
+          <a:schemeClr val="accent1"/>
+        </a:effectRef>
+        <a:fontRef idx="minor">
+          <a:schemeClr val="tx1"/>
+        </a:fontRef>
+      </a:style>
+    </a:lnDef>
+  </a:objectDefaults>
+  <a:extraClrSchemeLst/>
+  <a:extLst>
+    <a:ext uri="{05A4C25C-085E-4340-85A3-A5531E510DB2}">
+      <thm15:themeFamily xmlns:thm15="http://schemas.microsoft.com/office/thememl/2012/main" name="Office Theme" id="{2E142A2C-CD16-42D6-873A-C26D2A0506FA}" vid="{1BDDFF52-6CD6-40A5-AB3C-68EB2F1E4D0A}"/>
+    </a:ext>
+  </a:extLst>
+</a:theme>
 </file>
--- a/presentation/Ban-do-Cong-an-so-Phu-Tho.pptx
+++ b/presentation/Ban-do-Cong-an-so-Phu-Tho.pptx
@@ -4,9 +4,6 @@
   <p:sldMasterIdLst>
     <p:sldMasterId id="2147483648" r:id="rId1"/>
   </p:sldMasterIdLst>
-  <p:notesMasterIdLst>
-    <p:notesMasterId r:id="rId13"/>
-  </p:notesMasterIdLst>
   <p:sldIdLst>
     <p:sldId id="256" r:id="rId2"/>
     <p:sldId id="257" r:id="rId3"/>
@@ -20,8 +17,11 @@
     <p:sldId id="265" r:id="rId11"/>
     <p:sldId id="266" r:id="rId12"/>
   </p:sldIdLst>
-  <p:sldSz cx="12161838" cy="6858000"/>
-  <p:notesSz cx="6858000" cy="12161838"/>
+  <p:notesMasterIdLst>
+    <p:notesMasterId r:id="rId13"/>
+  </p:notesMasterIdLst>
+  <p:sldSz cx="12161520" cy="6858000"/>
+  <p:notesSz cx="6858000" cy="12161520"/>
   <p:defaultTextStyle>
     <a:lvl1pPr marL="0" algn="l" defTabSz="914400" rtl="0" eaLnBrk="1" latinLnBrk="0" hangingPunct="1">
       <a:defRPr sz="1800" kern="1200">
@@ -114,11 +114,6 @@
       </a:defRPr>
     </a:lvl9pPr>
   </p:defaultTextStyle>
-  <p:extLst>
-    <p:ext uri="{EFAFB233-063F-42B5-8137-9DF3F51BA10A}">
-      <p15:sldGuideLst xmlns:p15="http://schemas.microsoft.com/office/powerpoint/2012/main"/>
-    </p:ext>
-  </p:extLst>
 </p:presentation>
 </file>
 
@@ -144,10 +139,234 @@
           <a:chExt cx="0" cy="0"/>
         </a:xfrm>
       </p:grpSpPr>
+      <p:sp>
+        <p:nvSpPr>
+          <p:cNvPr id="2" name="Header Placeholder 1"/>
+          <p:cNvSpPr>
+            <a:spLocks noGrp="1"/>
+          </p:cNvSpPr>
+          <p:nvPr>
+            <p:ph type="hdr" sz="quarter"/>
+          </p:nvPr>
+        </p:nvSpPr>
+        <p:spPr>
+          <a:xfrm>
+            <a:off x="0" y="0"/>
+            <a:ext cx="2971800" cy="458788"/>
+          </a:xfrm>
+          <a:prstGeom prst="rect">
+            <a:avLst/>
+          </a:prstGeom>
+        </p:spPr>
+        <p:txBody>
+          <a:bodyPr vert="horz" lIns="91440" tIns="45720" rIns="91440" bIns="45720" rtlCol="0"/>
+          <a:lstStyle>
+            <a:lvl1pPr algn="l">
+              <a:defRPr sz="1200"/>
+            </a:lvl1pPr>
+          </a:lstStyle>
+          <a:p>
+            <a:endParaRPr lang="en-US"/>
+          </a:p>
+        </p:txBody>
+      </p:sp>
+      <p:sp>
+        <p:nvSpPr>
+          <p:cNvPr id="3" name="Date Placeholder 2"/>
+          <p:cNvSpPr>
+            <a:spLocks noGrp="1"/>
+          </p:cNvSpPr>
+          <p:nvPr>
+            <p:ph type="dt" idx="1"/>
+          </p:nvPr>
+        </p:nvSpPr>
+        <p:spPr>
+          <a:xfrm>
+            <a:off x="3884613" y="0"/>
+            <a:ext cx="2971800" cy="458788"/>
+          </a:xfrm>
+          <a:prstGeom prst="rect">
+            <a:avLst/>
+          </a:prstGeom>
+        </p:spPr>
+        <p:txBody>
+          <a:bodyPr vert="horz" lIns="91440" tIns="45720" rIns="91440" bIns="45720" rtlCol="0"/>
+          <a:lstStyle>
+            <a:lvl1pPr algn="r">
+              <a:defRPr sz="1200"/>
+            </a:lvl1pPr>
+          </a:lstStyle>
+          <a:p>
+            <a:fld id="{5282F153-3F37-0F45-9E97-73ACFA13230C}" type="datetimeFigureOut">
+              <a:rPr lang="en-US"/>
+              <a:t>7/23/19</a:t>
+            </a:fld>
+            <a:endParaRPr lang="en-US"/>
+          </a:p>
+        </p:txBody>
+      </p:sp>
+      <p:sp>
+        <p:nvSpPr>
+          <p:cNvPr id="4" name="Slide Image Placeholder 3"/>
+          <p:cNvSpPr>
+            <a:spLocks noGrp="1" noRot="1" noChangeAspect="1"/>
+          </p:cNvSpPr>
+          <p:nvPr>
+            <p:ph type="sldImg" idx="2"/>
+          </p:nvPr>
+        </p:nvSpPr>
+        <p:spPr>
+          <a:xfrm>
+            <a:off x="685800" y="1143000"/>
+            <a:ext cx="5486400" cy="3086100"/>
+          </a:xfrm>
+          <a:prstGeom prst="rect">
+            <a:avLst/>
+          </a:prstGeom>
+          <a:noFill/>
+          <a:ln w="12700">
+            <a:solidFill>
+              <a:prstClr val="black"/>
+            </a:solidFill>
+          </a:ln>
+        </p:spPr>
+        <p:txBody>
+          <a:bodyPr vert="horz" lIns="91440" tIns="45720" rIns="91440" bIns="45720" rtlCol="0" anchor="ctr"/>
+          <a:lstStyle/>
+          <a:p>
+            <a:endParaRPr lang="en-US"/>
+          </a:p>
+        </p:txBody>
+      </p:sp>
+      <p:sp>
+        <p:nvSpPr>
+          <p:cNvPr id="5" name="Notes Placeholder 4"/>
+          <p:cNvSpPr>
+            <a:spLocks noGrp="1"/>
+          </p:cNvSpPr>
+          <p:nvPr>
+            <p:ph type="body" sz="quarter" idx="3"/>
+          </p:nvPr>
+        </p:nvSpPr>
+        <p:spPr>
+          <a:xfrm>
+            <a:off x="685800" y="4400550"/>
+            <a:ext cx="5486400" cy="3600450"/>
+          </a:xfrm>
+          <a:prstGeom prst="rect">
+            <a:avLst/>
+          </a:prstGeom>
+        </p:spPr>
+        <p:txBody>
+          <a:bodyPr vert="horz" lIns="91440" tIns="45720" rIns="91440" bIns="45720" rtlCol="0"/>
+          <a:lstStyle/>
+          <a:p>
+            <a:pPr lvl="0"/>
+            <a:r>
+              <a:rPr lang="en-US"/>
+              <a:t>Click to edit Master text styles</a:t>
+            </a:r>
+          </a:p>
+          <a:p>
+            <a:pPr lvl="1"/>
+            <a:r>
+              <a:rPr lang="en-US"/>
+              <a:t>Second level</a:t>
+            </a:r>
+          </a:p>
+          <a:p>
+            <a:pPr lvl="2"/>
+            <a:r>
+              <a:rPr lang="en-US"/>
+              <a:t>Third level</a:t>
+            </a:r>
+          </a:p>
+          <a:p>
+            <a:pPr lvl="3"/>
+            <a:r>
+              <a:rPr lang="en-US"/>
+              <a:t>Fourth level</a:t>
+            </a:r>
+          </a:p>
+          <a:p>
+            <a:pPr lvl="4"/>
+            <a:r>
+              <a:rPr lang="en-US"/>
+              <a:t>Fifth level</a:t>
+            </a:r>
+          </a:p>
+        </p:txBody>
+      </p:sp>
+      <p:sp>
+        <p:nvSpPr>
+          <p:cNvPr id="6" name="Footer Placeholder 5"/>
+          <p:cNvSpPr>
+            <a:spLocks noGrp="1"/>
+          </p:cNvSpPr>
+          <p:nvPr>
+            <p:ph type="ftr" sz="quarter" idx="4"/>
+          </p:nvPr>
+        </p:nvSpPr>
+        <p:spPr>
+          <a:xfrm>
+            <a:off x="0" y="8685213"/>
+            <a:ext cx="2971800" cy="458787"/>
+          </a:xfrm>
+          <a:prstGeom prst="rect">
+            <a:avLst/>
+          </a:prstGeom>
+        </p:spPr>
+        <p:txBody>
+          <a:bodyPr vert="horz" lIns="91440" tIns="45720" rIns="91440" bIns="45720" rtlCol="0" anchor="b"/>
+          <a:lstStyle>
+            <a:lvl1pPr algn="l">
+              <a:defRPr sz="1200"/>
+            </a:lvl1pPr>
+          </a:lstStyle>
+          <a:p>
+            <a:endParaRPr lang="en-US"/>
+          </a:p>
+        </p:txBody>
+      </p:sp>
+      <p:sp>
+        <p:nvSpPr>
+          <p:cNvPr id="7" name="Slide Number Placeholder 6"/>
+          <p:cNvSpPr>
+            <a:spLocks noGrp="1"/>
+          </p:cNvSpPr>
+          <p:nvPr>
+            <p:ph type="sldNum" sz="quarter" idx="5"/>
+          </p:nvPr>
+        </p:nvSpPr>
+        <p:spPr>
+          <a:xfrm>
+            <a:off x="3884613" y="8685213"/>
+            <a:ext cx="2971800" cy="458787"/>
+          </a:xfrm>
+          <a:prstGeom prst="rect">
+            <a:avLst/>
+          </a:prstGeom>
+        </p:spPr>
+        <p:txBody>
+          <a:bodyPr vert="horz" lIns="91440" tIns="45720" rIns="91440" bIns="45720" rtlCol="0" anchor="b"/>
+          <a:lstStyle>
+            <a:lvl1pPr algn="r">
+              <a:defRPr sz="1200"/>
+            </a:lvl1pPr>
+          </a:lstStyle>
+          <a:p>
+            <a:fld id="{CE5E9CC1-C706-0F49-92D6-E571CC5EEA8F}" type="slidenum">
+              <a:rPr lang="en-US"/>
+              <a:t>‹#›</a:t>
+            </a:fld>
+            <a:endParaRPr lang="en-US"/>
+          </a:p>
+        </p:txBody>
+      </p:sp>
     </p:spTree>
     <p:extLst>
       <p:ext uri="{BB962C8B-B14F-4D97-AF65-F5344CB8AC3E}">
-        <p14:creationId xmlns:p14="http://schemas.microsoft.com/office/powerpoint/2010/main" val="4023641880"/>
+        <p14:creationId xmlns:p14="http://schemas.microsoft.com/office/powerpoint/2010/main" val="1024086991"/>
       </p:ext>
     </p:extLst>
   </p:cSld>
@@ -295,6 +514,7 @@
               <a:rPr lang="en-US" dirty="0"/>
               <a:t>Kính thưa các đồng chí Lãnh đạo Công an tỉnh, hôm nay tôi xin đại diện trình bày công trình ra mắt Câu lạc bộ sáng tạo: Bản đồ Công an số tỉnh Phú Thọ. Xin phép bắt đầu bài trình bày bằng một thực tế hằng ngày mà tất cả chúng ta đều gặp.</a:t>
             </a:r>
+            <a:endParaRPr lang="en-US" dirty="0"/>
           </a:p>
         </p:txBody>
       </p:sp>
@@ -380,8 +600,9 @@
           <a:p>
             <a:r>
               <a:rPr lang="en-US" dirty="0"/>
-              <a:t>Kính thưa các đồng chí, trước khi nêu kiến nghị, tôi xin phép được báo cáo thẳng thắn những hạn chế của công trình. Thứ nhất, bản chất đây vẫn là AI, dù đã có bốn lớp kiểm soát thì vẫn không thể khẳng định đúng tuyệt đối một trăm phần trăm. Thứ hai, kho dữ liệu hiện được xây dựng từ nguồn văn bản công khai, chưa qua thẩm định chính thức của đơn vị nghiệp vụ. Thứ ba, công trình chưa có nguồn lực công nghệ thông tin chuyên trách để tiếp nhận, duy trì và nâng cấp lâu dài. Thứ tư, công trình chưa được đồng thiết kế đầy đủ với cán bộ trực tiếp tiếp dân, nên còn cần bổ sung các tình huống phát sinh tại quầy. Và thứ năm, hệ thống chưa được kiểm thử trên diện rộng. Tuy nhiên, mỗi hạn chế đều có hướng khắc phục: bổ sung khuyến cáo và cơ chế báo lỗi cho người dân; đề nghị đơn vị nghiệp vụ thẩm định nội dung; bố trí cán bộ công nghệ thông tin phối hợp; mời cán bộ tiếp dân cùng bổ sung tình huống; và triển khai theo giai đoạn, thí điểm rồi đánh giá trước khi nhân rộng. Tôi báo cáo điều này với mong muốn công trình được hoàn thiện một cách thực chất, chứ không phải để trình bày một sản phẩm hoàn hảo trên giấy.</a:t>
-            </a:r>
+              <a:t>Kính thưa các đồng chí, sản phẩm đã hoạt động được, nhưng để vận hành hiệu quả và bền vững thì một mình tôi không thể làm hết. Tôi xin thẳng thắn: bản thân tôi vừa không chuyên về công nghệ, vừa không phải người trực tiếp tiếp công dân hằng ngày — đây là công trình tôi tự mày mò nghiên cứu theo góc nhìn cá nhân. Chính vì vậy, tôi xin đề xuất ba điều kiện phối hợp. Thứ nhất, về kỹ thuật: Câu lạc bộ Sáng tạo xin được trực tiếp phụ trách vận hành hệ thống; khi có vấn đề công nghệ chuyên sâu thì kính đề nghị đơn vị công nghệ thông tin hỗ trợ. Thứ hai, về nội dung: kính đề nghị đơn vị nghiệp vụ rà soát, phê duyệt và cập nhật nội dung; đây cũng là bước hậu kiểm quan trọng, bởi bản chất AI vẫn có thể trả lời sai nên rất cần con người kiểm soát. Thứ ba, về thực tế: kính mong các đồng chí cán bộ trực tiếp tiếp công dân bổ sung những tình huống thật và những câu người dân hay hỏi ngay tại quầy. Và trên hết, chúng tôi xác định làm từng bước — thí điểm ở phạm vi hẹp, đánh giá kết quả, rồi mới nhân rộng — để mọi rủi ro đều nằm trong tầm kiểm soát.</a:t>
+            </a:r>
+            <a:endParaRPr lang="en-US" dirty="0"/>
           </a:p>
         </p:txBody>
       </p:sp>
@@ -469,6 +690,7 @@
               <a:rPr lang="en-US" dirty="0"/>
               <a:t>Kính thưa các đồng chí Lãnh đạo, đây không chỉ là một phần mềm, đây là viên gạch góp phần xây dựng hình ảnh chính quyền số gần dân. Trên tinh thần cầu thị vừa báo cáo, tôi kính đề nghị Lãnh đạo Công an tỉnh ba nội dung. Một là, cho phép triển khai thí điểm với cấu hình kiểm soát đã kiểm thử, đánh giá kết quả rồi mới tiến tới nhân rộng. Hai là, giao đơn vị nghiệp vụ thẩm định nội dung kho dữ liệu để bảo đảm tính chính xác về pháp lý. Ba là, quan tâm bố trí cán bộ công nghệ thông tin và kinh phí duy trì hạ tầng hằng năm, để hệ thống phục vụ nhân dân được lâu dài. Xin trân trọng cảm ơn các đồng chí.</a:t>
             </a:r>
+            <a:endParaRPr lang="en-US" dirty="0"/>
           </a:p>
         </p:txBody>
       </p:sp>
@@ -556,6 +778,7 @@
               <a:rPr lang="en-US" dirty="0"/>
               <a:t>Thưa các đồng chí, từ thực tế công tác chúng ta đều thấy một điều: cùng một câu hỏi về thủ tục được hỏi đi hỏi lại rất nhiều lần. Người dân thì loay hoay tìm đúng trụ sở, mất công đi lại vì chuẩn bị sai giấy tờ. Cán bộ thì mất thời gian trả lời những câu giống hệt nhau. Tôi xin lưu ý đây là ghi nhận từ quan sát thực tế, chưa phải số liệu thống kê chính thức, nên tôi không nêu con số cụ thể.</a:t>
             </a:r>
+            <a:endParaRPr lang="en-US" dirty="0"/>
           </a:p>
         </p:txBody>
       </p:sp>
@@ -643,6 +866,7 @@
               <a:rPr lang="en-US" dirty="0"/>
               <a:t>Từ thực tế công tác, có thể thấy người dân cần được hướng dẫn chính xác trước khi đến làm thủ tục. Đây là một nhận định khái quát, không phải trích dẫn nguyên văn của một trường hợp cụ thể. Chính nhu cầu đó đã thôi thúc tôi bắt tay nghiên cứu.</a:t>
             </a:r>
+            <a:endParaRPr lang="en-US" dirty="0"/>
           </a:p>
         </p:txBody>
       </p:sp>
@@ -730,6 +954,7 @@
               <a:rPr lang="en-US" dirty="0"/>
               <a:t>Và đó là lý do Bản đồ Công an số ra đời. Nó không chỉ là một cái bản đồ khô khan. Nó là sự kết hợp giữa bản đồ định vị chính xác mọi trụ sở, và một Trợ lý ảo AI hiểu luật, túc trực 24/7 để tư vấn thủ tục cho dân.</a:t>
             </a:r>
+            <a:endParaRPr lang="en-US" dirty="0"/>
           </a:p>
         </p:txBody>
       </p:sp>
@@ -817,6 +1042,7 @@
               <a:rPr lang="en-US" dirty="0"/>
               <a:t>Thưa các đồng chí, dùng AI thì lo nhất là AI bịa chuyện. Tôi không dám khẳng định hệ thống đúng tuyệt đối, vì như vậy là không trung thực. Điều tôi xin báo cáo là: hệ thống được thiết kế để GIẢM RỦI RO trả lời sai, bằng hai nguyên tắc — chỉ dựa trên kho dữ liệu có kiểm soát, và có bước hậu kiểm trước khi hiển thị cho người dân.</a:t>
             </a:r>
+            <a:endParaRPr lang="en-US" dirty="0"/>
           </a:p>
         </p:txBody>
       </p:sp>
@@ -902,8 +1128,9 @@
           <a:p>
             <a:r>
               <a:rPr lang="en-US" dirty="0"/>
-              <a:t>Để giảm rủi ro trả lời sai, hệ thống được thiết kế gồm bốn lớp kiểm soát nối tiếp nhau. Lớp một: truy hồi có kiểm soát, ưu tiên nguồn đã qua rà soát nội bộ, đúng thẩm quyền, đúng cấp thực hiện, tránh lẫn quy định cấp xã với cấp tỉnh. Lớp hai: dùng chính một AI khác chấm điểm, xếp hạng lại kết quả, loại bỏ tài liệu gây nhiễu. Lớp ba: câu trả lời phải bám theo tài liệu truy hồi được, nếu không đủ căn cứ thì báo không đủ cơ sở thay vì suy diễn. Lớp bốn: trước khi hiển thị, một bước hậu kiểm tự động đối chiếu lại từng số điện thoại, địa chỉ, căn cứ pháp lý với nguồn. Ở đây tôi xin báo cáo rõ hiện trạng để các đồng chí nắm đúng: lớp hai và lớp bốn hiện đã hoạt động. Lớp một và lớp ba đã được kiểm thử đạt trên bản thử nghiệm, nhưng bản chạy chính thức hiện vẫn dùng cấu hình cũ, nên hai lớp này chưa được bật. Đây chính là một trong những nội dung tôi xin kiến nghị ở phần sau.</a:t>
-            </a:r>
+              <a:t>Để giảm rủi ro trả lời sai, hệ thống được thiết kế gồm bốn lớp kiểm soát nối tiếp nhau. Lớp một: truy hồi có kiểm soát, ưu tiên nguồn đã qua rà soát nội bộ, đúng thẩm quyền, đúng cấp thực hiện, tránh lẫn quy định cấp xã với cấp tỉnh. Lớp hai: dùng chính một AI khác chấm điểm, xếp hạng lại kết quả, loại bỏ tài liệu gây nhiễu. Lớp ba: câu trả lời phải bám theo tài liệu truy hồi được, nếu không đủ căn cứ thì báo không đủ cơ sở thay vì suy diễn. Lớp bốn: trước khi hiển thị, một bước hậu kiểm tự động đối chiếu lại từng số điện thoại, địa chỉ, căn cứ pháp lý với nguồn. Ở đây tôi xin báo cáo rõ hiện trạng để các đồng chí nắm đúng: lớp hai và lớp bốn hiện đã hoạt động. Lớp một và lớp ba đã kiểm thử đạt trên bản thử nghiệm, sẵn sàng để áp dụng — chỉ còn chờ phê duyệt để bật trên bản chạy chính thức. Đây chính là một trong những nội dung tôi xin kiến nghị ở phần sau.</a:t>
+            </a:r>
+            <a:endParaRPr lang="en-US" dirty="0"/>
           </a:p>
         </p:txBody>
       </p:sp>
@@ -991,6 +1218,7 @@
               <a:rPr lang="en-US" dirty="0"/>
               <a:t>Đây là video minh hoạ quy trình hệ thống xử lý một câu hỏi của người dân: từ lúc tiếp nhận câu hỏi, truy hồi tài liệu, chọn lọc đúng tài liệu có thẩm quyền, cho tới khi sinh câu trả lời kèm trích dẫn nguồn. Tôi xin lưu ý, nội dung câu hỏi và câu trả lời trong video chỉ là ví dụ để minh hoạ luồng xử lý, không phải nội dung tư vấn chính thức. Video không có âm thanh, các đồng chí có thể vừa xem vừa nghe tôi trình bày.</a:t>
             </a:r>
+            <a:endParaRPr lang="en-US" dirty="0"/>
           </a:p>
         </p:txBody>
       </p:sp>
@@ -1078,6 +1306,7 @@
               <a:rPr lang="en-US" dirty="0"/>
               <a:t>Hệ thống cực kỳ thân thiện với người dân địa phương qua giao diện điện thoại. Ngoài ra, để hỗ trợ hội nhập, nó còn bổ sung tính năng đa ngôn ngữ. Về phía cán bộ, việc quản trị cũng cực kỳ đơn giản qua Google Sheets.</a:t>
             </a:r>
+            <a:endParaRPr lang="en-US" dirty="0"/>
           </a:p>
         </p:txBody>
       </p:sp>
@@ -1165,6 +1394,7 @@
               <a:rPr lang="en-US" dirty="0"/>
               <a:t>Về giá trị mang lại: thứ nhất, hệ thống phục vụ 24/7, người dân tra cứu được cả ngoài giờ hành chính mà không phải chờ tới lượt. Thứ hai, về tốc độ, tôi xin báo cáo đúng số đo: thời gian phản hồi p95 trong kiểm thử nội bộ khoảng 17 giây, và có thể lên tới khoảng 28 giây khi hệ thống phải chuyển sang nhà cung cấp AI dự phòng. Tôi nói rõ đây là số đo trong kiểm thử, chưa phải số liệu vận hành thực tế trên diện rộng. Đổi lại, dự án cần chi phí đầu tư hạ tầng máy chủ và API.</a:t>
             </a:r>
+            <a:endParaRPr lang="en-US" dirty="0"/>
           </a:p>
         </p:txBody>
       </p:sp>
@@ -1237,11 +1467,6 @@
 <file path=ppt/slideMasters/slideMaster1.xml><?xml version="1.0" encoding="utf-8"?>
 <p:sldMaster xmlns:a="http://schemas.openxmlformats.org/drawingml/2006/main" xmlns:r="http://schemas.openxmlformats.org/officeDocument/2006/relationships" xmlns:p="http://schemas.openxmlformats.org/presentationml/2006/main">
   <p:cSld>
-    <p:bg>
-      <p:bgRef idx="1001">
-        <a:schemeClr val="bg1"/>
-      </p:bgRef>
-    </p:bg>
     <p:spTree>
       <p:nvGrpSpPr>
         <p:cNvPr id="1" name=""/>
@@ -1524,7 +1749,6 @@
         <a:solidFill>
           <a:srgbClr val="1E3A8A"/>
         </a:solidFill>
-        <a:effectLst/>
       </p:bgPr>
     </p:bg>
     <p:spTree>
@@ -1543,14 +1767,14 @@
       </p:grpSpPr>
       <p:pic>
         <p:nvPicPr>
-          <p:cNvPr id="2" name="Image 0" descr="preencoded.png"/>
+          <p:cNvPr id="2" name="Image 0" descr="preencoded.png">    </p:cNvPr>
           <p:cNvPicPr>
             <a:picLocks noChangeAspect="1"/>
           </p:cNvPicPr>
           <p:nvPr/>
         </p:nvPicPr>
         <p:blipFill>
-          <a:blip r:embed="rId3">
+          <a:blip r:embed="rId1">
             <a:alphaModFix amt="14000"/>
           </a:blip>
           <a:stretch>
@@ -1588,11 +1812,11 @@
           <a:bodyPr wrap="square" lIns="0" tIns="0" rIns="0" bIns="0" rtlCol="0" anchor="ctr"/>
           <a:lstStyle/>
           <a:p>
-            <a:pPr marL="0" indent="0">
-              <a:buNone/>
-            </a:pPr>
-            <a:r>
-              <a:rPr lang="en-US" sz="1400" b="1" kern="0" spc="150" dirty="0">
+            <a:pPr indent="0" marL="0">
+              <a:buNone/>
+            </a:pPr>
+            <a:r>
+              <a:rPr lang="en-US" sz="1400" b="1" spc="150" kern="0" dirty="0">
                 <a:solidFill>
                   <a:srgbClr val="DBEAFE"/>
                 </a:solidFill>
@@ -1627,11 +1851,11 @@
           <a:bodyPr wrap="square" lIns="0" tIns="0" rIns="0" bIns="0" rtlCol="0" anchor="ctr"/>
           <a:lstStyle/>
           <a:p>
-            <a:pPr marL="0" indent="0">
-              <a:buNone/>
-            </a:pPr>
-            <a:r>
-              <a:rPr lang="en-US" sz="5400" b="1" kern="0" spc="-120" dirty="0">
+            <a:pPr indent="0" marL="0">
+              <a:buNone/>
+            </a:pPr>
+            <a:r>
+              <a:rPr lang="en-US" sz="5400" b="1" spc="-120" kern="0" dirty="0">
                 <a:solidFill>
                   <a:srgbClr val="FFFFFF"/>
                 </a:solidFill>
@@ -1666,7 +1890,7 @@
           <a:bodyPr wrap="square" lIns="0" tIns="0" rIns="0" bIns="0" rtlCol="0" anchor="ctr"/>
           <a:lstStyle/>
           <a:p>
-            <a:pPr marL="0" indent="0">
+            <a:pPr indent="0" marL="0">
               <a:buNone/>
             </a:pPr>
             <a:r>
@@ -1727,7 +1951,7 @@
           <a:bodyPr wrap="square" lIns="0" tIns="0" rIns="0" bIns="0" rtlCol="0" anchor="ctr"/>
           <a:lstStyle/>
           <a:p>
-            <a:pPr marL="0" indent="0" algn="ctr">
+            <a:pPr algn="ctr" indent="0" marL="0">
               <a:buNone/>
             </a:pPr>
             <a:r>
@@ -1788,7 +2012,7 @@
           <a:bodyPr wrap="square" lIns="0" tIns="0" rIns="0" bIns="0" rtlCol="0" anchor="ctr"/>
           <a:lstStyle/>
           <a:p>
-            <a:pPr marL="0" indent="0" algn="ctr">
+            <a:pPr algn="ctr" indent="0" marL="0">
               <a:buNone/>
             </a:pPr>
             <a:r>
@@ -1849,7 +2073,7 @@
           <a:bodyPr wrap="square" lIns="0" tIns="0" rIns="0" bIns="0" rtlCol="0" anchor="ctr"/>
           <a:lstStyle/>
           <a:p>
-            <a:pPr marL="0" indent="0" algn="ctr">
+            <a:pPr algn="ctr" indent="0" marL="0">
               <a:buNone/>
             </a:pPr>
             <a:r>
@@ -1888,7 +2112,7 @@
           <a:bodyPr wrap="square" lIns="0" tIns="0" rIns="0" bIns="0" rtlCol="0" anchor="ctr"/>
           <a:lstStyle/>
           <a:p>
-            <a:pPr marL="0" indent="0">
+            <a:pPr indent="0" marL="0">
               <a:buNone/>
             </a:pPr>
             <a:r>
@@ -1902,6 +2126,9 @@
               </a:rPr>
               <a:t>Tác giả: </a:t>
             </a:r>
+            <a:pPr indent="0" marL="0">
+              <a:buNone/>
+            </a:pPr>
             <a:r>
               <a:rPr lang="en-US" sz="1500" b="1" dirty="0">
                 <a:solidFill>
@@ -1922,18 +2149,9 @@
   <p:clrMapOvr>
     <a:masterClrMapping/>
   </p:clrMapOvr>
-  <mc:AlternateContent xmlns:mc="http://schemas.openxmlformats.org/markup-compatibility/2006">
-    <mc:Choice xmlns:p14="http://schemas.microsoft.com/office/powerpoint/2010/main" Requires="p14">
-      <p:transition p14:dur="450">
-        <p:fade/>
-      </p:transition>
-    </mc:Choice>
-    <mc:Fallback>
-      <p:transition>
-        <p:fade/>
-      </p:transition>
-    </mc:Fallback>
-  </mc:AlternateContent>
+  <p:transition xmlns:p14="http://schemas.microsoft.com/office/powerpoint/2010/main" spd="med" p14:dur="450">
+    <p:fade/>
+  </p:transition>
 </p:sld>
 </file>
 
@@ -1945,7 +2163,6 @@
         <a:solidFill>
           <a:srgbClr val="FFFFFF"/>
         </a:solidFill>
-        <a:effectLst/>
       </p:bgPr>
     </p:bg>
     <p:spTree>
@@ -1983,11 +2200,11 @@
           <a:bodyPr wrap="square" lIns="0" tIns="0" rIns="0" bIns="0" rtlCol="0" anchor="ctr"/>
           <a:lstStyle/>
           <a:p>
-            <a:pPr marL="0" indent="0">
-              <a:buNone/>
-            </a:pPr>
-            <a:r>
-              <a:rPr lang="en-US" sz="1300" b="1" kern="0" spc="200" dirty="0">
+            <a:pPr indent="0" marL="0">
+              <a:buNone/>
+            </a:pPr>
+            <a:r>
+              <a:rPr lang="en-US" sz="1300" b="1" spc="200" kern="0" dirty="0">
                 <a:solidFill>
                   <a:srgbClr val="1D4ED8"/>
                 </a:solidFill>
@@ -1995,7 +2212,7 @@
                 <a:ea typeface="Segoe UI" pitchFamily="34" charset="-122"/>
                 <a:cs typeface="Segoe UI" pitchFamily="34" charset="-120"/>
               </a:rPr>
-              <a:t>THẲNG THẮN NHÌN NHẬN</a:t>
+              <a:t>ĐIỀU KIỆN TRIỂN KHAI</a:t>
             </a:r>
             <a:endParaRPr lang="en-US" sz="1300" dirty="0"/>
           </a:p>
@@ -2022,11 +2239,11 @@
           <a:bodyPr wrap="square" lIns="0" tIns="0" rIns="0" bIns="0" rtlCol="0" anchor="t"/>
           <a:lstStyle/>
           <a:p>
-            <a:pPr marL="0" indent="0">
-              <a:buNone/>
-            </a:pPr>
-            <a:r>
-              <a:rPr lang="en-US" sz="2900" b="1" kern="0" spc="-50" dirty="0">
+            <a:pPr indent="0" marL="0">
+              <a:buNone/>
+            </a:pPr>
+            <a:r>
+              <a:rPr lang="en-US" sz="2900" b="1" spc="-50" kern="0" dirty="0">
                 <a:solidFill>
                   <a:srgbClr val="0F172A"/>
                 </a:solidFill>
@@ -2034,7 +2251,7 @@
                 <a:ea typeface="Segoe UI" pitchFamily="34" charset="-122"/>
                 <a:cs typeface="Segoe UI" pitchFamily="34" charset="-120"/>
               </a:rPr>
-              <a:t>Hạn chế và hướng khắc phục</a:t>
+              <a:t>Ba điều kiện để vận hành hiệu quả</a:t>
             </a:r>
             <a:endParaRPr lang="en-US" sz="2900" dirty="0"/>
           </a:p>
@@ -2061,7 +2278,7 @@
           <a:bodyPr wrap="square" lIns="0" tIns="0" rIns="0" bIns="0" rtlCol="0" anchor="ctr"/>
           <a:lstStyle/>
           <a:p>
-            <a:pPr marL="0" indent="0">
+            <a:pPr indent="0" marL="0">
               <a:buNone/>
             </a:pPr>
             <a:r>
@@ -2073,7 +2290,7 @@
                 <a:ea typeface="Segoe UI" pitchFamily="34" charset="-122"/>
                 <a:cs typeface="Segoe UI" pitchFamily="34" charset="-120"/>
               </a:rPr>
-              <a:t>Công trình đang trong giai đoạn hoàn thiện — xin báo cáo trung thực các hạn chế và hướng khắc phục.</a:t>
+              <a:t>Sản phẩm đã hoạt động. Để vận hành hiệu quả và bền vững, công trình cần ba sự phối hợp rõ ràng.</a:t>
             </a:r>
             <a:endParaRPr lang="en-US" sz="1450" dirty="0"/>
           </a:p>
@@ -2100,11 +2317,11 @@
           <a:bodyPr wrap="square" lIns="0" tIns="0" rIns="0" bIns="0" rtlCol="0" anchor="ctr"/>
           <a:lstStyle/>
           <a:p>
-            <a:pPr marL="0" indent="0">
-              <a:buNone/>
-            </a:pPr>
-            <a:r>
-              <a:rPr lang="en-US" sz="1200" b="1" kern="0" spc="150" dirty="0">
+            <a:pPr indent="0" marL="0">
+              <a:buNone/>
+            </a:pPr>
+            <a:r>
+              <a:rPr lang="en-US" sz="1200" b="1" spc="150" kern="0" dirty="0">
                 <a:solidFill>
                   <a:srgbClr val="64748B"/>
                 </a:solidFill>
@@ -2112,7 +2329,7 @@
                 <a:ea typeface="Segoe UI" pitchFamily="34" charset="-122"/>
                 <a:cs typeface="Segoe UI" pitchFamily="34" charset="-120"/>
               </a:rPr>
-              <a:t>HẠN CHẾ CÒN TỒN TẠI</a:t>
+              <a:t>BÊN PHỐI HỢP</a:t>
             </a:r>
             <a:endParaRPr lang="en-US" sz="1200" dirty="0"/>
           </a:p>
@@ -2139,11 +2356,11 @@
           <a:bodyPr wrap="square" lIns="0" tIns="0" rIns="0" bIns="0" rtlCol="0" anchor="ctr"/>
           <a:lstStyle/>
           <a:p>
-            <a:pPr marL="0" indent="0">
-              <a:buNone/>
-            </a:pPr>
-            <a:r>
-              <a:rPr lang="en-US" sz="1200" b="1" kern="0" spc="150" dirty="0">
+            <a:pPr indent="0" marL="0">
+              <a:buNone/>
+            </a:pPr>
+            <a:r>
+              <a:rPr lang="en-US" sz="1200" b="1" spc="150" kern="0" dirty="0">
                 <a:solidFill>
                   <a:srgbClr val="0B7A75"/>
                 </a:solidFill>
@@ -2151,7 +2368,7 @@
                 <a:ea typeface="Segoe UI" pitchFamily="34" charset="-122"/>
                 <a:cs typeface="Segoe UI" pitchFamily="34" charset="-120"/>
               </a:rPr>
-              <a:t>HƯỚNG KHẮC PHỤC ĐỀ XUẤT</a:t>
+              <a:t>NỘI DUNG PHỐI HỢP</a:t>
             </a:r>
             <a:endParaRPr lang="en-US" sz="1200" dirty="0"/>
           </a:p>
@@ -2225,7 +2442,7 @@
           <a:bodyPr wrap="square" lIns="0" tIns="0" rIns="0" bIns="0" rtlCol="0" anchor="ctr"/>
           <a:lstStyle/>
           <a:p>
-            <a:pPr marL="0" indent="0" algn="ctr">
+            <a:pPr algn="ctr" indent="0" marL="0">
               <a:buNone/>
             </a:pPr>
             <a:r>
@@ -2264,7 +2481,7 @@
           <a:bodyPr wrap="square" lIns="0" tIns="0" rIns="0" bIns="0" rtlCol="0" anchor="ctr"/>
           <a:lstStyle/>
           <a:p>
-            <a:pPr marL="0" indent="0">
+            <a:pPr indent="0" marL="0">
               <a:buNone/>
             </a:pPr>
             <a:r>
@@ -2276,7 +2493,7 @@
                 <a:ea typeface="Segoe UI" pitchFamily="34" charset="-122"/>
                 <a:cs typeface="Segoe UI" pitchFamily="34" charset="-120"/>
               </a:rPr>
-              <a:t>Bản chất vẫn là AI — vẫn có thể trả lời sai</a:t>
+              <a:t>Câu lạc bộ Sáng tạo</a:t>
             </a:r>
             <a:endParaRPr lang="en-US" sz="1450" dirty="0"/>
           </a:p>
@@ -2284,14 +2501,14 @@
       </p:sp>
       <p:pic>
         <p:nvPicPr>
-          <p:cNvPr id="11" name="Image 0" descr="preencoded.png"/>
+          <p:cNvPr id="11" name="Image 0" descr="preencoded.png">    </p:cNvPr>
           <p:cNvPicPr>
             <a:picLocks noChangeAspect="1"/>
           </p:cNvPicPr>
           <p:nvPr/>
         </p:nvPicPr>
         <p:blipFill>
-          <a:blip r:embed="rId3"/>
+          <a:blip r:embed="rId1"/>
           <a:stretch>
             <a:fillRect/>
           </a:stretch>
@@ -2335,14 +2552,14 @@
       </p:sp>
       <p:pic>
         <p:nvPicPr>
-          <p:cNvPr id="13" name="Image 1" descr="preencoded.png"/>
+          <p:cNvPr id="13" name="Image 1" descr="preencoded.png">    </p:cNvPr>
           <p:cNvPicPr>
             <a:picLocks noChangeAspect="1"/>
           </p:cNvPicPr>
           <p:nvPr/>
         </p:nvPicPr>
         <p:blipFill>
-          <a:blip r:embed="rId4"/>
+          <a:blip r:embed="rId2"/>
           <a:stretch>
             <a:fillRect/>
           </a:stretch>
@@ -2378,7 +2595,7 @@
           <a:bodyPr wrap="square" lIns="0" tIns="0" rIns="0" bIns="0" rtlCol="0" anchor="ctr"/>
           <a:lstStyle/>
           <a:p>
-            <a:pPr marL="0" indent="0">
+            <a:pPr indent="0" marL="0">
               <a:buNone/>
             </a:pPr>
             <a:r>
@@ -2390,7 +2607,7 @@
                 <a:ea typeface="Segoe UI" pitchFamily="34" charset="-122"/>
                 <a:cs typeface="Segoe UI" pitchFamily="34" charset="-120"/>
               </a:rPr>
-              <a:t>Hiển thị khuyến cáo “thông tin tham khảo”; nút báo lỗi ngay dưới mỗi câu trả lời; cán bộ rà soát định kỳ.</a:t>
+              <a:t>Trực tiếp phụ trách kỹ thuật và vận hành; đề nghị đơn vị CNTT hỗ trợ khi có việc chuyên sâu.</a:t>
             </a:r>
             <a:endParaRPr lang="en-US" sz="1400" dirty="0"/>
           </a:p>
@@ -2464,7 +2681,7 @@
           <a:bodyPr wrap="square" lIns="0" tIns="0" rIns="0" bIns="0" rtlCol="0" anchor="ctr"/>
           <a:lstStyle/>
           <a:p>
-            <a:pPr marL="0" indent="0" algn="ctr">
+            <a:pPr algn="ctr" indent="0" marL="0">
               <a:buNone/>
             </a:pPr>
             <a:r>
@@ -2503,7 +2720,7 @@
           <a:bodyPr wrap="square" lIns="0" tIns="0" rIns="0" bIns="0" rtlCol="0" anchor="ctr"/>
           <a:lstStyle/>
           <a:p>
-            <a:pPr marL="0" indent="0">
+            <a:pPr indent="0" marL="0">
               <a:buNone/>
             </a:pPr>
             <a:r>
@@ -2515,7 +2732,7 @@
                 <a:ea typeface="Segoe UI" pitchFamily="34" charset="-122"/>
                 <a:cs typeface="Segoe UI" pitchFamily="34" charset="-120"/>
               </a:rPr>
-              <a:t>Kho dữ liệu chưa qua thẩm định chính thức</a:t>
+              <a:t>Đơn vị nghiệp vụ</a:t>
             </a:r>
             <a:endParaRPr lang="en-US" sz="1450" dirty="0"/>
           </a:p>
@@ -2523,7 +2740,7 @@
       </p:sp>
       <p:pic>
         <p:nvPicPr>
-          <p:cNvPr id="19" name="Image 2" descr="preencoded.png"/>
+          <p:cNvPr id="19" name="Image 2" descr="preencoded.png">    </p:cNvPr>
           <p:cNvPicPr>
             <a:picLocks noChangeAspect="1"/>
           </p:cNvPicPr>
@@ -2574,7 +2791,7 @@
       </p:sp>
       <p:pic>
         <p:nvPicPr>
-          <p:cNvPr id="21" name="Image 3" descr="preencoded.png"/>
+          <p:cNvPr id="21" name="Image 3" descr="preencoded.png">    </p:cNvPr>
           <p:cNvPicPr>
             <a:picLocks noChangeAspect="1"/>
           </p:cNvPicPr>
@@ -2617,7 +2834,7 @@
           <a:bodyPr wrap="square" lIns="0" tIns="0" rIns="0" bIns="0" rtlCol="0" anchor="ctr"/>
           <a:lstStyle/>
           <a:p>
-            <a:pPr marL="0" indent="0">
+            <a:pPr indent="0" marL="0">
               <a:buNone/>
             </a:pPr>
             <a:r>
@@ -2629,7 +2846,7 @@
                 <a:ea typeface="Segoe UI" pitchFamily="34" charset="-122"/>
                 <a:cs typeface="Segoe UI" pitchFamily="34" charset="-120"/>
               </a:rPr>
-              <a:t>Đề nghị đơn vị nghiệp vụ (QLXNC, QLHC về TTXH) rà soát, phê duyệt nội dung trước khi công bố rộng.</a:t>
+              <a:t>Rà soát, phê duyệt và cập nhật nội dung; hậu kiểm chuyên môn vì AI vẫn có thể trả lời sai.</a:t>
             </a:r>
             <a:endParaRPr lang="en-US" sz="1400" dirty="0"/>
           </a:p>
@@ -2703,7 +2920,7 @@
           <a:bodyPr wrap="square" lIns="0" tIns="0" rIns="0" bIns="0" rtlCol="0" anchor="ctr"/>
           <a:lstStyle/>
           <a:p>
-            <a:pPr marL="0" indent="0" algn="ctr">
+            <a:pPr algn="ctr" indent="0" marL="0">
               <a:buNone/>
             </a:pPr>
             <a:r>
@@ -2742,7 +2959,7 @@
           <a:bodyPr wrap="square" lIns="0" tIns="0" rIns="0" bIns="0" rtlCol="0" anchor="ctr"/>
           <a:lstStyle/>
           <a:p>
-            <a:pPr marL="0" indent="0">
+            <a:pPr indent="0" marL="0">
               <a:buNone/>
             </a:pPr>
             <a:r>
@@ -2754,7 +2971,7 @@
                 <a:ea typeface="Segoe UI" pitchFamily="34" charset="-122"/>
                 <a:cs typeface="Segoe UI" pitchFamily="34" charset="-120"/>
               </a:rPr>
-              <a:t>Chưa có nguồn lực CNTT chuyên trách</a:t>
+              <a:t>Cán bộ tiếp công dân</a:t>
             </a:r>
             <a:endParaRPr lang="en-US" sz="1450" dirty="0"/>
           </a:p>
@@ -2762,14 +2979,14 @@
       </p:sp>
       <p:pic>
         <p:nvPicPr>
-          <p:cNvPr id="27" name="Image 4" descr="preencoded.png"/>
+          <p:cNvPr id="27" name="Image 4" descr="preencoded.png">    </p:cNvPr>
           <p:cNvPicPr>
             <a:picLocks noChangeAspect="1"/>
           </p:cNvPicPr>
           <p:nvPr/>
         </p:nvPicPr>
         <p:blipFill>
-          <a:blip r:embed="rId3"/>
+          <a:blip r:embed="rId5"/>
           <a:stretch>
             <a:fillRect/>
           </a:stretch>
@@ -2813,14 +3030,14 @@
       </p:sp>
       <p:pic>
         <p:nvPicPr>
-          <p:cNvPr id="29" name="Image 5" descr="preencoded.png"/>
+          <p:cNvPr id="29" name="Image 5" descr="preencoded.png">    </p:cNvPr>
           <p:cNvPicPr>
             <a:picLocks noChangeAspect="1"/>
           </p:cNvPicPr>
           <p:nvPr/>
         </p:nvPicPr>
         <p:blipFill>
-          <a:blip r:embed="rId4"/>
+          <a:blip r:embed="rId6"/>
           <a:stretch>
             <a:fillRect/>
           </a:stretch>
@@ -2856,7 +3073,7 @@
           <a:bodyPr wrap="square" lIns="0" tIns="0" rIns="0" bIns="0" rtlCol="0" anchor="ctr"/>
           <a:lstStyle/>
           <a:p>
-            <a:pPr marL="0" indent="0">
+            <a:pPr indent="0" marL="0">
               <a:buNone/>
             </a:pPr>
             <a:r>
@@ -2868,485 +3085,7 @@
                 <a:ea typeface="Segoe UI" pitchFamily="34" charset="-122"/>
                 <a:cs typeface="Segoe UI" pitchFamily="34" charset="-120"/>
               </a:rPr>
-              <a:t>Đề nghị bố trí, phối hợp cán bộ CNTT để tiếp nhận, duy trì và nâng cấp hệ thống lâu dài.</a:t>
-            </a:r>
-            <a:endParaRPr lang="en-US" sz="1400" dirty="0"/>
-          </a:p>
-        </p:txBody>
-      </p:sp>
-      <p:sp>
-        <p:nvSpPr>
-          <p:cNvPr id="31" name="Shape 23"/>
-          <p:cNvSpPr/>
-          <p:nvPr/>
-        </p:nvSpPr>
-        <p:spPr>
-          <a:xfrm>
-            <a:off x="640080" y="4974336"/>
-            <a:ext cx="5029200" cy="749808"/>
-          </a:xfrm>
-          <a:prstGeom prst="roundRect">
-            <a:avLst>
-              <a:gd name="adj" fmla="val 9756"/>
-            </a:avLst>
-          </a:prstGeom>
-          <a:solidFill>
-            <a:srgbClr val="F8FAFC"/>
-          </a:solidFill>
-          <a:ln w="12700">
-            <a:solidFill>
-              <a:srgbClr val="E2E8F0"/>
-            </a:solidFill>
-            <a:prstDash val="solid"/>
-          </a:ln>
-        </p:spPr>
-      </p:sp>
-      <p:sp>
-        <p:nvSpPr>
-          <p:cNvPr id="32" name="Shape 24"/>
-          <p:cNvSpPr/>
-          <p:nvPr/>
-        </p:nvSpPr>
-        <p:spPr>
-          <a:xfrm>
-            <a:off x="841248" y="5175504"/>
-            <a:ext cx="347472" cy="347472"/>
-          </a:xfrm>
-          <a:prstGeom prst="ellipse">
-            <a:avLst/>
-          </a:prstGeom>
-          <a:solidFill>
-            <a:srgbClr val="334155"/>
-          </a:solidFill>
-          <a:ln/>
-        </p:spPr>
-      </p:sp>
-      <p:sp>
-        <p:nvSpPr>
-          <p:cNvPr id="33" name="Text 25"/>
-          <p:cNvSpPr/>
-          <p:nvPr/>
-        </p:nvSpPr>
-        <p:spPr>
-          <a:xfrm>
-            <a:off x="841248" y="5175504"/>
-            <a:ext cx="347472" cy="347472"/>
-          </a:xfrm>
-          <a:prstGeom prst="rect">
-            <a:avLst/>
-          </a:prstGeom>
-          <a:noFill/>
-          <a:ln/>
-        </p:spPr>
-        <p:txBody>
-          <a:bodyPr wrap="square" lIns="0" tIns="0" rIns="0" bIns="0" rtlCol="0" anchor="ctr"/>
-          <a:lstStyle/>
-          <a:p>
-            <a:pPr marL="0" indent="0" algn="ctr">
-              <a:buNone/>
-            </a:pPr>
-            <a:r>
-              <a:rPr lang="en-US" sz="1400" b="1" dirty="0">
-                <a:solidFill>
-                  <a:srgbClr val="FFFFFF"/>
-                </a:solidFill>
-                <a:latin typeface="Segoe UI" pitchFamily="34" charset="0"/>
-                <a:ea typeface="Segoe UI" pitchFamily="34" charset="-122"/>
-                <a:cs typeface="Segoe UI" pitchFamily="34" charset="-120"/>
-              </a:rPr>
-              <a:t>4</a:t>
-            </a:r>
-            <a:endParaRPr lang="en-US" sz="1400" dirty="0"/>
-          </a:p>
-        </p:txBody>
-      </p:sp>
-      <p:sp>
-        <p:nvSpPr>
-          <p:cNvPr id="34" name="Text 26"/>
-          <p:cNvSpPr/>
-          <p:nvPr/>
-        </p:nvSpPr>
-        <p:spPr>
-          <a:xfrm>
-            <a:off x="1325880" y="4974336"/>
-            <a:ext cx="4160520" cy="749808"/>
-          </a:xfrm>
-          <a:prstGeom prst="rect">
-            <a:avLst/>
-          </a:prstGeom>
-          <a:noFill/>
-          <a:ln/>
-        </p:spPr>
-        <p:txBody>
-          <a:bodyPr wrap="square" lIns="0" tIns="0" rIns="0" bIns="0" rtlCol="0" anchor="ctr"/>
-          <a:lstStyle/>
-          <a:p>
-            <a:pPr marL="0" indent="0">
-              <a:buNone/>
-            </a:pPr>
-            <a:r>
-              <a:rPr lang="en-US" sz="1450" b="1" dirty="0">
-                <a:solidFill>
-                  <a:srgbClr val="0F172A"/>
-                </a:solidFill>
-                <a:latin typeface="Segoe UI" pitchFamily="34" charset="0"/>
-                <a:ea typeface="Segoe UI" pitchFamily="34" charset="-122"/>
-                <a:cs typeface="Segoe UI" pitchFamily="34" charset="-120"/>
-              </a:rPr>
-              <a:t>Chưa đồng thiết kế đầy đủ với cán bộ tiếp dân</a:t>
-            </a:r>
-            <a:endParaRPr lang="en-US" sz="1450" dirty="0"/>
-          </a:p>
-        </p:txBody>
-      </p:sp>
-      <p:pic>
-        <p:nvPicPr>
-          <p:cNvPr id="35" name="Image 6" descr="preencoded.png"/>
-          <p:cNvPicPr>
-            <a:picLocks noChangeAspect="1"/>
-          </p:cNvPicPr>
-          <p:nvPr/>
-        </p:nvPicPr>
-        <p:blipFill>
-          <a:blip r:embed="rId3"/>
-          <a:stretch>
-            <a:fillRect/>
-          </a:stretch>
-        </p:blipFill>
-        <p:spPr>
-          <a:xfrm>
-            <a:off x="5797296" y="5221224"/>
-            <a:ext cx="256032" cy="256032"/>
-          </a:xfrm>
-          <a:prstGeom prst="rect">
-            <a:avLst/>
-          </a:prstGeom>
-        </p:spPr>
-      </p:pic>
-      <p:sp>
-        <p:nvSpPr>
-          <p:cNvPr id="36" name="Shape 27"/>
-          <p:cNvSpPr/>
-          <p:nvPr/>
-        </p:nvSpPr>
-        <p:spPr>
-          <a:xfrm>
-            <a:off x="6309360" y="4974336"/>
-            <a:ext cx="5212080" cy="749808"/>
-          </a:xfrm>
-          <a:prstGeom prst="roundRect">
-            <a:avLst>
-              <a:gd name="adj" fmla="val 9756"/>
-            </a:avLst>
-          </a:prstGeom>
-          <a:solidFill>
-            <a:srgbClr val="EAF6F5"/>
-          </a:solidFill>
-          <a:ln w="12700">
-            <a:solidFill>
-              <a:srgbClr val="0B7A75"/>
-            </a:solidFill>
-            <a:prstDash val="solid"/>
-          </a:ln>
-        </p:spPr>
-      </p:sp>
-      <p:pic>
-        <p:nvPicPr>
-          <p:cNvPr id="37" name="Image 7" descr="preencoded.png"/>
-          <p:cNvPicPr>
-            <a:picLocks noChangeAspect="1"/>
-          </p:cNvPicPr>
-          <p:nvPr/>
-        </p:nvPicPr>
-        <p:blipFill>
-          <a:blip r:embed="rId4"/>
-          <a:stretch>
-            <a:fillRect/>
-          </a:stretch>
-        </p:blipFill>
-        <p:spPr>
-          <a:xfrm>
-            <a:off x="6510528" y="5221224"/>
-            <a:ext cx="256032" cy="256032"/>
-          </a:xfrm>
-          <a:prstGeom prst="rect">
-            <a:avLst/>
-          </a:prstGeom>
-        </p:spPr>
-      </p:pic>
-      <p:sp>
-        <p:nvSpPr>
-          <p:cNvPr id="38" name="Text 28"/>
-          <p:cNvSpPr/>
-          <p:nvPr/>
-        </p:nvSpPr>
-        <p:spPr>
-          <a:xfrm>
-            <a:off x="6876288" y="4974336"/>
-            <a:ext cx="4462272" cy="749808"/>
-          </a:xfrm>
-          <a:prstGeom prst="rect">
-            <a:avLst/>
-          </a:prstGeom>
-          <a:noFill/>
-          <a:ln/>
-        </p:spPr>
-        <p:txBody>
-          <a:bodyPr wrap="square" lIns="0" tIns="0" rIns="0" bIns="0" rtlCol="0" anchor="ctr"/>
-          <a:lstStyle/>
-          <a:p>
-            <a:pPr marL="0" indent="0">
-              <a:buNone/>
-            </a:pPr>
-            <a:r>
-              <a:rPr lang="en-US" sz="1400" dirty="0">
-                <a:solidFill>
-                  <a:srgbClr val="0F172A"/>
-                </a:solidFill>
-                <a:latin typeface="Segoe UI" pitchFamily="34" charset="0"/>
-                <a:ea typeface="Segoe UI" pitchFamily="34" charset="-122"/>
-                <a:cs typeface="Segoe UI" pitchFamily="34" charset="-120"/>
-              </a:rPr>
-              <a:t>Mời cán bộ trực tiếp tiếp công dân bổ sung tình huống thực tế và các câu hỏi thường gặp tại quầy.</a:t>
-            </a:r>
-            <a:endParaRPr lang="en-US" sz="1400" dirty="0"/>
-          </a:p>
-        </p:txBody>
-      </p:sp>
-      <p:sp>
-        <p:nvSpPr>
-          <p:cNvPr id="39" name="Shape 29"/>
-          <p:cNvSpPr/>
-          <p:nvPr/>
-        </p:nvSpPr>
-        <p:spPr>
-          <a:xfrm>
-            <a:off x="640080" y="5833872"/>
-            <a:ext cx="5029200" cy="749808"/>
-          </a:xfrm>
-          <a:prstGeom prst="roundRect">
-            <a:avLst>
-              <a:gd name="adj" fmla="val 9756"/>
-            </a:avLst>
-          </a:prstGeom>
-          <a:solidFill>
-            <a:srgbClr val="F8FAFC"/>
-          </a:solidFill>
-          <a:ln w="12700">
-            <a:solidFill>
-              <a:srgbClr val="E2E8F0"/>
-            </a:solidFill>
-            <a:prstDash val="solid"/>
-          </a:ln>
-        </p:spPr>
-      </p:sp>
-      <p:sp>
-        <p:nvSpPr>
-          <p:cNvPr id="40" name="Shape 30"/>
-          <p:cNvSpPr/>
-          <p:nvPr/>
-        </p:nvSpPr>
-        <p:spPr>
-          <a:xfrm>
-            <a:off x="841248" y="6035040"/>
-            <a:ext cx="347472" cy="347472"/>
-          </a:xfrm>
-          <a:prstGeom prst="ellipse">
-            <a:avLst/>
-          </a:prstGeom>
-          <a:solidFill>
-            <a:srgbClr val="334155"/>
-          </a:solidFill>
-          <a:ln/>
-        </p:spPr>
-      </p:sp>
-      <p:sp>
-        <p:nvSpPr>
-          <p:cNvPr id="41" name="Text 31"/>
-          <p:cNvSpPr/>
-          <p:nvPr/>
-        </p:nvSpPr>
-        <p:spPr>
-          <a:xfrm>
-            <a:off x="841248" y="6035040"/>
-            <a:ext cx="347472" cy="347472"/>
-          </a:xfrm>
-          <a:prstGeom prst="rect">
-            <a:avLst/>
-          </a:prstGeom>
-          <a:noFill/>
-          <a:ln/>
-        </p:spPr>
-        <p:txBody>
-          <a:bodyPr wrap="square" lIns="0" tIns="0" rIns="0" bIns="0" rtlCol="0" anchor="ctr"/>
-          <a:lstStyle/>
-          <a:p>
-            <a:pPr marL="0" indent="0" algn="ctr">
-              <a:buNone/>
-            </a:pPr>
-            <a:r>
-              <a:rPr lang="en-US" sz="1400" b="1" dirty="0">
-                <a:solidFill>
-                  <a:srgbClr val="FFFFFF"/>
-                </a:solidFill>
-                <a:latin typeface="Segoe UI" pitchFamily="34" charset="0"/>
-                <a:ea typeface="Segoe UI" pitchFamily="34" charset="-122"/>
-                <a:cs typeface="Segoe UI" pitchFamily="34" charset="-120"/>
-              </a:rPr>
-              <a:t>5</a:t>
-            </a:r>
-            <a:endParaRPr lang="en-US" sz="1400" dirty="0"/>
-          </a:p>
-        </p:txBody>
-      </p:sp>
-      <p:sp>
-        <p:nvSpPr>
-          <p:cNvPr id="42" name="Text 32"/>
-          <p:cNvSpPr/>
-          <p:nvPr/>
-        </p:nvSpPr>
-        <p:spPr>
-          <a:xfrm>
-            <a:off x="1325880" y="5833872"/>
-            <a:ext cx="4160520" cy="749808"/>
-          </a:xfrm>
-          <a:prstGeom prst="rect">
-            <a:avLst/>
-          </a:prstGeom>
-          <a:noFill/>
-          <a:ln/>
-        </p:spPr>
-        <p:txBody>
-          <a:bodyPr wrap="square" lIns="0" tIns="0" rIns="0" bIns="0" rtlCol="0" anchor="ctr"/>
-          <a:lstStyle/>
-          <a:p>
-            <a:pPr marL="0" indent="0">
-              <a:buNone/>
-            </a:pPr>
-            <a:r>
-              <a:rPr lang="en-US" sz="1450" b="1" dirty="0">
-                <a:solidFill>
-                  <a:srgbClr val="0F172A"/>
-                </a:solidFill>
-                <a:latin typeface="Segoe UI" pitchFamily="34" charset="0"/>
-                <a:ea typeface="Segoe UI" pitchFamily="34" charset="-122"/>
-                <a:cs typeface="Segoe UI" pitchFamily="34" charset="-120"/>
-              </a:rPr>
-              <a:t>Chưa được kiểm thử trên diện rộng</a:t>
-            </a:r>
-            <a:endParaRPr lang="en-US" sz="1450" dirty="0"/>
-          </a:p>
-        </p:txBody>
-      </p:sp>
-      <p:pic>
-        <p:nvPicPr>
-          <p:cNvPr id="43" name="Image 8" descr="preencoded.png"/>
-          <p:cNvPicPr>
-            <a:picLocks noChangeAspect="1"/>
-          </p:cNvPicPr>
-          <p:nvPr/>
-        </p:nvPicPr>
-        <p:blipFill>
-          <a:blip r:embed="rId3"/>
-          <a:stretch>
-            <a:fillRect/>
-          </a:stretch>
-        </p:blipFill>
-        <p:spPr>
-          <a:xfrm>
-            <a:off x="5797296" y="6080760"/>
-            <a:ext cx="256032" cy="256032"/>
-          </a:xfrm>
-          <a:prstGeom prst="rect">
-            <a:avLst/>
-          </a:prstGeom>
-        </p:spPr>
-      </p:pic>
-      <p:sp>
-        <p:nvSpPr>
-          <p:cNvPr id="44" name="Shape 33"/>
-          <p:cNvSpPr/>
-          <p:nvPr/>
-        </p:nvSpPr>
-        <p:spPr>
-          <a:xfrm>
-            <a:off x="6309360" y="5833872"/>
-            <a:ext cx="5212080" cy="749808"/>
-          </a:xfrm>
-          <a:prstGeom prst="roundRect">
-            <a:avLst>
-              <a:gd name="adj" fmla="val 9756"/>
-            </a:avLst>
-          </a:prstGeom>
-          <a:solidFill>
-            <a:srgbClr val="EAF6F5"/>
-          </a:solidFill>
-          <a:ln w="12700">
-            <a:solidFill>
-              <a:srgbClr val="0B7A75"/>
-            </a:solidFill>
-            <a:prstDash val="solid"/>
-          </a:ln>
-        </p:spPr>
-      </p:sp>
-      <p:pic>
-        <p:nvPicPr>
-          <p:cNvPr id="45" name="Image 9" descr="preencoded.png"/>
-          <p:cNvPicPr>
-            <a:picLocks noChangeAspect="1"/>
-          </p:cNvPicPr>
-          <p:nvPr/>
-        </p:nvPicPr>
-        <p:blipFill>
-          <a:blip r:embed="rId4"/>
-          <a:stretch>
-            <a:fillRect/>
-          </a:stretch>
-        </p:blipFill>
-        <p:spPr>
-          <a:xfrm>
-            <a:off x="6510528" y="6080760"/>
-            <a:ext cx="256032" cy="256032"/>
-          </a:xfrm>
-          <a:prstGeom prst="rect">
-            <a:avLst/>
-          </a:prstGeom>
-        </p:spPr>
-      </p:pic>
-      <p:sp>
-        <p:nvSpPr>
-          <p:cNvPr id="46" name="Text 34"/>
-          <p:cNvSpPr/>
-          <p:nvPr/>
-        </p:nvSpPr>
-        <p:spPr>
-          <a:xfrm>
-            <a:off x="6876288" y="5833872"/>
-            <a:ext cx="4462272" cy="749808"/>
-          </a:xfrm>
-          <a:prstGeom prst="rect">
-            <a:avLst/>
-          </a:prstGeom>
-          <a:noFill/>
-          <a:ln/>
-        </p:spPr>
-        <p:txBody>
-          <a:bodyPr wrap="square" lIns="0" tIns="0" rIns="0" bIns="0" rtlCol="0" anchor="ctr"/>
-          <a:lstStyle/>
-          <a:p>
-            <a:pPr marL="0" indent="0">
-              <a:buNone/>
-            </a:pPr>
-            <a:r>
-              <a:rPr lang="en-US" sz="1400" dirty="0">
-                <a:solidFill>
-                  <a:srgbClr val="0F172A"/>
-                </a:solidFill>
-                <a:latin typeface="Segoe UI" pitchFamily="34" charset="0"/>
-                <a:ea typeface="Segoe UI" pitchFamily="34" charset="-122"/>
-                <a:cs typeface="Segoe UI" pitchFamily="34" charset="-120"/>
-              </a:rPr>
-              <a:t>Triển khai theo giai đoạn: thí điểm phạm vi hẹp → đánh giá kết quả → mới nhân rộng toàn tỉnh.</a:t>
+              <a:t>Bổ sung tình huống thực tế và những câu hỏi người dân thường gặp ngay tại quầy.</a:t>
             </a:r>
             <a:endParaRPr lang="en-US" sz="1400" dirty="0"/>
           </a:p>
@@ -3357,18 +3096,9 @@
   <p:clrMapOvr>
     <a:masterClrMapping/>
   </p:clrMapOvr>
-  <mc:AlternateContent xmlns:mc="http://schemas.openxmlformats.org/markup-compatibility/2006">
-    <mc:Choice xmlns:p14="http://schemas.microsoft.com/office/powerpoint/2010/main" Requires="p14">
-      <p:transition p14:dur="450">
-        <p:fade/>
-      </p:transition>
-    </mc:Choice>
-    <mc:Fallback>
-      <p:transition>
-        <p:fade/>
-      </p:transition>
-    </mc:Fallback>
-  </mc:AlternateContent>
+  <p:transition xmlns:p14="http://schemas.microsoft.com/office/powerpoint/2010/main" spd="med" p14:dur="450">
+    <p:fade/>
+  </p:transition>
 </p:sld>
 </file>
 
@@ -3380,7 +3110,6 @@
         <a:solidFill>
           <a:srgbClr val="1E3A8A"/>
         </a:solidFill>
-        <a:effectLst/>
       </p:bgPr>
     </p:bg>
     <p:spTree>
@@ -3399,14 +3128,14 @@
       </p:grpSpPr>
       <p:pic>
         <p:nvPicPr>
-          <p:cNvPr id="2" name="Image 0" descr="preencoded.png"/>
+          <p:cNvPr id="2" name="Image 0" descr="preencoded.png">    </p:cNvPr>
           <p:cNvPicPr>
             <a:picLocks noChangeAspect="1"/>
           </p:cNvPicPr>
           <p:nvPr/>
         </p:nvPicPr>
         <p:blipFill>
-          <a:blip r:embed="rId3">
+          <a:blip r:embed="rId1">
             <a:alphaModFix amt="12000"/>
           </a:blip>
           <a:stretch>
@@ -3444,11 +3173,11 @@
           <a:bodyPr wrap="square" lIns="0" tIns="0" rIns="0" bIns="0" rtlCol="0" anchor="ctr"/>
           <a:lstStyle/>
           <a:p>
-            <a:pPr marL="0" indent="0">
-              <a:buNone/>
-            </a:pPr>
-            <a:r>
-              <a:rPr lang="en-US" sz="1400" b="1" kern="0" spc="200" dirty="0">
+            <a:pPr indent="0" marL="0">
+              <a:buNone/>
+            </a:pPr>
+            <a:r>
+              <a:rPr lang="en-US" sz="1400" b="1" spc="200" kern="0" dirty="0">
                 <a:solidFill>
                   <a:srgbClr val="DBEAFE"/>
                 </a:solidFill>
@@ -3483,11 +3212,11 @@
           <a:bodyPr wrap="square" lIns="0" tIns="0" rIns="0" bIns="0" rtlCol="0" anchor="ctr"/>
           <a:lstStyle/>
           <a:p>
-            <a:pPr marL="0" indent="0">
-              <a:buNone/>
-            </a:pPr>
-            <a:r>
-              <a:rPr lang="en-US" sz="3000" b="1" kern="0" spc="-50" dirty="0">
+            <a:pPr indent="0" marL="0">
+              <a:buNone/>
+            </a:pPr>
+            <a:r>
+              <a:rPr lang="en-US" sz="3000" b="1" spc="-50" kern="0" dirty="0">
                 <a:solidFill>
                   <a:srgbClr val="FFFFFF"/>
                 </a:solidFill>
@@ -3503,14 +3232,14 @@
       </p:sp>
       <p:pic>
         <p:nvPicPr>
-          <p:cNvPr id="5" name="Image 1" descr="preencoded.png"/>
+          <p:cNvPr id="5" name="Image 1" descr="preencoded.png">    </p:cNvPr>
           <p:cNvPicPr>
             <a:picLocks noChangeAspect="1"/>
           </p:cNvPicPr>
           <p:nvPr/>
         </p:nvPicPr>
         <p:blipFill>
-          <a:blip r:embed="rId4"/>
+          <a:blip r:embed="rId2"/>
           <a:stretch>
             <a:fillRect/>
           </a:stretch>
@@ -3546,7 +3275,7 @@
           <a:bodyPr wrap="square" lIns="0" tIns="0" rIns="0" bIns="0" rtlCol="0" anchor="ctr"/>
           <a:lstStyle/>
           <a:p>
-            <a:pPr marL="0" indent="0">
+            <a:pPr indent="0" marL="0">
               <a:buNone/>
             </a:pPr>
             <a:r>
@@ -3566,14 +3295,14 @@
       </p:sp>
       <p:pic>
         <p:nvPicPr>
-          <p:cNvPr id="7" name="Image 2" descr="preencoded.png"/>
+          <p:cNvPr id="7" name="Image 2" descr="preencoded.png">    </p:cNvPr>
           <p:cNvPicPr>
             <a:picLocks noChangeAspect="1"/>
           </p:cNvPicPr>
           <p:nvPr/>
         </p:nvPicPr>
         <p:blipFill>
-          <a:blip r:embed="rId4"/>
+          <a:blip r:embed="rId3"/>
           <a:stretch>
             <a:fillRect/>
           </a:stretch>
@@ -3609,7 +3338,7 @@
           <a:bodyPr wrap="square" lIns="0" tIns="0" rIns="0" bIns="0" rtlCol="0" anchor="ctr"/>
           <a:lstStyle/>
           <a:p>
-            <a:pPr marL="0" indent="0">
+            <a:pPr indent="0" marL="0">
               <a:buNone/>
             </a:pPr>
             <a:r>
@@ -3653,8 +3382,8 @@
             <a:prstDash val="solid"/>
           </a:ln>
           <a:effectLst>
-            <a:outerShdw blurRad="114300" dist="38100" dir="8100000" algn="bl" rotWithShape="0">
-              <a:srgbClr val="1E40AF">
+            <a:outerShdw sx="100000" sy="100000" kx="0" ky="0" algn="bl" rotWithShape="0" blurRad="114300" dist="38100" dir="8100000">
+              <a:srgbClr val="1e40af">
                 <a:alpha val="20000"/>
               </a:srgbClr>
             </a:outerShdw>
@@ -3682,11 +3411,11 @@
           <a:bodyPr wrap="square" lIns="0" tIns="0" rIns="0" bIns="0" rtlCol="0" anchor="ctr"/>
           <a:lstStyle/>
           <a:p>
-            <a:pPr marL="0" indent="0">
-              <a:buNone/>
-            </a:pPr>
-            <a:r>
-              <a:rPr lang="en-US" sz="1400" b="1" kern="0" spc="150" dirty="0">
+            <a:pPr indent="0" marL="0">
+              <a:buNone/>
+            </a:pPr>
+            <a:r>
+              <a:rPr lang="en-US" sz="1400" b="1" spc="150" kern="0" dirty="0">
                 <a:solidFill>
                   <a:srgbClr val="DBEAFE"/>
                 </a:solidFill>
@@ -3806,7 +3535,7 @@
           <a:bodyPr wrap="square" lIns="0" tIns="0" rIns="0" bIns="0" rtlCol="0" anchor="ctr"/>
           <a:lstStyle/>
           <a:p>
-            <a:pPr marL="0" indent="0" algn="r">
+            <a:pPr algn="r" indent="0" marL="0">
               <a:buNone/>
             </a:pPr>
             <a:r>
@@ -3829,18 +3558,9 @@
   <p:clrMapOvr>
     <a:masterClrMapping/>
   </p:clrMapOvr>
-  <mc:AlternateContent xmlns:mc="http://schemas.openxmlformats.org/markup-compatibility/2006">
-    <mc:Choice xmlns:p14="http://schemas.microsoft.com/office/powerpoint/2010/main" Requires="p14">
-      <p:transition p14:dur="450">
-        <p:fade/>
-      </p:transition>
-    </mc:Choice>
-    <mc:Fallback>
-      <p:transition>
-        <p:fade/>
-      </p:transition>
-    </mc:Fallback>
-  </mc:AlternateContent>
+  <p:transition xmlns:p14="http://schemas.microsoft.com/office/powerpoint/2010/main" spd="med" p14:dur="450">
+    <p:fade/>
+  </p:transition>
 </p:sld>
 </file>
 
@@ -3852,7 +3572,6 @@
         <a:solidFill>
           <a:srgbClr val="1E3A8A"/>
         </a:solidFill>
-        <a:effectLst/>
       </p:bgPr>
     </p:bg>
     <p:spTree>
@@ -3890,11 +3609,11 @@
           <a:bodyPr wrap="square" lIns="0" tIns="0" rIns="0" bIns="0" rtlCol="0" anchor="ctr"/>
           <a:lstStyle/>
           <a:p>
-            <a:pPr marL="0" indent="0">
-              <a:buNone/>
-            </a:pPr>
-            <a:r>
-              <a:rPr lang="en-US" sz="1300" b="1" kern="0" spc="200" dirty="0">
+            <a:pPr indent="0" marL="0">
+              <a:buNone/>
+            </a:pPr>
+            <a:r>
+              <a:rPr lang="en-US" sz="1300" b="1" spc="200" kern="0" dirty="0">
                 <a:solidFill>
                   <a:srgbClr val="DBEAFE"/>
                 </a:solidFill>
@@ -3929,7 +3648,7 @@
           <a:bodyPr wrap="square" lIns="0" tIns="0" rIns="0" bIns="0" rtlCol="0" anchor="t"/>
           <a:lstStyle/>
           <a:p>
-            <a:pPr marL="0" indent="0">
+            <a:pPr indent="0" marL="0">
               <a:buNone/>
             </a:pPr>
             <a:endParaRPr lang="en-US" sz="2900" dirty="0"/>
@@ -3957,11 +3676,11 @@
           <a:bodyPr wrap="square" lIns="0" tIns="0" rIns="0" bIns="0" rtlCol="0" anchor="ctr"/>
           <a:lstStyle/>
           <a:p>
-            <a:pPr marL="0" indent="0" algn="ctr">
-              <a:buNone/>
-            </a:pPr>
-            <a:r>
-              <a:rPr lang="en-US" sz="9000" b="1" kern="0" spc="-250" dirty="0">
+            <a:pPr algn="ctr" indent="0" marL="0">
+              <a:buNone/>
+            </a:pPr>
+            <a:r>
+              <a:rPr lang="en-US" sz="9000" b="1" spc="-250" kern="0" dirty="0">
                 <a:solidFill>
                   <a:srgbClr val="DBEAFE"/>
                 </a:solidFill>
@@ -3996,7 +3715,7 @@
           <a:bodyPr wrap="square" lIns="0" tIns="0" rIns="0" bIns="0" rtlCol="0" anchor="ctr"/>
           <a:lstStyle/>
           <a:p>
-            <a:pPr marL="0" indent="0" algn="ctr">
+            <a:pPr algn="ctr" indent="0" marL="0">
               <a:buNone/>
             </a:pPr>
             <a:r>
@@ -4060,8 +3779,8 @@
           </a:solidFill>
           <a:ln/>
           <a:effectLst>
-            <a:outerShdw blurRad="114300" dist="38100" dir="8100000" algn="bl" rotWithShape="0">
-              <a:srgbClr val="1E40AF">
+            <a:outerShdw sx="100000" sy="100000" kx="0" ky="0" algn="bl" rotWithShape="0" blurRad="114300" dist="38100" dir="8100000">
+              <a:srgbClr val="1e40af">
                 <a:alpha val="20000"/>
               </a:srgbClr>
             </a:outerShdw>
@@ -4070,14 +3789,14 @@
       </p:sp>
       <p:pic>
         <p:nvPicPr>
-          <p:cNvPr id="8" name="Image 0" descr="preencoded.png"/>
+          <p:cNvPr id="8" name="Image 0" descr="preencoded.png">    </p:cNvPr>
           <p:cNvPicPr>
             <a:picLocks noChangeAspect="1"/>
           </p:cNvPicPr>
           <p:nvPr/>
         </p:nvPicPr>
         <p:blipFill>
-          <a:blip r:embed="rId3"/>
+          <a:blip r:embed="rId1"/>
           <a:stretch>
             <a:fillRect/>
           </a:stretch>
@@ -4113,7 +3832,7 @@
           <a:bodyPr wrap="square" lIns="0" tIns="0" rIns="0" bIns="0" rtlCol="0" anchor="ctr"/>
           <a:lstStyle/>
           <a:p>
-            <a:pPr marL="0" indent="0">
+            <a:pPr indent="0" marL="0">
               <a:buNone/>
             </a:pPr>
             <a:r>
@@ -4177,8 +3896,8 @@
           </a:solidFill>
           <a:ln/>
           <a:effectLst>
-            <a:outerShdw blurRad="114300" dist="38100" dir="8100000" algn="bl" rotWithShape="0">
-              <a:srgbClr val="1E40AF">
+            <a:outerShdw sx="100000" sy="100000" kx="0" ky="0" algn="bl" rotWithShape="0" blurRad="114300" dist="38100" dir="8100000">
+              <a:srgbClr val="1e40af">
                 <a:alpha val="20000"/>
               </a:srgbClr>
             </a:outerShdw>
@@ -4187,14 +3906,14 @@
       </p:sp>
       <p:pic>
         <p:nvPicPr>
-          <p:cNvPr id="12" name="Image 1" descr="preencoded.png"/>
+          <p:cNvPr id="12" name="Image 1" descr="preencoded.png">    </p:cNvPr>
           <p:cNvPicPr>
             <a:picLocks noChangeAspect="1"/>
           </p:cNvPicPr>
           <p:nvPr/>
         </p:nvPicPr>
         <p:blipFill>
-          <a:blip r:embed="rId3"/>
+          <a:blip r:embed="rId2"/>
           <a:stretch>
             <a:fillRect/>
           </a:stretch>
@@ -4230,7 +3949,7 @@
           <a:bodyPr wrap="square" lIns="0" tIns="0" rIns="0" bIns="0" rtlCol="0" anchor="ctr"/>
           <a:lstStyle/>
           <a:p>
-            <a:pPr marL="0" indent="0">
+            <a:pPr indent="0" marL="0">
               <a:buNone/>
             </a:pPr>
             <a:r>
@@ -4294,8 +4013,8 @@
           </a:solidFill>
           <a:ln/>
           <a:effectLst>
-            <a:outerShdw blurRad="114300" dist="38100" dir="8100000" algn="bl" rotWithShape="0">
-              <a:srgbClr val="1E40AF">
+            <a:outerShdw sx="100000" sy="100000" kx="0" ky="0" algn="bl" rotWithShape="0" blurRad="114300" dist="38100" dir="8100000">
+              <a:srgbClr val="1e40af">
                 <a:alpha val="20000"/>
               </a:srgbClr>
             </a:outerShdw>
@@ -4304,7 +4023,7 @@
       </p:sp>
       <p:pic>
         <p:nvPicPr>
-          <p:cNvPr id="16" name="Image 2" descr="preencoded.png"/>
+          <p:cNvPr id="16" name="Image 2" descr="preencoded.png">    </p:cNvPr>
           <p:cNvPicPr>
             <a:picLocks noChangeAspect="1"/>
           </p:cNvPicPr>
@@ -4347,7 +4066,7 @@
           <a:bodyPr wrap="square" lIns="0" tIns="0" rIns="0" bIns="0" rtlCol="0" anchor="ctr"/>
           <a:lstStyle/>
           <a:p>
-            <a:pPr marL="0" indent="0">
+            <a:pPr indent="0" marL="0">
               <a:buNone/>
             </a:pPr>
             <a:r>
@@ -4386,7 +4105,7 @@
           <a:bodyPr wrap="square" lIns="0" tIns="0" rIns="0" bIns="0" rtlCol="0" anchor="ctr"/>
           <a:lstStyle/>
           <a:p>
-            <a:pPr marL="0" indent="0">
+            <a:pPr indent="0" marL="0">
               <a:buNone/>
             </a:pPr>
             <a:r>
@@ -4409,18 +4128,9 @@
   <p:clrMapOvr>
     <a:masterClrMapping/>
   </p:clrMapOvr>
-  <mc:AlternateContent xmlns:mc="http://schemas.openxmlformats.org/markup-compatibility/2006">
-    <mc:Choice xmlns:p14="http://schemas.microsoft.com/office/powerpoint/2010/main" Requires="p14">
-      <p:transition p14:dur="450">
-        <p:fade/>
-      </p:transition>
-    </mc:Choice>
-    <mc:Fallback>
-      <p:transition>
-        <p:fade/>
-      </p:transition>
-    </mc:Fallback>
-  </mc:AlternateContent>
+  <p:transition xmlns:p14="http://schemas.microsoft.com/office/powerpoint/2010/main" spd="med" p14:dur="450">
+    <p:fade/>
+  </p:transition>
 </p:sld>
 </file>
 
@@ -4432,7 +4142,6 @@
         <a:solidFill>
           <a:srgbClr val="FFFFFF"/>
         </a:solidFill>
-        <a:effectLst/>
       </p:bgPr>
     </p:bg>
     <p:spTree>
@@ -4490,7 +4199,7 @@
           <a:bodyPr wrap="square" lIns="0" tIns="0" rIns="0" bIns="0" rtlCol="0" anchor="t"/>
           <a:lstStyle/>
           <a:p>
-            <a:pPr marL="0" indent="0">
+            <a:pPr indent="0" marL="0">
               <a:buNone/>
             </a:pPr>
             <a:r>
@@ -4507,7 +4216,7 @@
             <a:endParaRPr lang="en-US" sz="3200" dirty="0"/>
           </a:p>
           <a:p>
-            <a:pPr marL="0" indent="0">
+            <a:pPr indent="0" marL="0">
               <a:buNone/>
             </a:pPr>
             <a:r>
@@ -4546,7 +4255,7 @@
           <a:bodyPr wrap="square" lIns="0" tIns="0" rIns="0" bIns="0" rtlCol="0" anchor="ctr"/>
           <a:lstStyle/>
           <a:p>
-            <a:pPr marL="0" indent="0">
+            <a:pPr indent="0" marL="0">
               <a:buNone/>
             </a:pPr>
             <a:r>
@@ -4569,18 +4278,9 @@
   <p:clrMapOvr>
     <a:masterClrMapping/>
   </p:clrMapOvr>
-  <mc:AlternateContent xmlns:mc="http://schemas.openxmlformats.org/markup-compatibility/2006">
-    <mc:Choice xmlns:p14="http://schemas.microsoft.com/office/powerpoint/2010/main" Requires="p14">
-      <p:transition p14:dur="450">
-        <p:fade/>
-      </p:transition>
-    </mc:Choice>
-    <mc:Fallback>
-      <p:transition>
-        <p:fade/>
-      </p:transition>
-    </mc:Fallback>
-  </mc:AlternateContent>
+  <p:transition xmlns:p14="http://schemas.microsoft.com/office/powerpoint/2010/main" spd="med" p14:dur="450">
+    <p:fade/>
+  </p:transition>
 </p:sld>
 </file>
 
@@ -4592,7 +4292,6 @@
         <a:solidFill>
           <a:srgbClr val="FFFFFF"/>
         </a:solidFill>
-        <a:effectLst/>
       </p:bgPr>
     </p:bg>
     <p:spTree>
@@ -4630,11 +4329,11 @@
           <a:bodyPr wrap="square" lIns="0" tIns="0" rIns="0" bIns="0" rtlCol="0" anchor="ctr"/>
           <a:lstStyle/>
           <a:p>
-            <a:pPr marL="0" indent="0">
-              <a:buNone/>
-            </a:pPr>
-            <a:r>
-              <a:rPr lang="en-US" sz="1300" b="1" kern="0" spc="200" dirty="0">
+            <a:pPr indent="0" marL="0">
+              <a:buNone/>
+            </a:pPr>
+            <a:r>
+              <a:rPr lang="en-US" sz="1300" b="1" spc="200" kern="0" dirty="0">
                 <a:solidFill>
                   <a:srgbClr val="1D4ED8"/>
                 </a:solidFill>
@@ -4669,11 +4368,11 @@
           <a:bodyPr wrap="square" lIns="0" tIns="0" rIns="0" bIns="0" rtlCol="0" anchor="t"/>
           <a:lstStyle/>
           <a:p>
-            <a:pPr marL="0" indent="0">
-              <a:buNone/>
-            </a:pPr>
-            <a:r>
-              <a:rPr lang="en-US" sz="2900" b="1" kern="0" spc="-50" dirty="0">
+            <a:pPr indent="0" marL="0">
+              <a:buNone/>
+            </a:pPr>
+            <a:r>
+              <a:rPr lang="en-US" sz="2900" b="1" spc="-50" kern="0" dirty="0">
                 <a:solidFill>
                   <a:srgbClr val="0F172A"/>
                 </a:solidFill>
@@ -4708,7 +4407,7 @@
           <a:bodyPr wrap="square" lIns="0" tIns="0" rIns="0" bIns="0" rtlCol="0" anchor="t"/>
           <a:lstStyle/>
           <a:p>
-            <a:pPr marL="0" indent="0">
+            <a:pPr indent="0" marL="0">
               <a:buNone/>
             </a:pPr>
             <a:r>
@@ -4745,8 +4444,8 @@
           </a:solidFill>
           <a:ln/>
           <a:effectLst>
-            <a:outerShdw blurRad="114300" dist="38100" dir="8100000" algn="bl" rotWithShape="0">
-              <a:srgbClr val="1E40AF">
+            <a:outerShdw sx="100000" sy="100000" kx="0" ky="0" algn="bl" rotWithShape="0" blurRad="114300" dist="38100" dir="8100000">
+              <a:srgbClr val="1e40af">
                 <a:alpha val="20000"/>
               </a:srgbClr>
             </a:outerShdw>
@@ -4755,14 +4454,14 @@
       </p:sp>
       <p:pic>
         <p:nvPicPr>
-          <p:cNvPr id="6" name="Image 0" descr="preencoded.png"/>
+          <p:cNvPr id="6" name="Image 0" descr="preencoded.png">    </p:cNvPr>
           <p:cNvPicPr>
             <a:picLocks noChangeAspect="1"/>
           </p:cNvPicPr>
           <p:nvPr/>
         </p:nvPicPr>
         <p:blipFill>
-          <a:blip r:embed="rId3"/>
+          <a:blip r:embed="rId1"/>
           <a:stretch>
             <a:fillRect/>
           </a:stretch>
@@ -4798,7 +4497,7 @@
           <a:bodyPr wrap="square" lIns="0" tIns="0" rIns="0" bIns="0" rtlCol="0" anchor="ctr"/>
           <a:lstStyle/>
           <a:p>
-            <a:pPr marL="0" indent="0">
+            <a:pPr indent="0" marL="0">
               <a:buNone/>
             </a:pPr>
             <a:r>
@@ -4837,7 +4536,7 @@
           <a:bodyPr wrap="square" lIns="0" tIns="0" rIns="0" bIns="0" rtlCol="0" anchor="ctr"/>
           <a:lstStyle/>
           <a:p>
-            <a:pPr marL="0" indent="0">
+            <a:pPr indent="0" marL="0">
               <a:buNone/>
             </a:pPr>
             <a:r>
@@ -4874,8 +4573,8 @@
           </a:solidFill>
           <a:ln/>
           <a:effectLst>
-            <a:outerShdw blurRad="114300" dist="38100" dir="8100000" algn="bl" rotWithShape="0">
-              <a:srgbClr val="1E40AF">
+            <a:outerShdw sx="100000" sy="100000" kx="0" ky="0" algn="bl" rotWithShape="0" blurRad="114300" dist="38100" dir="8100000">
+              <a:srgbClr val="1e40af">
                 <a:alpha val="20000"/>
               </a:srgbClr>
             </a:outerShdw>
@@ -4903,7 +4602,7 @@
           <a:bodyPr wrap="square" lIns="0" tIns="0" rIns="0" bIns="0" rtlCol="0" anchor="ctr"/>
           <a:lstStyle/>
           <a:p>
-            <a:pPr marL="0" indent="0">
+            <a:pPr indent="0" marL="0">
               <a:buNone/>
             </a:pPr>
             <a:r>
@@ -4942,7 +4641,7 @@
           <a:bodyPr wrap="square" lIns="0" tIns="0" rIns="0" bIns="0" rtlCol="0" anchor="ctr"/>
           <a:lstStyle/>
           <a:p>
-            <a:pPr marL="0" indent="0">
+            <a:pPr indent="0" marL="0">
               <a:buNone/>
             </a:pPr>
             <a:r>
@@ -4986,7 +4685,7 @@
             <a:prstDash val="solid"/>
           </a:ln>
           <a:effectLst>
-            <a:outerShdw blurRad="88900" dist="25400" dir="8100000" algn="bl" rotWithShape="0">
+            <a:outerShdw sx="100000" sy="100000" kx="0" ky="0" algn="bl" rotWithShape="0" blurRad="88900" dist="25400" dir="8100000">
               <a:srgbClr val="94A3B8">
                 <a:alpha val="28000"/>
               </a:srgbClr>
@@ -4996,15 +4695,15 @@
       </p:sp>
       <p:pic>
         <p:nvPicPr>
-          <p:cNvPr id="13" name="Image 1" descr="D:\04. Github\bandocapt\presentation\asset\giao dien desktop.png"/>
+          <p:cNvPr id="13" name="Image 1" descr="D:\04. Github\bandocapt\presentation\asset\giao dien desktop.png">    </p:cNvPr>
           <p:cNvPicPr>
             <a:picLocks noChangeAspect="1"/>
           </p:cNvPicPr>
           <p:nvPr/>
         </p:nvPicPr>
         <p:blipFill>
-          <a:blip r:embed="rId4"/>
-          <a:srcRect/>
+          <a:blip r:embed="rId2"/>
+          <a:srcRect l="0" r="0" t="0" b="0"/>
           <a:stretch/>
         </p:blipFill>
         <p:spPr>
@@ -5038,7 +4737,7 @@
           <a:bodyPr wrap="square" lIns="0" tIns="0" rIns="0" bIns="0" rtlCol="0" anchor="ctr"/>
           <a:lstStyle/>
           <a:p>
-            <a:pPr marL="0" indent="0" algn="ctr">
+            <a:pPr algn="ctr" indent="0" marL="0">
               <a:buNone/>
             </a:pPr>
             <a:r>
@@ -5061,18 +4760,9 @@
   <p:clrMapOvr>
     <a:masterClrMapping/>
   </p:clrMapOvr>
-  <mc:AlternateContent xmlns:mc="http://schemas.openxmlformats.org/markup-compatibility/2006">
-    <mc:Choice xmlns:p14="http://schemas.microsoft.com/office/powerpoint/2010/main" Requires="p14">
-      <p:transition p14:dur="450">
-        <p:fade/>
-      </p:transition>
-    </mc:Choice>
-    <mc:Fallback>
-      <p:transition>
-        <p:fade/>
-      </p:transition>
-    </mc:Fallback>
-  </mc:AlternateContent>
+  <p:transition xmlns:p14="http://schemas.microsoft.com/office/powerpoint/2010/main" spd="med" p14:dur="450">
+    <p:fade/>
+  </p:transition>
 </p:sld>
 </file>
 
@@ -5084,7 +4774,6 @@
         <a:solidFill>
           <a:srgbClr val="1E3A8A"/>
         </a:solidFill>
-        <a:effectLst/>
       </p:bgPr>
     </p:bg>
     <p:spTree>
@@ -5122,11 +4811,11 @@
           <a:bodyPr wrap="square" lIns="0" tIns="0" rIns="0" bIns="0" rtlCol="0" anchor="ctr"/>
           <a:lstStyle/>
           <a:p>
-            <a:pPr marL="0" indent="0" algn="ctr">
-              <a:buNone/>
-            </a:pPr>
-            <a:r>
-              <a:rPr lang="en-US" sz="4400" b="1" kern="0" spc="-120" dirty="0">
+            <a:pPr algn="ctr" indent="0" marL="0">
+              <a:buNone/>
+            </a:pPr>
+            <a:r>
+              <a:rPr lang="en-US" sz="4400" b="1" spc="-120" kern="0" dirty="0">
                 <a:solidFill>
                   <a:srgbClr val="FFFFFF"/>
                 </a:solidFill>
@@ -5139,11 +4828,11 @@
             <a:endParaRPr lang="en-US" sz="4400" dirty="0"/>
           </a:p>
           <a:p>
-            <a:pPr marL="0" indent="0" algn="ctr">
-              <a:buNone/>
-            </a:pPr>
-            <a:r>
-              <a:rPr lang="en-US" sz="4400" b="1" kern="0" spc="-120" dirty="0">
+            <a:pPr algn="ctr" indent="0" marL="0">
+              <a:buNone/>
+            </a:pPr>
+            <a:r>
+              <a:rPr lang="en-US" sz="4400" b="1" spc="-120" kern="0" dirty="0">
                 <a:solidFill>
                   <a:srgbClr val="FFFFFF"/>
                 </a:solidFill>
@@ -5156,11 +4845,11 @@
             <a:endParaRPr lang="en-US" sz="4400" dirty="0"/>
           </a:p>
           <a:p>
-            <a:pPr marL="0" indent="0" algn="ctr">
-              <a:buNone/>
-            </a:pPr>
-            <a:r>
-              <a:rPr lang="en-US" sz="4400" b="1" kern="0" spc="-120" dirty="0">
+            <a:pPr algn="ctr" indent="0" marL="0">
+              <a:buNone/>
+            </a:pPr>
+            <a:r>
+              <a:rPr lang="en-US" sz="4400" b="1" spc="-120" kern="0" dirty="0">
                 <a:solidFill>
                   <a:srgbClr val="FFFFFF"/>
                 </a:solidFill>
@@ -5180,7 +4869,7 @@
     <a:masterClrMapping/>
   </p:clrMapOvr>
   <mc:AlternateContent xmlns:mc="http://schemas.openxmlformats.org/markup-compatibility/2006">
-    <mc:Choice xmlns:p159="http://schemas.microsoft.com/office/powerpoint/2015/9/main" xmlns="" Requires="p159">
+    <mc:Choice xmlns:p159="http://schemas.microsoft.com/office/powerpoint/2015/9/main" Requires="p159">
       <p:transition xmlns:p14="http://schemas.microsoft.com/office/powerpoint/2010/main" spd="med" p14:dur="800">
         <p159:morph option="byObject"/>
       </p:transition>
@@ -5202,7 +4891,6 @@
         <a:solidFill>
           <a:srgbClr val="FFFFFF"/>
         </a:solidFill>
-        <a:effectLst/>
       </p:bgPr>
     </p:bg>
     <p:spTree>
@@ -5240,11 +4928,11 @@
           <a:bodyPr wrap="square" lIns="0" tIns="0" rIns="0" bIns="0" rtlCol="0" anchor="ctr"/>
           <a:lstStyle/>
           <a:p>
-            <a:pPr marL="0" indent="0">
-              <a:buNone/>
-            </a:pPr>
-            <a:r>
-              <a:rPr lang="en-US" sz="1300" b="1" kern="0" spc="200" dirty="0">
+            <a:pPr indent="0" marL="0">
+              <a:buNone/>
+            </a:pPr>
+            <a:r>
+              <a:rPr lang="en-US" sz="1300" b="1" spc="200" kern="0" dirty="0">
                 <a:solidFill>
                   <a:srgbClr val="1D4ED8"/>
                 </a:solidFill>
@@ -5279,11 +4967,11 @@
           <a:bodyPr wrap="square" lIns="0" tIns="0" rIns="0" bIns="0" rtlCol="0" anchor="t"/>
           <a:lstStyle/>
           <a:p>
-            <a:pPr marL="0" indent="0">
-              <a:buNone/>
-            </a:pPr>
-            <a:r>
-              <a:rPr lang="en-US" sz="2900" b="1" kern="0" spc="-50" dirty="0">
+            <a:pPr indent="0" marL="0">
+              <a:buNone/>
+            </a:pPr>
+            <a:r>
+              <a:rPr lang="en-US" sz="2900" b="1" spc="-50" kern="0" dirty="0">
                 <a:solidFill>
                   <a:srgbClr val="0F172A"/>
                 </a:solidFill>
@@ -5318,7 +5006,7 @@
           <a:bodyPr wrap="square" lIns="0" tIns="0" rIns="0" bIns="0" rtlCol="0" anchor="ctr"/>
           <a:lstStyle/>
           <a:p>
-            <a:pPr marL="0" indent="0">
+            <a:pPr indent="0" marL="0">
               <a:buNone/>
             </a:pPr>
             <a:r>
@@ -5362,7 +5050,7 @@
             <a:prstDash val="solid"/>
           </a:ln>
           <a:effectLst>
-            <a:outerShdw blurRad="88900" dist="25400" dir="8100000" algn="bl" rotWithShape="0">
+            <a:outerShdw sx="100000" sy="100000" kx="0" ky="0" algn="bl" rotWithShape="0" blurRad="88900" dist="25400" dir="8100000">
               <a:srgbClr val="94A3B8">
                 <a:alpha val="28000"/>
               </a:srgbClr>
@@ -5389,8 +5077,8 @@
           </a:solidFill>
           <a:ln/>
           <a:effectLst>
-            <a:outerShdw blurRad="114300" dist="38100" dir="8100000" algn="bl" rotWithShape="0">
-              <a:srgbClr val="1E40AF">
+            <a:outerShdw sx="100000" sy="100000" kx="0" ky="0" algn="bl" rotWithShape="0" blurRad="114300" dist="38100" dir="8100000">
+              <a:srgbClr val="1e40af">
                 <a:alpha val="20000"/>
               </a:srgbClr>
             </a:outerShdw>
@@ -5399,14 +5087,14 @@
       </p:sp>
       <p:pic>
         <p:nvPicPr>
-          <p:cNvPr id="7" name="Image 0" descr="preencoded.png"/>
+          <p:cNvPr id="7" name="Image 0" descr="preencoded.png">    </p:cNvPr>
           <p:cNvPicPr>
             <a:picLocks noChangeAspect="1"/>
           </p:cNvPicPr>
           <p:nvPr/>
         </p:nvPicPr>
         <p:blipFill>
-          <a:blip r:embed="rId3"/>
+          <a:blip r:embed="rId1"/>
           <a:stretch>
             <a:fillRect/>
           </a:stretch>
@@ -5442,7 +5130,7 @@
           <a:bodyPr wrap="square" lIns="0" tIns="0" rIns="0" bIns="0" rtlCol="0" anchor="t"/>
           <a:lstStyle/>
           <a:p>
-            <a:pPr marL="0" indent="0" algn="ctr">
+            <a:pPr algn="ctr" indent="0" marL="0">
               <a:buNone/>
             </a:pPr>
             <a:r>
@@ -5481,7 +5169,7 @@
           <a:bodyPr wrap="square" lIns="0" tIns="0" rIns="0" bIns="0" rtlCol="0" anchor="t"/>
           <a:lstStyle/>
           <a:p>
-            <a:pPr marL="0" indent="0" algn="ctr">
+            <a:pPr algn="ctr" indent="0" marL="0">
               <a:buNone/>
             </a:pPr>
             <a:r>
@@ -5501,14 +5189,14 @@
       </p:sp>
       <p:pic>
         <p:nvPicPr>
-          <p:cNvPr id="10" name="Image 1" descr="preencoded.png"/>
+          <p:cNvPr id="10" name="Image 1" descr="preencoded.png">    </p:cNvPr>
           <p:cNvPicPr>
             <a:picLocks noChangeAspect="1"/>
           </p:cNvPicPr>
           <p:nvPr/>
         </p:nvPicPr>
         <p:blipFill>
-          <a:blip r:embed="rId4"/>
+          <a:blip r:embed="rId2"/>
           <a:stretch>
             <a:fillRect/>
           </a:stretch>
@@ -5549,7 +5237,7 @@
             <a:prstDash val="solid"/>
           </a:ln>
           <a:effectLst>
-            <a:outerShdw blurRad="88900" dist="25400" dir="8100000" algn="bl" rotWithShape="0">
+            <a:outerShdw sx="100000" sy="100000" kx="0" ky="0" algn="bl" rotWithShape="0" blurRad="88900" dist="25400" dir="8100000">
               <a:srgbClr val="94A3B8">
                 <a:alpha val="28000"/>
               </a:srgbClr>
@@ -5576,8 +5264,8 @@
           </a:solidFill>
           <a:ln/>
           <a:effectLst>
-            <a:outerShdw blurRad="114300" dist="38100" dir="8100000" algn="bl" rotWithShape="0">
-              <a:srgbClr val="1E40AF">
+            <a:outerShdw sx="100000" sy="100000" kx="0" ky="0" algn="bl" rotWithShape="0" blurRad="114300" dist="38100" dir="8100000">
+              <a:srgbClr val="1e40af">
                 <a:alpha val="20000"/>
               </a:srgbClr>
             </a:outerShdw>
@@ -5586,14 +5274,14 @@
       </p:sp>
       <p:pic>
         <p:nvPicPr>
-          <p:cNvPr id="13" name="Image 2" descr="preencoded.png"/>
+          <p:cNvPr id="13" name="Image 2" descr="preencoded.png">    </p:cNvPr>
           <p:cNvPicPr>
             <a:picLocks noChangeAspect="1"/>
           </p:cNvPicPr>
           <p:nvPr/>
         </p:nvPicPr>
         <p:blipFill>
-          <a:blip r:embed="rId5"/>
+          <a:blip r:embed="rId3"/>
           <a:stretch>
             <a:fillRect/>
           </a:stretch>
@@ -5629,7 +5317,7 @@
           <a:bodyPr wrap="square" lIns="0" tIns="0" rIns="0" bIns="0" rtlCol="0" anchor="t"/>
           <a:lstStyle/>
           <a:p>
-            <a:pPr marL="0" indent="0" algn="ctr">
+            <a:pPr algn="ctr" indent="0" marL="0">
               <a:buNone/>
             </a:pPr>
             <a:r>
@@ -5668,7 +5356,7 @@
           <a:bodyPr wrap="square" lIns="0" tIns="0" rIns="0" bIns="0" rtlCol="0" anchor="t"/>
           <a:lstStyle/>
           <a:p>
-            <a:pPr marL="0" indent="0" algn="ctr">
+            <a:pPr algn="ctr" indent="0" marL="0">
               <a:buNone/>
             </a:pPr>
             <a:r>
@@ -5688,7 +5376,7 @@
       </p:sp>
       <p:pic>
         <p:nvPicPr>
-          <p:cNvPr id="16" name="Image 3" descr="preencoded.png"/>
+          <p:cNvPr id="16" name="Image 3" descr="preencoded.png">    </p:cNvPr>
           <p:cNvPicPr>
             <a:picLocks noChangeAspect="1"/>
           </p:cNvPicPr>
@@ -5736,7 +5424,7 @@
             <a:prstDash val="solid"/>
           </a:ln>
           <a:effectLst>
-            <a:outerShdw blurRad="88900" dist="25400" dir="8100000" algn="bl" rotWithShape="0">
+            <a:outerShdw sx="100000" sy="100000" kx="0" ky="0" algn="bl" rotWithShape="0" blurRad="88900" dist="25400" dir="8100000">
               <a:srgbClr val="94A3B8">
                 <a:alpha val="28000"/>
               </a:srgbClr>
@@ -5763,8 +5451,8 @@
           </a:solidFill>
           <a:ln/>
           <a:effectLst>
-            <a:outerShdw blurRad="114300" dist="38100" dir="8100000" algn="bl" rotWithShape="0">
-              <a:srgbClr val="1E40AF">
+            <a:outerShdw sx="100000" sy="100000" kx="0" ky="0" algn="bl" rotWithShape="0" blurRad="114300" dist="38100" dir="8100000">
+              <a:srgbClr val="1e40af">
                 <a:alpha val="20000"/>
               </a:srgbClr>
             </a:outerShdw>
@@ -5773,14 +5461,14 @@
       </p:sp>
       <p:pic>
         <p:nvPicPr>
-          <p:cNvPr id="19" name="Image 4" descr="preencoded.png"/>
+          <p:cNvPr id="19" name="Image 4" descr="preencoded.png">    </p:cNvPr>
           <p:cNvPicPr>
             <a:picLocks noChangeAspect="1"/>
           </p:cNvPicPr>
           <p:nvPr/>
         </p:nvPicPr>
         <p:blipFill>
-          <a:blip r:embed="rId6"/>
+          <a:blip r:embed="rId5"/>
           <a:stretch>
             <a:fillRect/>
           </a:stretch>
@@ -5816,7 +5504,7 @@
           <a:bodyPr wrap="square" lIns="0" tIns="0" rIns="0" bIns="0" rtlCol="0" anchor="t"/>
           <a:lstStyle/>
           <a:p>
-            <a:pPr marL="0" indent="0" algn="ctr">
+            <a:pPr algn="ctr" indent="0" marL="0">
               <a:buNone/>
             </a:pPr>
             <a:r>
@@ -5855,7 +5543,7 @@
           <a:bodyPr wrap="square" lIns="0" tIns="0" rIns="0" bIns="0" rtlCol="0" anchor="t"/>
           <a:lstStyle/>
           <a:p>
-            <a:pPr marL="0" indent="0" algn="ctr">
+            <a:pPr algn="ctr" indent="0" marL="0">
               <a:buNone/>
             </a:pPr>
             <a:r>
@@ -5875,14 +5563,14 @@
       </p:sp>
       <p:pic>
         <p:nvPicPr>
-          <p:cNvPr id="22" name="Image 5" descr="preencoded.png"/>
+          <p:cNvPr id="22" name="Image 5" descr="preencoded.png">    </p:cNvPr>
           <p:cNvPicPr>
             <a:picLocks noChangeAspect="1"/>
           </p:cNvPicPr>
           <p:nvPr/>
         </p:nvPicPr>
         <p:blipFill>
-          <a:blip r:embed="rId4"/>
+          <a:blip r:embed="rId6"/>
           <a:stretch>
             <a:fillRect/>
           </a:stretch>
@@ -5923,7 +5611,7 @@
             <a:prstDash val="solid"/>
           </a:ln>
           <a:effectLst>
-            <a:outerShdw blurRad="88900" dist="25400" dir="8100000" algn="bl" rotWithShape="0">
+            <a:outerShdw sx="100000" sy="100000" kx="0" ky="0" algn="bl" rotWithShape="0" blurRad="88900" dist="25400" dir="8100000">
               <a:srgbClr val="94A3B8">
                 <a:alpha val="28000"/>
               </a:srgbClr>
@@ -5950,8 +5638,8 @@
           </a:solidFill>
           <a:ln/>
           <a:effectLst>
-            <a:outerShdw blurRad="114300" dist="38100" dir="8100000" algn="bl" rotWithShape="0">
-              <a:srgbClr val="1E40AF">
+            <a:outerShdw sx="100000" sy="100000" kx="0" ky="0" algn="bl" rotWithShape="0" blurRad="114300" dist="38100" dir="8100000">
+              <a:srgbClr val="1e40af">
                 <a:alpha val="20000"/>
               </a:srgbClr>
             </a:outerShdw>
@@ -5960,7 +5648,7 @@
       </p:sp>
       <p:pic>
         <p:nvPicPr>
-          <p:cNvPr id="25" name="Image 6" descr="preencoded.png"/>
+          <p:cNvPr id="25" name="Image 6" descr="preencoded.png">    </p:cNvPr>
           <p:cNvPicPr>
             <a:picLocks noChangeAspect="1"/>
           </p:cNvPicPr>
@@ -6003,7 +5691,7 @@
           <a:bodyPr wrap="square" lIns="0" tIns="0" rIns="0" bIns="0" rtlCol="0" anchor="t"/>
           <a:lstStyle/>
           <a:p>
-            <a:pPr marL="0" indent="0" algn="ctr">
+            <a:pPr algn="ctr" indent="0" marL="0">
               <a:buNone/>
             </a:pPr>
             <a:r>
@@ -6042,7 +5730,7 @@
           <a:bodyPr wrap="square" lIns="0" tIns="0" rIns="0" bIns="0" rtlCol="0" anchor="t"/>
           <a:lstStyle/>
           <a:p>
-            <a:pPr marL="0" indent="0" algn="ctr">
+            <a:pPr algn="ctr" indent="0" marL="0">
               <a:buNone/>
             </a:pPr>
             <a:r>
@@ -6108,7 +5796,7 @@
           <a:bodyPr wrap="square" lIns="0" tIns="0" rIns="0" bIns="0" rtlCol="0" anchor="ctr"/>
           <a:lstStyle/>
           <a:p>
-            <a:pPr marL="0" indent="0">
+            <a:pPr indent="0" marL="0">
               <a:buNone/>
             </a:pPr>
             <a:r>
@@ -6120,7 +5808,7 @@
                 <a:ea typeface="Segoe UI" pitchFamily="34" charset="-122"/>
                 <a:cs typeface="Segoe UI" pitchFamily="34" charset="-120"/>
               </a:rPr>
-              <a:t>Hiện trạng: lớp 2, 4 đang hoạt động; lớp 1, 3 đã kiểm thử trên bản thử nghiệm và chờ phê duyệt áp dụng.</a:t>
+              <a:t>Hiện trạng: lớp 2, 4 đang hoạt động; lớp 1, 3 đã kiểm thử đạt trên bản thử nghiệm, sẵn sàng áp dụng, đang chờ phê duyệt.</a:t>
             </a:r>
             <a:endParaRPr lang="en-US" sz="1400" dirty="0"/>
           </a:p>
@@ -6131,18 +5819,9 @@
   <p:clrMapOvr>
     <a:masterClrMapping/>
   </p:clrMapOvr>
-  <mc:AlternateContent xmlns:mc="http://schemas.openxmlformats.org/markup-compatibility/2006">
-    <mc:Choice xmlns:p14="http://schemas.microsoft.com/office/powerpoint/2010/main" Requires="p14">
-      <p:transition p14:dur="450">
-        <p:fade/>
-      </p:transition>
-    </mc:Choice>
-    <mc:Fallback>
-      <p:transition>
-        <p:fade/>
-      </p:transition>
-    </mc:Fallback>
-  </mc:AlternateContent>
+  <p:transition xmlns:p14="http://schemas.microsoft.com/office/powerpoint/2010/main" spd="med" p14:dur="450">
+    <p:fade/>
+  </p:transition>
 </p:sld>
 </file>
 
@@ -6154,7 +5833,6 @@
         <a:solidFill>
           <a:srgbClr val="FFFFFF"/>
         </a:solidFill>
-        <a:effectLst/>
       </p:bgPr>
     </p:bg>
     <p:spTree>
@@ -6192,11 +5870,11 @@
           <a:bodyPr wrap="square" lIns="0" tIns="0" rIns="0" bIns="0" rtlCol="0" anchor="ctr"/>
           <a:lstStyle/>
           <a:p>
-            <a:pPr marL="0" indent="0">
-              <a:buNone/>
-            </a:pPr>
-            <a:r>
-              <a:rPr lang="en-US" sz="1300" b="1" kern="0" spc="200" dirty="0">
+            <a:pPr indent="0" marL="0">
+              <a:buNone/>
+            </a:pPr>
+            <a:r>
+              <a:rPr lang="en-US" sz="1300" b="1" spc="200" kern="0" dirty="0">
                 <a:solidFill>
                   <a:srgbClr val="1D4ED8"/>
                 </a:solidFill>
@@ -6231,11 +5909,11 @@
           <a:bodyPr wrap="square" lIns="0" tIns="0" rIns="0" bIns="0" rtlCol="0" anchor="t"/>
           <a:lstStyle/>
           <a:p>
-            <a:pPr marL="0" indent="0">
-              <a:buNone/>
-            </a:pPr>
-            <a:r>
-              <a:rPr lang="en-US" sz="2900" b="1" kern="0" spc="-50" dirty="0">
+            <a:pPr indent="0" marL="0">
+              <a:buNone/>
+            </a:pPr>
+            <a:r>
+              <a:rPr lang="en-US" sz="2900" b="1" spc="-50" kern="0" dirty="0">
                 <a:solidFill>
                   <a:srgbClr val="0F172A"/>
                 </a:solidFill>
@@ -6275,7 +5953,7 @@
             <a:prstDash val="solid"/>
           </a:ln>
           <a:effectLst>
-            <a:outerShdw blurRad="88900" dist="25400" dir="8100000" algn="bl" rotWithShape="0">
+            <a:outerShdw sx="100000" sy="100000" kx="0" ky="0" algn="bl" rotWithShape="0" blurRad="88900" dist="25400" dir="8100000">
               <a:srgbClr val="94A3B8">
                 <a:alpha val="28000"/>
               </a:srgbClr>
@@ -6285,23 +5963,23 @@
       </p:sp>
       <p:pic>
         <p:nvPicPr>
-          <p:cNvPr id="5" name="Media 0">
+          <p:cNvPr id="3" name="Media 0">
             <a:hlinkClick r:id="" action="ppaction://media"/>
           </p:cNvPr>
           <p:cNvPicPr>
             <a:picLocks noChangeAspect="1"/>
           </p:cNvPicPr>
           <p:nvPr>
-            <a:videoFile r:link="rId2"/>
+            <a:videoFile r:link="rId1"/>
             <p:extLst>
               <p:ext uri="{DAA4B4D4-6D71-4841-9C94-3DE7FCFB9230}">
-                <p14:media xmlns:p14="http://schemas.microsoft.com/office/powerpoint/2010/main" r:embed="rId1"/>
+                <p14:media xmlns:p14="http://schemas.microsoft.com/office/powerpoint/2010/main" r:embed="rId2"/>
               </p:ext>
             </p:extLst>
           </p:nvPr>
         </p:nvPicPr>
         <p:blipFill>
-          <a:blip r:embed="rId5"/>
+          <a:blip r:embed="rId3"/>
           <a:stretch>
             <a:fillRect/>
           </a:stretch>
@@ -6364,7 +6042,7 @@
           <a:bodyPr wrap="square" lIns="0" tIns="0" rIns="0" bIns="0" rtlCol="0" anchor="ctr"/>
           <a:lstStyle/>
           <a:p>
-            <a:pPr marL="0" indent="0" algn="ctr">
+            <a:pPr algn="ctr" indent="0" marL="0">
               <a:buNone/>
             </a:pPr>
             <a:r>
@@ -6387,153 +6065,9 @@
   <p:clrMapOvr>
     <a:masterClrMapping/>
   </p:clrMapOvr>
-  <mc:AlternateContent xmlns:mc="http://schemas.openxmlformats.org/markup-compatibility/2006">
-    <mc:Choice xmlns:p14="http://schemas.microsoft.com/office/powerpoint/2010/main" Requires="p14">
-      <p:transition p14:dur="450">
-        <p:fade/>
-      </p:transition>
-    </mc:Choice>
-    <mc:Fallback>
-      <p:transition>
-        <p:fade/>
-      </p:transition>
-    </mc:Fallback>
-  </mc:AlternateContent>
-  <p:timing>
-    <p:tnLst>
-      <p:par>
-        <p:cTn id="1" dur="indefinite" restart="never" nodeType="tmRoot">
-          <p:childTnLst>
-            <p:seq concurrent="1" nextAc="seek">
-              <p:cTn id="2" dur="indefinite" nodeType="mainSeq">
-                <p:childTnLst>
-                  <p:par>
-                    <p:cTn id="3" fill="hold">
-                      <p:stCondLst>
-                        <p:cond delay="indefinite"/>
-                      </p:stCondLst>
-                      <p:childTnLst>
-                        <p:par>
-                          <p:cTn id="4" fill="hold">
-                            <p:stCondLst>
-                              <p:cond delay="0"/>
-                            </p:stCondLst>
-                            <p:childTnLst>
-                              <p:par>
-                                <p:cTn id="5" presetID="1" presetClass="mediacall" presetSubtype="0" fill="hold" nodeType="clickEffect">
-                                  <p:stCondLst>
-                                    <p:cond delay="0"/>
-                                  </p:stCondLst>
-                                  <p:childTnLst>
-                                    <p:cmd type="call" cmd="playFrom(0.0)">
-                                      <p:cBhvr>
-                                        <p:cTn id="6" dur="1" fill="hold"/>
-                                        <p:tgtEl>
-                                          <p:spTgt spid="5"/>
-                                        </p:tgtEl>
-                                      </p:cBhvr>
-                                    </p:cmd>
-                                  </p:childTnLst>
-                                </p:cTn>
-                              </p:par>
-                            </p:childTnLst>
-                          </p:cTn>
-                        </p:par>
-                      </p:childTnLst>
-                    </p:cTn>
-                  </p:par>
-                </p:childTnLst>
-              </p:cTn>
-              <p:prevCondLst>
-                <p:cond evt="onPrev" delay="0">
-                  <p:tgtEl>
-                    <p:sldTgt/>
-                  </p:tgtEl>
-                </p:cond>
-              </p:prevCondLst>
-              <p:nextCondLst>
-                <p:cond evt="onNext" delay="0">
-                  <p:tgtEl>
-                    <p:sldTgt/>
-                  </p:tgtEl>
-                </p:cond>
-              </p:nextCondLst>
-            </p:seq>
-            <p:video>
-              <p:cMediaNode vol="80000">
-                <p:cTn id="7" repeatCount="indefinite" fill="hold" display="0">
-                  <p:stCondLst>
-                    <p:cond delay="indefinite"/>
-                  </p:stCondLst>
-                </p:cTn>
-                <p:tgtEl>
-                  <p:spTgt spid="5"/>
-                </p:tgtEl>
-              </p:cMediaNode>
-            </p:video>
-            <p:seq concurrent="1" nextAc="seek">
-              <p:cTn id="8" restart="whenNotActive" fill="hold" evtFilter="cancelBubble" nodeType="interactiveSeq">
-                <p:stCondLst>
-                  <p:cond evt="onClick" delay="0">
-                    <p:tgtEl>
-                      <p:spTgt spid="5"/>
-                    </p:tgtEl>
-                  </p:cond>
-                </p:stCondLst>
-                <p:endSync evt="end" delay="0">
-                  <p:rtn val="all"/>
-                </p:endSync>
-                <p:childTnLst>
-                  <p:par>
-                    <p:cTn id="9" fill="hold">
-                      <p:stCondLst>
-                        <p:cond delay="0"/>
-                      </p:stCondLst>
-                      <p:childTnLst>
-                        <p:par>
-                          <p:cTn id="10" fill="hold">
-                            <p:stCondLst>
-                              <p:cond delay="0"/>
-                            </p:stCondLst>
-                            <p:childTnLst>
-                              <p:par>
-                                <p:cTn id="11" presetID="2" presetClass="mediacall" presetSubtype="0" fill="hold" nodeType="clickEffect">
-                                  <p:stCondLst>
-                                    <p:cond delay="0"/>
-                                  </p:stCondLst>
-                                  <p:childTnLst>
-                                    <p:cmd type="call" cmd="togglePause">
-                                      <p:cBhvr>
-                                        <p:cTn id="12" dur="1" fill="hold"/>
-                                        <p:tgtEl>
-                                          <p:spTgt spid="5"/>
-                                        </p:tgtEl>
-                                      </p:cBhvr>
-                                    </p:cmd>
-                                  </p:childTnLst>
-                                </p:cTn>
-                              </p:par>
-                            </p:childTnLst>
-                          </p:cTn>
-                        </p:par>
-                      </p:childTnLst>
-                    </p:cTn>
-                  </p:par>
-                </p:childTnLst>
-              </p:cTn>
-              <p:nextCondLst>
-                <p:cond evt="onClick" delay="0">
-                  <p:tgtEl>
-                    <p:spTgt spid="5"/>
-                  </p:tgtEl>
-                </p:cond>
-              </p:nextCondLst>
-            </p:seq>
-          </p:childTnLst>
-        </p:cTn>
-      </p:par>
-    </p:tnLst>
-  </p:timing>
+  <p:transition xmlns:p14="http://schemas.microsoft.com/office/powerpoint/2010/main" spd="med" p14:dur="450">
+    <p:fade/>
+  </p:transition>
 </p:sld>
 </file>
 
@@ -6545,7 +6079,6 @@
         <a:solidFill>
           <a:srgbClr val="FFFFFF"/>
         </a:solidFill>
-        <a:effectLst/>
       </p:bgPr>
     </p:bg>
     <p:spTree>
@@ -6583,11 +6116,11 @@
           <a:bodyPr wrap="square" lIns="0" tIns="0" rIns="0" bIns="0" rtlCol="0" anchor="ctr"/>
           <a:lstStyle/>
           <a:p>
-            <a:pPr marL="0" indent="0">
-              <a:buNone/>
-            </a:pPr>
-            <a:r>
-              <a:rPr lang="en-US" sz="1300" b="1" kern="0" spc="200" dirty="0">
+            <a:pPr indent="0" marL="0">
+              <a:buNone/>
+            </a:pPr>
+            <a:r>
+              <a:rPr lang="en-US" sz="1300" b="1" spc="200" kern="0" dirty="0">
                 <a:solidFill>
                   <a:srgbClr val="1D4ED8"/>
                 </a:solidFill>
@@ -6622,11 +6155,11 @@
           <a:bodyPr wrap="square" lIns="0" tIns="0" rIns="0" bIns="0" rtlCol="0" anchor="t"/>
           <a:lstStyle/>
           <a:p>
-            <a:pPr marL="0" indent="0">
-              <a:buNone/>
-            </a:pPr>
-            <a:r>
-              <a:rPr lang="en-US" sz="2900" b="1" kern="0" spc="-50" dirty="0">
+            <a:pPr indent="0" marL="0">
+              <a:buNone/>
+            </a:pPr>
+            <a:r>
+              <a:rPr lang="en-US" sz="2900" b="1" spc="-50" kern="0" dirty="0">
                 <a:solidFill>
                   <a:srgbClr val="0F172A"/>
                 </a:solidFill>
@@ -6666,7 +6199,7 @@
             <a:prstDash val="solid"/>
           </a:ln>
           <a:effectLst>
-            <a:outerShdw blurRad="88900" dist="25400" dir="8100000" algn="bl" rotWithShape="0">
+            <a:outerShdw sx="100000" sy="100000" kx="0" ky="0" algn="bl" rotWithShape="0" blurRad="88900" dist="25400" dir="8100000">
               <a:srgbClr val="94A3B8">
                 <a:alpha val="28000"/>
               </a:srgbClr>
@@ -6676,15 +6209,15 @@
       </p:sp>
       <p:pic>
         <p:nvPicPr>
-          <p:cNvPr id="5" name="Image 0" descr="D:\04. Github\bandocapt\presentation\asset\chat bot tra loi.png"/>
+          <p:cNvPr id="5" name="Image 0" descr="D:\04. Github\bandocapt\presentation\asset\chat bot tra loi.png">    </p:cNvPr>
           <p:cNvPicPr>
             <a:picLocks noChangeAspect="1"/>
           </p:cNvPicPr>
           <p:nvPr/>
         </p:nvPicPr>
         <p:blipFill>
-          <a:blip r:embed="rId3"/>
-          <a:srcRect/>
+          <a:blip r:embed="rId1"/>
+          <a:srcRect l="0" r="0" t="0" b="0"/>
           <a:stretch/>
         </p:blipFill>
         <p:spPr>
@@ -6723,7 +6256,7 @@
             <a:prstDash val="solid"/>
           </a:ln>
           <a:effectLst>
-            <a:outerShdw blurRad="88900" dist="25400" dir="8100000" algn="bl" rotWithShape="0">
+            <a:outerShdw sx="100000" sy="100000" kx="0" ky="0" algn="bl" rotWithShape="0" blurRad="88900" dist="25400" dir="8100000">
               <a:srgbClr val="94A3B8">
                 <a:alpha val="28000"/>
               </a:srgbClr>
@@ -6733,15 +6266,15 @@
       </p:sp>
       <p:pic>
         <p:nvPicPr>
-          <p:cNvPr id="7" name="Image 1" descr="D:\04. Github\bandocapt\presentation\asset\tra cuu thu tục tren dien thoai.png"/>
+          <p:cNvPr id="7" name="Image 1" descr="D:\04. Github\bandocapt\presentation\asset\tra cuu thu tục tren dien thoai.png">    </p:cNvPr>
           <p:cNvPicPr>
             <a:picLocks noChangeAspect="1"/>
           </p:cNvPicPr>
           <p:nvPr/>
         </p:nvPicPr>
         <p:blipFill>
-          <a:blip r:embed="rId4"/>
-          <a:srcRect/>
+          <a:blip r:embed="rId2"/>
+          <a:srcRect l="0" r="0" t="0" b="0"/>
           <a:stretch/>
         </p:blipFill>
         <p:spPr>
@@ -6775,7 +6308,7 @@
           <a:bodyPr wrap="square" lIns="0" tIns="0" rIns="0" bIns="0" rtlCol="0" anchor="ctr"/>
           <a:lstStyle/>
           <a:p>
-            <a:pPr marL="0" indent="0">
+            <a:pPr indent="0" marL="0">
               <a:buNone/>
             </a:pPr>
             <a:r>
@@ -6792,7 +6325,7 @@
             <a:endParaRPr lang="en-US" sz="2600" dirty="0"/>
           </a:p>
           <a:p>
-            <a:pPr marL="0" indent="0">
+            <a:pPr indent="0" marL="0">
               <a:buNone/>
             </a:pPr>
             <a:r>
@@ -6829,8 +6362,8 @@
           </a:solidFill>
           <a:ln/>
           <a:effectLst>
-            <a:outerShdw blurRad="114300" dist="38100" dir="8100000" algn="bl" rotWithShape="0">
-              <a:srgbClr val="1E40AF">
+            <a:outerShdw sx="100000" sy="100000" kx="0" ky="0" algn="bl" rotWithShape="0" blurRad="114300" dist="38100" dir="8100000">
+              <a:srgbClr val="1e40af">
                 <a:alpha val="20000"/>
               </a:srgbClr>
             </a:outerShdw>
@@ -6839,7 +6372,265 @@
       </p:sp>
       <p:pic>
         <p:nvPicPr>
-          <p:cNvPr id="10" name="Image 2" descr="preencoded.png"/>
+          <p:cNvPr id="10" name="Image 2" descr="preencoded.png">    </p:cNvPr>
+          <p:cNvPicPr>
+            <a:picLocks noChangeAspect="1"/>
+          </p:cNvPicPr>
+          <p:nvPr/>
+        </p:nvPicPr>
+        <p:blipFill>
+          <a:blip r:embed="rId3"/>
+          <a:stretch>
+            <a:fillRect/>
+          </a:stretch>
+        </p:blipFill>
+        <p:spPr>
+          <a:xfrm>
+            <a:off x="5363688" y="2876520"/>
+            <a:ext cx="227137" cy="227137"/>
+          </a:xfrm>
+          <a:prstGeom prst="rect">
+            <a:avLst/>
+          </a:prstGeom>
+        </p:spPr>
+      </p:pic>
+      <p:sp>
+        <p:nvSpPr>
+          <p:cNvPr id="11" name="Text 6"/>
+          <p:cNvSpPr/>
+          <p:nvPr/>
+        </p:nvSpPr>
+        <p:spPr>
+          <a:xfrm>
+            <a:off x="5897880" y="2734056"/>
+            <a:ext cx="3566160" cy="228600"/>
+          </a:xfrm>
+          <a:prstGeom prst="rect">
+            <a:avLst/>
+          </a:prstGeom>
+          <a:noFill/>
+          <a:ln/>
+        </p:spPr>
+        <p:txBody>
+          <a:bodyPr wrap="square" lIns="0" tIns="0" rIns="0" bIns="0" rtlCol="0" anchor="ctr"/>
+          <a:lstStyle/>
+          <a:p>
+            <a:pPr indent="0" marL="0">
+              <a:buNone/>
+            </a:pPr>
+            <a:r>
+              <a:rPr lang="en-US" sz="1700" b="1" dirty="0">
+                <a:solidFill>
+                  <a:srgbClr val="0F172A"/>
+                </a:solidFill>
+                <a:latin typeface="Segoe UI" pitchFamily="34" charset="0"/>
+                <a:ea typeface="Segoe UI" pitchFamily="34" charset="-122"/>
+                <a:cs typeface="Segoe UI" pitchFamily="34" charset="-120"/>
+              </a:rPr>
+              <a:t>Thân thiện dễ dùng</a:t>
+            </a:r>
+            <a:endParaRPr lang="en-US" sz="1700" dirty="0"/>
+          </a:p>
+        </p:txBody>
+      </p:sp>
+      <p:sp>
+        <p:nvSpPr>
+          <p:cNvPr id="12" name="Text 7"/>
+          <p:cNvSpPr/>
+          <p:nvPr/>
+        </p:nvSpPr>
+        <p:spPr>
+          <a:xfrm>
+            <a:off x="5897880" y="3035808"/>
+            <a:ext cx="4846320" cy="384048"/>
+          </a:xfrm>
+          <a:prstGeom prst="rect">
+            <a:avLst/>
+          </a:prstGeom>
+          <a:noFill/>
+          <a:ln/>
+        </p:spPr>
+        <p:txBody>
+          <a:bodyPr wrap="square" lIns="0" tIns="0" rIns="0" bIns="0" rtlCol="0" anchor="ctr"/>
+          <a:lstStyle/>
+          <a:p>
+            <a:pPr indent="0" marL="0">
+              <a:buNone/>
+            </a:pPr>
+            <a:r>
+              <a:rPr lang="en-US" sz="1450" dirty="0">
+                <a:solidFill>
+                  <a:srgbClr val="334155"/>
+                </a:solidFill>
+                <a:latin typeface="Segoe UI" pitchFamily="34" charset="0"/>
+                <a:ea typeface="Segoe UI" pitchFamily="34" charset="-122"/>
+                <a:cs typeface="Segoe UI" pitchFamily="34" charset="-120"/>
+              </a:rPr>
+              <a:t>Giao diện tối giản, tối ưu cho điện thoại di động.</a:t>
+            </a:r>
+            <a:endParaRPr lang="en-US" sz="1450" dirty="0"/>
+          </a:p>
+        </p:txBody>
+      </p:sp>
+      <p:sp>
+        <p:nvSpPr>
+          <p:cNvPr id="13" name="Shape 8"/>
+          <p:cNvSpPr/>
+          <p:nvPr/>
+        </p:nvSpPr>
+        <p:spPr>
+          <a:xfrm>
+            <a:off x="5230368" y="3584448"/>
+            <a:ext cx="493776" cy="493776"/>
+          </a:xfrm>
+          <a:prstGeom prst="ellipse">
+            <a:avLst/>
+          </a:prstGeom>
+          <a:solidFill>
+            <a:srgbClr val="1D4ED8"/>
+          </a:solidFill>
+          <a:ln/>
+          <a:effectLst>
+            <a:outerShdw sx="100000" sy="100000" kx="0" ky="0" algn="bl" rotWithShape="0" blurRad="114300" dist="38100" dir="8100000">
+              <a:srgbClr val="1e40af">
+                <a:alpha val="20000"/>
+              </a:srgbClr>
+            </a:outerShdw>
+          </a:effectLst>
+        </p:spPr>
+      </p:sp>
+      <p:pic>
+        <p:nvPicPr>
+          <p:cNvPr id="14" name="Image 3" descr="preencoded.png">    </p:cNvPr>
+          <p:cNvPicPr>
+            <a:picLocks noChangeAspect="1"/>
+          </p:cNvPicPr>
+          <p:nvPr/>
+        </p:nvPicPr>
+        <p:blipFill>
+          <a:blip r:embed="rId4"/>
+          <a:stretch>
+            <a:fillRect/>
+          </a:stretch>
+        </p:blipFill>
+        <p:spPr>
+          <a:xfrm>
+            <a:off x="5363688" y="3717768"/>
+            <a:ext cx="227137" cy="227137"/>
+          </a:xfrm>
+          <a:prstGeom prst="rect">
+            <a:avLst/>
+          </a:prstGeom>
+        </p:spPr>
+      </p:pic>
+      <p:sp>
+        <p:nvSpPr>
+          <p:cNvPr id="15" name="Text 9"/>
+          <p:cNvSpPr/>
+          <p:nvPr/>
+        </p:nvSpPr>
+        <p:spPr>
+          <a:xfrm>
+            <a:off x="5897880" y="3575304"/>
+            <a:ext cx="3566160" cy="228600"/>
+          </a:xfrm>
+          <a:prstGeom prst="rect">
+            <a:avLst/>
+          </a:prstGeom>
+          <a:noFill/>
+          <a:ln/>
+        </p:spPr>
+        <p:txBody>
+          <a:bodyPr wrap="square" lIns="0" tIns="0" rIns="0" bIns="0" rtlCol="0" anchor="ctr"/>
+          <a:lstStyle/>
+          <a:p>
+            <a:pPr indent="0" marL="0">
+              <a:buNone/>
+            </a:pPr>
+            <a:r>
+              <a:rPr lang="en-US" sz="1700" b="1" dirty="0">
+                <a:solidFill>
+                  <a:srgbClr val="0F172A"/>
+                </a:solidFill>
+                <a:latin typeface="Segoe UI" pitchFamily="34" charset="0"/>
+                <a:ea typeface="Segoe UI" pitchFamily="34" charset="-122"/>
+                <a:cs typeface="Segoe UI" pitchFamily="34" charset="-120"/>
+              </a:rPr>
+              <a:t>Hỗ trợ Ngoại ngữ</a:t>
+            </a:r>
+            <a:endParaRPr lang="en-US" sz="1700" dirty="0"/>
+          </a:p>
+        </p:txBody>
+      </p:sp>
+      <p:sp>
+        <p:nvSpPr>
+          <p:cNvPr id="16" name="Text 10"/>
+          <p:cNvSpPr/>
+          <p:nvPr/>
+        </p:nvSpPr>
+        <p:spPr>
+          <a:xfrm>
+            <a:off x="5897880" y="3877056"/>
+            <a:ext cx="4846320" cy="384048"/>
+          </a:xfrm>
+          <a:prstGeom prst="rect">
+            <a:avLst/>
+          </a:prstGeom>
+          <a:noFill/>
+          <a:ln/>
+        </p:spPr>
+        <p:txBody>
+          <a:bodyPr wrap="square" lIns="0" tIns="0" rIns="0" bIns="0" rtlCol="0" anchor="ctr"/>
+          <a:lstStyle/>
+          <a:p>
+            <a:pPr indent="0" marL="0">
+              <a:buNone/>
+            </a:pPr>
+            <a:r>
+              <a:rPr lang="en-US" sz="1450" dirty="0">
+                <a:solidFill>
+                  <a:srgbClr val="334155"/>
+                </a:solidFill>
+                <a:latin typeface="Segoe UI" pitchFamily="34" charset="0"/>
+                <a:ea typeface="Segoe UI" pitchFamily="34" charset="-122"/>
+                <a:cs typeface="Segoe UI" pitchFamily="34" charset="-120"/>
+              </a:rPr>
+              <a:t>Dịch Tiếng Anh/Trung/Hàn cho người nước ngoài.</a:t>
+            </a:r>
+            <a:endParaRPr lang="en-US" sz="1450" dirty="0"/>
+          </a:p>
+        </p:txBody>
+      </p:sp>
+      <p:sp>
+        <p:nvSpPr>
+          <p:cNvPr id="17" name="Shape 11"/>
+          <p:cNvSpPr/>
+          <p:nvPr/>
+        </p:nvSpPr>
+        <p:spPr>
+          <a:xfrm>
+            <a:off x="5230368" y="4425696"/>
+            <a:ext cx="493776" cy="493776"/>
+          </a:xfrm>
+          <a:prstGeom prst="ellipse">
+            <a:avLst/>
+          </a:prstGeom>
+          <a:solidFill>
+            <a:srgbClr val="1D4ED8"/>
+          </a:solidFill>
+          <a:ln/>
+          <a:effectLst>
+            <a:outerShdw sx="100000" sy="100000" kx="0" ky="0" algn="bl" rotWithShape="0" blurRad="114300" dist="38100" dir="8100000">
+              <a:srgbClr val="1e40af">
+                <a:alpha val="20000"/>
+              </a:srgbClr>
+            </a:outerShdw>
+          </a:effectLst>
+        </p:spPr>
+      </p:sp>
+      <p:pic>
+        <p:nvPicPr>
+          <p:cNvPr id="18" name="Image 4" descr="preencoded.png">    </p:cNvPr>
           <p:cNvPicPr>
             <a:picLocks noChangeAspect="1"/>
           </p:cNvPicPr>
@@ -6853,7 +6644,7 @@
         </p:blipFill>
         <p:spPr>
           <a:xfrm>
-            <a:off x="5363688" y="2876520"/>
+            <a:off x="5363688" y="4559016"/>
             <a:ext cx="227137" cy="227137"/>
           </a:xfrm>
           <a:prstGeom prst="rect">
@@ -6863,13 +6654,13 @@
       </p:pic>
       <p:sp>
         <p:nvSpPr>
-          <p:cNvPr id="11" name="Text 6"/>
-          <p:cNvSpPr/>
-          <p:nvPr/>
-        </p:nvSpPr>
-        <p:spPr>
-          <a:xfrm>
-            <a:off x="5897880" y="2734056"/>
+          <p:cNvPr id="19" name="Text 12"/>
+          <p:cNvSpPr/>
+          <p:nvPr/>
+        </p:nvSpPr>
+        <p:spPr>
+          <a:xfrm>
+            <a:off x="5897880" y="4416552"/>
             <a:ext cx="3566160" cy="228600"/>
           </a:xfrm>
           <a:prstGeom prst="rect">
@@ -6882,7 +6673,7 @@
           <a:bodyPr wrap="square" lIns="0" tIns="0" rIns="0" bIns="0" rtlCol="0" anchor="ctr"/>
           <a:lstStyle/>
           <a:p>
-            <a:pPr marL="0" indent="0">
+            <a:pPr indent="0" marL="0">
               <a:buNone/>
             </a:pPr>
             <a:r>
@@ -6894,7 +6685,7 @@
                 <a:ea typeface="Segoe UI" pitchFamily="34" charset="-122"/>
                 <a:cs typeface="Segoe UI" pitchFamily="34" charset="-120"/>
               </a:rPr>
-              <a:t>Thân thiện dễ dùng</a:t>
+              <a:t>Quản trị linh hoạt</a:t>
             </a:r>
             <a:endParaRPr lang="en-US" sz="1700" dirty="0"/>
           </a:p>
@@ -6902,13 +6693,13 @@
       </p:sp>
       <p:sp>
         <p:nvSpPr>
-          <p:cNvPr id="12" name="Text 7"/>
-          <p:cNvSpPr/>
-          <p:nvPr/>
-        </p:nvSpPr>
-        <p:spPr>
-          <a:xfrm>
-            <a:off x="5897880" y="3035808"/>
+          <p:cNvPr id="20" name="Text 13"/>
+          <p:cNvSpPr/>
+          <p:nvPr/>
+        </p:nvSpPr>
+        <p:spPr>
+          <a:xfrm>
+            <a:off x="5897880" y="4718304"/>
             <a:ext cx="4846320" cy="384048"/>
           </a:xfrm>
           <a:prstGeom prst="rect">
@@ -6921,7 +6712,7 @@
           <a:bodyPr wrap="square" lIns="0" tIns="0" rIns="0" bIns="0" rtlCol="0" anchor="ctr"/>
           <a:lstStyle/>
           <a:p>
-            <a:pPr marL="0" indent="0">
+            <a:pPr indent="0" marL="0">
               <a:buNone/>
             </a:pPr>
             <a:r>
@@ -6933,7 +6724,7 @@
                 <a:ea typeface="Segoe UI" pitchFamily="34" charset="-122"/>
                 <a:cs typeface="Segoe UI" pitchFamily="34" charset="-120"/>
               </a:rPr>
-              <a:t>Giao diện tối giản, tối ưu cho điện thoại di động.</a:t>
+              <a:t>Cán bộ cập nhật dữ liệu tự động qua Google Sheets.</a:t>
             </a:r>
             <a:endParaRPr lang="en-US" sz="1450" dirty="0"/>
           </a:p>
@@ -6941,25 +6732,25 @@
       </p:sp>
       <p:sp>
         <p:nvSpPr>
-          <p:cNvPr id="13" name="Shape 8"/>
-          <p:cNvSpPr/>
-          <p:nvPr/>
-        </p:nvSpPr>
-        <p:spPr>
-          <a:xfrm>
-            <a:off x="5230368" y="3584448"/>
+          <p:cNvPr id="21" name="Shape 14"/>
+          <p:cNvSpPr/>
+          <p:nvPr/>
+        </p:nvSpPr>
+        <p:spPr>
+          <a:xfrm>
+            <a:off x="5230368" y="5266944"/>
             <a:ext cx="493776" cy="493776"/>
           </a:xfrm>
           <a:prstGeom prst="ellipse">
             <a:avLst/>
           </a:prstGeom>
           <a:solidFill>
-            <a:srgbClr val="1D4ED8"/>
+            <a:srgbClr val="0B7A75"/>
           </a:solidFill>
           <a:ln/>
           <a:effectLst>
-            <a:outerShdw blurRad="114300" dist="38100" dir="8100000" algn="bl" rotWithShape="0">
-              <a:srgbClr val="1E40AF">
+            <a:outerShdw sx="100000" sy="100000" kx="0" ky="0" algn="bl" rotWithShape="0" blurRad="114300" dist="38100" dir="8100000">
+              <a:srgbClr val="1e40af">
                 <a:alpha val="20000"/>
               </a:srgbClr>
             </a:outerShdw>
@@ -6968,7 +6759,7 @@
       </p:sp>
       <p:pic>
         <p:nvPicPr>
-          <p:cNvPr id="14" name="Image 3" descr="preencoded.png"/>
+          <p:cNvPr id="22" name="Image 5" descr="preencoded.png">    </p:cNvPr>
           <p:cNvPicPr>
             <a:picLocks noChangeAspect="1"/>
           </p:cNvPicPr>
@@ -6982,264 +6773,6 @@
         </p:blipFill>
         <p:spPr>
           <a:xfrm>
-            <a:off x="5363688" y="3717768"/>
-            <a:ext cx="227137" cy="227137"/>
-          </a:xfrm>
-          <a:prstGeom prst="rect">
-            <a:avLst/>
-          </a:prstGeom>
-        </p:spPr>
-      </p:pic>
-      <p:sp>
-        <p:nvSpPr>
-          <p:cNvPr id="15" name="Text 9"/>
-          <p:cNvSpPr/>
-          <p:nvPr/>
-        </p:nvSpPr>
-        <p:spPr>
-          <a:xfrm>
-            <a:off x="5897880" y="3575304"/>
-            <a:ext cx="3566160" cy="228600"/>
-          </a:xfrm>
-          <a:prstGeom prst="rect">
-            <a:avLst/>
-          </a:prstGeom>
-          <a:noFill/>
-          <a:ln/>
-        </p:spPr>
-        <p:txBody>
-          <a:bodyPr wrap="square" lIns="0" tIns="0" rIns="0" bIns="0" rtlCol="0" anchor="ctr"/>
-          <a:lstStyle/>
-          <a:p>
-            <a:pPr marL="0" indent="0">
-              <a:buNone/>
-            </a:pPr>
-            <a:r>
-              <a:rPr lang="en-US" sz="1700" b="1" dirty="0">
-                <a:solidFill>
-                  <a:srgbClr val="0F172A"/>
-                </a:solidFill>
-                <a:latin typeface="Segoe UI" pitchFamily="34" charset="0"/>
-                <a:ea typeface="Segoe UI" pitchFamily="34" charset="-122"/>
-                <a:cs typeface="Segoe UI" pitchFamily="34" charset="-120"/>
-              </a:rPr>
-              <a:t>Hỗ trợ Ngoại ngữ</a:t>
-            </a:r>
-            <a:endParaRPr lang="en-US" sz="1700" dirty="0"/>
-          </a:p>
-        </p:txBody>
-      </p:sp>
-      <p:sp>
-        <p:nvSpPr>
-          <p:cNvPr id="16" name="Text 10"/>
-          <p:cNvSpPr/>
-          <p:nvPr/>
-        </p:nvSpPr>
-        <p:spPr>
-          <a:xfrm>
-            <a:off x="5897880" y="3877056"/>
-            <a:ext cx="4846320" cy="384048"/>
-          </a:xfrm>
-          <a:prstGeom prst="rect">
-            <a:avLst/>
-          </a:prstGeom>
-          <a:noFill/>
-          <a:ln/>
-        </p:spPr>
-        <p:txBody>
-          <a:bodyPr wrap="square" lIns="0" tIns="0" rIns="0" bIns="0" rtlCol="0" anchor="ctr"/>
-          <a:lstStyle/>
-          <a:p>
-            <a:pPr marL="0" indent="0">
-              <a:buNone/>
-            </a:pPr>
-            <a:r>
-              <a:rPr lang="en-US" sz="1450" dirty="0">
-                <a:solidFill>
-                  <a:srgbClr val="334155"/>
-                </a:solidFill>
-                <a:latin typeface="Segoe UI" pitchFamily="34" charset="0"/>
-                <a:ea typeface="Segoe UI" pitchFamily="34" charset="-122"/>
-                <a:cs typeface="Segoe UI" pitchFamily="34" charset="-120"/>
-              </a:rPr>
-              <a:t>Dịch Tiếng Anh/Trung/Hàn cho người nước ngoài.</a:t>
-            </a:r>
-            <a:endParaRPr lang="en-US" sz="1450" dirty="0"/>
-          </a:p>
-        </p:txBody>
-      </p:sp>
-      <p:sp>
-        <p:nvSpPr>
-          <p:cNvPr id="17" name="Shape 11"/>
-          <p:cNvSpPr/>
-          <p:nvPr/>
-        </p:nvSpPr>
-        <p:spPr>
-          <a:xfrm>
-            <a:off x="5230368" y="4425696"/>
-            <a:ext cx="493776" cy="493776"/>
-          </a:xfrm>
-          <a:prstGeom prst="ellipse">
-            <a:avLst/>
-          </a:prstGeom>
-          <a:solidFill>
-            <a:srgbClr val="1D4ED8"/>
-          </a:solidFill>
-          <a:ln/>
-          <a:effectLst>
-            <a:outerShdw blurRad="114300" dist="38100" dir="8100000" algn="bl" rotWithShape="0">
-              <a:srgbClr val="1E40AF">
-                <a:alpha val="20000"/>
-              </a:srgbClr>
-            </a:outerShdw>
-          </a:effectLst>
-        </p:spPr>
-      </p:sp>
-      <p:pic>
-        <p:nvPicPr>
-          <p:cNvPr id="18" name="Image 4" descr="preencoded.png"/>
-          <p:cNvPicPr>
-            <a:picLocks noChangeAspect="1"/>
-          </p:cNvPicPr>
-          <p:nvPr/>
-        </p:nvPicPr>
-        <p:blipFill>
-          <a:blip r:embed="rId6"/>
-          <a:stretch>
-            <a:fillRect/>
-          </a:stretch>
-        </p:blipFill>
-        <p:spPr>
-          <a:xfrm>
-            <a:off x="5363688" y="4559016"/>
-            <a:ext cx="227137" cy="227137"/>
-          </a:xfrm>
-          <a:prstGeom prst="rect">
-            <a:avLst/>
-          </a:prstGeom>
-        </p:spPr>
-      </p:pic>
-      <p:sp>
-        <p:nvSpPr>
-          <p:cNvPr id="19" name="Text 12"/>
-          <p:cNvSpPr/>
-          <p:nvPr/>
-        </p:nvSpPr>
-        <p:spPr>
-          <a:xfrm>
-            <a:off x="5897880" y="4416552"/>
-            <a:ext cx="3566160" cy="228600"/>
-          </a:xfrm>
-          <a:prstGeom prst="rect">
-            <a:avLst/>
-          </a:prstGeom>
-          <a:noFill/>
-          <a:ln/>
-        </p:spPr>
-        <p:txBody>
-          <a:bodyPr wrap="square" lIns="0" tIns="0" rIns="0" bIns="0" rtlCol="0" anchor="ctr"/>
-          <a:lstStyle/>
-          <a:p>
-            <a:pPr marL="0" indent="0">
-              <a:buNone/>
-            </a:pPr>
-            <a:r>
-              <a:rPr lang="en-US" sz="1700" b="1" dirty="0">
-                <a:solidFill>
-                  <a:srgbClr val="0F172A"/>
-                </a:solidFill>
-                <a:latin typeface="Segoe UI" pitchFamily="34" charset="0"/>
-                <a:ea typeface="Segoe UI" pitchFamily="34" charset="-122"/>
-                <a:cs typeface="Segoe UI" pitchFamily="34" charset="-120"/>
-              </a:rPr>
-              <a:t>Quản trị linh hoạt</a:t>
-            </a:r>
-            <a:endParaRPr lang="en-US" sz="1700" dirty="0"/>
-          </a:p>
-        </p:txBody>
-      </p:sp>
-      <p:sp>
-        <p:nvSpPr>
-          <p:cNvPr id="20" name="Text 13"/>
-          <p:cNvSpPr/>
-          <p:nvPr/>
-        </p:nvSpPr>
-        <p:spPr>
-          <a:xfrm>
-            <a:off x="5897880" y="4718304"/>
-            <a:ext cx="4846320" cy="384048"/>
-          </a:xfrm>
-          <a:prstGeom prst="rect">
-            <a:avLst/>
-          </a:prstGeom>
-          <a:noFill/>
-          <a:ln/>
-        </p:spPr>
-        <p:txBody>
-          <a:bodyPr wrap="square" lIns="0" tIns="0" rIns="0" bIns="0" rtlCol="0" anchor="ctr"/>
-          <a:lstStyle/>
-          <a:p>
-            <a:pPr marL="0" indent="0">
-              <a:buNone/>
-            </a:pPr>
-            <a:r>
-              <a:rPr lang="en-US" sz="1450" dirty="0">
-                <a:solidFill>
-                  <a:srgbClr val="334155"/>
-                </a:solidFill>
-                <a:latin typeface="Segoe UI" pitchFamily="34" charset="0"/>
-                <a:ea typeface="Segoe UI" pitchFamily="34" charset="-122"/>
-                <a:cs typeface="Segoe UI" pitchFamily="34" charset="-120"/>
-              </a:rPr>
-              <a:t>Cán bộ cập nhật dữ liệu tự động qua Google Sheets.</a:t>
-            </a:r>
-            <a:endParaRPr lang="en-US" sz="1450" dirty="0"/>
-          </a:p>
-        </p:txBody>
-      </p:sp>
-      <p:sp>
-        <p:nvSpPr>
-          <p:cNvPr id="21" name="Shape 14"/>
-          <p:cNvSpPr/>
-          <p:nvPr/>
-        </p:nvSpPr>
-        <p:spPr>
-          <a:xfrm>
-            <a:off x="5230368" y="5266944"/>
-            <a:ext cx="493776" cy="493776"/>
-          </a:xfrm>
-          <a:prstGeom prst="ellipse">
-            <a:avLst/>
-          </a:prstGeom>
-          <a:solidFill>
-            <a:srgbClr val="0B7A75"/>
-          </a:solidFill>
-          <a:ln/>
-          <a:effectLst>
-            <a:outerShdw blurRad="114300" dist="38100" dir="8100000" algn="bl" rotWithShape="0">
-              <a:srgbClr val="1E40AF">
-                <a:alpha val="20000"/>
-              </a:srgbClr>
-            </a:outerShdw>
-          </a:effectLst>
-        </p:spPr>
-      </p:sp>
-      <p:pic>
-        <p:nvPicPr>
-          <p:cNvPr id="22" name="Image 5" descr="preencoded.png"/>
-          <p:cNvPicPr>
-            <a:picLocks noChangeAspect="1"/>
-          </p:cNvPicPr>
-          <p:nvPr/>
-        </p:nvPicPr>
-        <p:blipFill>
-          <a:blip r:embed="rId7"/>
-          <a:stretch>
-            <a:fillRect/>
-          </a:stretch>
-        </p:blipFill>
-        <p:spPr>
-          <a:xfrm>
             <a:off x="5363688" y="5400264"/>
             <a:ext cx="227137" cy="227137"/>
           </a:xfrm>
@@ -7269,7 +6802,7 @@
           <a:bodyPr wrap="square" lIns="0" tIns="0" rIns="0" bIns="0" rtlCol="0" anchor="ctr"/>
           <a:lstStyle/>
           <a:p>
-            <a:pPr marL="0" indent="0">
+            <a:pPr indent="0" marL="0">
               <a:buNone/>
             </a:pPr>
             <a:r>
@@ -7308,7 +6841,7 @@
           <a:bodyPr wrap="square" lIns="0" tIns="0" rIns="0" bIns="0" rtlCol="0" anchor="ctr"/>
           <a:lstStyle/>
           <a:p>
-            <a:pPr marL="0" indent="0">
+            <a:pPr indent="0" marL="0">
               <a:buNone/>
             </a:pPr>
             <a:r>
@@ -7331,18 +6864,9 @@
   <p:clrMapOvr>
     <a:masterClrMapping/>
   </p:clrMapOvr>
-  <mc:AlternateContent xmlns:mc="http://schemas.openxmlformats.org/markup-compatibility/2006">
-    <mc:Choice xmlns:p14="http://schemas.microsoft.com/office/powerpoint/2010/main" Requires="p14">
-      <p:transition p14:dur="450">
-        <p:fade/>
-      </p:transition>
-    </mc:Choice>
-    <mc:Fallback>
-      <p:transition>
-        <p:fade/>
-      </p:transition>
-    </mc:Fallback>
-  </mc:AlternateContent>
+  <p:transition xmlns:p14="http://schemas.microsoft.com/office/powerpoint/2010/main" spd="med" p14:dur="450">
+    <p:fade/>
+  </p:transition>
 </p:sld>
 </file>
 
@@ -7354,7 +6878,6 @@
         <a:solidFill>
           <a:srgbClr val="1E3A8A"/>
         </a:solidFill>
-        <a:effectLst/>
       </p:bgPr>
     </p:bg>
     <p:spTree>
@@ -7392,11 +6915,11 @@
           <a:bodyPr wrap="square" lIns="0" tIns="0" rIns="0" bIns="0" rtlCol="0" anchor="ctr"/>
           <a:lstStyle/>
           <a:p>
-            <a:pPr marL="0" indent="0">
-              <a:buNone/>
-            </a:pPr>
-            <a:r>
-              <a:rPr lang="en-US" sz="1400" b="1" kern="0" spc="200" dirty="0">
+            <a:pPr indent="0" marL="0">
+              <a:buNone/>
+            </a:pPr>
+            <a:r>
+              <a:rPr lang="en-US" sz="1400" b="1" spc="200" kern="0" dirty="0">
                 <a:solidFill>
                   <a:srgbClr val="DBEAFE"/>
                 </a:solidFill>
@@ -7431,11 +6954,11 @@
           <a:bodyPr wrap="square" lIns="0" tIns="0" rIns="0" bIns="0" rtlCol="0" anchor="ctr"/>
           <a:lstStyle/>
           <a:p>
-            <a:pPr marL="0" indent="0">
-              <a:buNone/>
-            </a:pPr>
-            <a:r>
-              <a:rPr lang="en-US" sz="3000" b="1" kern="0" spc="-50" dirty="0">
+            <a:pPr indent="0" marL="0">
+              <a:buNone/>
+            </a:pPr>
+            <a:r>
+              <a:rPr lang="en-US" sz="3000" b="1" spc="-50" kern="0" dirty="0">
                 <a:solidFill>
                   <a:srgbClr val="FFFFFF"/>
                 </a:solidFill>
@@ -7475,8 +6998,8 @@
             <a:prstDash val="solid"/>
           </a:ln>
           <a:effectLst>
-            <a:outerShdw blurRad="114300" dist="38100" dir="8100000" algn="bl" rotWithShape="0">
-              <a:srgbClr val="1E40AF">
+            <a:outerShdw sx="100000" sy="100000" kx="0" ky="0" algn="bl" rotWithShape="0" blurRad="114300" dist="38100" dir="8100000">
+              <a:srgbClr val="1e40af">
                 <a:alpha val="20000"/>
               </a:srgbClr>
             </a:outerShdw>
@@ -7485,14 +7008,14 @@
       </p:sp>
       <p:pic>
         <p:nvPicPr>
-          <p:cNvPr id="5" name="Image 0" descr="preencoded.png"/>
+          <p:cNvPr id="5" name="Image 0" descr="preencoded.png">    </p:cNvPr>
           <p:cNvPicPr>
             <a:picLocks noChangeAspect="1"/>
           </p:cNvPicPr>
           <p:nvPr/>
         </p:nvPicPr>
         <p:blipFill>
-          <a:blip r:embed="rId3">
+          <a:blip r:embed="rId1">
             <a:alphaModFix amt="14000"/>
           </a:blip>
           <a:stretch>
@@ -7530,11 +7053,11 @@
           <a:bodyPr wrap="square" lIns="0" tIns="0" rIns="0" bIns="0" rtlCol="0" anchor="ctr"/>
           <a:lstStyle/>
           <a:p>
-            <a:pPr marL="0" indent="0">
-              <a:buNone/>
-            </a:pPr>
-            <a:r>
-              <a:rPr lang="en-US" sz="4400" b="1" kern="0" spc="-100" dirty="0">
+            <a:pPr indent="0" marL="0">
+              <a:buNone/>
+            </a:pPr>
+            <a:r>
+              <a:rPr lang="en-US" sz="4400" b="1" spc="-100" kern="0" dirty="0">
                 <a:solidFill>
                   <a:srgbClr val="DBEAFE"/>
                 </a:solidFill>
@@ -7569,7 +7092,7 @@
           <a:bodyPr wrap="square" lIns="0" tIns="0" rIns="0" bIns="0" rtlCol="0" anchor="ctr"/>
           <a:lstStyle/>
           <a:p>
-            <a:pPr marL="0" indent="0">
+            <a:pPr indent="0" marL="0">
               <a:buNone/>
             </a:pPr>
             <a:r>
@@ -7613,8 +7136,8 @@
             <a:prstDash val="solid"/>
           </a:ln>
           <a:effectLst>
-            <a:outerShdw blurRad="114300" dist="38100" dir="8100000" algn="bl" rotWithShape="0">
-              <a:srgbClr val="1E40AF">
+            <a:outerShdw sx="100000" sy="100000" kx="0" ky="0" algn="bl" rotWithShape="0" blurRad="114300" dist="38100" dir="8100000">
+              <a:srgbClr val="1e40af">
                 <a:alpha val="20000"/>
               </a:srgbClr>
             </a:outerShdw>
@@ -7623,14 +7146,14 @@
       </p:sp>
       <p:pic>
         <p:nvPicPr>
-          <p:cNvPr id="9" name="Image 1" descr="preencoded.png"/>
+          <p:cNvPr id="9" name="Image 1" descr="preencoded.png">    </p:cNvPr>
           <p:cNvPicPr>
             <a:picLocks noChangeAspect="1"/>
           </p:cNvPicPr>
           <p:nvPr/>
         </p:nvPicPr>
         <p:blipFill>
-          <a:blip r:embed="rId4">
+          <a:blip r:embed="rId2">
             <a:alphaModFix amt="14000"/>
           </a:blip>
           <a:stretch>
@@ -7668,11 +7191,11 @@
           <a:bodyPr wrap="square" lIns="0" tIns="0" rIns="0" bIns="0" rtlCol="0" anchor="ctr"/>
           <a:lstStyle/>
           <a:p>
-            <a:pPr marL="0" indent="0">
-              <a:buNone/>
-            </a:pPr>
-            <a:r>
-              <a:rPr lang="en-US" sz="4400" b="1" kern="0" spc="-100" dirty="0">
+            <a:pPr indent="0" marL="0">
+              <a:buNone/>
+            </a:pPr>
+            <a:r>
+              <a:rPr lang="en-US" sz="4400" b="1" spc="-100" kern="0" dirty="0">
                 <a:solidFill>
                   <a:srgbClr val="DBEAFE"/>
                 </a:solidFill>
@@ -7707,7 +7230,7 @@
           <a:bodyPr wrap="square" lIns="0" tIns="0" rIns="0" bIns="0" rtlCol="0" anchor="ctr"/>
           <a:lstStyle/>
           <a:p>
-            <a:pPr marL="0" indent="0">
+            <a:pPr indent="0" marL="0">
               <a:buNone/>
             </a:pPr>
             <a:r>
@@ -7768,7 +7291,7 @@
           <a:bodyPr wrap="square" lIns="0" tIns="0" rIns="0" bIns="0" rtlCol="0" anchor="ctr"/>
           <a:lstStyle/>
           <a:p>
-            <a:pPr marL="0" indent="0" algn="ctr">
+            <a:pPr algn="ctr" indent="0" marL="0">
               <a:buNone/>
             </a:pPr>
             <a:r>
@@ -7792,7 +7315,7 @@
     <a:masterClrMapping/>
   </p:clrMapOvr>
   <mc:AlternateContent xmlns:mc="http://schemas.openxmlformats.org/markup-compatibility/2006">
-    <mc:Choice xmlns:p159="http://schemas.microsoft.com/office/powerpoint/2015/9/main" xmlns="" Requires="p159">
+    <mc:Choice xmlns:p159="http://schemas.microsoft.com/office/powerpoint/2015/9/main" Requires="p159">
       <p:transition xmlns:p14="http://schemas.microsoft.com/office/powerpoint/2010/main" spd="med" p14:dur="800">
         <p159:morph option="byObject"/>
       </p:transition>
@@ -8099,319 +7622,4 @@
     </a:ext>
   </a:extLst>
 </a:theme>
-</file>
-
-<file path=ppt/theme/theme2.xml><?xml version="1.0" encoding="utf-8"?>
-<a:theme xmlns:a="http://schemas.openxmlformats.org/drawingml/2006/main" name="Office Theme">
-  <a:themeElements>
-    <a:clrScheme name="Office">
-      <a:dk1>
-        <a:sysClr val="windowText" lastClr="000000"/>
-      </a:dk1>
-      <a:lt1>
-        <a:sysClr val="window" lastClr="FFFFFF"/>
-      </a:lt1>
-      <a:dk2>
-        <a:srgbClr val="0E2841"/>
-      </a:dk2>
-      <a:lt2>
-        <a:srgbClr val="E8E8E8"/>
-      </a:lt2>
-      <a:accent1>
-        <a:srgbClr val="156082"/>
-      </a:accent1>
-      <a:accent2>
-        <a:srgbClr val="E97132"/>
-      </a:accent2>
-      <a:accent3>
-        <a:srgbClr val="196B24"/>
-      </a:accent3>
-      <a:accent4>
-        <a:srgbClr val="0F9ED5"/>
-      </a:accent4>
-      <a:accent5>
-        <a:srgbClr val="A02B93"/>
-      </a:accent5>
-      <a:accent6>
-        <a:srgbClr val="4EA72E"/>
-      </a:accent6>
-      <a:hlink>
-        <a:srgbClr val="467886"/>
-      </a:hlink>
-      <a:folHlink>
-        <a:srgbClr val="96607D"/>
-      </a:folHlink>
-    </a:clrScheme>
-    <a:fontScheme name="Office">
-      <a:majorFont>
-        <a:latin typeface="Aptos Display" panose="02110004020202020204"/>
-        <a:ea typeface=""/>
-        <a:cs typeface=""/>
-        <a:font script="Jpan" typeface="游ゴシック Light"/>
-        <a:font script="Hang" typeface="맑은 고딕"/>
-        <a:font script="Hans" typeface="等线 Light"/>
-        <a:font script="Hant" typeface="新細明體"/>
-        <a:font script="Arab" typeface="Times New Roman"/>
-        <a:font script="Hebr" typeface="Times New Roman"/>
-        <a:font script="Thai" typeface="Angsana New"/>
-        <a:font script="Ethi" typeface="Nyala"/>
-        <a:font script="Beng" typeface="Vrinda"/>
-        <a:font script="Gujr" typeface="Shruti"/>
-        <a:font script="Khmr" typeface="MoolBoran"/>
-        <a:font script="Knda" typeface="Tunga"/>
-        <a:font script="Guru" typeface="Raavi"/>
-        <a:font script="Cans" typeface="Euphemia"/>
-        <a:font script="Cher" typeface="Plantagenet Cherokee"/>
-        <a:font script="Yiii" typeface="Microsoft Yi Baiti"/>
-        <a:font script="Tibt" typeface="Microsoft Himalaya"/>
-        <a:font script="Thaa" typeface="MV Boli"/>
-        <a:font script="Deva" typeface="Mangal"/>
-        <a:font script="Telu" typeface="Gautami"/>
-        <a:font script="Taml" typeface="Latha"/>
-        <a:font script="Syrc" typeface="Estrangelo Edessa"/>
-        <a:font script="Orya" typeface="Kalinga"/>
-        <a:font script="Mlym" typeface="Kartika"/>
-        <a:font script="Laoo" typeface="DokChampa"/>
-        <a:font script="Sinh" typeface="Iskoola Pota"/>
-        <a:font script="Mong" typeface="Mongolian Baiti"/>
-        <a:font script="Viet" typeface="Times New Roman"/>
-        <a:font script="Uigh" typeface="Microsoft Uighur"/>
-        <a:font script="Geor" typeface="Sylfaen"/>
-        <a:font script="Armn" typeface="Arial"/>
-        <a:font script="Bugi" typeface="Leelawadee UI"/>
-        <a:font script="Bopo" typeface="Microsoft JhengHei"/>
-        <a:font script="Java" typeface="Javanese Text"/>
-        <a:font script="Lisu" typeface="Segoe UI"/>
-        <a:font script="Mymr" typeface="Myanmar Text"/>
-        <a:font script="Nkoo" typeface="Ebrima"/>
-        <a:font script="Olck" typeface="Nirmala UI"/>
-        <a:font script="Osma" typeface="Ebrima"/>
-        <a:font script="Phag" typeface="Phagspa"/>
-        <a:font script="Syrn" typeface="Estrangelo Edessa"/>
-        <a:font script="Syrj" typeface="Estrangelo Edessa"/>
-        <a:font script="Syre" typeface="Estrangelo Edessa"/>
-        <a:font script="Sora" typeface="Nirmala UI"/>
-        <a:font script="Tale" typeface="Microsoft Tai Le"/>
-        <a:font script="Talu" typeface="Microsoft New Tai Lue"/>
-        <a:font script="Tfng" typeface="Ebrima"/>
-      </a:majorFont>
-      <a:minorFont>
-        <a:latin typeface="Aptos" panose="02110004020202020204"/>
-        <a:ea typeface=""/>
-        <a:cs typeface=""/>
-        <a:font script="Jpan" typeface="游ゴシック"/>
-        <a:font script="Hang" typeface="맑은 고딕"/>
-        <a:font script="Hans" typeface="等线"/>
-        <a:font script="Hant" typeface="新細明體"/>
-        <a:font script="Arab" typeface="Arial"/>
-        <a:font script="Hebr" typeface="Arial"/>
-        <a:font script="Thai" typeface="Cordia New"/>
-        <a:font script="Ethi" typeface="Nyala"/>
-        <a:font script="Beng" typeface="Vrinda"/>
-        <a:font script="Gujr" typeface="Shruti"/>
-        <a:font script="Khmr" typeface="DaunPenh"/>
-        <a:font script="Knda" typeface="Tunga"/>
-        <a:font script="Guru" typeface="Raavi"/>
-        <a:font script="Cans" typeface="Euphemia"/>
-        <a:font script="Cher" typeface="Plantagenet Cherokee"/>
-        <a:font script="Yiii" typeface="Microsoft Yi Baiti"/>
-        <a:font script="Tibt" typeface="Microsoft Himalaya"/>
-        <a:font script="Thaa" typeface="MV Boli"/>
-        <a:font script="Deva" typeface="Mangal"/>
-        <a:font script="Telu" typeface="Gautami"/>
-        <a:font script="Taml" typeface="Latha"/>
-        <a:font script="Syrc" typeface="Estrangelo Edessa"/>
-        <a:font script="Orya" typeface="Kalinga"/>
-        <a:font script="Mlym" typeface="Kartika"/>
-        <a:font script="Laoo" typeface="DokChampa"/>
-        <a:font script="Sinh" typeface="Iskoola Pota"/>
-        <a:font script="Mong" typeface="Mongolian Baiti"/>
-        <a:font script="Viet" typeface="Arial"/>
-        <a:font script="Uigh" typeface="Microsoft Uighur"/>
-        <a:font script="Geor" typeface="Sylfaen"/>
-        <a:font script="Armn" typeface="Arial"/>
-        <a:font script="Bugi" typeface="Leelawadee UI"/>
-        <a:font script="Bopo" typeface="Microsoft JhengHei"/>
-        <a:font script="Java" typeface="Javanese Text"/>
-        <a:font script="Lisu" typeface="Segoe UI"/>
-        <a:font script="Mymr" typeface="Myanmar Text"/>
-        <a:font script="Nkoo" typeface="Ebrima"/>
-        <a:font script="Olck" typeface="Nirmala UI"/>
-        <a:font script="Osma" typeface="Ebrima"/>
-        <a:font script="Phag" typeface="Phagspa"/>
-        <a:font script="Syrn" typeface="Estrangelo Edessa"/>
-        <a:font script="Syrj" typeface="Estrangelo Edessa"/>
-        <a:font script="Syre" typeface="Estrangelo Edessa"/>
-        <a:font script="Sora" typeface="Nirmala UI"/>
-        <a:font script="Tale" typeface="Microsoft Tai Le"/>
-        <a:font script="Talu" typeface="Microsoft New Tai Lue"/>
-        <a:font script="Tfng" typeface="Ebrima"/>
-      </a:minorFont>
-    </a:fontScheme>
-    <a:fmtScheme name="Office">
-      <a:fillStyleLst>
-        <a:solidFill>
-          <a:schemeClr val="phClr"/>
-        </a:solidFill>
-        <a:gradFill rotWithShape="1">
-          <a:gsLst>
-            <a:gs pos="0">
-              <a:schemeClr val="phClr">
-                <a:lumMod val="110000"/>
-                <a:satMod val="105000"/>
-                <a:tint val="67000"/>
-              </a:schemeClr>
-            </a:gs>
-            <a:gs pos="50000">
-              <a:schemeClr val="phClr">
-                <a:lumMod val="105000"/>
-                <a:satMod val="103000"/>
-                <a:tint val="73000"/>
-              </a:schemeClr>
-            </a:gs>
-            <a:gs pos="100000">
-              <a:schemeClr val="phClr">
-                <a:lumMod val="105000"/>
-                <a:satMod val="109000"/>
-                <a:tint val="81000"/>
-              </a:schemeClr>
-            </a:gs>
-          </a:gsLst>
-          <a:lin ang="5400000" scaled="0"/>
-        </a:gradFill>
-        <a:gradFill rotWithShape="1">
-          <a:gsLst>
-            <a:gs pos="0">
-              <a:schemeClr val="phClr">
-                <a:satMod val="103000"/>
-                <a:lumMod val="102000"/>
-                <a:tint val="94000"/>
-              </a:schemeClr>
-            </a:gs>
-            <a:gs pos="50000">
-              <a:schemeClr val="phClr">
-                <a:satMod val="110000"/>
-                <a:lumMod val="100000"/>
-                <a:shade val="100000"/>
-              </a:schemeClr>
-            </a:gs>
-            <a:gs pos="100000">
-              <a:schemeClr val="phClr">
-                <a:lumMod val="99000"/>
-                <a:satMod val="120000"/>
-                <a:shade val="78000"/>
-              </a:schemeClr>
-            </a:gs>
-          </a:gsLst>
-          <a:lin ang="5400000" scaled="0"/>
-        </a:gradFill>
-      </a:fillStyleLst>
-      <a:lnStyleLst>
-        <a:ln w="12700" cap="flat" cmpd="sng" algn="ctr">
-          <a:solidFill>
-            <a:schemeClr val="phClr"/>
-          </a:solidFill>
-          <a:prstDash val="solid"/>
-          <a:miter lim="800000"/>
-        </a:ln>
-        <a:ln w="19050" cap="flat" cmpd="sng" algn="ctr">
-          <a:solidFill>
-            <a:schemeClr val="phClr"/>
-          </a:solidFill>
-          <a:prstDash val="solid"/>
-          <a:miter lim="800000"/>
-        </a:ln>
-        <a:ln w="25400" cap="flat" cmpd="sng" algn="ctr">
-          <a:solidFill>
-            <a:schemeClr val="phClr"/>
-          </a:solidFill>
-          <a:prstDash val="solid"/>
-          <a:miter lim="800000"/>
-        </a:ln>
-      </a:lnStyleLst>
-      <a:effectStyleLst>
-        <a:effectStyle>
-          <a:effectLst/>
-        </a:effectStyle>
-        <a:effectStyle>
-          <a:effectLst/>
-        </a:effectStyle>
-        <a:effectStyle>
-          <a:effectLst>
-            <a:outerShdw blurRad="57150" dist="19050" dir="5400000" algn="ctr" rotWithShape="0">
-              <a:srgbClr val="000000">
-                <a:alpha val="63000"/>
-              </a:srgbClr>
-            </a:outerShdw>
-          </a:effectLst>
-        </a:effectStyle>
-      </a:effectStyleLst>
-      <a:bgFillStyleLst>
-        <a:solidFill>
-          <a:schemeClr val="phClr"/>
-        </a:solidFill>
-        <a:solidFill>
-          <a:schemeClr val="phClr">
-            <a:tint val="95000"/>
-            <a:satMod val="170000"/>
-          </a:schemeClr>
-        </a:solidFill>
-        <a:gradFill rotWithShape="1">
-          <a:gsLst>
-            <a:gs pos="0">
-              <a:schemeClr val="phClr">
-                <a:tint val="93000"/>
-                <a:satMod val="150000"/>
-                <a:shade val="98000"/>
-                <a:lumMod val="102000"/>
-              </a:schemeClr>
-            </a:gs>
-            <a:gs pos="50000">
-              <a:schemeClr val="phClr">
-                <a:tint val="98000"/>
-                <a:satMod val="130000"/>
-                <a:shade val="90000"/>
-                <a:lumMod val="103000"/>
-              </a:schemeClr>
-            </a:gs>
-            <a:gs pos="100000">
-              <a:schemeClr val="phClr">
-                <a:shade val="63000"/>
-                <a:satMod val="120000"/>
-              </a:schemeClr>
-            </a:gs>
-          </a:gsLst>
-          <a:lin ang="5400000" scaled="0"/>
-        </a:gradFill>
-      </a:bgFillStyleLst>
-    </a:fmtScheme>
-  </a:themeElements>
-  <a:objectDefaults>
-    <a:lnDef>
-      <a:spPr/>
-      <a:bodyPr/>
-      <a:lstStyle/>
-      <a:style>
-        <a:lnRef idx="2">
-          <a:schemeClr val="accent1"/>
-        </a:lnRef>
-        <a:fillRef idx="0">
-          <a:schemeClr val="accent1"/>
-        </a:fillRef>
-        <a:effectRef idx="1">
-          <a:schemeClr val="accent1"/>
-        </a:effectRef>
-        <a:fontRef idx="minor">
-          <a:schemeClr val="tx1"/>
-        </a:fontRef>
-      </a:style>
-    </a:lnDef>
-  </a:objectDefaults>
-  <a:extraClrSchemeLst/>
-  <a:extLst>
-    <a:ext uri="{05A4C25C-085E-4340-85A3-A5531E510DB2}">
-      <thm15:themeFamily xmlns:thm15="http://schemas.microsoft.com/office/thememl/2012/main" name="Office Theme" id="{2E142A2C-CD16-42D6-873A-C26D2A0506FA}" vid="{1BDDFF52-6CD6-40A5-AB3C-68EB2F1E4D0A}"/>
-    </a:ext>
-  </a:extLst>
-</a:theme>
 </file>